--- a/lectures/slidesCMUCS.pptx
+++ b/lectures/slidesCMUCS.pptx
@@ -3224,7 +3224,7 @@
               <a:t>Brian G. Milnes </a:t>
             </a:r>
             <a:r>
-              <a:rPr lang="en-US" sz="1800">
+              <a:rPr>
                 <a:hlinkClick r:id="rId2"/>
               </a:rPr>
               <a:t>briangmilnes@gmail.com</a:t>
@@ -4244,7 +4244,7 @@
               <a:buNone/>
             </a:pPr>
             <a:r>
-              <a:rPr lang="en-US" sz="1800">
+              <a:rPr lang="en-US" sz="1100">
                 <a:solidFill>
                   <a:srgbClr val="7D9029"/>
                 </a:solidFill>
@@ -4253,7 +4253,7 @@
               <a:t>#[</a:t>
             </a:r>
             <a:r>
-              <a:rPr lang="en-US" sz="1800">
+              <a:rPr lang="en-US" sz="1100">
                 <a:solidFill>
                   <a:srgbClr val="BC7A00"/>
                 </a:solidFill>
@@ -4262,13 +4262,13 @@
               <a:t>verifier::</a:t>
             </a:r>
             <a:r>
-              <a:rPr lang="en-US" sz="1800">
+              <a:rPr lang="en-US" sz="1100">
                 <a:latin typeface="Courier"/>
               </a:rPr>
               <a:t>reject_recursive_types</a:t>
             </a:r>
             <a:r>
-              <a:rPr lang="en-US" sz="1800">
+              <a:rPr lang="en-US" sz="1100">
                 <a:solidFill>
                   <a:srgbClr val="7D9029"/>
                 </a:solidFill>
@@ -4277,13 +4277,13 @@
               <a:t>(</a:t>
             </a:r>
             <a:r>
-              <a:rPr lang="en-US" sz="1800">
+              <a:rPr lang="en-US" sz="1100">
                 <a:latin typeface="Courier"/>
               </a:rPr>
               <a:t>V</a:t>
             </a:r>
             <a:r>
-              <a:rPr lang="en-US" sz="1800">
+              <a:rPr lang="en-US" sz="1100">
                 <a:solidFill>
                   <a:srgbClr val="7D9029"/>
                 </a:solidFill>
@@ -4293,7 +4293,7 @@
             </a:r>
             <a:br/>
             <a:r>
-              <a:rPr lang="en-US" sz="1800" b="1">
+              <a:rPr lang="en-US" sz="1100" b="1">
                 <a:solidFill>
                   <a:srgbClr val="007020"/>
                 </a:solidFill>
@@ -4302,13 +4302,13 @@
               <a:t>pub</a:t>
             </a:r>
             <a:r>
-              <a:rPr lang="en-US" sz="1800">
+              <a:rPr lang="en-US" sz="1100">
                 <a:latin typeface="Courier"/>
               </a:rPr>
               <a:t> </a:t>
             </a:r>
             <a:r>
-              <a:rPr lang="en-US" sz="1800" b="1">
+              <a:rPr lang="en-US" sz="1100" b="1">
                 <a:solidFill>
                   <a:srgbClr val="007020"/>
                 </a:solidFill>
@@ -4317,13 +4317,13 @@
               <a:t>struct</a:t>
             </a:r>
             <a:r>
-              <a:rPr lang="en-US" sz="1800">
+              <a:rPr lang="en-US" sz="1100">
                 <a:latin typeface="Courier"/>
               </a:rPr>
               <a:t> UnDirGraphStEph</a:t>
             </a:r>
             <a:r>
-              <a:rPr lang="en-US" sz="1800">
+              <a:rPr lang="en-US" sz="1100">
                 <a:solidFill>
                   <a:srgbClr val="666666"/>
                 </a:solidFill>
@@ -4332,13 +4332,13 @@
               <a:t>&lt;</a:t>
             </a:r>
             <a:r>
-              <a:rPr lang="en-US" sz="1800">
+              <a:rPr lang="en-US" sz="1100">
                 <a:latin typeface="Courier"/>
               </a:rPr>
               <a:t>V</a:t>
             </a:r>
             <a:r>
-              <a:rPr lang="en-US" sz="1800">
+              <a:rPr lang="en-US" sz="1100">
                 <a:solidFill>
                   <a:srgbClr val="666666"/>
                 </a:solidFill>
@@ -4347,13 +4347,13 @@
               <a:t>:</a:t>
             </a:r>
             <a:r>
-              <a:rPr lang="en-US" sz="1800">
+              <a:rPr lang="en-US" sz="1100">
                 <a:latin typeface="Courier"/>
               </a:rPr>
               <a:t> StT </a:t>
             </a:r>
             <a:r>
-              <a:rPr lang="en-US" sz="1800">
+              <a:rPr lang="en-US" sz="1100">
                 <a:solidFill>
                   <a:srgbClr val="666666"/>
                 </a:solidFill>
@@ -4362,13 +4362,13 @@
               <a:t>+</a:t>
             </a:r>
             <a:r>
-              <a:rPr lang="en-US" sz="1800">
+              <a:rPr lang="en-US" sz="1100">
                 <a:latin typeface="Courier"/>
               </a:rPr>
               <a:t> </a:t>
             </a:r>
             <a:r>
-              <a:rPr lang="en-US" sz="1800">
+              <a:rPr lang="en-US" sz="1100">
                 <a:solidFill>
                   <a:srgbClr val="008000"/>
                 </a:solidFill>
@@ -4377,7 +4377,7 @@
               <a:t>Hash</a:t>
             </a:r>
             <a:r>
-              <a:rPr lang="en-US" sz="1800">
+              <a:rPr lang="en-US" sz="1100">
                 <a:solidFill>
                   <a:srgbClr val="666666"/>
                 </a:solidFill>
@@ -4386,13 +4386,13 @@
               <a:t>&gt;</a:t>
             </a:r>
             <a:r>
-              <a:rPr lang="en-US" sz="1800">
+              <a:rPr lang="en-US" sz="1100">
                 <a:latin typeface="Courier"/>
               </a:rPr>
               <a:t> </a:t>
             </a:r>
             <a:r>
-              <a:rPr lang="en-US" sz="1800">
+              <a:rPr lang="en-US" sz="1100">
                 <a:solidFill>
                   <a:srgbClr val="666666"/>
                 </a:solidFill>
@@ -4402,13 +4402,13 @@
             </a:r>
             <a:br/>
             <a:r>
-              <a:rPr lang="en-US" sz="1800">
+              <a:rPr lang="en-US" sz="1100">
                 <a:latin typeface="Courier"/>
               </a:rPr>
               <a:t>    </a:t>
             </a:r>
             <a:r>
-              <a:rPr lang="en-US" sz="1800" b="1">
+              <a:rPr lang="en-US" sz="1100" b="1">
                 <a:solidFill>
                   <a:srgbClr val="007020"/>
                 </a:solidFill>
@@ -4417,13 +4417,13 @@
               <a:t>pub</a:t>
             </a:r>
             <a:r>
-              <a:rPr lang="en-US" sz="1800">
+              <a:rPr lang="en-US" sz="1100">
                 <a:latin typeface="Courier"/>
               </a:rPr>
               <a:t> V</a:t>
             </a:r>
             <a:r>
-              <a:rPr lang="en-US" sz="1800">
+              <a:rPr lang="en-US" sz="1100">
                 <a:solidFill>
                   <a:srgbClr val="666666"/>
                 </a:solidFill>
@@ -4432,13 +4432,13 @@
               <a:t>:</a:t>
             </a:r>
             <a:r>
-              <a:rPr lang="en-US" sz="1800">
+              <a:rPr lang="en-US" sz="1100">
                 <a:latin typeface="Courier"/>
               </a:rPr>
               <a:t> SetStEph</a:t>
             </a:r>
             <a:r>
-              <a:rPr lang="en-US" sz="1800">
+              <a:rPr lang="en-US" sz="1100">
                 <a:solidFill>
                   <a:srgbClr val="666666"/>
                 </a:solidFill>
@@ -4447,13 +4447,13 @@
               <a:t>&lt;</a:t>
             </a:r>
             <a:r>
-              <a:rPr lang="en-US" sz="1800">
+              <a:rPr lang="en-US" sz="1100">
                 <a:latin typeface="Courier"/>
               </a:rPr>
               <a:t>V</a:t>
             </a:r>
             <a:r>
-              <a:rPr lang="en-US" sz="1800">
+              <a:rPr lang="en-US" sz="1100">
                 <a:solidFill>
                   <a:srgbClr val="666666"/>
                 </a:solidFill>
@@ -4463,13 +4463,13 @@
             </a:r>
             <a:br/>
             <a:r>
-              <a:rPr lang="en-US" sz="1800">
+              <a:rPr lang="en-US" sz="1100">
                 <a:latin typeface="Courier"/>
               </a:rPr>
               <a:t>    </a:t>
             </a:r>
             <a:r>
-              <a:rPr lang="en-US" sz="1800" b="1">
+              <a:rPr lang="en-US" sz="1100" b="1">
                 <a:solidFill>
                   <a:srgbClr val="007020"/>
                 </a:solidFill>
@@ -4478,13 +4478,13 @@
               <a:t>pub</a:t>
             </a:r>
             <a:r>
-              <a:rPr lang="en-US" sz="1800">
+              <a:rPr lang="en-US" sz="1100">
                 <a:latin typeface="Courier"/>
               </a:rPr>
               <a:t> E</a:t>
             </a:r>
             <a:r>
-              <a:rPr lang="en-US" sz="1800">
+              <a:rPr lang="en-US" sz="1100">
                 <a:solidFill>
                   <a:srgbClr val="666666"/>
                 </a:solidFill>
@@ -4493,13 +4493,13 @@
               <a:t>:</a:t>
             </a:r>
             <a:r>
-              <a:rPr lang="en-US" sz="1800">
+              <a:rPr lang="en-US" sz="1100">
                 <a:latin typeface="Courier"/>
               </a:rPr>
               <a:t> SetStEph</a:t>
             </a:r>
             <a:r>
-              <a:rPr lang="en-US" sz="1800">
+              <a:rPr lang="en-US" sz="1100">
                 <a:solidFill>
                   <a:srgbClr val="666666"/>
                 </a:solidFill>
@@ -4508,13 +4508,13 @@
               <a:t>&lt;</a:t>
             </a:r>
             <a:r>
-              <a:rPr lang="en-US" sz="1800">
+              <a:rPr lang="en-US" sz="1100">
                 <a:latin typeface="Courier"/>
               </a:rPr>
               <a:t>Edge</a:t>
             </a:r>
             <a:r>
-              <a:rPr lang="en-US" sz="1800">
+              <a:rPr lang="en-US" sz="1100">
                 <a:solidFill>
                   <a:srgbClr val="666666"/>
                 </a:solidFill>
@@ -4523,13 +4523,13 @@
               <a:t>&lt;</a:t>
             </a:r>
             <a:r>
-              <a:rPr lang="en-US" sz="1800">
+              <a:rPr lang="en-US" sz="1100">
                 <a:latin typeface="Courier"/>
               </a:rPr>
               <a:t>V</a:t>
             </a:r>
             <a:r>
-              <a:rPr lang="en-US" sz="1800">
+              <a:rPr lang="en-US" sz="1100">
                 <a:solidFill>
                   <a:srgbClr val="666666"/>
                 </a:solidFill>
@@ -4539,7 +4539,7 @@
             </a:r>
             <a:br/>
             <a:r>
-              <a:rPr lang="en-US" sz="1800">
+              <a:rPr lang="en-US" sz="1100">
                 <a:solidFill>
                   <a:srgbClr val="666666"/>
                 </a:solidFill>
@@ -4550,7 +4550,7 @@
             <a:br/>
             <a:br/>
             <a:r>
-              <a:rPr lang="en-US" sz="1800" b="1">
+              <a:rPr lang="en-US" sz="1100" b="1">
                 <a:solidFill>
                   <a:srgbClr val="007020"/>
                 </a:solidFill>
@@ -4559,7 +4559,7 @@
               <a:t>impl</a:t>
             </a:r>
             <a:r>
-              <a:rPr lang="en-US" sz="1800">
+              <a:rPr lang="en-US" sz="1100">
                 <a:solidFill>
                   <a:srgbClr val="666666"/>
                 </a:solidFill>
@@ -4568,13 +4568,13 @@
               <a:t>&lt;</a:t>
             </a:r>
             <a:r>
-              <a:rPr lang="en-US" sz="1800">
+              <a:rPr lang="en-US" sz="1100">
                 <a:latin typeface="Courier"/>
               </a:rPr>
               <a:t>V</a:t>
             </a:r>
             <a:r>
-              <a:rPr lang="en-US" sz="1800">
+              <a:rPr lang="en-US" sz="1100">
                 <a:solidFill>
                   <a:srgbClr val="666666"/>
                 </a:solidFill>
@@ -4583,13 +4583,13 @@
               <a:t>:</a:t>
             </a:r>
             <a:r>
-              <a:rPr lang="en-US" sz="1800">
+              <a:rPr lang="en-US" sz="1100">
                 <a:latin typeface="Courier"/>
               </a:rPr>
               <a:t> StT </a:t>
             </a:r>
             <a:r>
-              <a:rPr lang="en-US" sz="1800">
+              <a:rPr lang="en-US" sz="1100">
                 <a:solidFill>
                   <a:srgbClr val="666666"/>
                 </a:solidFill>
@@ -4598,13 +4598,13 @@
               <a:t>+</a:t>
             </a:r>
             <a:r>
-              <a:rPr lang="en-US" sz="1800">
+              <a:rPr lang="en-US" sz="1100">
                 <a:latin typeface="Courier"/>
               </a:rPr>
               <a:t> </a:t>
             </a:r>
             <a:r>
-              <a:rPr lang="en-US" sz="1800">
+              <a:rPr lang="en-US" sz="1100">
                 <a:solidFill>
                   <a:srgbClr val="008000"/>
                 </a:solidFill>
@@ -4613,7 +4613,7 @@
               <a:t>Hash</a:t>
             </a:r>
             <a:r>
-              <a:rPr lang="en-US" sz="1800">
+              <a:rPr lang="en-US" sz="1100">
                 <a:solidFill>
                   <a:srgbClr val="666666"/>
                 </a:solidFill>
@@ -4622,13 +4622,13 @@
               <a:t>&gt;</a:t>
             </a:r>
             <a:r>
-              <a:rPr lang="en-US" sz="1800">
+              <a:rPr lang="en-US" sz="1100">
                 <a:latin typeface="Courier"/>
               </a:rPr>
               <a:t> View </a:t>
             </a:r>
             <a:r>
-              <a:rPr lang="en-US" sz="1800" b="1">
+              <a:rPr lang="en-US" sz="1100" b="1">
                 <a:solidFill>
                   <a:srgbClr val="007020"/>
                 </a:solidFill>
@@ -4637,13 +4637,13 @@
               <a:t>for</a:t>
             </a:r>
             <a:r>
-              <a:rPr lang="en-US" sz="1800">
+              <a:rPr lang="en-US" sz="1100">
                 <a:latin typeface="Courier"/>
               </a:rPr>
               <a:t> UnDirGraphStEph</a:t>
             </a:r>
             <a:r>
-              <a:rPr lang="en-US" sz="1800">
+              <a:rPr lang="en-US" sz="1100">
                 <a:solidFill>
                   <a:srgbClr val="666666"/>
                 </a:solidFill>
@@ -4652,13 +4652,13 @@
               <a:t>&lt;</a:t>
             </a:r>
             <a:r>
-              <a:rPr lang="en-US" sz="1800">
+              <a:rPr lang="en-US" sz="1100">
                 <a:latin typeface="Courier"/>
               </a:rPr>
               <a:t>V</a:t>
             </a:r>
             <a:r>
-              <a:rPr lang="en-US" sz="1800">
+              <a:rPr lang="en-US" sz="1100">
                 <a:solidFill>
                   <a:srgbClr val="666666"/>
                 </a:solidFill>
@@ -4667,13 +4667,13 @@
               <a:t>&gt;</a:t>
             </a:r>
             <a:r>
-              <a:rPr lang="en-US" sz="1800">
+              <a:rPr lang="en-US" sz="1100">
                 <a:latin typeface="Courier"/>
               </a:rPr>
               <a:t> </a:t>
             </a:r>
             <a:r>
-              <a:rPr lang="en-US" sz="1800">
+              <a:rPr lang="en-US" sz="1100">
                 <a:solidFill>
                   <a:srgbClr val="666666"/>
                 </a:solidFill>
@@ -4683,13 +4683,13 @@
             </a:r>
             <a:br/>
             <a:r>
-              <a:rPr lang="en-US" sz="1800">
+              <a:rPr lang="en-US" sz="1100">
                 <a:latin typeface="Courier"/>
               </a:rPr>
               <a:t>    </a:t>
             </a:r>
             <a:r>
-              <a:rPr lang="en-US" sz="1800" b="1">
+              <a:rPr lang="en-US" sz="1100" b="1">
                 <a:solidFill>
                   <a:srgbClr val="007020"/>
                 </a:solidFill>
@@ -4698,13 +4698,13 @@
               <a:t>type</a:t>
             </a:r>
             <a:r>
-              <a:rPr lang="en-US" sz="1800">
+              <a:rPr lang="en-US" sz="1100">
                 <a:latin typeface="Courier"/>
               </a:rPr>
               <a:t> V </a:t>
             </a:r>
             <a:r>
-              <a:rPr lang="en-US" sz="1800">
+              <a:rPr lang="en-US" sz="1100">
                 <a:solidFill>
                   <a:srgbClr val="666666"/>
                 </a:solidFill>
@@ -4713,13 +4713,13 @@
               <a:t>=</a:t>
             </a:r>
             <a:r>
-              <a:rPr lang="en-US" sz="1800">
+              <a:rPr lang="en-US" sz="1100">
                 <a:latin typeface="Courier"/>
               </a:rPr>
               <a:t> GraphView</a:t>
             </a:r>
             <a:r>
-              <a:rPr lang="en-US" sz="1800">
+              <a:rPr lang="en-US" sz="1100">
                 <a:solidFill>
                   <a:srgbClr val="666666"/>
                 </a:solidFill>
@@ -4728,13 +4728,13 @@
               <a:t>&lt;&lt;</a:t>
             </a:r>
             <a:r>
-              <a:rPr lang="en-US" sz="1800">
+              <a:rPr lang="en-US" sz="1100">
                 <a:latin typeface="Courier"/>
               </a:rPr>
               <a:t>V </a:t>
             </a:r>
             <a:r>
-              <a:rPr lang="en-US" sz="1800" b="1">
+              <a:rPr lang="en-US" sz="1100" b="1">
                 <a:solidFill>
                   <a:srgbClr val="007020"/>
                 </a:solidFill>
@@ -4743,13 +4743,13 @@
               <a:t>as</a:t>
             </a:r>
             <a:r>
-              <a:rPr lang="en-US" sz="1800">
+              <a:rPr lang="en-US" sz="1100">
                 <a:latin typeface="Courier"/>
               </a:rPr>
               <a:t> View</a:t>
             </a:r>
             <a:r>
-              <a:rPr lang="en-US" sz="1800">
+              <a:rPr lang="en-US" sz="1100">
                 <a:solidFill>
                   <a:srgbClr val="666666"/>
                 </a:solidFill>
@@ -4758,7 +4758,7 @@
               <a:t>&gt;</a:t>
             </a:r>
             <a:r>
-              <a:rPr lang="en-US" sz="1800">
+              <a:rPr lang="en-US" sz="1100">
                 <a:solidFill>
                   <a:srgbClr val="BC7A00"/>
                 </a:solidFill>
@@ -4767,13 +4767,13 @@
               <a:t>::</a:t>
             </a:r>
             <a:r>
-              <a:rPr lang="en-US" sz="1800">
+              <a:rPr lang="en-US" sz="1100">
                 <a:latin typeface="Courier"/>
               </a:rPr>
               <a:t>V</a:t>
             </a:r>
             <a:r>
-              <a:rPr lang="en-US" sz="1800">
+              <a:rPr lang="en-US" sz="1100">
                 <a:solidFill>
                   <a:srgbClr val="666666"/>
                 </a:solidFill>
@@ -4783,13 +4783,13 @@
             </a:r>
             <a:br/>
             <a:r>
-              <a:rPr lang="en-US" sz="1800">
+              <a:rPr lang="en-US" sz="1100">
                 <a:latin typeface="Courier"/>
               </a:rPr>
               <a:t>    open spec </a:t>
             </a:r>
             <a:r>
-              <a:rPr lang="en-US" sz="1800" b="1">
+              <a:rPr lang="en-US" sz="1100" b="1">
                 <a:solidFill>
                   <a:srgbClr val="007020"/>
                 </a:solidFill>
@@ -4798,13 +4798,13 @@
               <a:t>fn</a:t>
             </a:r>
             <a:r>
-              <a:rPr lang="en-US" sz="1800">
+              <a:rPr lang="en-US" sz="1100">
                 <a:latin typeface="Courier"/>
               </a:rPr>
               <a:t> view(</a:t>
             </a:r>
             <a:r>
-              <a:rPr lang="en-US" sz="1800">
+              <a:rPr lang="en-US" sz="1100">
                 <a:solidFill>
                   <a:srgbClr val="666666"/>
                 </a:solidFill>
@@ -4813,7 +4813,7 @@
               <a:t>&amp;</a:t>
             </a:r>
             <a:r>
-              <a:rPr lang="en-US" sz="1800" b="1">
+              <a:rPr lang="en-US" sz="1100" b="1">
                 <a:solidFill>
                   <a:srgbClr val="007020"/>
                 </a:solidFill>
@@ -4822,13 +4822,13 @@
               <a:t>self</a:t>
             </a:r>
             <a:r>
-              <a:rPr lang="en-US" sz="1800">
+              <a:rPr lang="en-US" sz="1100">
                 <a:latin typeface="Courier"/>
               </a:rPr>
               <a:t>) </a:t>
             </a:r>
             <a:r>
-              <a:rPr lang="en-US" sz="1800">
+              <a:rPr lang="en-US" sz="1100">
                 <a:solidFill>
                   <a:srgbClr val="666666"/>
                 </a:solidFill>
@@ -4837,13 +4837,13 @@
               <a:t>-&gt;</a:t>
             </a:r>
             <a:r>
-              <a:rPr lang="en-US" sz="1800">
+              <a:rPr lang="en-US" sz="1100">
                 <a:latin typeface="Courier"/>
               </a:rPr>
               <a:t> </a:t>
             </a:r>
             <a:r>
-              <a:rPr lang="en-US" sz="1800">
+              <a:rPr lang="en-US" sz="1100">
                 <a:solidFill>
                   <a:srgbClr val="902000"/>
                 </a:solidFill>
@@ -4852,7 +4852,7 @@
               <a:t>Self</a:t>
             </a:r>
             <a:r>
-              <a:rPr lang="en-US" sz="1800">
+              <a:rPr lang="en-US" sz="1100">
                 <a:solidFill>
                   <a:srgbClr val="BC7A00"/>
                 </a:solidFill>
@@ -4861,13 +4861,13 @@
               <a:t>::</a:t>
             </a:r>
             <a:r>
-              <a:rPr lang="en-US" sz="1800">
+              <a:rPr lang="en-US" sz="1100">
                 <a:latin typeface="Courier"/>
               </a:rPr>
               <a:t>V </a:t>
             </a:r>
             <a:r>
-              <a:rPr lang="en-US" sz="1800">
+              <a:rPr lang="en-US" sz="1100">
                 <a:solidFill>
                   <a:srgbClr val="666666"/>
                 </a:solidFill>
@@ -4877,13 +4877,13 @@
             </a:r>
             <a:br/>
             <a:r>
-              <a:rPr lang="en-US" sz="1800">
+              <a:rPr lang="en-US" sz="1100">
                 <a:latin typeface="Courier"/>
               </a:rPr>
               <a:t>        GraphView </a:t>
             </a:r>
             <a:r>
-              <a:rPr lang="en-US" sz="1800">
+              <a:rPr lang="en-US" sz="1100">
                 <a:solidFill>
                   <a:srgbClr val="666666"/>
                 </a:solidFill>
@@ -4892,13 +4892,13 @@
               <a:t>{</a:t>
             </a:r>
             <a:r>
-              <a:rPr lang="en-US" sz="1800">
+              <a:rPr lang="en-US" sz="1100">
                 <a:latin typeface="Courier"/>
               </a:rPr>
               <a:t> V</a:t>
             </a:r>
             <a:r>
-              <a:rPr lang="en-US" sz="1800">
+              <a:rPr lang="en-US" sz="1100">
                 <a:solidFill>
                   <a:srgbClr val="666666"/>
                 </a:solidFill>
@@ -4907,13 +4907,13 @@
               <a:t>:</a:t>
             </a:r>
             <a:r>
-              <a:rPr lang="en-US" sz="1800">
+              <a:rPr lang="en-US" sz="1100">
                 <a:latin typeface="Courier"/>
               </a:rPr>
               <a:t> </a:t>
             </a:r>
             <a:r>
-              <a:rPr lang="en-US" sz="1800" b="1">
+              <a:rPr lang="en-US" sz="1100" b="1">
                 <a:solidFill>
                   <a:srgbClr val="007020"/>
                 </a:solidFill>
@@ -4922,7 +4922,7 @@
               <a:t>self</a:t>
             </a:r>
             <a:r>
-              <a:rPr lang="en-US" sz="1800">
+              <a:rPr lang="en-US" sz="1100">
                 <a:solidFill>
                   <a:srgbClr val="666666"/>
                 </a:solidFill>
@@ -4931,13 +4931,13 @@
               <a:t>.</a:t>
             </a:r>
             <a:r>
-              <a:rPr lang="en-US" sz="1800">
+              <a:rPr lang="en-US" sz="1100">
                 <a:latin typeface="Courier"/>
               </a:rPr>
               <a:t>V</a:t>
             </a:r>
             <a:r>
-              <a:rPr lang="en-US" sz="1800">
+              <a:rPr lang="en-US" sz="1100">
                 <a:solidFill>
                   <a:srgbClr val="666666"/>
                 </a:solidFill>
@@ -4946,13 +4946,13 @@
               <a:t>@,</a:t>
             </a:r>
             <a:r>
-              <a:rPr lang="en-US" sz="1800">
+              <a:rPr lang="en-US" sz="1100">
                 <a:latin typeface="Courier"/>
               </a:rPr>
               <a:t> A</a:t>
             </a:r>
             <a:r>
-              <a:rPr lang="en-US" sz="1800">
+              <a:rPr lang="en-US" sz="1100">
                 <a:solidFill>
                   <a:srgbClr val="666666"/>
                 </a:solidFill>
@@ -4961,13 +4961,13 @@
               <a:t>:</a:t>
             </a:r>
             <a:r>
-              <a:rPr lang="en-US" sz="1800">
+              <a:rPr lang="en-US" sz="1100">
                 <a:latin typeface="Courier"/>
               </a:rPr>
               <a:t> </a:t>
             </a:r>
             <a:r>
-              <a:rPr lang="en-US" sz="1800" b="1">
+              <a:rPr lang="en-US" sz="1100" b="1">
                 <a:solidFill>
                   <a:srgbClr val="007020"/>
                 </a:solidFill>
@@ -4976,7 +4976,7 @@
               <a:t>self</a:t>
             </a:r>
             <a:r>
-              <a:rPr lang="en-US" sz="1800">
+              <a:rPr lang="en-US" sz="1100">
                 <a:solidFill>
                   <a:srgbClr val="666666"/>
                 </a:solidFill>
@@ -4985,13 +4985,13 @@
               <a:t>.</a:t>
             </a:r>
             <a:r>
-              <a:rPr lang="en-US" sz="1800">
+              <a:rPr lang="en-US" sz="1100">
                 <a:latin typeface="Courier"/>
               </a:rPr>
               <a:t>E</a:t>
             </a:r>
             <a:r>
-              <a:rPr lang="en-US" sz="1800">
+              <a:rPr lang="en-US" sz="1100">
                 <a:solidFill>
                   <a:srgbClr val="666666"/>
                 </a:solidFill>
@@ -5000,13 +5000,13 @@
               <a:t>@</a:t>
             </a:r>
             <a:r>
-              <a:rPr lang="en-US" sz="1800">
+              <a:rPr lang="en-US" sz="1100">
                 <a:latin typeface="Courier"/>
               </a:rPr>
               <a:t> </a:t>
             </a:r>
             <a:r>
-              <a:rPr lang="en-US" sz="1800">
+              <a:rPr lang="en-US" sz="1100">
                 <a:solidFill>
                   <a:srgbClr val="666666"/>
                 </a:solidFill>
@@ -5016,13 +5016,13 @@
             </a:r>
             <a:br/>
             <a:r>
-              <a:rPr lang="en-US" sz="1800">
+              <a:rPr lang="en-US" sz="1100">
                 <a:latin typeface="Courier"/>
               </a:rPr>
               <a:t>    </a:t>
             </a:r>
             <a:r>
-              <a:rPr lang="en-US" sz="1800">
+              <a:rPr lang="en-US" sz="1100">
                 <a:solidFill>
                   <a:srgbClr val="666666"/>
                 </a:solidFill>
@@ -5032,7 +5032,7 @@
             </a:r>
             <a:br/>
             <a:r>
-              <a:rPr lang="en-US" sz="1800">
+              <a:rPr lang="en-US" sz="1100">
                 <a:solidFill>
                   <a:srgbClr val="666666"/>
                 </a:solidFill>
@@ -5109,7 +5109,7 @@
               <a:buNone/>
             </a:pPr>
             <a:r>
-              <a:rPr lang="en-US" sz="1800" b="1">
+              <a:rPr lang="en-US" sz="1100" b="1">
                 <a:solidFill>
                   <a:srgbClr val="007020"/>
                 </a:solidFill>
@@ -5118,13 +5118,13 @@
               <a:t>pub</a:t>
             </a:r>
             <a:r>
-              <a:rPr lang="en-US" sz="1800">
+              <a:rPr lang="en-US" sz="1100">
                 <a:latin typeface="Courier"/>
               </a:rPr>
               <a:t> </a:t>
             </a:r>
             <a:r>
-              <a:rPr lang="en-US" sz="1800" b="1">
+              <a:rPr lang="en-US" sz="1100" b="1">
                 <a:solidFill>
                   <a:srgbClr val="007020"/>
                 </a:solidFill>
@@ -5133,13 +5133,13 @@
               <a:t>trait</a:t>
             </a:r>
             <a:r>
-              <a:rPr lang="en-US" sz="1800">
+              <a:rPr lang="en-US" sz="1100">
                 <a:latin typeface="Courier"/>
               </a:rPr>
               <a:t> UnDirGraphStEphTrait</a:t>
             </a:r>
             <a:r>
-              <a:rPr lang="en-US" sz="1800">
+              <a:rPr lang="en-US" sz="1100">
                 <a:solidFill>
                   <a:srgbClr val="666666"/>
                 </a:solidFill>
@@ -5148,13 +5148,13 @@
               <a:t>&lt;</a:t>
             </a:r>
             <a:r>
-              <a:rPr lang="en-US" sz="1800">
+              <a:rPr lang="en-US" sz="1100">
                 <a:latin typeface="Courier"/>
               </a:rPr>
               <a:t>V</a:t>
             </a:r>
             <a:r>
-              <a:rPr lang="en-US" sz="1800">
+              <a:rPr lang="en-US" sz="1100">
                 <a:solidFill>
                   <a:srgbClr val="666666"/>
                 </a:solidFill>
@@ -5163,13 +5163,13 @@
               <a:t>:</a:t>
             </a:r>
             <a:r>
-              <a:rPr lang="en-US" sz="1800">
+              <a:rPr lang="en-US" sz="1100">
                 <a:latin typeface="Courier"/>
               </a:rPr>
               <a:t> StT </a:t>
             </a:r>
             <a:r>
-              <a:rPr lang="en-US" sz="1800">
+              <a:rPr lang="en-US" sz="1100">
                 <a:solidFill>
                   <a:srgbClr val="666666"/>
                 </a:solidFill>
@@ -5178,13 +5178,13 @@
               <a:t>+</a:t>
             </a:r>
             <a:r>
-              <a:rPr lang="en-US" sz="1800">
+              <a:rPr lang="en-US" sz="1100">
                 <a:latin typeface="Courier"/>
               </a:rPr>
               <a:t> </a:t>
             </a:r>
             <a:r>
-              <a:rPr lang="en-US" sz="1800">
+              <a:rPr lang="en-US" sz="1100">
                 <a:solidFill>
                   <a:srgbClr val="008000"/>
                 </a:solidFill>
@@ -5193,7 +5193,7 @@
               <a:t>Hash</a:t>
             </a:r>
             <a:r>
-              <a:rPr lang="en-US" sz="1800">
+              <a:rPr lang="en-US" sz="1100">
                 <a:solidFill>
                   <a:srgbClr val="666666"/>
                 </a:solidFill>
@@ -5203,13 +5203,13 @@
             </a:r>
             <a:br/>
             <a:r>
-              <a:rPr lang="en-US" sz="1800">
+              <a:rPr lang="en-US" sz="1100">
                 <a:latin typeface="Courier"/>
               </a:rPr>
               <a:t>    View</a:t>
             </a:r>
             <a:r>
-              <a:rPr lang="en-US" sz="1800">
+              <a:rPr lang="en-US" sz="1100">
                 <a:solidFill>
                   <a:srgbClr val="666666"/>
                 </a:solidFill>
@@ -5218,13 +5218,13 @@
               <a:t>&lt;</a:t>
             </a:r>
             <a:r>
-              <a:rPr lang="en-US" sz="1800">
+              <a:rPr lang="en-US" sz="1100">
                 <a:latin typeface="Courier"/>
               </a:rPr>
               <a:t>V </a:t>
             </a:r>
             <a:r>
-              <a:rPr lang="en-US" sz="1800">
+              <a:rPr lang="en-US" sz="1100">
                 <a:solidFill>
                   <a:srgbClr val="666666"/>
                 </a:solidFill>
@@ -5233,13 +5233,13 @@
               <a:t>=</a:t>
             </a:r>
             <a:r>
-              <a:rPr lang="en-US" sz="1800">
+              <a:rPr lang="en-US" sz="1100">
                 <a:latin typeface="Courier"/>
               </a:rPr>
               <a:t> GraphView</a:t>
             </a:r>
             <a:r>
-              <a:rPr lang="en-US" sz="1800">
+              <a:rPr lang="en-US" sz="1100">
                 <a:solidFill>
                   <a:srgbClr val="666666"/>
                 </a:solidFill>
@@ -5248,13 +5248,13 @@
               <a:t>&lt;&lt;</a:t>
             </a:r>
             <a:r>
-              <a:rPr lang="en-US" sz="1800">
+              <a:rPr lang="en-US" sz="1100">
                 <a:latin typeface="Courier"/>
               </a:rPr>
               <a:t>V </a:t>
             </a:r>
             <a:r>
-              <a:rPr lang="en-US" sz="1800" b="1">
+              <a:rPr lang="en-US" sz="1100" b="1">
                 <a:solidFill>
                   <a:srgbClr val="007020"/>
                 </a:solidFill>
@@ -5263,13 +5263,13 @@
               <a:t>as</a:t>
             </a:r>
             <a:r>
-              <a:rPr lang="en-US" sz="1800">
+              <a:rPr lang="en-US" sz="1100">
                 <a:latin typeface="Courier"/>
               </a:rPr>
               <a:t> View</a:t>
             </a:r>
             <a:r>
-              <a:rPr lang="en-US" sz="1800">
+              <a:rPr lang="en-US" sz="1100">
                 <a:solidFill>
                   <a:srgbClr val="666666"/>
                 </a:solidFill>
@@ -5278,7 +5278,7 @@
               <a:t>&gt;</a:t>
             </a:r>
             <a:r>
-              <a:rPr lang="en-US" sz="1800">
+              <a:rPr lang="en-US" sz="1100">
                 <a:solidFill>
                   <a:srgbClr val="BC7A00"/>
                 </a:solidFill>
@@ -5287,13 +5287,13 @@
               <a:t>::</a:t>
             </a:r>
             <a:r>
-              <a:rPr lang="en-US" sz="1800">
+              <a:rPr lang="en-US" sz="1100">
                 <a:latin typeface="Courier"/>
               </a:rPr>
               <a:t>V</a:t>
             </a:r>
             <a:r>
-              <a:rPr lang="en-US" sz="1800">
+              <a:rPr lang="en-US" sz="1100">
                 <a:solidFill>
                   <a:srgbClr val="666666"/>
                 </a:solidFill>
@@ -5302,13 +5302,13 @@
               <a:t>&gt;&gt;</a:t>
             </a:r>
             <a:r>
-              <a:rPr lang="en-US" sz="1800">
+              <a:rPr lang="en-US" sz="1100">
                 <a:latin typeface="Courier"/>
               </a:rPr>
               <a:t> </a:t>
             </a:r>
             <a:r>
-              <a:rPr lang="en-US" sz="1800">
+              <a:rPr lang="en-US" sz="1100">
                 <a:solidFill>
                   <a:srgbClr val="666666"/>
                 </a:solidFill>
@@ -5317,13 +5317,13 @@
               <a:t>+</a:t>
             </a:r>
             <a:r>
-              <a:rPr lang="en-US" sz="1800">
+              <a:rPr lang="en-US" sz="1100">
                 <a:latin typeface="Courier"/>
               </a:rPr>
               <a:t> </a:t>
             </a:r>
             <a:r>
-              <a:rPr lang="en-US" sz="1800">
+              <a:rPr lang="en-US" sz="1100">
                 <a:solidFill>
                   <a:srgbClr val="008000"/>
                 </a:solidFill>
@@ -5333,7 +5333,7 @@
             </a:r>
             <a:br/>
             <a:r>
-              <a:rPr lang="en-US" sz="1800">
+              <a:rPr lang="en-US" sz="1100">
                 <a:solidFill>
                   <a:srgbClr val="666666"/>
                 </a:solidFill>
@@ -5343,13 +5343,13 @@
             </a:r>
             <a:br/>
             <a:r>
-              <a:rPr lang="en-US" sz="1800">
+              <a:rPr lang="en-US" sz="1100">
                 <a:latin typeface="Courier"/>
               </a:rPr>
               <a:t>    open spec </a:t>
             </a:r>
             <a:r>
-              <a:rPr lang="en-US" sz="1800" b="1">
+              <a:rPr lang="en-US" sz="1100" b="1">
                 <a:solidFill>
                   <a:srgbClr val="007020"/>
                 </a:solidFill>
@@ -5358,13 +5358,13 @@
               <a:t>fn</a:t>
             </a:r>
             <a:r>
-              <a:rPr lang="en-US" sz="1800">
+              <a:rPr lang="en-US" sz="1100">
                 <a:latin typeface="Courier"/>
               </a:rPr>
               <a:t> spec_neighborhood(</a:t>
             </a:r>
             <a:r>
-              <a:rPr lang="en-US" sz="1800">
+              <a:rPr lang="en-US" sz="1100">
                 <a:solidFill>
                   <a:srgbClr val="666666"/>
                 </a:solidFill>
@@ -5373,7 +5373,7 @@
               <a:t>&amp;</a:t>
             </a:r>
             <a:r>
-              <a:rPr lang="en-US" sz="1800" b="1">
+              <a:rPr lang="en-US" sz="1100" b="1">
                 <a:solidFill>
                   <a:srgbClr val="007020"/>
                 </a:solidFill>
@@ -5382,7 +5382,7 @@
               <a:t>self</a:t>
             </a:r>
             <a:r>
-              <a:rPr lang="en-US" sz="1800">
+              <a:rPr lang="en-US" sz="1100">
                 <a:solidFill>
                   <a:srgbClr val="666666"/>
                 </a:solidFill>
@@ -5391,13 +5391,13 @@
               <a:t>,</a:t>
             </a:r>
             <a:r>
-              <a:rPr lang="en-US" sz="1800">
+              <a:rPr lang="en-US" sz="1100">
                 <a:latin typeface="Courier"/>
               </a:rPr>
               <a:t> v</a:t>
             </a:r>
             <a:r>
-              <a:rPr lang="en-US" sz="1800">
+              <a:rPr lang="en-US" sz="1100">
                 <a:solidFill>
                   <a:srgbClr val="666666"/>
                 </a:solidFill>
@@ -5406,13 +5406,13 @@
               <a:t>:</a:t>
             </a:r>
             <a:r>
-              <a:rPr lang="en-US" sz="1800">
+              <a:rPr lang="en-US" sz="1100">
                 <a:latin typeface="Courier"/>
               </a:rPr>
               <a:t> </a:t>
             </a:r>
             <a:r>
-              <a:rPr lang="en-US" sz="1800">
+              <a:rPr lang="en-US" sz="1100">
                 <a:solidFill>
                   <a:srgbClr val="BC7A00"/>
                 </a:solidFill>
@@ -5421,13 +5421,13 @@
               <a:t>V::</a:t>
             </a:r>
             <a:r>
-              <a:rPr lang="en-US" sz="1800">
+              <a:rPr lang="en-US" sz="1100">
                 <a:latin typeface="Courier"/>
               </a:rPr>
               <a:t>V) </a:t>
             </a:r>
             <a:r>
-              <a:rPr lang="en-US" sz="1800">
+              <a:rPr lang="en-US" sz="1100">
                 <a:solidFill>
                   <a:srgbClr val="666666"/>
                 </a:solidFill>
@@ -5436,13 +5436,13 @@
               <a:t>-&gt;</a:t>
             </a:r>
             <a:r>
-              <a:rPr lang="en-US" sz="1800">
+              <a:rPr lang="en-US" sz="1100">
                 <a:latin typeface="Courier"/>
               </a:rPr>
               <a:t> Set</a:t>
             </a:r>
             <a:r>
-              <a:rPr lang="en-US" sz="1800">
+              <a:rPr lang="en-US" sz="1100">
                 <a:solidFill>
                   <a:srgbClr val="666666"/>
                 </a:solidFill>
@@ -5451,7 +5451,7 @@
               <a:t>&lt;</a:t>
             </a:r>
             <a:r>
-              <a:rPr lang="en-US" sz="1800">
+              <a:rPr lang="en-US" sz="1100">
                 <a:solidFill>
                   <a:srgbClr val="BC7A00"/>
                 </a:solidFill>
@@ -5460,13 +5460,13 @@
               <a:t>V::</a:t>
             </a:r>
             <a:r>
-              <a:rPr lang="en-US" sz="1800">
+              <a:rPr lang="en-US" sz="1100">
                 <a:latin typeface="Courier"/>
               </a:rPr>
               <a:t>V</a:t>
             </a:r>
             <a:r>
-              <a:rPr lang="en-US" sz="1800">
+              <a:rPr lang="en-US" sz="1100">
                 <a:solidFill>
                   <a:srgbClr val="666666"/>
                 </a:solidFill>
@@ -5476,13 +5476,13 @@
             </a:r>
             <a:br/>
             <a:r>
-              <a:rPr lang="en-US" sz="1800">
+              <a:rPr lang="en-US" sz="1100">
                 <a:latin typeface="Courier"/>
               </a:rPr>
               <a:t>        recommends spec_graphview_wf(self</a:t>
             </a:r>
             <a:r>
-              <a:rPr lang="en-US" sz="1800">
+              <a:rPr lang="en-US" sz="1100">
                 <a:solidFill>
                   <a:srgbClr val="666666"/>
                 </a:solidFill>
@@ -5491,13 +5491,13 @@
               <a:t>@</a:t>
             </a:r>
             <a:r>
-              <a:rPr lang="en-US" sz="1800">
+              <a:rPr lang="en-US" sz="1100">
                 <a:latin typeface="Courier"/>
               </a:rPr>
               <a:t>)</a:t>
             </a:r>
             <a:r>
-              <a:rPr lang="en-US" sz="1800">
+              <a:rPr lang="en-US" sz="1100">
                 <a:solidFill>
                   <a:srgbClr val="666666"/>
                 </a:solidFill>
@@ -5506,13 +5506,13 @@
               <a:t>,</a:t>
             </a:r>
             <a:r>
-              <a:rPr lang="en-US" sz="1800">
+              <a:rPr lang="en-US" sz="1100">
                 <a:latin typeface="Courier"/>
               </a:rPr>
               <a:t> self</a:t>
             </a:r>
             <a:r>
-              <a:rPr lang="en-US" sz="1800">
+              <a:rPr lang="en-US" sz="1100">
                 <a:solidFill>
                   <a:srgbClr val="666666"/>
                 </a:solidFill>
@@ -5521,13 +5521,13 @@
               <a:t>@.</a:t>
             </a:r>
             <a:r>
-              <a:rPr lang="en-US" sz="1800">
+              <a:rPr lang="en-US" sz="1100">
                 <a:latin typeface="Courier"/>
               </a:rPr>
               <a:t>V</a:t>
             </a:r>
             <a:r>
-              <a:rPr lang="en-US" sz="1800">
+              <a:rPr lang="en-US" sz="1100">
                 <a:solidFill>
                   <a:srgbClr val="666666"/>
                 </a:solidFill>
@@ -5536,20 +5536,20 @@
               <a:t>.</a:t>
             </a:r>
             <a:r>
-              <a:rPr lang="en-US" sz="1800">
+              <a:rPr lang="en-US" sz="1100">
                 <a:latin typeface="Courier"/>
               </a:rPr>
               <a:t>contains(v)</a:t>
             </a:r>
             <a:br/>
             <a:r>
-              <a:rPr lang="en-US" sz="1800">
+              <a:rPr lang="en-US" sz="1100">
                 <a:latin typeface="Courier"/>
               </a:rPr>
               <a:t>    </a:t>
             </a:r>
             <a:r>
-              <a:rPr lang="en-US" sz="1800">
+              <a:rPr lang="en-US" sz="1100">
                 <a:solidFill>
                   <a:srgbClr val="666666"/>
                 </a:solidFill>
@@ -5558,13 +5558,13 @@
               <a:t>{</a:t>
             </a:r>
             <a:r>
-              <a:rPr lang="en-US" sz="1800">
+              <a:rPr lang="en-US" sz="1100">
                 <a:latin typeface="Courier"/>
               </a:rPr>
               <a:t> </a:t>
             </a:r>
             <a:r>
-              <a:rPr lang="en-US" sz="1800">
+              <a:rPr lang="en-US" sz="1100">
                 <a:solidFill>
                   <a:srgbClr val="BC7A00"/>
                 </a:solidFill>
@@ -5573,13 +5573,13 @@
               <a:t>Set::</a:t>
             </a:r>
             <a:r>
-              <a:rPr lang="en-US" sz="1800">
+              <a:rPr lang="en-US" sz="1100">
                 <a:latin typeface="Courier"/>
               </a:rPr>
               <a:t>new(</a:t>
             </a:r>
             <a:r>
-              <a:rPr lang="en-US" sz="1800">
+              <a:rPr lang="en-US" sz="1100">
                 <a:solidFill>
                   <a:srgbClr val="666666"/>
                 </a:solidFill>
@@ -5588,13 +5588,13 @@
               <a:t>|</a:t>
             </a:r>
             <a:r>
-              <a:rPr lang="en-US" sz="1800">
+              <a:rPr lang="en-US" sz="1100">
                 <a:latin typeface="Courier"/>
               </a:rPr>
               <a:t>w</a:t>
             </a:r>
             <a:r>
-              <a:rPr lang="en-US" sz="1800">
+              <a:rPr lang="en-US" sz="1100">
                 <a:solidFill>
                   <a:srgbClr val="666666"/>
                 </a:solidFill>
@@ -5603,13 +5603,13 @@
               <a:t>|</a:t>
             </a:r>
             <a:r>
-              <a:rPr lang="en-US" sz="1800">
+              <a:rPr lang="en-US" sz="1100">
                 <a:latin typeface="Courier"/>
               </a:rPr>
               <a:t> self</a:t>
             </a:r>
             <a:r>
-              <a:rPr lang="en-US" sz="1800">
+              <a:rPr lang="en-US" sz="1100">
                 <a:solidFill>
                   <a:srgbClr val="666666"/>
                 </a:solidFill>
@@ -5618,13 +5618,13 @@
               <a:t>@.</a:t>
             </a:r>
             <a:r>
-              <a:rPr lang="en-US" sz="1800">
+              <a:rPr lang="en-US" sz="1100">
                 <a:latin typeface="Courier"/>
               </a:rPr>
               <a:t>A</a:t>
             </a:r>
             <a:r>
-              <a:rPr lang="en-US" sz="1800">
+              <a:rPr lang="en-US" sz="1100">
                 <a:solidFill>
                   <a:srgbClr val="666666"/>
                 </a:solidFill>
@@ -5633,13 +5633,13 @@
               <a:t>.</a:t>
             </a:r>
             <a:r>
-              <a:rPr lang="en-US" sz="1800">
+              <a:rPr lang="en-US" sz="1100">
                 <a:latin typeface="Courier"/>
               </a:rPr>
               <a:t>contains((v</a:t>
             </a:r>
             <a:r>
-              <a:rPr lang="en-US" sz="1800">
+              <a:rPr lang="en-US" sz="1100">
                 <a:solidFill>
                   <a:srgbClr val="666666"/>
                 </a:solidFill>
@@ -5648,13 +5648,13 @@
               <a:t>,</a:t>
             </a:r>
             <a:r>
-              <a:rPr lang="en-US" sz="1800">
+              <a:rPr lang="en-US" sz="1100">
                 <a:latin typeface="Courier"/>
               </a:rPr>
               <a:t>w)) </a:t>
             </a:r>
             <a:r>
-              <a:rPr lang="en-US" sz="1800">
+              <a:rPr lang="en-US" sz="1100">
                 <a:solidFill>
                   <a:srgbClr val="666666"/>
                 </a:solidFill>
@@ -5663,13 +5663,13 @@
               <a:t>||</a:t>
             </a:r>
             <a:r>
-              <a:rPr lang="en-US" sz="1800">
+              <a:rPr lang="en-US" sz="1100">
                 <a:latin typeface="Courier"/>
               </a:rPr>
               <a:t> self</a:t>
             </a:r>
             <a:r>
-              <a:rPr lang="en-US" sz="1800">
+              <a:rPr lang="en-US" sz="1100">
                 <a:solidFill>
                   <a:srgbClr val="666666"/>
                 </a:solidFill>
@@ -5678,13 +5678,13 @@
               <a:t>@.</a:t>
             </a:r>
             <a:r>
-              <a:rPr lang="en-US" sz="1800">
+              <a:rPr lang="en-US" sz="1100">
                 <a:latin typeface="Courier"/>
               </a:rPr>
               <a:t>A</a:t>
             </a:r>
             <a:r>
-              <a:rPr lang="en-US" sz="1800">
+              <a:rPr lang="en-US" sz="1100">
                 <a:solidFill>
                   <a:srgbClr val="666666"/>
                 </a:solidFill>
@@ -5693,13 +5693,13 @@
               <a:t>.</a:t>
             </a:r>
             <a:r>
-              <a:rPr lang="en-US" sz="1800">
+              <a:rPr lang="en-US" sz="1100">
                 <a:latin typeface="Courier"/>
               </a:rPr>
               <a:t>contains((w</a:t>
             </a:r>
             <a:r>
-              <a:rPr lang="en-US" sz="1800">
+              <a:rPr lang="en-US" sz="1100">
                 <a:solidFill>
                   <a:srgbClr val="666666"/>
                 </a:solidFill>
@@ -5708,13 +5708,13 @@
               <a:t>,</a:t>
             </a:r>
             <a:r>
-              <a:rPr lang="en-US" sz="1800">
+              <a:rPr lang="en-US" sz="1100">
                 <a:latin typeface="Courier"/>
               </a:rPr>
               <a:t>v))) </a:t>
             </a:r>
             <a:r>
-              <a:rPr lang="en-US" sz="1800">
+              <a:rPr lang="en-US" sz="1100">
                 <a:solidFill>
                   <a:srgbClr val="666666"/>
                 </a:solidFill>
@@ -5725,13 +5725,13 @@
             <a:br/>
             <a:br/>
             <a:r>
-              <a:rPr lang="en-US" sz="1800">
+              <a:rPr lang="en-US" sz="1100">
                 <a:latin typeface="Courier"/>
               </a:rPr>
               <a:t>    </a:t>
             </a:r>
             <a:r>
-              <a:rPr lang="en-US" sz="1800" b="1">
+              <a:rPr lang="en-US" sz="1100" b="1">
                 <a:solidFill>
                   <a:srgbClr val="007020"/>
                 </a:solidFill>
@@ -5740,13 +5740,13 @@
               <a:t>fn</a:t>
             </a:r>
             <a:r>
-              <a:rPr lang="en-US" sz="1800">
+              <a:rPr lang="en-US" sz="1100">
                 <a:latin typeface="Courier"/>
               </a:rPr>
               <a:t> neighborhood(</a:t>
             </a:r>
             <a:r>
-              <a:rPr lang="en-US" sz="1800">
+              <a:rPr lang="en-US" sz="1100">
                 <a:solidFill>
                   <a:srgbClr val="666666"/>
                 </a:solidFill>
@@ -5755,7 +5755,7 @@
               <a:t>&amp;</a:t>
             </a:r>
             <a:r>
-              <a:rPr lang="en-US" sz="1800" b="1">
+              <a:rPr lang="en-US" sz="1100" b="1">
                 <a:solidFill>
                   <a:srgbClr val="007020"/>
                 </a:solidFill>
@@ -5764,7 +5764,7 @@
               <a:t>self</a:t>
             </a:r>
             <a:r>
-              <a:rPr lang="en-US" sz="1800">
+              <a:rPr lang="en-US" sz="1100">
                 <a:solidFill>
                   <a:srgbClr val="666666"/>
                 </a:solidFill>
@@ -5773,13 +5773,13 @@
               <a:t>,</a:t>
             </a:r>
             <a:r>
-              <a:rPr lang="en-US" sz="1800">
+              <a:rPr lang="en-US" sz="1100">
                 <a:latin typeface="Courier"/>
               </a:rPr>
               <a:t> v</a:t>
             </a:r>
             <a:r>
-              <a:rPr lang="en-US" sz="1800">
+              <a:rPr lang="en-US" sz="1100">
                 <a:solidFill>
                   <a:srgbClr val="666666"/>
                 </a:solidFill>
@@ -5788,13 +5788,13 @@
               <a:t>:</a:t>
             </a:r>
             <a:r>
-              <a:rPr lang="en-US" sz="1800">
+              <a:rPr lang="en-US" sz="1100">
                 <a:latin typeface="Courier"/>
               </a:rPr>
               <a:t> </a:t>
             </a:r>
             <a:r>
-              <a:rPr lang="en-US" sz="1800">
+              <a:rPr lang="en-US" sz="1100">
                 <a:solidFill>
                   <a:srgbClr val="666666"/>
                 </a:solidFill>
@@ -5803,13 +5803,13 @@
               <a:t>&amp;</a:t>
             </a:r>
             <a:r>
-              <a:rPr lang="en-US" sz="1800">
+              <a:rPr lang="en-US" sz="1100">
                 <a:latin typeface="Courier"/>
               </a:rPr>
               <a:t>V) </a:t>
             </a:r>
             <a:r>
-              <a:rPr lang="en-US" sz="1800">
+              <a:rPr lang="en-US" sz="1100">
                 <a:solidFill>
                   <a:srgbClr val="666666"/>
                 </a:solidFill>
@@ -5818,13 +5818,13 @@
               <a:t>-&gt;</a:t>
             </a:r>
             <a:r>
-              <a:rPr lang="en-US" sz="1800">
+              <a:rPr lang="en-US" sz="1100">
                 <a:latin typeface="Courier"/>
               </a:rPr>
               <a:t> (nbrs</a:t>
             </a:r>
             <a:r>
-              <a:rPr lang="en-US" sz="1800">
+              <a:rPr lang="en-US" sz="1100">
                 <a:solidFill>
                   <a:srgbClr val="666666"/>
                 </a:solidFill>
@@ -5833,13 +5833,13 @@
               <a:t>:</a:t>
             </a:r>
             <a:r>
-              <a:rPr lang="en-US" sz="1800">
+              <a:rPr lang="en-US" sz="1100">
                 <a:latin typeface="Courier"/>
               </a:rPr>
               <a:t> SetStEph</a:t>
             </a:r>
             <a:r>
-              <a:rPr lang="en-US" sz="1800">
+              <a:rPr lang="en-US" sz="1100">
                 <a:solidFill>
                   <a:srgbClr val="666666"/>
                 </a:solidFill>
@@ -5848,13 +5848,13 @@
               <a:t>&lt;</a:t>
             </a:r>
             <a:r>
-              <a:rPr lang="en-US" sz="1800">
+              <a:rPr lang="en-US" sz="1100">
                 <a:latin typeface="Courier"/>
               </a:rPr>
               <a:t>V</a:t>
             </a:r>
             <a:r>
-              <a:rPr lang="en-US" sz="1800">
+              <a:rPr lang="en-US" sz="1100">
                 <a:solidFill>
                   <a:srgbClr val="666666"/>
                 </a:solidFill>
@@ -5863,20 +5863,20 @@
               <a:t>&gt;</a:t>
             </a:r>
             <a:r>
-              <a:rPr lang="en-US" sz="1800">
+              <a:rPr lang="en-US" sz="1100">
                 <a:latin typeface="Courier"/>
               </a:rPr>
               <a:t>)</a:t>
             </a:r>
             <a:br/>
             <a:r>
-              <a:rPr lang="en-US" sz="1800">
+              <a:rPr lang="en-US" sz="1100">
                 <a:latin typeface="Courier"/>
               </a:rPr>
               <a:t>        requires spec_graphview_wf(self</a:t>
             </a:r>
             <a:r>
-              <a:rPr lang="en-US" sz="1800">
+              <a:rPr lang="en-US" sz="1100">
                 <a:solidFill>
                   <a:srgbClr val="666666"/>
                 </a:solidFill>
@@ -5885,13 +5885,13 @@
               <a:t>@</a:t>
             </a:r>
             <a:r>
-              <a:rPr lang="en-US" sz="1800">
+              <a:rPr lang="en-US" sz="1100">
                 <a:latin typeface="Courier"/>
               </a:rPr>
               <a:t>)</a:t>
             </a:r>
             <a:r>
-              <a:rPr lang="en-US" sz="1800">
+              <a:rPr lang="en-US" sz="1100">
                 <a:solidFill>
                   <a:srgbClr val="666666"/>
                 </a:solidFill>
@@ -5900,13 +5900,13 @@
               <a:t>,</a:t>
             </a:r>
             <a:r>
-              <a:rPr lang="en-US" sz="1800">
+              <a:rPr lang="en-US" sz="1100">
                 <a:latin typeface="Courier"/>
               </a:rPr>
               <a:t> self</a:t>
             </a:r>
             <a:r>
-              <a:rPr lang="en-US" sz="1800">
+              <a:rPr lang="en-US" sz="1100">
                 <a:solidFill>
                   <a:srgbClr val="666666"/>
                 </a:solidFill>
@@ -5915,13 +5915,13 @@
               <a:t>@.</a:t>
             </a:r>
             <a:r>
-              <a:rPr lang="en-US" sz="1800">
+              <a:rPr lang="en-US" sz="1100">
                 <a:latin typeface="Courier"/>
               </a:rPr>
               <a:t>V</a:t>
             </a:r>
             <a:r>
-              <a:rPr lang="en-US" sz="1800">
+              <a:rPr lang="en-US" sz="1100">
                 <a:solidFill>
                   <a:srgbClr val="666666"/>
                 </a:solidFill>
@@ -5930,13 +5930,13 @@
               <a:t>.</a:t>
             </a:r>
             <a:r>
-              <a:rPr lang="en-US" sz="1800">
+              <a:rPr lang="en-US" sz="1100">
                 <a:latin typeface="Courier"/>
               </a:rPr>
               <a:t>contains(v</a:t>
             </a:r>
             <a:r>
-              <a:rPr lang="en-US" sz="1800">
+              <a:rPr lang="en-US" sz="1100">
                 <a:solidFill>
                   <a:srgbClr val="666666"/>
                 </a:solidFill>
@@ -5945,13 +5945,13 @@
               <a:t>@</a:t>
             </a:r>
             <a:r>
-              <a:rPr lang="en-US" sz="1800">
+              <a:rPr lang="en-US" sz="1100">
                 <a:latin typeface="Courier"/>
               </a:rPr>
               <a:t>)</a:t>
             </a:r>
             <a:r>
-              <a:rPr lang="en-US" sz="1800">
+              <a:rPr lang="en-US" sz="1100">
                 <a:solidFill>
                   <a:srgbClr val="666666"/>
                 </a:solidFill>
@@ -5960,13 +5960,13 @@
               <a:t>,</a:t>
             </a:r>
             <a:r>
-              <a:rPr lang="en-US" sz="1800">
+              <a:rPr lang="en-US" sz="1100">
                 <a:latin typeface="Courier"/>
               </a:rPr>
               <a:t> </a:t>
             </a:r>
             <a:r>
-              <a:rPr lang="en-US" sz="1800">
+              <a:rPr lang="en-US" sz="1100">
                 <a:solidFill>
                   <a:srgbClr val="666666"/>
                 </a:solidFill>
@@ -5976,13 +5976,13 @@
             </a:r>
             <a:br/>
             <a:r>
-              <a:rPr lang="en-US" sz="1800">
+              <a:rPr lang="en-US" sz="1100">
                 <a:latin typeface="Courier"/>
               </a:rPr>
               <a:t>        ensures  nbrs</a:t>
             </a:r>
             <a:r>
-              <a:rPr lang="en-US" sz="1800">
+              <a:rPr lang="en-US" sz="1100">
                 <a:solidFill>
                   <a:srgbClr val="666666"/>
                 </a:solidFill>
@@ -5991,13 +5991,13 @@
               <a:t>@</a:t>
             </a:r>
             <a:r>
-              <a:rPr lang="en-US" sz="1800">
+              <a:rPr lang="en-US" sz="1100">
                 <a:latin typeface="Courier"/>
               </a:rPr>
               <a:t> </a:t>
             </a:r>
             <a:r>
-              <a:rPr lang="en-US" sz="1800">
+              <a:rPr lang="en-US" sz="1100">
                 <a:solidFill>
                   <a:srgbClr val="666666"/>
                 </a:solidFill>
@@ -6006,13 +6006,13 @@
               <a:t>==</a:t>
             </a:r>
             <a:r>
-              <a:rPr lang="en-US" sz="1800">
+              <a:rPr lang="en-US" sz="1100">
                 <a:latin typeface="Courier"/>
               </a:rPr>
               <a:t> </a:t>
             </a:r>
             <a:r>
-              <a:rPr lang="en-US" sz="1800" b="1">
+              <a:rPr lang="en-US" sz="1100" b="1">
                 <a:solidFill>
                   <a:srgbClr val="007020"/>
                 </a:solidFill>
@@ -6021,7 +6021,7 @@
               <a:t>self</a:t>
             </a:r>
             <a:r>
-              <a:rPr lang="en-US" sz="1800">
+              <a:rPr lang="en-US" sz="1100">
                 <a:solidFill>
                   <a:srgbClr val="666666"/>
                 </a:solidFill>
@@ -6030,13 +6030,13 @@
               <a:t>.</a:t>
             </a:r>
             <a:r>
-              <a:rPr lang="en-US" sz="1800">
+              <a:rPr lang="en-US" sz="1100">
                 <a:latin typeface="Courier"/>
               </a:rPr>
               <a:t>spec_neighborhood(v</a:t>
             </a:r>
             <a:r>
-              <a:rPr lang="en-US" sz="1800">
+              <a:rPr lang="en-US" sz="1100">
                 <a:solidFill>
                   <a:srgbClr val="666666"/>
                 </a:solidFill>
@@ -6045,13 +6045,13 @@
               <a:t>@</a:t>
             </a:r>
             <a:r>
-              <a:rPr lang="en-US" sz="1800">
+              <a:rPr lang="en-US" sz="1100">
                 <a:latin typeface="Courier"/>
               </a:rPr>
               <a:t>)</a:t>
             </a:r>
             <a:r>
-              <a:rPr lang="en-US" sz="1800">
+              <a:rPr lang="en-US" sz="1100">
                 <a:solidFill>
                   <a:srgbClr val="666666"/>
                 </a:solidFill>
@@ -6060,13 +6060,13 @@
               <a:t>,</a:t>
             </a:r>
             <a:r>
-              <a:rPr lang="en-US" sz="1800">
+              <a:rPr lang="en-US" sz="1100">
                 <a:latin typeface="Courier"/>
               </a:rPr>
               <a:t> nbrs</a:t>
             </a:r>
             <a:r>
-              <a:rPr lang="en-US" sz="1800">
+              <a:rPr lang="en-US" sz="1100">
                 <a:solidFill>
                   <a:srgbClr val="666666"/>
                 </a:solidFill>
@@ -6075,13 +6075,13 @@
               <a:t>@</a:t>
             </a:r>
             <a:r>
-              <a:rPr lang="en-US" sz="1800">
+              <a:rPr lang="en-US" sz="1100">
                 <a:latin typeface="Courier"/>
               </a:rPr>
               <a:t> </a:t>
             </a:r>
             <a:r>
-              <a:rPr lang="en-US" sz="1800">
+              <a:rPr lang="en-US" sz="1100">
                 <a:solidFill>
                   <a:srgbClr val="666666"/>
                 </a:solidFill>
@@ -6090,13 +6090,13 @@
               <a:t>&lt;=</a:t>
             </a:r>
             <a:r>
-              <a:rPr lang="en-US" sz="1800">
+              <a:rPr lang="en-US" sz="1100">
                 <a:latin typeface="Courier"/>
               </a:rPr>
               <a:t> self</a:t>
             </a:r>
             <a:r>
-              <a:rPr lang="en-US" sz="1800">
+              <a:rPr lang="en-US" sz="1100">
                 <a:solidFill>
                   <a:srgbClr val="666666"/>
                 </a:solidFill>
@@ -6105,13 +6105,13 @@
               <a:t>@.</a:t>
             </a:r>
             <a:r>
-              <a:rPr lang="en-US" sz="1800">
+              <a:rPr lang="en-US" sz="1100">
                 <a:latin typeface="Courier"/>
               </a:rPr>
               <a:t>V</a:t>
             </a:r>
             <a:r>
-              <a:rPr lang="en-US" sz="1800">
+              <a:rPr lang="en-US" sz="1100">
                 <a:solidFill>
                   <a:srgbClr val="666666"/>
                 </a:solidFill>
@@ -6121,7 +6121,7 @@
             </a:r>
             <a:br/>
             <a:r>
-              <a:rPr lang="en-US" sz="1800">
+              <a:rPr lang="en-US" sz="1100">
                 <a:solidFill>
                   <a:srgbClr val="666666"/>
                 </a:solidFill>
@@ -6285,11 +6285,11 @@
               <a:buNone/>
             </a:pPr>
             <a:r>
-              <a:rPr lang="en-US" sz="3200"/>
+              <a:rPr lang="en-US" sz="1100"/>
               <a:t>UnDirGraphStEph — Impl: </a:t>
             </a:r>
             <a:r>
-              <a:rPr lang="en-US" sz="3200">
+              <a:rPr>
                 <a:latin typeface="Courier"/>
               </a:rPr>
               <a:t>neighborhood</a:t>
@@ -6320,7 +6320,7 @@
               <a:buNone/>
             </a:pPr>
             <a:r>
-              <a:rPr lang="en-US" sz="1800" b="1">
+              <a:rPr lang="en-US" sz="1100" b="1">
                 <a:solidFill>
                   <a:srgbClr val="007020"/>
                 </a:solidFill>
@@ -6329,13 +6329,13 @@
               <a:t>fn</a:t>
             </a:r>
             <a:r>
-              <a:rPr lang="en-US" sz="1800">
+              <a:rPr lang="en-US" sz="1100">
                 <a:latin typeface="Courier"/>
               </a:rPr>
               <a:t> neighborhood(</a:t>
             </a:r>
             <a:r>
-              <a:rPr lang="en-US" sz="1800">
+              <a:rPr lang="en-US" sz="1100">
                 <a:solidFill>
                   <a:srgbClr val="666666"/>
                 </a:solidFill>
@@ -6344,7 +6344,7 @@
               <a:t>&amp;</a:t>
             </a:r>
             <a:r>
-              <a:rPr lang="en-US" sz="1800" b="1">
+              <a:rPr lang="en-US" sz="1100" b="1">
                 <a:solidFill>
                   <a:srgbClr val="007020"/>
                 </a:solidFill>
@@ -6353,7 +6353,7 @@
               <a:t>self</a:t>
             </a:r>
             <a:r>
-              <a:rPr lang="en-US" sz="1800">
+              <a:rPr lang="en-US" sz="1100">
                 <a:solidFill>
                   <a:srgbClr val="666666"/>
                 </a:solidFill>
@@ -6362,13 +6362,13 @@
               <a:t>,</a:t>
             </a:r>
             <a:r>
-              <a:rPr lang="en-US" sz="1800">
+              <a:rPr lang="en-US" sz="1100">
                 <a:latin typeface="Courier"/>
               </a:rPr>
               <a:t> v</a:t>
             </a:r>
             <a:r>
-              <a:rPr lang="en-US" sz="1800">
+              <a:rPr lang="en-US" sz="1100">
                 <a:solidFill>
                   <a:srgbClr val="666666"/>
                 </a:solidFill>
@@ -6377,13 +6377,13 @@
               <a:t>:</a:t>
             </a:r>
             <a:r>
-              <a:rPr lang="en-US" sz="1800">
+              <a:rPr lang="en-US" sz="1100">
                 <a:latin typeface="Courier"/>
               </a:rPr>
               <a:t> </a:t>
             </a:r>
             <a:r>
-              <a:rPr lang="en-US" sz="1800">
+              <a:rPr lang="en-US" sz="1100">
                 <a:solidFill>
                   <a:srgbClr val="666666"/>
                 </a:solidFill>
@@ -6392,13 +6392,13 @@
               <a:t>&amp;</a:t>
             </a:r>
             <a:r>
-              <a:rPr lang="en-US" sz="1800">
+              <a:rPr lang="en-US" sz="1100">
                 <a:latin typeface="Courier"/>
               </a:rPr>
               <a:t>V) </a:t>
             </a:r>
             <a:r>
-              <a:rPr lang="en-US" sz="1800">
+              <a:rPr lang="en-US" sz="1100">
                 <a:solidFill>
                   <a:srgbClr val="666666"/>
                 </a:solidFill>
@@ -6407,13 +6407,13 @@
               <a:t>-&gt;</a:t>
             </a:r>
             <a:r>
-              <a:rPr lang="en-US" sz="1800">
+              <a:rPr lang="en-US" sz="1100">
                 <a:latin typeface="Courier"/>
               </a:rPr>
               <a:t> (nbrs</a:t>
             </a:r>
             <a:r>
-              <a:rPr lang="en-US" sz="1800">
+              <a:rPr lang="en-US" sz="1100">
                 <a:solidFill>
                   <a:srgbClr val="666666"/>
                 </a:solidFill>
@@ -6422,13 +6422,13 @@
               <a:t>:</a:t>
             </a:r>
             <a:r>
-              <a:rPr lang="en-US" sz="1800">
+              <a:rPr lang="en-US" sz="1100">
                 <a:latin typeface="Courier"/>
               </a:rPr>
               <a:t> SetStEph</a:t>
             </a:r>
             <a:r>
-              <a:rPr lang="en-US" sz="1800">
+              <a:rPr lang="en-US" sz="1100">
                 <a:solidFill>
                   <a:srgbClr val="666666"/>
                 </a:solidFill>
@@ -6437,13 +6437,13 @@
               <a:t>&lt;</a:t>
             </a:r>
             <a:r>
-              <a:rPr lang="en-US" sz="1800">
+              <a:rPr lang="en-US" sz="1100">
                 <a:latin typeface="Courier"/>
               </a:rPr>
               <a:t>V</a:t>
             </a:r>
             <a:r>
-              <a:rPr lang="en-US" sz="1800">
+              <a:rPr lang="en-US" sz="1100">
                 <a:solidFill>
                   <a:srgbClr val="666666"/>
                 </a:solidFill>
@@ -6452,13 +6452,13 @@
               <a:t>&gt;</a:t>
             </a:r>
             <a:r>
-              <a:rPr lang="en-US" sz="1800">
+              <a:rPr lang="en-US" sz="1100">
                 <a:latin typeface="Courier"/>
               </a:rPr>
               <a:t>) </a:t>
             </a:r>
             <a:r>
-              <a:rPr lang="en-US" sz="1800">
+              <a:rPr lang="en-US" sz="1100">
                 <a:solidFill>
                   <a:srgbClr val="666666"/>
                 </a:solidFill>
@@ -6468,13 +6468,13 @@
             </a:r>
             <a:br/>
             <a:r>
-              <a:rPr lang="en-US" sz="1800">
+              <a:rPr lang="en-US" sz="1100">
                 <a:latin typeface="Courier"/>
               </a:rPr>
               <a:t>    </a:t>
             </a:r>
             <a:r>
-              <a:rPr lang="en-US" sz="1800" b="1">
+              <a:rPr lang="en-US" sz="1100" b="1">
                 <a:solidFill>
                   <a:srgbClr val="007020"/>
                 </a:solidFill>
@@ -6483,13 +6483,13 @@
               <a:t>let</a:t>
             </a:r>
             <a:r>
-              <a:rPr lang="en-US" sz="1800">
+              <a:rPr lang="en-US" sz="1100">
                 <a:latin typeface="Courier"/>
               </a:rPr>
               <a:t> </a:t>
             </a:r>
             <a:r>
-              <a:rPr lang="en-US" sz="1800" b="1">
+              <a:rPr lang="en-US" sz="1100" b="1">
                 <a:solidFill>
                   <a:srgbClr val="007020"/>
                 </a:solidFill>
@@ -6498,13 +6498,13 @@
               <a:t>mut</a:t>
             </a:r>
             <a:r>
-              <a:rPr lang="en-US" sz="1800">
+              <a:rPr lang="en-US" sz="1100">
                 <a:latin typeface="Courier"/>
               </a:rPr>
               <a:t> nbrs</a:t>
             </a:r>
             <a:r>
-              <a:rPr lang="en-US" sz="1800">
+              <a:rPr lang="en-US" sz="1100">
                 <a:solidFill>
                   <a:srgbClr val="666666"/>
                 </a:solidFill>
@@ -6513,13 +6513,13 @@
               <a:t>:</a:t>
             </a:r>
             <a:r>
-              <a:rPr lang="en-US" sz="1800">
+              <a:rPr lang="en-US" sz="1100">
                 <a:latin typeface="Courier"/>
               </a:rPr>
               <a:t> SetStEph</a:t>
             </a:r>
             <a:r>
-              <a:rPr lang="en-US" sz="1800">
+              <a:rPr lang="en-US" sz="1100">
                 <a:solidFill>
                   <a:srgbClr val="666666"/>
                 </a:solidFill>
@@ -6528,13 +6528,13 @@
               <a:t>&lt;</a:t>
             </a:r>
             <a:r>
-              <a:rPr lang="en-US" sz="1800">
+              <a:rPr lang="en-US" sz="1100">
                 <a:latin typeface="Courier"/>
               </a:rPr>
               <a:t>V</a:t>
             </a:r>
             <a:r>
-              <a:rPr lang="en-US" sz="1800">
+              <a:rPr lang="en-US" sz="1100">
                 <a:solidFill>
                   <a:srgbClr val="666666"/>
                 </a:solidFill>
@@ -6543,13 +6543,13 @@
               <a:t>&gt;</a:t>
             </a:r>
             <a:r>
-              <a:rPr lang="en-US" sz="1800">
+              <a:rPr lang="en-US" sz="1100">
                 <a:latin typeface="Courier"/>
               </a:rPr>
               <a:t> </a:t>
             </a:r>
             <a:r>
-              <a:rPr lang="en-US" sz="1800">
+              <a:rPr lang="en-US" sz="1100">
                 <a:solidFill>
                   <a:srgbClr val="666666"/>
                 </a:solidFill>
@@ -6558,13 +6558,13 @@
               <a:t>=</a:t>
             </a:r>
             <a:r>
-              <a:rPr lang="en-US" sz="1800">
+              <a:rPr lang="en-US" sz="1100">
                 <a:latin typeface="Courier"/>
               </a:rPr>
               <a:t> </a:t>
             </a:r>
             <a:r>
-              <a:rPr lang="en-US" sz="1800">
+              <a:rPr lang="en-US" sz="1100">
                 <a:solidFill>
                   <a:srgbClr val="BC7A00"/>
                 </a:solidFill>
@@ -6573,13 +6573,13 @@
               <a:t>SetStEph::</a:t>
             </a:r>
             <a:r>
-              <a:rPr lang="en-US" sz="1800">
+              <a:rPr lang="en-US" sz="1100">
                 <a:latin typeface="Courier"/>
               </a:rPr>
               <a:t>empty()</a:t>
             </a:r>
             <a:r>
-              <a:rPr lang="en-US" sz="1800">
+              <a:rPr lang="en-US" sz="1100">
                 <a:solidFill>
                   <a:srgbClr val="666666"/>
                 </a:solidFill>
@@ -6589,13 +6589,13 @@
             </a:r>
             <a:br/>
             <a:r>
-              <a:rPr lang="en-US" sz="1800">
+              <a:rPr lang="en-US" sz="1100">
                 <a:latin typeface="Courier"/>
               </a:rPr>
               <a:t>    </a:t>
             </a:r>
             <a:r>
-              <a:rPr lang="en-US" sz="1800" b="1">
+              <a:rPr lang="en-US" sz="1100" b="1">
                 <a:solidFill>
                   <a:srgbClr val="007020"/>
                 </a:solidFill>
@@ -6604,13 +6604,13 @@
               <a:t>let</a:t>
             </a:r>
             <a:r>
-              <a:rPr lang="en-US" sz="1800">
+              <a:rPr lang="en-US" sz="1100">
                 <a:latin typeface="Courier"/>
               </a:rPr>
               <a:t> </a:t>
             </a:r>
             <a:r>
-              <a:rPr lang="en-US" sz="1800" b="1">
+              <a:rPr lang="en-US" sz="1100" b="1">
                 <a:solidFill>
                   <a:srgbClr val="007020"/>
                 </a:solidFill>
@@ -6619,13 +6619,13 @@
               <a:t>mut</a:t>
             </a:r>
             <a:r>
-              <a:rPr lang="en-US" sz="1800">
+              <a:rPr lang="en-US" sz="1100">
                 <a:latin typeface="Courier"/>
               </a:rPr>
               <a:t> it </a:t>
             </a:r>
             <a:r>
-              <a:rPr lang="en-US" sz="1800">
+              <a:rPr lang="en-US" sz="1100">
                 <a:solidFill>
                   <a:srgbClr val="666666"/>
                 </a:solidFill>
@@ -6634,13 +6634,13 @@
               <a:t>=</a:t>
             </a:r>
             <a:r>
-              <a:rPr lang="en-US" sz="1800">
+              <a:rPr lang="en-US" sz="1100">
                 <a:latin typeface="Courier"/>
               </a:rPr>
               <a:t> </a:t>
             </a:r>
             <a:r>
-              <a:rPr lang="en-US" sz="1800" b="1">
+              <a:rPr lang="en-US" sz="1100" b="1">
                 <a:solidFill>
                   <a:srgbClr val="007020"/>
                 </a:solidFill>
@@ -6649,7 +6649,7 @@
               <a:t>self</a:t>
             </a:r>
             <a:r>
-              <a:rPr lang="en-US" sz="1800">
+              <a:rPr lang="en-US" sz="1100">
                 <a:solidFill>
                   <a:srgbClr val="666666"/>
                 </a:solidFill>
@@ -6658,13 +6658,13 @@
               <a:t>.</a:t>
             </a:r>
             <a:r>
-              <a:rPr lang="en-US" sz="1800">
+              <a:rPr lang="en-US" sz="1100">
                 <a:latin typeface="Courier"/>
               </a:rPr>
               <a:t>E</a:t>
             </a:r>
             <a:r>
-              <a:rPr lang="en-US" sz="1800">
+              <a:rPr lang="en-US" sz="1100">
                 <a:solidFill>
                   <a:srgbClr val="666666"/>
                 </a:solidFill>
@@ -6673,13 +6673,13 @@
               <a:t>.</a:t>
             </a:r>
             <a:r>
-              <a:rPr lang="en-US" sz="1800">
+              <a:rPr lang="en-US" sz="1100">
                 <a:latin typeface="Courier"/>
               </a:rPr>
               <a:t>iter()</a:t>
             </a:r>
             <a:r>
-              <a:rPr lang="en-US" sz="1800">
+              <a:rPr lang="en-US" sz="1100">
                 <a:solidFill>
                   <a:srgbClr val="666666"/>
                 </a:solidFill>
@@ -6689,13 +6689,13 @@
             </a:r>
             <a:br/>
             <a:r>
-              <a:rPr lang="en-US" sz="1800">
+              <a:rPr lang="en-US" sz="1100">
                 <a:latin typeface="Courier"/>
               </a:rPr>
               <a:t>    </a:t>
             </a:r>
             <a:r>
-              <a:rPr lang="en-US" sz="1800" b="1">
+              <a:rPr lang="en-US" sz="1100" b="1">
                 <a:solidFill>
                   <a:srgbClr val="007020"/>
                 </a:solidFill>
@@ -6704,13 +6704,13 @@
               <a:t>let</a:t>
             </a:r>
             <a:r>
-              <a:rPr lang="en-US" sz="1800">
+              <a:rPr lang="en-US" sz="1100">
                 <a:latin typeface="Courier"/>
               </a:rPr>
               <a:t> ghost edges_seq </a:t>
             </a:r>
             <a:r>
-              <a:rPr lang="en-US" sz="1800">
+              <a:rPr lang="en-US" sz="1100">
                 <a:solidFill>
                   <a:srgbClr val="666666"/>
                 </a:solidFill>
@@ -6719,13 +6719,13 @@
               <a:t>=</a:t>
             </a:r>
             <a:r>
-              <a:rPr lang="en-US" sz="1800">
+              <a:rPr lang="en-US" sz="1100">
                 <a:latin typeface="Courier"/>
               </a:rPr>
               <a:t> it</a:t>
             </a:r>
             <a:r>
-              <a:rPr lang="en-US" sz="1800">
+              <a:rPr lang="en-US" sz="1100">
                 <a:solidFill>
                   <a:srgbClr val="666666"/>
                 </a:solidFill>
@@ -6734,7 +6734,7 @@
               <a:t>@.</a:t>
             </a:r>
             <a:r>
-              <a:rPr lang="en-US" sz="1800">
+              <a:rPr lang="en-US" sz="1100">
                 <a:solidFill>
                   <a:srgbClr val="40A070"/>
                 </a:solidFill>
@@ -6743,7 +6743,7 @@
               <a:t>1</a:t>
             </a:r>
             <a:r>
-              <a:rPr lang="en-US" sz="1800">
+              <a:rPr lang="en-US" sz="1100">
                 <a:solidFill>
                   <a:srgbClr val="666666"/>
                 </a:solidFill>
@@ -6753,13 +6753,13 @@
             </a:r>
             <a:br/>
             <a:r>
-              <a:rPr lang="en-US" sz="1800">
+              <a:rPr lang="en-US" sz="1100">
                 <a:latin typeface="Courier"/>
               </a:rPr>
               <a:t>    </a:t>
             </a:r>
             <a:r>
-              <a:rPr lang="en-US" sz="1800" b="1">
+              <a:rPr lang="en-US" sz="1100" b="1">
                 <a:solidFill>
                   <a:srgbClr val="007020"/>
                 </a:solidFill>
@@ -6769,13 +6769,13 @@
             </a:r>
             <a:br/>
             <a:r>
-              <a:rPr lang="en-US" sz="1800">
+              <a:rPr lang="en-US" sz="1100">
                 <a:latin typeface="Courier"/>
               </a:rPr>
               <a:t>        invariant nbrs</a:t>
             </a:r>
             <a:r>
-              <a:rPr lang="en-US" sz="1800">
+              <a:rPr lang="en-US" sz="1100">
                 <a:solidFill>
                   <a:srgbClr val="666666"/>
                 </a:solidFill>
@@ -6784,13 +6784,13 @@
               <a:t>@</a:t>
             </a:r>
             <a:r>
-              <a:rPr lang="en-US" sz="1800">
+              <a:rPr lang="en-US" sz="1100">
                 <a:latin typeface="Courier"/>
               </a:rPr>
               <a:t> </a:t>
             </a:r>
             <a:r>
-              <a:rPr lang="en-US" sz="1800">
+              <a:rPr lang="en-US" sz="1100">
                 <a:solidFill>
                   <a:srgbClr val="666666"/>
                 </a:solidFill>
@@ -6799,13 +6799,13 @@
               <a:t>==</a:t>
             </a:r>
             <a:r>
-              <a:rPr lang="en-US" sz="1800">
+              <a:rPr lang="en-US" sz="1100">
                 <a:latin typeface="Courier"/>
               </a:rPr>
               <a:t> </a:t>
             </a:r>
             <a:r>
-              <a:rPr lang="en-US" sz="1800">
+              <a:rPr lang="en-US" sz="1100">
                 <a:solidFill>
                   <a:srgbClr val="BC7A00"/>
                 </a:solidFill>
@@ -6814,13 +6814,13 @@
               <a:t>Set::</a:t>
             </a:r>
             <a:r>
-              <a:rPr lang="en-US" sz="1800">
+              <a:rPr lang="en-US" sz="1100">
                 <a:latin typeface="Courier"/>
               </a:rPr>
               <a:t>new(</a:t>
             </a:r>
             <a:r>
-              <a:rPr lang="en-US" sz="1800">
+              <a:rPr lang="en-US" sz="1100">
                 <a:solidFill>
                   <a:srgbClr val="666666"/>
                 </a:solidFill>
@@ -6829,13 +6829,13 @@
               <a:t>|</a:t>
             </a:r>
             <a:r>
-              <a:rPr lang="en-US" sz="1800">
+              <a:rPr lang="en-US" sz="1100">
                 <a:latin typeface="Courier"/>
               </a:rPr>
               <a:t>w</a:t>
             </a:r>
             <a:r>
-              <a:rPr lang="en-US" sz="1800">
+              <a:rPr lang="en-US" sz="1100">
                 <a:solidFill>
                   <a:srgbClr val="666666"/>
                 </a:solidFill>
@@ -6844,13 +6844,13 @@
               <a:t>|</a:t>
             </a:r>
             <a:r>
-              <a:rPr lang="en-US" sz="1800">
+              <a:rPr lang="en-US" sz="1100">
                 <a:latin typeface="Courier"/>
               </a:rPr>
               <a:t> exists </a:t>
             </a:r>
             <a:r>
-              <a:rPr lang="en-US" sz="1800">
+              <a:rPr lang="en-US" sz="1100">
                 <a:solidFill>
                   <a:srgbClr val="666666"/>
                 </a:solidFill>
@@ -6859,13 +6859,13 @@
               <a:t>|</a:t>
             </a:r>
             <a:r>
-              <a:rPr lang="en-US" sz="1800">
+              <a:rPr lang="en-US" sz="1100">
                 <a:latin typeface="Courier"/>
               </a:rPr>
               <a:t>i</a:t>
             </a:r>
             <a:r>
-              <a:rPr lang="en-US" sz="1800">
+              <a:rPr lang="en-US" sz="1100">
                 <a:solidFill>
                   <a:srgbClr val="666666"/>
                 </a:solidFill>
@@ -6875,13 +6875,13 @@
             </a:r>
             <a:br/>
             <a:r>
-              <a:rPr lang="en-US" sz="1800">
+              <a:rPr lang="en-US" sz="1100">
                 <a:latin typeface="Courier"/>
               </a:rPr>
               <a:t>            </a:t>
             </a:r>
             <a:r>
-              <a:rPr lang="en-US" sz="1800">
+              <a:rPr lang="en-US" sz="1100">
                 <a:solidFill>
                   <a:srgbClr val="40A070"/>
                 </a:solidFill>
@@ -6890,13 +6890,13 @@
               <a:t>0</a:t>
             </a:r>
             <a:r>
-              <a:rPr lang="en-US" sz="1800">
+              <a:rPr lang="en-US" sz="1100">
                 <a:latin typeface="Courier"/>
               </a:rPr>
               <a:t> </a:t>
             </a:r>
             <a:r>
-              <a:rPr lang="en-US" sz="1800">
+              <a:rPr lang="en-US" sz="1100">
                 <a:solidFill>
                   <a:srgbClr val="666666"/>
                 </a:solidFill>
@@ -6905,13 +6905,13 @@
               <a:t>&lt;=</a:t>
             </a:r>
             <a:r>
-              <a:rPr lang="en-US" sz="1800">
+              <a:rPr lang="en-US" sz="1100">
                 <a:latin typeface="Courier"/>
               </a:rPr>
               <a:t> i </a:t>
             </a:r>
             <a:r>
-              <a:rPr lang="en-US" sz="1800">
+              <a:rPr lang="en-US" sz="1100">
                 <a:solidFill>
                   <a:srgbClr val="666666"/>
                 </a:solidFill>
@@ -6920,13 +6920,13 @@
               <a:t>&lt;</a:t>
             </a:r>
             <a:r>
-              <a:rPr lang="en-US" sz="1800">
+              <a:rPr lang="en-US" sz="1100">
                 <a:latin typeface="Courier"/>
               </a:rPr>
               <a:t> it</a:t>
             </a:r>
             <a:r>
-              <a:rPr lang="en-US" sz="1800">
+              <a:rPr lang="en-US" sz="1100">
                 <a:solidFill>
                   <a:srgbClr val="666666"/>
                 </a:solidFill>
@@ -6935,7 +6935,7 @@
               <a:t>@.</a:t>
             </a:r>
             <a:r>
-              <a:rPr lang="en-US" sz="1800">
+              <a:rPr lang="en-US" sz="1100">
                 <a:solidFill>
                   <a:srgbClr val="40A070"/>
                 </a:solidFill>
@@ -6944,13 +6944,13 @@
               <a:t>0</a:t>
             </a:r>
             <a:r>
-              <a:rPr lang="en-US" sz="1800">
+              <a:rPr lang="en-US" sz="1100">
                 <a:latin typeface="Courier"/>
               </a:rPr>
               <a:t> </a:t>
             </a:r>
             <a:r>
-              <a:rPr lang="en-US" sz="1800">
+              <a:rPr lang="en-US" sz="1100">
                 <a:solidFill>
                   <a:srgbClr val="666666"/>
                 </a:solidFill>
@@ -6959,13 +6959,13 @@
               <a:t>&amp;&amp;</a:t>
             </a:r>
             <a:r>
-              <a:rPr lang="en-US" sz="1800">
+              <a:rPr lang="en-US" sz="1100">
                 <a:latin typeface="Courier"/>
               </a:rPr>
               <a:t> </a:t>
             </a:r>
             <a:r>
-              <a:rPr lang="en-US" sz="1800" i="1">
+              <a:rPr lang="en-US" sz="1100" i="1">
                 <a:solidFill>
                   <a:srgbClr val="60A0B0"/>
                 </a:solidFill>
@@ -6974,13 +6974,13 @@
               <a:t>/* edges_seq[i] hits v on either side */</a:t>
             </a:r>
             <a:r>
-              <a:rPr lang="en-US" sz="1800">
+              <a:rPr lang="en-US" sz="1100">
                 <a:latin typeface="Courier"/>
               </a:rPr>
               <a:t> </a:t>
             </a:r>
             <a:r>
-              <a:rPr lang="en-US" sz="1800">
+              <a:rPr lang="en-US" sz="1100">
                 <a:solidFill>
                   <a:srgbClr val="666666"/>
                 </a:solidFill>
@@ -6989,13 +6989,13 @@
               <a:t>...</a:t>
             </a:r>
             <a:r>
-              <a:rPr lang="en-US" sz="1800">
+              <a:rPr lang="en-US" sz="1100">
                 <a:latin typeface="Courier"/>
               </a:rPr>
               <a:t>)</a:t>
             </a:r>
             <a:r>
-              <a:rPr lang="en-US" sz="1800">
+              <a:rPr lang="en-US" sz="1100">
                 <a:solidFill>
                   <a:srgbClr val="666666"/>
                 </a:solidFill>
@@ -7005,13 +7005,13 @@
             </a:r>
             <a:br/>
             <a:r>
-              <a:rPr lang="en-US" sz="1800">
+              <a:rPr lang="en-US" sz="1100">
                 <a:latin typeface="Courier"/>
               </a:rPr>
               <a:t>        decreases edges_seq</a:t>
             </a:r>
             <a:r>
-              <a:rPr lang="en-US" sz="1800">
+              <a:rPr lang="en-US" sz="1100">
                 <a:solidFill>
                   <a:srgbClr val="666666"/>
                 </a:solidFill>
@@ -7020,13 +7020,13 @@
               <a:t>.</a:t>
             </a:r>
             <a:r>
-              <a:rPr lang="en-US" sz="1800">
+              <a:rPr lang="en-US" sz="1100">
                 <a:latin typeface="Courier"/>
               </a:rPr>
               <a:t>len() </a:t>
             </a:r>
             <a:r>
-              <a:rPr lang="en-US" sz="1800">
+              <a:rPr lang="en-US" sz="1100">
                 <a:solidFill>
                   <a:srgbClr val="666666"/>
                 </a:solidFill>
@@ -7035,13 +7035,13 @@
               <a:t>-</a:t>
             </a:r>
             <a:r>
-              <a:rPr lang="en-US" sz="1800">
+              <a:rPr lang="en-US" sz="1100">
                 <a:latin typeface="Courier"/>
               </a:rPr>
               <a:t> it</a:t>
             </a:r>
             <a:r>
-              <a:rPr lang="en-US" sz="1800">
+              <a:rPr lang="en-US" sz="1100">
                 <a:solidFill>
                   <a:srgbClr val="666666"/>
                 </a:solidFill>
@@ -7050,7 +7050,7 @@
               <a:t>@.</a:t>
             </a:r>
             <a:r>
-              <a:rPr lang="en-US" sz="1800">
+              <a:rPr lang="en-US" sz="1100">
                 <a:solidFill>
                   <a:srgbClr val="40A070"/>
                 </a:solidFill>
@@ -7059,7 +7059,7 @@
               <a:t>0</a:t>
             </a:r>
             <a:r>
-              <a:rPr lang="en-US" sz="1800">
+              <a:rPr lang="en-US" sz="1100">
                 <a:solidFill>
                   <a:srgbClr val="666666"/>
                 </a:solidFill>
@@ -7069,13 +7069,13 @@
             </a:r>
             <a:br/>
             <a:r>
-              <a:rPr lang="en-US" sz="1800">
+              <a:rPr lang="en-US" sz="1100">
                 <a:latin typeface="Courier"/>
               </a:rPr>
               <a:t>    </a:t>
             </a:r>
             <a:r>
-              <a:rPr lang="en-US" sz="1800">
+              <a:rPr lang="en-US" sz="1100">
                 <a:solidFill>
                   <a:srgbClr val="666666"/>
                 </a:solidFill>
@@ -7085,13 +7085,13 @@
             </a:r>
             <a:br/>
             <a:r>
-              <a:rPr lang="en-US" sz="1800">
+              <a:rPr lang="en-US" sz="1100">
                 <a:latin typeface="Courier"/>
               </a:rPr>
               <a:t>        </a:t>
             </a:r>
             <a:r>
-              <a:rPr lang="en-US" sz="1800" b="1">
+              <a:rPr lang="en-US" sz="1100" b="1">
                 <a:solidFill>
                   <a:srgbClr val="007020"/>
                 </a:solidFill>
@@ -7100,13 +7100,13 @@
               <a:t>match</a:t>
             </a:r>
             <a:r>
-              <a:rPr lang="en-US" sz="1800">
+              <a:rPr lang="en-US" sz="1100">
                 <a:latin typeface="Courier"/>
               </a:rPr>
               <a:t> it</a:t>
             </a:r>
             <a:r>
-              <a:rPr lang="en-US" sz="1800">
+              <a:rPr lang="en-US" sz="1100">
                 <a:solidFill>
                   <a:srgbClr val="666666"/>
                 </a:solidFill>
@@ -7115,13 +7115,13 @@
               <a:t>.</a:t>
             </a:r>
             <a:r>
-              <a:rPr lang="en-US" sz="1800">
+              <a:rPr lang="en-US" sz="1100">
                 <a:latin typeface="Courier"/>
               </a:rPr>
               <a:t>next() </a:t>
             </a:r>
             <a:r>
-              <a:rPr lang="en-US" sz="1800">
+              <a:rPr lang="en-US" sz="1100">
                 <a:solidFill>
                   <a:srgbClr val="666666"/>
                 </a:solidFill>
@@ -7131,13 +7131,13 @@
             </a:r>
             <a:br/>
             <a:r>
-              <a:rPr lang="en-US" sz="1800">
+              <a:rPr lang="en-US" sz="1100">
                 <a:latin typeface="Courier"/>
               </a:rPr>
               <a:t>            </a:t>
             </a:r>
             <a:r>
-              <a:rPr lang="en-US" sz="1800">
+              <a:rPr lang="en-US" sz="1100">
                 <a:solidFill>
                   <a:srgbClr val="880000"/>
                 </a:solidFill>
@@ -7146,13 +7146,13 @@
               <a:t>None</a:t>
             </a:r>
             <a:r>
-              <a:rPr lang="en-US" sz="1800">
+              <a:rPr lang="en-US" sz="1100">
                 <a:latin typeface="Courier"/>
               </a:rPr>
               <a:t>    </a:t>
             </a:r>
             <a:r>
-              <a:rPr lang="en-US" sz="1800">
+              <a:rPr lang="en-US" sz="1100">
                 <a:solidFill>
                   <a:srgbClr val="666666"/>
                 </a:solidFill>
@@ -7161,13 +7161,13 @@
               <a:t>=&gt;</a:t>
             </a:r>
             <a:r>
-              <a:rPr lang="en-US" sz="1800">
+              <a:rPr lang="en-US" sz="1100">
                 <a:latin typeface="Courier"/>
               </a:rPr>
               <a:t> </a:t>
             </a:r>
             <a:r>
-              <a:rPr lang="en-US" sz="1800">
+              <a:rPr lang="en-US" sz="1100">
                 <a:solidFill>
                   <a:srgbClr val="666666"/>
                 </a:solidFill>
@@ -7176,13 +7176,13 @@
               <a:t>{</a:t>
             </a:r>
             <a:r>
-              <a:rPr lang="en-US" sz="1800">
+              <a:rPr lang="en-US" sz="1100">
                 <a:latin typeface="Courier"/>
               </a:rPr>
               <a:t> proof </a:t>
             </a:r>
             <a:r>
-              <a:rPr lang="en-US" sz="1800">
+              <a:rPr lang="en-US" sz="1100">
                 <a:solidFill>
                   <a:srgbClr val="666666"/>
                 </a:solidFill>
@@ -7191,13 +7191,13 @@
               <a:t>{</a:t>
             </a:r>
             <a:r>
-              <a:rPr lang="en-US" sz="1800">
+              <a:rPr lang="en-US" sz="1100">
                 <a:latin typeface="Courier"/>
               </a:rPr>
               <a:t> </a:t>
             </a:r>
             <a:r>
-              <a:rPr lang="en-US" sz="1800" i="1">
+              <a:rPr lang="en-US" sz="1100" i="1">
                 <a:solidFill>
                   <a:srgbClr val="60A0B0"/>
                 </a:solidFill>
@@ -7206,13 +7206,13 @@
               <a:t>/* set-equality lemmas */</a:t>
             </a:r>
             <a:r>
-              <a:rPr lang="en-US" sz="1800">
+              <a:rPr lang="en-US" sz="1100">
                 <a:latin typeface="Courier"/>
               </a:rPr>
               <a:t> </a:t>
             </a:r>
             <a:r>
-              <a:rPr lang="en-US" sz="1800">
+              <a:rPr lang="en-US" sz="1100">
                 <a:solidFill>
                   <a:srgbClr val="666666"/>
                 </a:solidFill>
@@ -7221,13 +7221,13 @@
               <a:t>}</a:t>
             </a:r>
             <a:r>
-              <a:rPr lang="en-US" sz="1800">
+              <a:rPr lang="en-US" sz="1100">
                 <a:latin typeface="Courier"/>
               </a:rPr>
               <a:t> </a:t>
             </a:r>
             <a:r>
-              <a:rPr lang="en-US" sz="1800" b="1">
+              <a:rPr lang="en-US" sz="1100" b="1">
                 <a:solidFill>
                   <a:srgbClr val="007020"/>
                 </a:solidFill>
@@ -7236,13 +7236,13 @@
               <a:t>return</a:t>
             </a:r>
             <a:r>
-              <a:rPr lang="en-US" sz="1800">
+              <a:rPr lang="en-US" sz="1100">
                 <a:latin typeface="Courier"/>
               </a:rPr>
               <a:t> nbrs</a:t>
             </a:r>
             <a:r>
-              <a:rPr lang="en-US" sz="1800">
+              <a:rPr lang="en-US" sz="1100">
                 <a:solidFill>
                   <a:srgbClr val="666666"/>
                 </a:solidFill>
@@ -7251,13 +7251,13 @@
               <a:t>;</a:t>
             </a:r>
             <a:r>
-              <a:rPr lang="en-US" sz="1800">
+              <a:rPr lang="en-US" sz="1100">
                 <a:latin typeface="Courier"/>
               </a:rPr>
               <a:t> </a:t>
             </a:r>
             <a:r>
-              <a:rPr lang="en-US" sz="1800">
+              <a:rPr lang="en-US" sz="1100">
                 <a:solidFill>
                   <a:srgbClr val="666666"/>
                 </a:solidFill>
@@ -7267,13 +7267,13 @@
             </a:r>
             <a:br/>
             <a:r>
-              <a:rPr lang="en-US" sz="1800">
+              <a:rPr lang="en-US" sz="1100">
                 <a:latin typeface="Courier"/>
               </a:rPr>
               <a:t>            </a:t>
             </a:r>
             <a:r>
-              <a:rPr lang="en-US" sz="1800">
+              <a:rPr lang="en-US" sz="1100">
                 <a:solidFill>
                   <a:srgbClr val="880000"/>
                 </a:solidFill>
@@ -7282,13 +7282,13 @@
               <a:t>Some</a:t>
             </a:r>
             <a:r>
-              <a:rPr lang="en-US" sz="1800">
+              <a:rPr lang="en-US" sz="1100">
                 <a:latin typeface="Courier"/>
               </a:rPr>
               <a:t>(e) </a:t>
             </a:r>
             <a:r>
-              <a:rPr lang="en-US" sz="1800">
+              <a:rPr lang="en-US" sz="1100">
                 <a:solidFill>
                   <a:srgbClr val="666666"/>
                 </a:solidFill>
@@ -7297,13 +7297,13 @@
               <a:t>=&gt;</a:t>
             </a:r>
             <a:r>
-              <a:rPr lang="en-US" sz="1800">
+              <a:rPr lang="en-US" sz="1100">
                 <a:latin typeface="Courier"/>
               </a:rPr>
               <a:t> </a:t>
             </a:r>
             <a:r>
-              <a:rPr lang="en-US" sz="1800">
+              <a:rPr lang="en-US" sz="1100">
                 <a:solidFill>
                   <a:srgbClr val="666666"/>
                 </a:solidFill>
@@ -7312,13 +7312,13 @@
               <a:t>{</a:t>
             </a:r>
             <a:r>
-              <a:rPr lang="en-US" sz="1800">
+              <a:rPr lang="en-US" sz="1100">
                 <a:latin typeface="Courier"/>
               </a:rPr>
               <a:t> </a:t>
             </a:r>
             <a:r>
-              <a:rPr lang="en-US" sz="1800" i="1">
+              <a:rPr lang="en-US" sz="1100" i="1">
                 <a:solidFill>
                   <a:srgbClr val="60A0B0"/>
                 </a:solidFill>
@@ -7327,13 +7327,13 @@
               <a:t>/* if feq(&amp;e.0,v) insert e.1; sym. */</a:t>
             </a:r>
             <a:r>
-              <a:rPr lang="en-US" sz="1800">
+              <a:rPr lang="en-US" sz="1100">
                 <a:latin typeface="Courier"/>
               </a:rPr>
               <a:t> </a:t>
             </a:r>
             <a:r>
-              <a:rPr lang="en-US" sz="1800">
+              <a:rPr lang="en-US" sz="1100">
                 <a:solidFill>
                   <a:srgbClr val="666666"/>
                 </a:solidFill>
@@ -7342,13 +7342,13 @@
               <a:t>...</a:t>
             </a:r>
             <a:r>
-              <a:rPr lang="en-US" sz="1800">
+              <a:rPr lang="en-US" sz="1100">
                 <a:latin typeface="Courier"/>
               </a:rPr>
               <a:t> </a:t>
             </a:r>
             <a:r>
-              <a:rPr lang="en-US" sz="1800">
+              <a:rPr lang="en-US" sz="1100">
                 <a:solidFill>
                   <a:srgbClr val="666666"/>
                 </a:solidFill>
@@ -7358,13 +7358,13 @@
             </a:r>
             <a:br/>
             <a:r>
-              <a:rPr lang="en-US" sz="1800">
+              <a:rPr lang="en-US" sz="1100">
                 <a:latin typeface="Courier"/>
               </a:rPr>
               <a:t>        </a:t>
             </a:r>
             <a:r>
-              <a:rPr lang="en-US" sz="1800">
+              <a:rPr lang="en-US" sz="1100">
                 <a:solidFill>
                   <a:srgbClr val="666666"/>
                 </a:solidFill>
@@ -7374,13 +7374,13 @@
             </a:r>
             <a:br/>
             <a:r>
-              <a:rPr lang="en-US" sz="1800">
+              <a:rPr lang="en-US" sz="1100">
                 <a:latin typeface="Courier"/>
               </a:rPr>
               <a:t>    </a:t>
             </a:r>
             <a:r>
-              <a:rPr lang="en-US" sz="1800">
+              <a:rPr lang="en-US" sz="1100">
                 <a:solidFill>
                   <a:srgbClr val="666666"/>
                 </a:solidFill>
@@ -7390,7 +7390,7 @@
             </a:r>
             <a:br/>
             <a:r>
-              <a:rPr lang="en-US" sz="1800">
+              <a:rPr lang="en-US" sz="1100">
                 <a:solidFill>
                   <a:srgbClr val="666666"/>
                 </a:solidFill>
@@ -7465,7 +7465,7 @@
           <a:p>
             <a:pPr lvl="0"/>
             <a:r>
-              <a:rPr lang="en-US" sz="1800"/>
+              <a:rPr lang="en-US" sz="1100"/>
               <a:t>Four specification constructs are used to give specs to Rust stdlib.</a:t>
             </a:r>
           </a:p>
@@ -7488,13 +7488,13 @@
               <a:buNone/>
             </a:pPr>
             <a:r>
-              <a:rPr lang="en-US" sz="1800">
+              <a:rPr>
                 <a:latin typeface="Courier"/>
               </a:rPr>
               <a:t>  </a:t>
             </a:r>
             <a:r>
-              <a:rPr lang="en-US" sz="1800">
+              <a:rPr lang="en-US" sz="1100">
                 <a:solidFill>
                   <a:srgbClr val="7D9029"/>
                 </a:solidFill>
@@ -7503,7 +7503,7 @@
               <a:t>#[</a:t>
             </a:r>
             <a:r>
-              <a:rPr lang="en-US" sz="1800">
+              <a:rPr lang="en-US" sz="1100">
                 <a:solidFill>
                   <a:srgbClr val="BC7A00"/>
                 </a:solidFill>
@@ -7512,13 +7512,13 @@
               <a:t>verifier::</a:t>
             </a:r>
             <a:r>
-              <a:rPr lang="en-US" sz="1800">
+              <a:rPr lang="en-US" sz="1100">
                 <a:latin typeface="Courier"/>
               </a:rPr>
               <a:t>external_type_specification</a:t>
             </a:r>
             <a:r>
-              <a:rPr lang="en-US" sz="1800">
+              <a:rPr lang="en-US" sz="1100">
                 <a:solidFill>
                   <a:srgbClr val="7D9029"/>
                 </a:solidFill>
@@ -7528,13 +7528,13 @@
             </a:r>
             <a:br/>
             <a:r>
-              <a:rPr lang="en-US" sz="1800">
+              <a:rPr lang="en-US" sz="1100">
                 <a:latin typeface="Courier"/>
               </a:rPr>
               <a:t>  </a:t>
             </a:r>
             <a:r>
-              <a:rPr lang="en-US" sz="1800" b="1">
+              <a:rPr lang="en-US" sz="1100" b="1">
                 <a:solidFill>
                   <a:srgbClr val="007020"/>
                 </a:solidFill>
@@ -7543,13 +7543,13 @@
               <a:t>pub</a:t>
             </a:r>
             <a:r>
-              <a:rPr lang="en-US" sz="1800">
+              <a:rPr lang="en-US" sz="1100">
                 <a:latin typeface="Courier"/>
               </a:rPr>
               <a:t> </a:t>
             </a:r>
             <a:r>
-              <a:rPr lang="en-US" sz="1800" b="1">
+              <a:rPr lang="en-US" sz="1100" b="1">
                 <a:solidFill>
                   <a:srgbClr val="007020"/>
                 </a:solidFill>
@@ -7558,13 +7558,13 @@
               <a:t>struct</a:t>
             </a:r>
             <a:r>
-              <a:rPr lang="en-US" sz="1800">
+              <a:rPr lang="en-US" sz="1100">
                 <a:latin typeface="Courier"/>
               </a:rPr>
               <a:t> ExVec</a:t>
             </a:r>
             <a:r>
-              <a:rPr lang="en-US" sz="1800">
+              <a:rPr lang="en-US" sz="1100">
                 <a:solidFill>
                   <a:srgbClr val="666666"/>
                 </a:solidFill>
@@ -7573,13 +7573,13 @@
               <a:t>&lt;</a:t>
             </a:r>
             <a:r>
-              <a:rPr lang="en-US" sz="1800">
+              <a:rPr lang="en-US" sz="1100">
                 <a:latin typeface="Courier"/>
               </a:rPr>
               <a:t>T</a:t>
             </a:r>
             <a:r>
-              <a:rPr lang="en-US" sz="1800">
+              <a:rPr lang="en-US" sz="1100">
                 <a:solidFill>
                   <a:srgbClr val="666666"/>
                 </a:solidFill>
@@ -7588,13 +7588,13 @@
               <a:t>&gt;</a:t>
             </a:r>
             <a:r>
-              <a:rPr lang="en-US" sz="1800">
+              <a:rPr lang="en-US" sz="1100">
                 <a:latin typeface="Courier"/>
               </a:rPr>
               <a:t>(</a:t>
             </a:r>
             <a:r>
-              <a:rPr lang="en-US" sz="1800">
+              <a:rPr lang="en-US" sz="1100">
                 <a:solidFill>
                   <a:srgbClr val="902000"/>
                 </a:solidFill>
@@ -7603,7 +7603,7 @@
               <a:t>Vec</a:t>
             </a:r>
             <a:r>
-              <a:rPr lang="en-US" sz="1800">
+              <a:rPr lang="en-US" sz="1100">
                 <a:solidFill>
                   <a:srgbClr val="666666"/>
                 </a:solidFill>
@@ -7612,13 +7612,13 @@
               <a:t>&lt;</a:t>
             </a:r>
             <a:r>
-              <a:rPr lang="en-US" sz="1800">
+              <a:rPr lang="en-US" sz="1100">
                 <a:latin typeface="Courier"/>
               </a:rPr>
               <a:t>T</a:t>
             </a:r>
             <a:r>
-              <a:rPr lang="en-US" sz="1800">
+              <a:rPr lang="en-US" sz="1100">
                 <a:solidFill>
                   <a:srgbClr val="666666"/>
                 </a:solidFill>
@@ -7627,13 +7627,13 @@
               <a:t>&gt;</a:t>
             </a:r>
             <a:r>
-              <a:rPr lang="en-US" sz="1800">
+              <a:rPr lang="en-US" sz="1100">
                 <a:latin typeface="Courier"/>
               </a:rPr>
               <a:t>)</a:t>
             </a:r>
             <a:r>
-              <a:rPr lang="en-US" sz="1800">
+              <a:rPr lang="en-US" sz="1100">
                 <a:solidFill>
                   <a:srgbClr val="666666"/>
                 </a:solidFill>
@@ -7708,7 +7708,7 @@
           <a:p>
             <a:pPr lvl="0"/>
             <a:r>
-              <a:rPr lang="en-US" sz="1800"/>
+              <a:rPr lang="en-US" sz="1100"/>
               <a:t>A proxy function with the same signature as the foreign function, carrying the requires/ensures.</a:t>
             </a:r>
           </a:p>
@@ -7717,13 +7717,13 @@
               <a:buNone/>
             </a:pPr>
             <a:r>
-              <a:rPr lang="en-US" sz="1800">
+              <a:rPr>
                 <a:latin typeface="Courier"/>
               </a:rPr>
               <a:t>  </a:t>
             </a:r>
             <a:r>
-              <a:rPr lang="en-US" sz="1800">
+              <a:rPr lang="en-US" sz="1100">
                 <a:solidFill>
                   <a:srgbClr val="7D9029"/>
                 </a:solidFill>
@@ -7732,7 +7732,7 @@
               <a:t>#[</a:t>
             </a:r>
             <a:r>
-              <a:rPr lang="en-US" sz="1800">
+              <a:rPr lang="en-US" sz="1100">
                 <a:solidFill>
                   <a:srgbClr val="BC7A00"/>
                 </a:solidFill>
@@ -7741,13 +7741,13 @@
               <a:t>verifier::</a:t>
             </a:r>
             <a:r>
-              <a:rPr lang="en-US" sz="1800">
+              <a:rPr lang="en-US" sz="1100">
                 <a:latin typeface="Courier"/>
               </a:rPr>
               <a:t>external_fn_specification</a:t>
             </a:r>
             <a:r>
-              <a:rPr lang="en-US" sz="1800">
+              <a:rPr lang="en-US" sz="1100">
                 <a:solidFill>
                   <a:srgbClr val="7D9029"/>
                 </a:solidFill>
@@ -7757,13 +7757,13 @@
             </a:r>
             <a:br/>
             <a:r>
-              <a:rPr lang="en-US" sz="1800">
+              <a:rPr lang="en-US" sz="1100">
                 <a:latin typeface="Courier"/>
               </a:rPr>
               <a:t>  </a:t>
             </a:r>
             <a:r>
-              <a:rPr lang="en-US" sz="1800" b="1">
+              <a:rPr lang="en-US" sz="1100" b="1">
                 <a:solidFill>
                   <a:srgbClr val="007020"/>
                 </a:solidFill>
@@ -7772,13 +7772,13 @@
               <a:t>pub</a:t>
             </a:r>
             <a:r>
-              <a:rPr lang="en-US" sz="1800">
+              <a:rPr lang="en-US" sz="1100">
                 <a:latin typeface="Courier"/>
               </a:rPr>
               <a:t> </a:t>
             </a:r>
             <a:r>
-              <a:rPr lang="en-US" sz="1800" b="1">
+              <a:rPr lang="en-US" sz="1100" b="1">
                 <a:solidFill>
                   <a:srgbClr val="007020"/>
                 </a:solidFill>
@@ -7787,13 +7787,13 @@
               <a:t>fn</a:t>
             </a:r>
             <a:r>
-              <a:rPr lang="en-US" sz="1800">
+              <a:rPr lang="en-US" sz="1100">
                 <a:latin typeface="Courier"/>
               </a:rPr>
               <a:t> ex_vec_push</a:t>
             </a:r>
             <a:r>
-              <a:rPr lang="en-US" sz="1800">
+              <a:rPr lang="en-US" sz="1100">
                 <a:solidFill>
                   <a:srgbClr val="666666"/>
                 </a:solidFill>
@@ -7802,13 +7802,13 @@
               <a:t>&lt;</a:t>
             </a:r>
             <a:r>
-              <a:rPr lang="en-US" sz="1800">
+              <a:rPr lang="en-US" sz="1100">
                 <a:latin typeface="Courier"/>
               </a:rPr>
               <a:t>T</a:t>
             </a:r>
             <a:r>
-              <a:rPr lang="en-US" sz="1800">
+              <a:rPr lang="en-US" sz="1100">
                 <a:solidFill>
                   <a:srgbClr val="666666"/>
                 </a:solidFill>
@@ -7817,13 +7817,13 @@
               <a:t>&gt;</a:t>
             </a:r>
             <a:r>
-              <a:rPr lang="en-US" sz="1800">
+              <a:rPr lang="en-US" sz="1100">
                 <a:latin typeface="Courier"/>
               </a:rPr>
               <a:t>(v</a:t>
             </a:r>
             <a:r>
-              <a:rPr lang="en-US" sz="1800">
+              <a:rPr lang="en-US" sz="1100">
                 <a:solidFill>
                   <a:srgbClr val="666666"/>
                 </a:solidFill>
@@ -7832,13 +7832,13 @@
               <a:t>:</a:t>
             </a:r>
             <a:r>
-              <a:rPr lang="en-US" sz="1800">
+              <a:rPr lang="en-US" sz="1100">
                 <a:latin typeface="Courier"/>
               </a:rPr>
               <a:t> </a:t>
             </a:r>
             <a:r>
-              <a:rPr lang="en-US" sz="1800">
+              <a:rPr lang="en-US" sz="1100">
                 <a:solidFill>
                   <a:srgbClr val="666666"/>
                 </a:solidFill>
@@ -7847,7 +7847,7 @@
               <a:t>&amp;</a:t>
             </a:r>
             <a:r>
-              <a:rPr lang="en-US" sz="1800" b="1">
+              <a:rPr lang="en-US" sz="1100" b="1">
                 <a:solidFill>
                   <a:srgbClr val="007020"/>
                 </a:solidFill>
@@ -7856,13 +7856,13 @@
               <a:t>mut</a:t>
             </a:r>
             <a:r>
-              <a:rPr lang="en-US" sz="1800">
+              <a:rPr lang="en-US" sz="1100">
                 <a:latin typeface="Courier"/>
               </a:rPr>
               <a:t> </a:t>
             </a:r>
             <a:r>
-              <a:rPr lang="en-US" sz="1800">
+              <a:rPr lang="en-US" sz="1100">
                 <a:solidFill>
                   <a:srgbClr val="902000"/>
                 </a:solidFill>
@@ -7871,7 +7871,7 @@
               <a:t>Vec</a:t>
             </a:r>
             <a:r>
-              <a:rPr lang="en-US" sz="1800">
+              <a:rPr lang="en-US" sz="1100">
                 <a:solidFill>
                   <a:srgbClr val="666666"/>
                 </a:solidFill>
@@ -7880,13 +7880,13 @@
               <a:t>&lt;</a:t>
             </a:r>
             <a:r>
-              <a:rPr lang="en-US" sz="1800">
+              <a:rPr lang="en-US" sz="1100">
                 <a:latin typeface="Courier"/>
               </a:rPr>
               <a:t>T</a:t>
             </a:r>
             <a:r>
-              <a:rPr lang="en-US" sz="1800">
+              <a:rPr lang="en-US" sz="1100">
                 <a:solidFill>
                   <a:srgbClr val="666666"/>
                 </a:solidFill>
@@ -7895,13 +7895,13 @@
               <a:t>&gt;,</a:t>
             </a:r>
             <a:r>
-              <a:rPr lang="en-US" sz="1800">
+              <a:rPr lang="en-US" sz="1100">
                 <a:latin typeface="Courier"/>
               </a:rPr>
               <a:t> value</a:t>
             </a:r>
             <a:r>
-              <a:rPr lang="en-US" sz="1800">
+              <a:rPr lang="en-US" sz="1100">
                 <a:solidFill>
                   <a:srgbClr val="666666"/>
                 </a:solidFill>
@@ -7910,20 +7910,20 @@
               <a:t>:</a:t>
             </a:r>
             <a:r>
-              <a:rPr lang="en-US" sz="1800">
+              <a:rPr lang="en-US" sz="1100">
                 <a:latin typeface="Courier"/>
               </a:rPr>
               <a:t> T)</a:t>
             </a:r>
             <a:br/>
             <a:r>
-              <a:rPr lang="en-US" sz="1800">
+              <a:rPr lang="en-US" sz="1100">
                 <a:latin typeface="Courier"/>
               </a:rPr>
               <a:t>      requires v</a:t>
             </a:r>
             <a:r>
-              <a:rPr lang="en-US" sz="1800">
+              <a:rPr lang="en-US" sz="1100">
                 <a:solidFill>
                   <a:srgbClr val="666666"/>
                 </a:solidFill>
@@ -7932,13 +7932,13 @@
               <a:t>@.</a:t>
             </a:r>
             <a:r>
-              <a:rPr lang="en-US" sz="1800">
+              <a:rPr lang="en-US" sz="1100">
                 <a:latin typeface="Courier"/>
               </a:rPr>
               <a:t>len() </a:t>
             </a:r>
             <a:r>
-              <a:rPr lang="en-US" sz="1800">
+              <a:rPr lang="en-US" sz="1100">
                 <a:solidFill>
                   <a:srgbClr val="666666"/>
                 </a:solidFill>
@@ -7947,13 +7947,13 @@
               <a:t>&lt;</a:t>
             </a:r>
             <a:r>
-              <a:rPr lang="en-US" sz="1800">
+              <a:rPr lang="en-US" sz="1100">
                 <a:latin typeface="Courier"/>
               </a:rPr>
               <a:t> </a:t>
             </a:r>
             <a:r>
-              <a:rPr lang="en-US" sz="1800">
+              <a:rPr lang="en-US" sz="1100">
                 <a:solidFill>
                   <a:srgbClr val="902000"/>
                 </a:solidFill>
@@ -7962,7 +7962,7 @@
               <a:t>usize</a:t>
             </a:r>
             <a:r>
-              <a:rPr lang="en-US" sz="1800">
+              <a:rPr lang="en-US" sz="1100">
                 <a:solidFill>
                   <a:srgbClr val="BC7A00"/>
                 </a:solidFill>
@@ -7971,7 +7971,7 @@
               <a:t>::</a:t>
             </a:r>
             <a:r>
-              <a:rPr lang="en-US" sz="1800">
+              <a:rPr lang="en-US" sz="1100">
                 <a:solidFill>
                   <a:srgbClr val="880000"/>
                 </a:solidFill>
@@ -7980,7 +7980,7 @@
               <a:t>MAX</a:t>
             </a:r>
             <a:r>
-              <a:rPr lang="en-US" sz="1800">
+              <a:rPr lang="en-US" sz="1100">
                 <a:solidFill>
                   <a:srgbClr val="666666"/>
                 </a:solidFill>
@@ -7990,13 +7990,13 @@
             </a:r>
             <a:br/>
             <a:r>
-              <a:rPr lang="en-US" sz="1800">
+              <a:rPr lang="en-US" sz="1100">
                 <a:latin typeface="Courier"/>
               </a:rPr>
               <a:t>      ensures  v</a:t>
             </a:r>
             <a:r>
-              <a:rPr lang="en-US" sz="1800">
+              <a:rPr lang="en-US" sz="1100">
                 <a:solidFill>
                   <a:srgbClr val="666666"/>
                 </a:solidFill>
@@ -8005,13 +8005,13 @@
               <a:t>@</a:t>
             </a:r>
             <a:r>
-              <a:rPr lang="en-US" sz="1800">
+              <a:rPr lang="en-US" sz="1100">
                 <a:latin typeface="Courier"/>
               </a:rPr>
               <a:t> </a:t>
             </a:r>
             <a:r>
-              <a:rPr lang="en-US" sz="1800">
+              <a:rPr lang="en-US" sz="1100">
                 <a:solidFill>
                   <a:srgbClr val="666666"/>
                 </a:solidFill>
@@ -8020,13 +8020,13 @@
               <a:t>==</a:t>
             </a:r>
             <a:r>
-              <a:rPr lang="en-US" sz="1800">
+              <a:rPr lang="en-US" sz="1100">
                 <a:latin typeface="Courier"/>
               </a:rPr>
               <a:t> old(v)</a:t>
             </a:r>
             <a:r>
-              <a:rPr lang="en-US" sz="1800">
+              <a:rPr lang="en-US" sz="1100">
                 <a:solidFill>
                   <a:srgbClr val="666666"/>
                 </a:solidFill>
@@ -8035,13 +8035,13 @@
               <a:t>@.</a:t>
             </a:r>
             <a:r>
-              <a:rPr lang="en-US" sz="1800">
+              <a:rPr lang="en-US" sz="1100">
                 <a:latin typeface="Courier"/>
               </a:rPr>
               <a:t>push(value)</a:t>
             </a:r>
             <a:r>
-              <a:rPr lang="en-US" sz="1800">
+              <a:rPr lang="en-US" sz="1100">
                 <a:solidFill>
                   <a:srgbClr val="666666"/>
                 </a:solidFill>
@@ -8051,13 +8051,13 @@
             </a:r>
             <a:br/>
             <a:r>
-              <a:rPr lang="en-US" sz="1800">
+              <a:rPr lang="en-US" sz="1100">
                 <a:latin typeface="Courier"/>
               </a:rPr>
               <a:t>  </a:t>
             </a:r>
             <a:r>
-              <a:rPr lang="en-US" sz="1800">
+              <a:rPr lang="en-US" sz="1100">
                 <a:solidFill>
                   <a:srgbClr val="666666"/>
                 </a:solidFill>
@@ -8066,13 +8066,13 @@
               <a:t>{</a:t>
             </a:r>
             <a:r>
-              <a:rPr lang="en-US" sz="1800">
+              <a:rPr lang="en-US" sz="1100">
                 <a:latin typeface="Courier"/>
               </a:rPr>
               <a:t> v</a:t>
             </a:r>
             <a:r>
-              <a:rPr lang="en-US" sz="1800">
+              <a:rPr lang="en-US" sz="1100">
                 <a:solidFill>
                   <a:srgbClr val="666666"/>
                 </a:solidFill>
@@ -8081,13 +8081,13 @@
               <a:t>.</a:t>
             </a:r>
             <a:r>
-              <a:rPr lang="en-US" sz="1800">
+              <a:rPr lang="en-US" sz="1100">
                 <a:latin typeface="Courier"/>
               </a:rPr>
               <a:t>push(value) </a:t>
             </a:r>
             <a:r>
-              <a:rPr lang="en-US" sz="1800">
+              <a:rPr lang="en-US" sz="1100">
                 <a:solidFill>
                   <a:srgbClr val="666666"/>
                 </a:solidFill>
@@ -8162,7 +8162,7 @@
           <a:p>
             <a:pPr lvl="0"/>
             <a:r>
-              <a:rPr lang="en-US" sz="1800"/>
+              <a:rPr lang="en-US" sz="1100"/>
               <a:t>Add a View and specs to a foreign type.</a:t>
             </a:r>
           </a:p>
@@ -8171,13 +8171,13 @@
               <a:buNone/>
             </a:pPr>
             <a:r>
-              <a:rPr lang="en-US" sz="1800">
+              <a:rPr>
                 <a:latin typeface="Courier"/>
               </a:rPr>
               <a:t>  </a:t>
             </a:r>
             <a:r>
-              <a:rPr lang="en-US" sz="1800">
+              <a:rPr lang="en-US" sz="1100">
                 <a:solidFill>
                   <a:srgbClr val="7D9029"/>
                 </a:solidFill>
@@ -8186,7 +8186,7 @@
               <a:t>#[</a:t>
             </a:r>
             <a:r>
-              <a:rPr lang="en-US" sz="1800">
+              <a:rPr lang="en-US" sz="1100">
                 <a:solidFill>
                   <a:srgbClr val="BC7A00"/>
                 </a:solidFill>
@@ -8195,13 +8195,13 @@
               <a:t>verifier::</a:t>
             </a:r>
             <a:r>
-              <a:rPr lang="en-US" sz="1800">
+              <a:rPr lang="en-US" sz="1100">
                 <a:latin typeface="Courier"/>
               </a:rPr>
               <a:t>external_type_specification</a:t>
             </a:r>
             <a:r>
-              <a:rPr lang="en-US" sz="1800">
+              <a:rPr lang="en-US" sz="1100">
                 <a:solidFill>
                   <a:srgbClr val="7D9029"/>
                 </a:solidFill>
@@ -8211,13 +8211,13 @@
             </a:r>
             <a:br/>
             <a:r>
-              <a:rPr lang="en-US" sz="1800">
+              <a:rPr lang="en-US" sz="1100">
                 <a:latin typeface="Courier"/>
               </a:rPr>
               <a:t>  </a:t>
             </a:r>
             <a:r>
-              <a:rPr lang="en-US" sz="1800" b="1">
+              <a:rPr lang="en-US" sz="1100" b="1">
                 <a:solidFill>
                   <a:srgbClr val="007020"/>
                 </a:solidFill>
@@ -8226,13 +8226,13 @@
               <a:t>pub</a:t>
             </a:r>
             <a:r>
-              <a:rPr lang="en-US" sz="1800">
+              <a:rPr lang="en-US" sz="1100">
                 <a:latin typeface="Courier"/>
               </a:rPr>
               <a:t> </a:t>
             </a:r>
             <a:r>
-              <a:rPr lang="en-US" sz="1800" b="1">
+              <a:rPr lang="en-US" sz="1100" b="1">
                 <a:solidFill>
                   <a:srgbClr val="007020"/>
                 </a:solidFill>
@@ -8241,13 +8241,13 @@
               <a:t>struct</a:t>
             </a:r>
             <a:r>
-              <a:rPr lang="en-US" sz="1800">
+              <a:rPr lang="en-US" sz="1100">
                 <a:latin typeface="Courier"/>
               </a:rPr>
               <a:t> ExHashMap</a:t>
             </a:r>
             <a:r>
-              <a:rPr lang="en-US" sz="1800">
+              <a:rPr lang="en-US" sz="1100">
                 <a:solidFill>
                   <a:srgbClr val="666666"/>
                 </a:solidFill>
@@ -8256,13 +8256,13 @@
               <a:t>&lt;</a:t>
             </a:r>
             <a:r>
-              <a:rPr lang="en-US" sz="1800">
+              <a:rPr lang="en-US" sz="1100">
                 <a:latin typeface="Courier"/>
               </a:rPr>
               <a:t>K</a:t>
             </a:r>
             <a:r>
-              <a:rPr lang="en-US" sz="1800">
+              <a:rPr lang="en-US" sz="1100">
                 <a:solidFill>
                   <a:srgbClr val="666666"/>
                 </a:solidFill>
@@ -8271,13 +8271,13 @@
               <a:t>,</a:t>
             </a:r>
             <a:r>
-              <a:rPr lang="en-US" sz="1800">
+              <a:rPr lang="en-US" sz="1100">
                 <a:latin typeface="Courier"/>
               </a:rPr>
               <a:t> V</a:t>
             </a:r>
             <a:r>
-              <a:rPr lang="en-US" sz="1800">
+              <a:rPr lang="en-US" sz="1100">
                 <a:solidFill>
                   <a:srgbClr val="666666"/>
                 </a:solidFill>
@@ -8286,13 +8286,13 @@
               <a:t>&gt;</a:t>
             </a:r>
             <a:r>
-              <a:rPr lang="en-US" sz="1800">
+              <a:rPr lang="en-US" sz="1100">
                 <a:latin typeface="Courier"/>
               </a:rPr>
               <a:t>(HashMap</a:t>
             </a:r>
             <a:r>
-              <a:rPr lang="en-US" sz="1800">
+              <a:rPr lang="en-US" sz="1100">
                 <a:solidFill>
                   <a:srgbClr val="666666"/>
                 </a:solidFill>
@@ -8301,13 +8301,13 @@
               <a:t>&lt;</a:t>
             </a:r>
             <a:r>
-              <a:rPr lang="en-US" sz="1800">
+              <a:rPr lang="en-US" sz="1100">
                 <a:latin typeface="Courier"/>
               </a:rPr>
               <a:t>K</a:t>
             </a:r>
             <a:r>
-              <a:rPr lang="en-US" sz="1800">
+              <a:rPr lang="en-US" sz="1100">
                 <a:solidFill>
                   <a:srgbClr val="666666"/>
                 </a:solidFill>
@@ -8316,13 +8316,13 @@
               <a:t>,</a:t>
             </a:r>
             <a:r>
-              <a:rPr lang="en-US" sz="1800">
+              <a:rPr lang="en-US" sz="1100">
                 <a:latin typeface="Courier"/>
               </a:rPr>
               <a:t> V</a:t>
             </a:r>
             <a:r>
-              <a:rPr lang="en-US" sz="1800">
+              <a:rPr lang="en-US" sz="1100">
                 <a:solidFill>
                   <a:srgbClr val="666666"/>
                 </a:solidFill>
@@ -8331,13 +8331,13 @@
               <a:t>&gt;</a:t>
             </a:r>
             <a:r>
-              <a:rPr lang="en-US" sz="1800">
+              <a:rPr lang="en-US" sz="1100">
                 <a:latin typeface="Courier"/>
               </a:rPr>
               <a:t>)</a:t>
             </a:r>
             <a:r>
-              <a:rPr lang="en-US" sz="1800">
+              <a:rPr lang="en-US" sz="1100">
                 <a:solidFill>
                   <a:srgbClr val="666666"/>
                 </a:solidFill>
@@ -8347,13 +8347,13 @@
             </a:r>
             <a:br/>
             <a:r>
-              <a:rPr lang="en-US" sz="1800">
+              <a:rPr lang="en-US" sz="1100">
                 <a:latin typeface="Courier"/>
               </a:rPr>
               <a:t>  </a:t>
             </a:r>
             <a:r>
-              <a:rPr lang="en-US" sz="1800" b="1">
+              <a:rPr lang="en-US" sz="1100" b="1">
                 <a:solidFill>
                   <a:srgbClr val="007020"/>
                 </a:solidFill>
@@ -8362,7 +8362,7 @@
               <a:t>impl</a:t>
             </a:r>
             <a:r>
-              <a:rPr lang="en-US" sz="1800">
+              <a:rPr lang="en-US" sz="1100">
                 <a:solidFill>
                   <a:srgbClr val="666666"/>
                 </a:solidFill>
@@ -8371,13 +8371,13 @@
               <a:t>&lt;</a:t>
             </a:r>
             <a:r>
-              <a:rPr lang="en-US" sz="1800">
+              <a:rPr lang="en-US" sz="1100">
                 <a:latin typeface="Courier"/>
               </a:rPr>
               <a:t>K</a:t>
             </a:r>
             <a:r>
-              <a:rPr lang="en-US" sz="1800">
+              <a:rPr lang="en-US" sz="1100">
                 <a:solidFill>
                   <a:srgbClr val="666666"/>
                 </a:solidFill>
@@ -8386,13 +8386,13 @@
               <a:t>,</a:t>
             </a:r>
             <a:r>
-              <a:rPr lang="en-US" sz="1800">
+              <a:rPr lang="en-US" sz="1100">
                 <a:latin typeface="Courier"/>
               </a:rPr>
               <a:t>V</a:t>
             </a:r>
             <a:r>
-              <a:rPr lang="en-US" sz="1800">
+              <a:rPr lang="en-US" sz="1100">
                 <a:solidFill>
                   <a:srgbClr val="666666"/>
                 </a:solidFill>
@@ -8401,13 +8401,13 @@
               <a:t>&gt;</a:t>
             </a:r>
             <a:r>
-              <a:rPr lang="en-US" sz="1800">
+              <a:rPr lang="en-US" sz="1100">
                 <a:latin typeface="Courier"/>
               </a:rPr>
               <a:t> View </a:t>
             </a:r>
             <a:r>
-              <a:rPr lang="en-US" sz="1800" b="1">
+              <a:rPr lang="en-US" sz="1100" b="1">
                 <a:solidFill>
                   <a:srgbClr val="007020"/>
                 </a:solidFill>
@@ -8416,13 +8416,13 @@
               <a:t>for</a:t>
             </a:r>
             <a:r>
-              <a:rPr lang="en-US" sz="1800">
+              <a:rPr lang="en-US" sz="1100">
                 <a:latin typeface="Courier"/>
               </a:rPr>
               <a:t> ExHashMap</a:t>
             </a:r>
             <a:r>
-              <a:rPr lang="en-US" sz="1800">
+              <a:rPr lang="en-US" sz="1100">
                 <a:solidFill>
                   <a:srgbClr val="666666"/>
                 </a:solidFill>
@@ -8431,13 +8431,13 @@
               <a:t>&lt;</a:t>
             </a:r>
             <a:r>
-              <a:rPr lang="en-US" sz="1800">
+              <a:rPr lang="en-US" sz="1100">
                 <a:latin typeface="Courier"/>
               </a:rPr>
               <a:t>K</a:t>
             </a:r>
             <a:r>
-              <a:rPr lang="en-US" sz="1800">
+              <a:rPr lang="en-US" sz="1100">
                 <a:solidFill>
                   <a:srgbClr val="666666"/>
                 </a:solidFill>
@@ -8446,13 +8446,13 @@
               <a:t>,</a:t>
             </a:r>
             <a:r>
-              <a:rPr lang="en-US" sz="1800">
+              <a:rPr lang="en-US" sz="1100">
                 <a:latin typeface="Courier"/>
               </a:rPr>
               <a:t>V</a:t>
             </a:r>
             <a:r>
-              <a:rPr lang="en-US" sz="1800">
+              <a:rPr lang="en-US" sz="1100">
                 <a:solidFill>
                   <a:srgbClr val="666666"/>
                 </a:solidFill>
@@ -8461,13 +8461,13 @@
               <a:t>&gt;</a:t>
             </a:r>
             <a:r>
-              <a:rPr lang="en-US" sz="1800">
+              <a:rPr lang="en-US" sz="1100">
                 <a:latin typeface="Courier"/>
               </a:rPr>
               <a:t> </a:t>
             </a:r>
             <a:r>
-              <a:rPr lang="en-US" sz="1800">
+              <a:rPr lang="en-US" sz="1100">
                 <a:solidFill>
                   <a:srgbClr val="666666"/>
                 </a:solidFill>
@@ -8477,13 +8477,13 @@
             </a:r>
             <a:br/>
             <a:r>
-              <a:rPr lang="en-US" sz="1800">
+              <a:rPr lang="en-US" sz="1100">
                 <a:latin typeface="Courier"/>
               </a:rPr>
               <a:t>       </a:t>
             </a:r>
             <a:r>
-              <a:rPr lang="en-US" sz="1800" b="1">
+              <a:rPr lang="en-US" sz="1100" b="1">
                 <a:solidFill>
                   <a:srgbClr val="007020"/>
                 </a:solidFill>
@@ -8492,13 +8492,13 @@
               <a:t>type</a:t>
             </a:r>
             <a:r>
-              <a:rPr lang="en-US" sz="1800">
+              <a:rPr lang="en-US" sz="1100">
                 <a:latin typeface="Courier"/>
               </a:rPr>
               <a:t> V </a:t>
             </a:r>
             <a:r>
-              <a:rPr lang="en-US" sz="1800">
+              <a:rPr lang="en-US" sz="1100">
                 <a:solidFill>
                   <a:srgbClr val="666666"/>
                 </a:solidFill>
@@ -8507,13 +8507,13 @@
               <a:t>=</a:t>
             </a:r>
             <a:r>
-              <a:rPr lang="en-US" sz="1800">
+              <a:rPr lang="en-US" sz="1100">
                 <a:latin typeface="Courier"/>
               </a:rPr>
               <a:t> Map</a:t>
             </a:r>
             <a:r>
-              <a:rPr lang="en-US" sz="1800">
+              <a:rPr lang="en-US" sz="1100">
                 <a:solidFill>
                   <a:srgbClr val="666666"/>
                 </a:solidFill>
@@ -8522,7 +8522,7 @@
               <a:t>&lt;</a:t>
             </a:r>
             <a:r>
-              <a:rPr lang="en-US" sz="1800">
+              <a:rPr lang="en-US" sz="1100">
                 <a:solidFill>
                   <a:srgbClr val="BC7A00"/>
                 </a:solidFill>
@@ -8531,13 +8531,13 @@
               <a:t>K::</a:t>
             </a:r>
             <a:r>
-              <a:rPr lang="en-US" sz="1800">
+              <a:rPr lang="en-US" sz="1100">
                 <a:latin typeface="Courier"/>
               </a:rPr>
               <a:t>V</a:t>
             </a:r>
             <a:r>
-              <a:rPr lang="en-US" sz="1800">
+              <a:rPr lang="en-US" sz="1100">
                 <a:solidFill>
                   <a:srgbClr val="666666"/>
                 </a:solidFill>
@@ -8546,13 +8546,13 @@
               <a:t>,</a:t>
             </a:r>
             <a:r>
-              <a:rPr lang="en-US" sz="1800">
+              <a:rPr lang="en-US" sz="1100">
                 <a:latin typeface="Courier"/>
               </a:rPr>
               <a:t> </a:t>
             </a:r>
             <a:r>
-              <a:rPr lang="en-US" sz="1800">
+              <a:rPr lang="en-US" sz="1100">
                 <a:solidFill>
                   <a:srgbClr val="BC7A00"/>
                 </a:solidFill>
@@ -8561,13 +8561,13 @@
               <a:t>V::</a:t>
             </a:r>
             <a:r>
-              <a:rPr lang="en-US" sz="1800">
+              <a:rPr lang="en-US" sz="1100">
                 <a:latin typeface="Courier"/>
               </a:rPr>
               <a:t>V</a:t>
             </a:r>
             <a:r>
-              <a:rPr lang="en-US" sz="1800">
+              <a:rPr lang="en-US" sz="1100">
                 <a:solidFill>
                   <a:srgbClr val="666666"/>
                 </a:solidFill>
@@ -8577,13 +8577,13 @@
             </a:r>
             <a:br/>
             <a:r>
-              <a:rPr lang="en-US" sz="1800">
+              <a:rPr lang="en-US" sz="1100">
                 <a:latin typeface="Courier"/>
               </a:rPr>
               <a:t>       spec </a:t>
             </a:r>
             <a:r>
-              <a:rPr lang="en-US" sz="1800" b="1">
+              <a:rPr lang="en-US" sz="1100" b="1">
                 <a:solidFill>
                   <a:srgbClr val="007020"/>
                 </a:solidFill>
@@ -8592,13 +8592,13 @@
               <a:t>fn</a:t>
             </a:r>
             <a:r>
-              <a:rPr lang="en-US" sz="1800">
+              <a:rPr lang="en-US" sz="1100">
                 <a:latin typeface="Courier"/>
               </a:rPr>
               <a:t> view(</a:t>
             </a:r>
             <a:r>
-              <a:rPr lang="en-US" sz="1800">
+              <a:rPr lang="en-US" sz="1100">
                 <a:solidFill>
                   <a:srgbClr val="666666"/>
                 </a:solidFill>
@@ -8607,7 +8607,7 @@
               <a:t>&amp;</a:t>
             </a:r>
             <a:r>
-              <a:rPr lang="en-US" sz="1800" b="1">
+              <a:rPr lang="en-US" sz="1100" b="1">
                 <a:solidFill>
                   <a:srgbClr val="007020"/>
                 </a:solidFill>
@@ -8616,13 +8616,13 @@
               <a:t>self</a:t>
             </a:r>
             <a:r>
-              <a:rPr lang="en-US" sz="1800">
+              <a:rPr lang="en-US" sz="1100">
                 <a:latin typeface="Courier"/>
               </a:rPr>
               <a:t>) </a:t>
             </a:r>
             <a:r>
-              <a:rPr lang="en-US" sz="1800">
+              <a:rPr lang="en-US" sz="1100">
                 <a:solidFill>
                   <a:srgbClr val="666666"/>
                 </a:solidFill>
@@ -8631,13 +8631,13 @@
               <a:t>-&gt;</a:t>
             </a:r>
             <a:r>
-              <a:rPr lang="en-US" sz="1800">
+              <a:rPr lang="en-US" sz="1100">
                 <a:latin typeface="Courier"/>
               </a:rPr>
               <a:t> Map</a:t>
             </a:r>
             <a:r>
-              <a:rPr lang="en-US" sz="1800">
+              <a:rPr lang="en-US" sz="1100">
                 <a:solidFill>
                   <a:srgbClr val="666666"/>
                 </a:solidFill>
@@ -8646,7 +8646,7 @@
               <a:t>&lt;</a:t>
             </a:r>
             <a:r>
-              <a:rPr lang="en-US" sz="1800">
+              <a:rPr lang="en-US" sz="1100">
                 <a:solidFill>
                   <a:srgbClr val="BC7A00"/>
                 </a:solidFill>
@@ -8655,13 +8655,13 @@
               <a:t>K::</a:t>
             </a:r>
             <a:r>
-              <a:rPr lang="en-US" sz="1800">
+              <a:rPr lang="en-US" sz="1100">
                 <a:latin typeface="Courier"/>
               </a:rPr>
               <a:t>V</a:t>
             </a:r>
             <a:r>
-              <a:rPr lang="en-US" sz="1800">
+              <a:rPr lang="en-US" sz="1100">
                 <a:solidFill>
                   <a:srgbClr val="666666"/>
                 </a:solidFill>
@@ -8670,13 +8670,13 @@
               <a:t>,</a:t>
             </a:r>
             <a:r>
-              <a:rPr lang="en-US" sz="1800">
+              <a:rPr lang="en-US" sz="1100">
                 <a:latin typeface="Courier"/>
               </a:rPr>
               <a:t> </a:t>
             </a:r>
             <a:r>
-              <a:rPr lang="en-US" sz="1800">
+              <a:rPr lang="en-US" sz="1100">
                 <a:solidFill>
                   <a:srgbClr val="BC7A00"/>
                 </a:solidFill>
@@ -8685,13 +8685,13 @@
               <a:t>V::</a:t>
             </a:r>
             <a:r>
-              <a:rPr lang="en-US" sz="1800">
+              <a:rPr lang="en-US" sz="1100">
                 <a:latin typeface="Courier"/>
               </a:rPr>
               <a:t>V</a:t>
             </a:r>
             <a:r>
-              <a:rPr lang="en-US" sz="1800">
+              <a:rPr lang="en-US" sz="1100">
                 <a:solidFill>
                   <a:srgbClr val="666666"/>
                 </a:solidFill>
@@ -8766,7 +8766,7 @@
           <a:p>
             <a:pPr lvl="0"/>
             <a:r>
-              <a:rPr lang="en-US" sz="1800"/>
+              <a:rPr lang="en-US" sz="1100"/>
               <a:t>Adds a spec to a foreign trait without modifying it:</a:t>
             </a:r>
           </a:p>
@@ -8775,7 +8775,7 @@
               <a:buNone/>
             </a:pPr>
             <a:r>
-              <a:rPr lang="en-US" sz="1800">
+              <a:rPr>
                 <a:solidFill>
                   <a:srgbClr val="7D9029"/>
                 </a:solidFill>
@@ -8784,7 +8784,7 @@
               <a:t>#[</a:t>
             </a:r>
             <a:r>
-              <a:rPr lang="en-US" sz="1800">
+              <a:rPr lang="en-US" sz="1100">
                 <a:solidFill>
                   <a:srgbClr val="BC7A00"/>
                 </a:solidFill>
@@ -8793,13 +8793,13 @@
               <a:t>verifier::</a:t>
             </a:r>
             <a:r>
-              <a:rPr lang="en-US" sz="1800">
+              <a:rPr lang="en-US" sz="1100">
                 <a:latin typeface="Courier"/>
               </a:rPr>
               <a:t>external_trait_specification</a:t>
             </a:r>
             <a:r>
-              <a:rPr lang="en-US" sz="1800">
+              <a:rPr lang="en-US" sz="1100">
                 <a:solidFill>
                   <a:srgbClr val="7D9029"/>
                 </a:solidFill>
@@ -8809,7 +8809,7 @@
             </a:r>
             <a:br/>
             <a:r>
-              <a:rPr lang="en-US" sz="1800" b="1">
+              <a:rPr lang="en-US" sz="1100" b="1">
                 <a:solidFill>
                   <a:srgbClr val="007020"/>
                 </a:solidFill>
@@ -8818,13 +8818,13 @@
               <a:t>pub</a:t>
             </a:r>
             <a:r>
-              <a:rPr lang="en-US" sz="1800">
+              <a:rPr lang="en-US" sz="1100">
                 <a:latin typeface="Courier"/>
               </a:rPr>
               <a:t> </a:t>
             </a:r>
             <a:r>
-              <a:rPr lang="en-US" sz="1800" b="1">
+              <a:rPr lang="en-US" sz="1100" b="1">
                 <a:solidFill>
                   <a:srgbClr val="007020"/>
                 </a:solidFill>
@@ -8833,13 +8833,13 @@
               <a:t>trait</a:t>
             </a:r>
             <a:r>
-              <a:rPr lang="en-US" sz="1800">
+              <a:rPr lang="en-US" sz="1100">
                 <a:latin typeface="Courier"/>
               </a:rPr>
               <a:t> ExClone</a:t>
             </a:r>
             <a:r>
-              <a:rPr lang="en-US" sz="1800">
+              <a:rPr lang="en-US" sz="1100">
                 <a:solidFill>
                   <a:srgbClr val="666666"/>
                 </a:solidFill>
@@ -8848,13 +8848,13 @@
               <a:t>:</a:t>
             </a:r>
             <a:r>
-              <a:rPr lang="en-US" sz="1800">
+              <a:rPr lang="en-US" sz="1100">
                 <a:latin typeface="Courier"/>
               </a:rPr>
               <a:t> </a:t>
             </a:r>
             <a:r>
-              <a:rPr lang="en-US" sz="1800">
+              <a:rPr lang="en-US" sz="1100">
                 <a:solidFill>
                   <a:srgbClr val="008000"/>
                 </a:solidFill>
@@ -8863,13 +8863,13 @@
               <a:t>Sized</a:t>
             </a:r>
             <a:r>
-              <a:rPr lang="en-US" sz="1800">
+              <a:rPr lang="en-US" sz="1100">
                 <a:latin typeface="Courier"/>
               </a:rPr>
               <a:t> </a:t>
             </a:r>
             <a:r>
-              <a:rPr lang="en-US" sz="1800">
+              <a:rPr lang="en-US" sz="1100">
                 <a:solidFill>
                   <a:srgbClr val="666666"/>
                 </a:solidFill>
@@ -8879,13 +8879,13 @@
             </a:r>
             <a:br/>
             <a:r>
-              <a:rPr lang="en-US" sz="1800">
+              <a:rPr lang="en-US" sz="1100">
                 <a:latin typeface="Courier"/>
               </a:rPr>
               <a:t>    </a:t>
             </a:r>
             <a:r>
-              <a:rPr lang="en-US" sz="1800" b="1">
+              <a:rPr lang="en-US" sz="1100" b="1">
                 <a:solidFill>
                   <a:srgbClr val="007020"/>
                 </a:solidFill>
@@ -8894,13 +8894,13 @@
               <a:t>type</a:t>
             </a:r>
             <a:r>
-              <a:rPr lang="en-US" sz="1800">
+              <a:rPr lang="en-US" sz="1100">
                 <a:latin typeface="Courier"/>
               </a:rPr>
               <a:t> ExternalTraitSpecificationFor: core::clone::Clone</a:t>
             </a:r>
             <a:r>
-              <a:rPr lang="en-US" sz="1800">
+              <a:rPr lang="en-US" sz="1100">
                 <a:solidFill>
                   <a:srgbClr val="666666"/>
                 </a:solidFill>
@@ -8910,13 +8910,13 @@
             </a:r>
             <a:br/>
             <a:r>
-              <a:rPr lang="en-US" sz="1800">
+              <a:rPr lang="en-US" sz="1100">
                 <a:latin typeface="Courier"/>
               </a:rPr>
               <a:t>    </a:t>
             </a:r>
             <a:r>
-              <a:rPr lang="en-US" sz="1800" b="1">
+              <a:rPr lang="en-US" sz="1100" b="1">
                 <a:solidFill>
                   <a:srgbClr val="007020"/>
                 </a:solidFill>
@@ -8925,13 +8925,13 @@
               <a:t>fn</a:t>
             </a:r>
             <a:r>
-              <a:rPr lang="en-US" sz="1800">
+              <a:rPr lang="en-US" sz="1100">
                 <a:latin typeface="Courier"/>
               </a:rPr>
               <a:t> clone(</a:t>
             </a:r>
             <a:r>
-              <a:rPr lang="en-US" sz="1800">
+              <a:rPr lang="en-US" sz="1100">
                 <a:solidFill>
                   <a:srgbClr val="666666"/>
                 </a:solidFill>
@@ -8940,7 +8940,7 @@
               <a:t>&amp;</a:t>
             </a:r>
             <a:r>
-              <a:rPr lang="en-US" sz="1800" b="1">
+              <a:rPr lang="en-US" sz="1100" b="1">
                 <a:solidFill>
                   <a:srgbClr val="007020"/>
                 </a:solidFill>
@@ -8949,13 +8949,13 @@
               <a:t>self</a:t>
             </a:r>
             <a:r>
-              <a:rPr lang="en-US" sz="1800">
+              <a:rPr lang="en-US" sz="1100">
                 <a:latin typeface="Courier"/>
               </a:rPr>
               <a:t>) </a:t>
             </a:r>
             <a:r>
-              <a:rPr lang="en-US" sz="1800">
+              <a:rPr lang="en-US" sz="1100">
                 <a:solidFill>
                   <a:srgbClr val="666666"/>
                 </a:solidFill>
@@ -8964,13 +8964,13 @@
               <a:t>-&gt;</a:t>
             </a:r>
             <a:r>
-              <a:rPr lang="en-US" sz="1800">
+              <a:rPr lang="en-US" sz="1100">
                 <a:latin typeface="Courier"/>
               </a:rPr>
               <a:t> </a:t>
             </a:r>
             <a:r>
-              <a:rPr lang="en-US" sz="1800">
+              <a:rPr lang="en-US" sz="1100">
                 <a:solidFill>
                   <a:srgbClr val="902000"/>
                 </a:solidFill>
@@ -8979,7 +8979,7 @@
               <a:t>Self</a:t>
             </a:r>
             <a:r>
-              <a:rPr lang="en-US" sz="1800">
+              <a:rPr lang="en-US" sz="1100">
                 <a:solidFill>
                   <a:srgbClr val="666666"/>
                 </a:solidFill>
@@ -8989,7 +8989,7 @@
             </a:r>
             <a:br/>
             <a:r>
-              <a:rPr lang="en-US" sz="1800">
+              <a:rPr lang="en-US" sz="1100">
                 <a:solidFill>
                   <a:srgbClr val="666666"/>
                 </a:solidFill>
@@ -9001,17 +9001,17 @@
           <a:p>
             <a:pPr lvl="0"/>
             <a:r>
-              <a:rPr lang="en-US" sz="1800"/>
+              <a:rPr lang="en-US" sz="1100"/>
               <a:t>The proxy trait name is </a:t>
             </a:r>
             <a:r>
-              <a:rPr lang="en-US" sz="1800">
+              <a:rPr>
                 <a:latin typeface="Courier"/>
               </a:rPr>
               <a:t>Ex&lt;TraitName&gt;</a:t>
             </a:r>
             <a:r>
-              <a:rPr lang="en-US" sz="1800"/>
+              <a:rPr lang="en-US" sz="1100"/>
               <a:t> by convention.</a:t>
             </a:r>
           </a:p>
@@ -9022,17 +9022,17 @@
               <a:t>Add </a:t>
             </a:r>
             <a:r>
-              <a:rPr lang="en-US" sz="1800">
+              <a:rPr>
                 <a:latin typeface="Courier"/>
               </a:rPr>
               <a:t>requires</a:t>
             </a:r>
             <a:r>
-              <a:rPr lang="en-US" sz="1800"/>
+              <a:rPr lang="en-US" sz="1100"/>
               <a:t>/</a:t>
             </a:r>
             <a:r>
-              <a:rPr lang="en-US" sz="1800">
+              <a:rPr>
                 <a:latin typeface="Courier"/>
               </a:rPr>
               <a:t>ensures</a:t>
@@ -10445,7 +10445,7 @@
           <a:p>
             <a:pPr lvl="0"/>
             <a:r>
-              <a:rPr lang="en-US" sz="1800"/>
+              <a:rPr lang="en-US" sz="1100"/>
               <a:t>Closures took a good bit of work.</a:t>
             </a:r>
           </a:p>
@@ -10470,7 +10470,7 @@
               <a:t>You can const fn and the compiler will check it but then you can’t say: </a:t>
             </a:r>
             <a:r>
-              <a:rPr lang="en-US" sz="1800">
+              <a:rPr>
                 <a:latin typeface="Courier"/>
               </a:rPr>
               <a:t>fn map(const fn F)</a:t>
@@ -13243,7 +13243,7 @@
           <a:p>
             <a:pPr lvl="0"/>
             <a:r>
-              <a:rPr lang="en-US" sz="1800" b="1"/>
+              <a:rPr lang="en-US" sz="1100" b="1"/>
               <a:t>Programmer rate</a:t>
             </a:r>
             <a:r>
@@ -13269,7 +13269,7 @@
               <a:t>Derived </a:t>
             </a:r>
             <a:r>
-              <a:rPr lang="en-US" sz="1800" b="1">
+              <a:rPr b="1">
                 <a:latin typeface="Courier"/>
               </a:rPr>
               <a:t>--ai-costs</a:t>

--- a/lectures/slidesCMUCS.pptx
+++ b/lectures/slidesCMUCS.pptx
@@ -94,6 +94,7 @@
     <p:sldId id="342" r:id="rId88"/>
     <p:sldId id="343" r:id="rId89"/>
     <p:sldId id="344" r:id="rId90"/>
+    <p:sldId id="345" r:id="rId91"/>
   </p:sldIdLst>
   <p:sldSz cx="9144000" cy="5143500" type="screen16x9"/>
   <p:notesSz cx="6858000" cy="9144000"/>
@@ -11365,6 +11366,13 @@
               <a:t>Iterators requires one assume!</a:t>
             </a:r>
           </a:p>
+          <a:p>
+            <a:pPr lvl="0"/>
+            <a:r>
+              <a:rPr lang="en-US" sz="1800"/>
+              <a:t>And there is a new ‘prophetic’ iterator coming along!</a:t>
+            </a:r>
+          </a:p>
         </p:txBody>
       </p:sp>
     </p:spTree>
@@ -12063,6 +12071,27 @@
             <a:r>
               <a:rPr lang="en-US" sz="1800"/>
               <a:t>Thank you Umut and Guy!</a:t>
+            </a:r>
+          </a:p>
+          <a:p>
+            <a:pPr lvl="0"/>
+            <a:r>
+              <a:rPr lang="en-US" sz="1800"/>
+              <a:t>A few weeks ago Zach Tatlock was on a call with Sandia National labs.</a:t>
+            </a:r>
+          </a:p>
+          <a:p>
+            <a:pPr lvl="0"/>
+            <a:r>
+              <a:rPr lang="en-US" sz="1800"/>
+              <a:t>They said: “You can’t prove algorithms like that!”</a:t>
+            </a:r>
+          </a:p>
+          <a:p>
+            <a:pPr lvl="0"/>
+            <a:r>
+              <a:rPr lang="en-US" sz="1800"/>
+              <a:t>He pointed them to APAS-VERUS and my linkedin racked up 1200 views.</a:t>
             </a:r>
           </a:p>
         </p:txBody>
@@ -13221,7 +13250,7 @@
             </a:pPr>
             <a:r>
               <a:rPr lang="en-US" sz="3200"/>
-              <a:t>Worked Example — Inputs</a:t>
+              <a:t>Proofgrammer/AI Costs</a:t>
             </a:r>
           </a:p>
         </p:txBody>
@@ -13243,7 +13272,7 @@
           <a:p>
             <a:pPr lvl="0"/>
             <a:r>
-              <a:rPr lang="en-US" sz="1100" b="1"/>
+              <a:rPr lang="en-US" sz="1800" b="1"/>
               <a:t>Programmer rate</a:t>
             </a:r>
             <a:r>
@@ -13266,13 +13295,7 @@
             <a:pPr lvl="0"/>
             <a:r>
               <a:rPr lang="en-US" sz="1800" b="1"/>
-              <a:t>Derived </a:t>
-            </a:r>
-            <a:r>
-              <a:rPr b="1">
-                <a:latin typeface="Courier"/>
-              </a:rPr>
-              <a:t>--ai-costs</a:t>
+              <a:t>Derived –ai-costs</a:t>
             </a:r>
             <a:r>
               <a:rPr lang="en-US" sz="1800"/>
@@ -13291,7 +13314,21 @@
             </a:r>
             <a:r>
               <a:rPr lang="en-US" sz="1800"/>
-              <a:t>: 21.6% APAS-AI ($1,512) / 78.4% APAS-VERUS ($5,488) | # | Project | Hours | LOC | LoEC | LOPC2R | LOC0R | |:–|:———————-|———:|——–:|——-:|——-:|——-:| | 1 | APAS-AI + Rusticate | 309.6 | 31,751 | 31,751 | — | — | | 2 | APAS-VERUS + Veracity | 1,123.4 | 166,401 | 56,549 | 47,828 | 95,908 | | 3 | Combined | 1,432.96 | 198,152 | 88,300 | 47,828 | 95,908 |</a:t>
+              <a:t>:</a:t>
+            </a:r>
+          </a:p>
+          <a:p>
+            <a:pPr lvl="1"/>
+            <a:r>
+              <a:rPr lang="en-US" sz="1800"/>
+              <a:t>21.6% APAS-AI ($1,512)</a:t>
+            </a:r>
+          </a:p>
+          <a:p>
+            <a:pPr lvl="1"/>
+            <a:r>
+              <a:rPr lang="en-US" sz="1800"/>
+              <a:t>78.4% APAS-VERUS ($5,488)</a:t>
             </a:r>
           </a:p>
         </p:txBody>
@@ -13302,6 +13339,647 @@
 </file>
 
 <file path=ppt/slides/slide59.xml><?xml version="1.0" encoding="utf-8"?>
+<p:sld xmlns:a="http://schemas.openxmlformats.org/drawingml/2006/main" xmlns:r="http://schemas.openxmlformats.org/officeDocument/2006/relationships" xmlns:p="http://schemas.openxmlformats.org/presentationml/2006/main">
+  <p:cSld>
+    <p:spTree>
+      <p:nvGrpSpPr>
+        <p:cNvPr id="1" name=""/>
+        <p:cNvGrpSpPr/>
+        <p:nvPr/>
+      </p:nvGrpSpPr>
+      <p:grpSpPr>
+        <a:xfrm>
+          <a:off x="0" y="0"/>
+          <a:ext cx="0" cy="0"/>
+          <a:chOff x="0" y="0"/>
+          <a:chExt cx="0" cy="0"/>
+        </a:xfrm>
+      </p:grpSpPr>
+      <p:sp>
+        <p:nvSpPr>
+          <p:cNvPr id="2" name="Title 1"/>
+          <p:cNvSpPr>
+            <a:spLocks noGrp="1"/>
+          </p:cNvSpPr>
+          <p:nvPr>
+            <p:ph type="title"/>
+          </p:nvPr>
+        </p:nvSpPr>
+        <p:spPr/>
+        <p:txBody>
+          <a:bodyPr/>
+          <a:lstStyle/>
+          <a:p>
+            <a:pPr lvl="0" indent="0" marL="0">
+              <a:buNone/>
+            </a:pPr>
+            <a:r>
+              <a:rPr lang="en-US" sz="3200"/>
+              <a:t>Proofgrammer/AI Costs</a:t>
+            </a:r>
+          </a:p>
+        </p:txBody>
+      </p:sp>
+      <p:graphicFrame>
+        <p:nvGraphicFramePr>
+          <p:cNvPr id="6" name="Content Placeholder 5"/>
+          <p:cNvGraphicFramePr>
+            <a:graphicFrameLocks noGrp="1"/>
+          </p:cNvGraphicFramePr>
+          <p:nvPr>
+            <p:ph idx="1"/>
+          </p:nvPr>
+        </p:nvGraphicFramePr>
+        <p:xfrm>
+          <a:off x="457200" y="1193800"/>
+          <a:ext cx="8229600" cy="3390900"/>
+        </p:xfrm>
+        <a:graphic>
+          <a:graphicData uri="http://schemas.openxmlformats.org/drawingml/2006/table">
+            <a:tbl>
+              <a:tblPr firstRow="1" bandRow="1">
+                <a:tableStyleId>{5C22544A-7EE6-4342-B048-85BDC9FD1C3A}</a:tableStyleId>
+              </a:tblPr>
+              <a:tblGrid>
+                <a:gridCol w="469900"/>
+                <a:gridCol w="2781300"/>
+                <a:gridCol w="1155700"/>
+                <a:gridCol w="1041400"/>
+                <a:gridCol w="927100"/>
+                <a:gridCol w="927100"/>
+                <a:gridCol w="927100"/>
+              </a:tblGrid>
+              <a:tr h="0">
+                <a:tc>
+                  <a:txBody>
+                    <a:bodyPr/>
+                    <a:lstStyle/>
+                    <a:p>
+                      <a:pPr lvl="0" indent="0" marL="0" algn="l">
+                        <a:buNone/>
+                      </a:pPr>
+                      <a:r>
+                        <a:rPr/>
+                        <a:t>#</a:t>
+                      </a:r>
+                    </a:p>
+                  </a:txBody>
+                  <a:tcPr/>
+                </a:tc>
+                <a:tc>
+                  <a:txBody>
+                    <a:bodyPr/>
+                    <a:lstStyle/>
+                    <a:p>
+                      <a:pPr lvl="0" indent="0" marL="0" algn="l">
+                        <a:buNone/>
+                      </a:pPr>
+                      <a:r>
+                        <a:rPr/>
+                        <a:t>Project</a:t>
+                      </a:r>
+                    </a:p>
+                  </a:txBody>
+                  <a:tcPr/>
+                </a:tc>
+                <a:tc>
+                  <a:txBody>
+                    <a:bodyPr/>
+                    <a:lstStyle/>
+                    <a:p>
+                      <a:pPr lvl="0" indent="0" marL="0" algn="r">
+                        <a:buNone/>
+                      </a:pPr>
+                      <a:r>
+                        <a:rPr/>
+                        <a:t>Hours</a:t>
+                      </a:r>
+                    </a:p>
+                  </a:txBody>
+                  <a:tcPr/>
+                </a:tc>
+                <a:tc>
+                  <a:txBody>
+                    <a:bodyPr/>
+                    <a:lstStyle/>
+                    <a:p>
+                      <a:pPr lvl="0" indent="0" marL="0" algn="r">
+                        <a:buNone/>
+                      </a:pPr>
+                      <a:r>
+                        <a:rPr/>
+                        <a:t>LOC</a:t>
+                      </a:r>
+                    </a:p>
+                  </a:txBody>
+                  <a:tcPr/>
+                </a:tc>
+                <a:tc>
+                  <a:txBody>
+                    <a:bodyPr/>
+                    <a:lstStyle/>
+                    <a:p>
+                      <a:pPr lvl="0" indent="0" marL="0" algn="r">
+                        <a:buNone/>
+                      </a:pPr>
+                      <a:r>
+                        <a:rPr/>
+                        <a:t>LoEC</a:t>
+                      </a:r>
+                    </a:p>
+                  </a:txBody>
+                  <a:tcPr/>
+                </a:tc>
+                <a:tc>
+                  <a:txBody>
+                    <a:bodyPr/>
+                    <a:lstStyle/>
+                    <a:p>
+                      <a:pPr lvl="0" indent="0" marL="0" algn="r">
+                        <a:buNone/>
+                      </a:pPr>
+                      <a:r>
+                        <a:rPr/>
+                        <a:t>LOPC2R</a:t>
+                      </a:r>
+                    </a:p>
+                  </a:txBody>
+                  <a:tcPr/>
+                </a:tc>
+                <a:tc>
+                  <a:txBody>
+                    <a:bodyPr/>
+                    <a:lstStyle/>
+                    <a:p>
+                      <a:pPr lvl="0" indent="0" marL="0" algn="r">
+                        <a:buNone/>
+                      </a:pPr>
+                      <a:r>
+                        <a:rPr/>
+                        <a:t>LOC0R</a:t>
+                      </a:r>
+                    </a:p>
+                  </a:txBody>
+                  <a:tcPr/>
+                </a:tc>
+              </a:tr>
+              <a:tr h="0">
+                <a:tc>
+                  <a:txBody>
+                    <a:bodyPr/>
+                    <a:lstStyle/>
+                    <a:p>
+                      <a:pPr lvl="0" indent="0" marL="0" algn="l">
+                        <a:buNone/>
+                      </a:pPr>
+                      <a:r>
+                        <a:rPr/>
+                        <a:t>1</a:t>
+                      </a:r>
+                    </a:p>
+                  </a:txBody>
+                </a:tc>
+                <a:tc>
+                  <a:txBody>
+                    <a:bodyPr/>
+                    <a:lstStyle/>
+                    <a:p>
+                      <a:pPr lvl="0" indent="0" marL="0" algn="l">
+                        <a:buNone/>
+                      </a:pPr>
+                      <a:r>
+                        <a:rPr/>
+                        <a:t>APAS-AI + Rusticate</a:t>
+                      </a:r>
+                    </a:p>
+                  </a:txBody>
+                </a:tc>
+                <a:tc>
+                  <a:txBody>
+                    <a:bodyPr/>
+                    <a:lstStyle/>
+                    <a:p>
+                      <a:pPr lvl="0" indent="0" marL="0" algn="r">
+                        <a:buNone/>
+                      </a:pPr>
+                      <a:r>
+                        <a:rPr/>
+                        <a:t>309.6</a:t>
+                      </a:r>
+                    </a:p>
+                  </a:txBody>
+                </a:tc>
+                <a:tc>
+                  <a:txBody>
+                    <a:bodyPr/>
+                    <a:lstStyle/>
+                    <a:p>
+                      <a:pPr lvl="0" indent="0" marL="0" algn="r">
+                        <a:buNone/>
+                      </a:pPr>
+                      <a:r>
+                        <a:rPr/>
+                        <a:t>31,751</a:t>
+                      </a:r>
+                    </a:p>
+                  </a:txBody>
+                </a:tc>
+                <a:tc>
+                  <a:txBody>
+                    <a:bodyPr/>
+                    <a:lstStyle/>
+                    <a:p>
+                      <a:pPr lvl="0" indent="0" marL="0" algn="r">
+                        <a:buNone/>
+                      </a:pPr>
+                      <a:r>
+                        <a:rPr/>
+                        <a:t>31,751</a:t>
+                      </a:r>
+                    </a:p>
+                  </a:txBody>
+                </a:tc>
+                <a:tc>
+                  <a:txBody>
+                    <a:bodyPr/>
+                    <a:lstStyle/>
+                    <a:p>
+                      <a:pPr lvl="0" indent="0" marL="0" algn="r">
+                        <a:buNone/>
+                      </a:pPr>
+                      <a:r>
+                        <a:rPr/>
+                        <a:t>—</a:t>
+                      </a:r>
+                    </a:p>
+                  </a:txBody>
+                </a:tc>
+                <a:tc>
+                  <a:txBody>
+                    <a:bodyPr/>
+                    <a:lstStyle/>
+                    <a:p>
+                      <a:pPr lvl="0" indent="0" marL="0" algn="r">
+                        <a:buNone/>
+                      </a:pPr>
+                      <a:r>
+                        <a:rPr/>
+                        <a:t>—</a:t>
+                      </a:r>
+                    </a:p>
+                  </a:txBody>
+                </a:tc>
+              </a:tr>
+              <a:tr h="0">
+                <a:tc>
+                  <a:txBody>
+                    <a:bodyPr/>
+                    <a:lstStyle/>
+                    <a:p>
+                      <a:pPr lvl="0" indent="0" marL="0" algn="l">
+                        <a:buNone/>
+                      </a:pPr>
+                      <a:r>
+                        <a:rPr/>
+                        <a:t>2</a:t>
+                      </a:r>
+                    </a:p>
+                  </a:txBody>
+                </a:tc>
+                <a:tc>
+                  <a:txBody>
+                    <a:bodyPr/>
+                    <a:lstStyle/>
+                    <a:p>
+                      <a:pPr lvl="0" indent="0" marL="0" algn="l">
+                        <a:buNone/>
+                      </a:pPr>
+                      <a:r>
+                        <a:rPr/>
+                        <a:t>APAS-VERUS + Veracity</a:t>
+                      </a:r>
+                    </a:p>
+                  </a:txBody>
+                </a:tc>
+                <a:tc>
+                  <a:txBody>
+                    <a:bodyPr/>
+                    <a:lstStyle/>
+                    <a:p>
+                      <a:pPr lvl="0" indent="0" marL="0" algn="r">
+                        <a:buNone/>
+                      </a:pPr>
+                      <a:r>
+                        <a:rPr/>
+                        <a:t>1,123.4</a:t>
+                      </a:r>
+                    </a:p>
+                  </a:txBody>
+                </a:tc>
+                <a:tc>
+                  <a:txBody>
+                    <a:bodyPr/>
+                    <a:lstStyle/>
+                    <a:p>
+                      <a:pPr lvl="0" indent="0" marL="0" algn="r">
+                        <a:buNone/>
+                      </a:pPr>
+                      <a:r>
+                        <a:rPr/>
+                        <a:t>166,401</a:t>
+                      </a:r>
+                    </a:p>
+                  </a:txBody>
+                </a:tc>
+                <a:tc>
+                  <a:txBody>
+                    <a:bodyPr/>
+                    <a:lstStyle/>
+                    <a:p>
+                      <a:pPr lvl="0" indent="0" marL="0" algn="r">
+                        <a:buNone/>
+                      </a:pPr>
+                      <a:r>
+                        <a:rPr/>
+                        <a:t>56,549</a:t>
+                      </a:r>
+                    </a:p>
+                  </a:txBody>
+                </a:tc>
+                <a:tc>
+                  <a:txBody>
+                    <a:bodyPr/>
+                    <a:lstStyle/>
+                    <a:p>
+                      <a:pPr lvl="0" indent="0" marL="0" algn="r">
+                        <a:buNone/>
+                      </a:pPr>
+                      <a:r>
+                        <a:rPr/>
+                        <a:t>47,828</a:t>
+                      </a:r>
+                    </a:p>
+                  </a:txBody>
+                </a:tc>
+                <a:tc>
+                  <a:txBody>
+                    <a:bodyPr/>
+                    <a:lstStyle/>
+                    <a:p>
+                      <a:pPr lvl="0" indent="0" marL="0" algn="r">
+                        <a:buNone/>
+                      </a:pPr>
+                      <a:r>
+                        <a:rPr/>
+                        <a:t>95,908</a:t>
+                      </a:r>
+                    </a:p>
+                  </a:txBody>
+                </a:tc>
+              </a:tr>
+              <a:tr h="0">
+                <a:tc>
+                  <a:txBody>
+                    <a:bodyPr/>
+                    <a:lstStyle/>
+                    <a:p>
+                      <a:pPr lvl="0" indent="0" marL="0" algn="l">
+                        <a:buNone/>
+                      </a:pPr>
+                      <a:r>
+                        <a:rPr/>
+                        <a:t>3</a:t>
+                      </a:r>
+                    </a:p>
+                  </a:txBody>
+                </a:tc>
+                <a:tc>
+                  <a:txBody>
+                    <a:bodyPr/>
+                    <a:lstStyle/>
+                    <a:p>
+                      <a:pPr lvl="0" indent="0" marL="0" algn="l">
+                        <a:buNone/>
+                      </a:pPr>
+                      <a:r>
+                        <a:rPr/>
+                        <a:t>Combined</a:t>
+                      </a:r>
+                    </a:p>
+                  </a:txBody>
+                </a:tc>
+                <a:tc>
+                  <a:txBody>
+                    <a:bodyPr/>
+                    <a:lstStyle/>
+                    <a:p>
+                      <a:pPr lvl="0" indent="0" marL="0" algn="r">
+                        <a:buNone/>
+                      </a:pPr>
+                      <a:r>
+                        <a:rPr/>
+                        <a:t>1,432.96</a:t>
+                      </a:r>
+                    </a:p>
+                  </a:txBody>
+                </a:tc>
+                <a:tc>
+                  <a:txBody>
+                    <a:bodyPr/>
+                    <a:lstStyle/>
+                    <a:p>
+                      <a:pPr lvl="0" indent="0" marL="0" algn="r">
+                        <a:buNone/>
+                      </a:pPr>
+                      <a:r>
+                        <a:rPr/>
+                        <a:t>198,152</a:t>
+                      </a:r>
+                    </a:p>
+                  </a:txBody>
+                </a:tc>
+                <a:tc>
+                  <a:txBody>
+                    <a:bodyPr/>
+                    <a:lstStyle/>
+                    <a:p>
+                      <a:pPr lvl="0" indent="0" marL="0" algn="r">
+                        <a:buNone/>
+                      </a:pPr>
+                      <a:r>
+                        <a:rPr/>
+                        <a:t>88,300</a:t>
+                      </a:r>
+                    </a:p>
+                  </a:txBody>
+                </a:tc>
+                <a:tc>
+                  <a:txBody>
+                    <a:bodyPr/>
+                    <a:lstStyle/>
+                    <a:p>
+                      <a:pPr lvl="0" indent="0" marL="0" algn="r">
+                        <a:buNone/>
+                      </a:pPr>
+                      <a:r>
+                        <a:rPr/>
+                        <a:t>47,828</a:t>
+                      </a:r>
+                    </a:p>
+                  </a:txBody>
+                </a:tc>
+                <a:tc>
+                  <a:txBody>
+                    <a:bodyPr/>
+                    <a:lstStyle/>
+                    <a:p>
+                      <a:pPr lvl="0" indent="0" marL="0" algn="r">
+                        <a:buNone/>
+                      </a:pPr>
+                      <a:r>
+                        <a:rPr/>
+                        <a:t>95,908</a:t>
+                      </a:r>
+                    </a:p>
+                  </a:txBody>
+                </a:tc>
+              </a:tr>
+            </a:tbl>
+          </a:graphicData>
+        </a:graphic>
+      </p:graphicFrame>
+    </p:spTree>
+  </p:cSld>
+</p:sld>
+</file>
+
+<file path=ppt/slides/slide6.xml><?xml version="1.0" encoding="utf-8"?>
+<p:sld xmlns:a="http://schemas.openxmlformats.org/drawingml/2006/main" xmlns:r="http://schemas.openxmlformats.org/officeDocument/2006/relationships" xmlns:p="http://schemas.openxmlformats.org/presentationml/2006/main">
+  <p:cSld>
+    <p:spTree>
+      <p:nvGrpSpPr>
+        <p:cNvPr id="1" name=""/>
+        <p:cNvGrpSpPr/>
+        <p:nvPr/>
+      </p:nvGrpSpPr>
+      <p:grpSpPr>
+        <a:xfrm>
+          <a:off x="0" y="0"/>
+          <a:ext cx="0" cy="0"/>
+          <a:chOff x="0" y="0"/>
+          <a:chExt cx="0" cy="0"/>
+        </a:xfrm>
+      </p:grpSpPr>
+      <p:sp>
+        <p:nvSpPr>
+          <p:cNvPr id="2" name="Title 1"/>
+          <p:cNvSpPr>
+            <a:spLocks noGrp="1"/>
+          </p:cNvSpPr>
+          <p:nvPr>
+            <p:ph type="title"/>
+          </p:nvPr>
+        </p:nvSpPr>
+        <p:spPr/>
+        <p:txBody>
+          <a:bodyPr/>
+          <a:lstStyle/>
+          <a:p>
+            <a:pPr lvl="0" indent="0" marL="0">
+              <a:buNone/>
+            </a:pPr>
+            <a:r>
+              <a:rPr lang="en-US" sz="3200"/>
+              <a:t>Rust - The Good</a:t>
+            </a:r>
+          </a:p>
+        </p:txBody>
+      </p:sp>
+      <p:sp>
+        <p:nvSpPr>
+          <p:cNvPr id="3" name="Content Placeholder 2"/>
+          <p:cNvSpPr>
+            <a:spLocks noGrp="1"/>
+          </p:cNvSpPr>
+          <p:nvPr>
+            <p:ph idx="1"/>
+          </p:nvPr>
+        </p:nvSpPr>
+        <p:spPr/>
+        <p:txBody>
+          <a:bodyPr/>
+          <a:lstStyle/>
+          <a:p>
+            <a:pPr lvl="0"/>
+            <a:r>
+              <a:rPr lang="en-US" sz="1800"/>
+              <a:t>20 year old PL</a:t>
+            </a:r>
+          </a:p>
+          <a:p>
+            <a:pPr lvl="0"/>
+            <a:r>
+              <a:rPr lang="en-US" sz="1800"/>
+              <a:t>Fast compilation, code.</a:t>
+            </a:r>
+          </a:p>
+          <a:p>
+            <a:pPr lvl="0"/>
+            <a:r>
+              <a:rPr lang="en-US" sz="1800"/>
+              <a:t>Industrial acceptance: AWS, Google, Huawei, Microsoft, and Mozilla.</a:t>
+            </a:r>
+          </a:p>
+          <a:p>
+            <a:pPr lvl="0"/>
+            <a:r>
+              <a:rPr lang="en-US" sz="1800"/>
+              <a:t>Linux Kernel now uses it!</a:t>
+            </a:r>
+          </a:p>
+          <a:p>
+            <a:pPr lvl="0"/>
+            <a:r>
+              <a:rPr lang="en-US" sz="1800"/>
+              <a:t>Linear typing plus borrowing! No GC!</a:t>
+            </a:r>
+          </a:p>
+          <a:p>
+            <a:pPr lvl="0"/>
+            <a:r>
+              <a:rPr lang="en-US" sz="1800"/>
+              <a:t>Clear mutability.</a:t>
+            </a:r>
+          </a:p>
+          <a:p>
+            <a:pPr lvl="0"/>
+            <a:r>
+              <a:rPr lang="en-US" sz="1800"/>
+              <a:t>Slicing! with ownership.</a:t>
+            </a:r>
+          </a:p>
+          <a:p>
+            <a:pPr lvl="0"/>
+            <a:r>
+              <a:rPr lang="en-US" sz="1800"/>
+              <a:t>Their ‘cargo’ package system works rather well.</a:t>
+            </a:r>
+          </a:p>
+          <a:p>
+            <a:pPr lvl="0"/>
+            <a:r>
+              <a:rPr lang="en-US" sz="1800"/>
+              <a:t>No objects for modularity! Good.</a:t>
+            </a:r>
+          </a:p>
+        </p:txBody>
+      </p:sp>
+    </p:spTree>
+  </p:cSld>
+</p:sld>
+</file>
+
+<file path=ppt/slides/slide60.xml><?xml version="1.0" encoding="utf-8"?>
 <p:sld xmlns:a="http://schemas.openxmlformats.org/drawingml/2006/main" xmlns:r="http://schemas.openxmlformats.org/officeDocument/2006/relationships" xmlns:p="http://schemas.openxmlformats.org/presentationml/2006/main">
   <p:cSld>
     <p:spTree>
@@ -13600,7 +14278,7 @@
                       </a:pPr>
                       <a:r>
                         <a:rPr b="1"/>
-                        <a:t>33.3%</a:t>
+                        <a:t>~33.3%</a:t>
                       </a:r>
                     </a:p>
                   </a:txBody>
@@ -13726,53 +14404,6 @@
                       </a:pPr>
                       <a:r>
                         <a:rPr/>
-                        <a:t>P / KLOPC2R</a:t>
-                      </a:r>
-                    </a:p>
-                  </a:txBody>
-                </a:tc>
-                <a:tc>
-                  <a:txBody>
-                    <a:bodyPr/>
-                    <a:lstStyle/>
-                    <a:p>
-                      <a:pPr lvl="0" indent="0" marL="0" algn="ctr">
-                        <a:buNone/>
-                      </a:pPr>
-                      <a:r>
-                        <a:rPr b="1"/>
-                        <a:t>$3.378</a:t>
-                      </a:r>
-                    </a:p>
-                  </a:txBody>
-                </a:tc>
-              </a:tr>
-              <a:tr h="0">
-                <a:tc>
-                  <a:txBody>
-                    <a:bodyPr/>
-                    <a:lstStyle/>
-                    <a:p>
-                      <a:pPr lvl="0" indent="0" marL="0" algn="l">
-                        <a:buNone/>
-                      </a:pPr>
-                      <a:r>
-                        <a:rPr/>
-                        <a:t>8</a:t>
-                      </a:r>
-                    </a:p>
-                  </a:txBody>
-                </a:tc>
-                <a:tc>
-                  <a:txBody>
-                    <a:bodyPr/>
-                    <a:lstStyle/>
-                    <a:p>
-                      <a:pPr lvl="0" indent="0" marL="0" algn="l">
-                        <a:buNone/>
-                      </a:pPr>
-                      <a:r>
-                        <a:rPr/>
                         <a:t>P / KLOP</a:t>
                       </a:r>
                     </a:p>
@@ -13803,7 +14434,7 @@
 </p:sld>
 </file>
 
-<file path=ppt/slides/slide6.xml><?xml version="1.0" encoding="utf-8"?>
+<file path=ppt/slides/slide61.xml><?xml version="1.0" encoding="utf-8"?>
 <p:sld xmlns:a="http://schemas.openxmlformats.org/drawingml/2006/main" xmlns:r="http://schemas.openxmlformats.org/officeDocument/2006/relationships" xmlns:p="http://schemas.openxmlformats.org/presentationml/2006/main">
   <p:cSld>
     <p:spTree>
@@ -13840,132 +14471,6 @@
             </a:pPr>
             <a:r>
               <a:rPr lang="en-US" sz="3200"/>
-              <a:t>Rust - The Good</a:t>
-            </a:r>
-          </a:p>
-        </p:txBody>
-      </p:sp>
-      <p:sp>
-        <p:nvSpPr>
-          <p:cNvPr id="3" name="Content Placeholder 2"/>
-          <p:cNvSpPr>
-            <a:spLocks noGrp="1"/>
-          </p:cNvSpPr>
-          <p:nvPr>
-            <p:ph idx="1"/>
-          </p:nvPr>
-        </p:nvSpPr>
-        <p:spPr/>
-        <p:txBody>
-          <a:bodyPr/>
-          <a:lstStyle/>
-          <a:p>
-            <a:pPr lvl="0"/>
-            <a:r>
-              <a:rPr lang="en-US" sz="1800"/>
-              <a:t>20 year old PL</a:t>
-            </a:r>
-          </a:p>
-          <a:p>
-            <a:pPr lvl="0"/>
-            <a:r>
-              <a:rPr lang="en-US" sz="1800"/>
-              <a:t>Fast compilation, code.</a:t>
-            </a:r>
-          </a:p>
-          <a:p>
-            <a:pPr lvl="0"/>
-            <a:r>
-              <a:rPr lang="en-US" sz="1800"/>
-              <a:t>Industrial acceptance: AWS, Google, Huawei, Microsoft, and Mozilla.</a:t>
-            </a:r>
-          </a:p>
-          <a:p>
-            <a:pPr lvl="0"/>
-            <a:r>
-              <a:rPr lang="en-US" sz="1800"/>
-              <a:t>Linux Kernel now uses it!</a:t>
-            </a:r>
-          </a:p>
-          <a:p>
-            <a:pPr lvl="0"/>
-            <a:r>
-              <a:rPr lang="en-US" sz="1800"/>
-              <a:t>Linear typing plus borrowing! No GC!</a:t>
-            </a:r>
-          </a:p>
-          <a:p>
-            <a:pPr lvl="0"/>
-            <a:r>
-              <a:rPr lang="en-US" sz="1800"/>
-              <a:t>Clear mutability.</a:t>
-            </a:r>
-          </a:p>
-          <a:p>
-            <a:pPr lvl="0"/>
-            <a:r>
-              <a:rPr lang="en-US" sz="1800"/>
-              <a:t>Slicing! with ownership.</a:t>
-            </a:r>
-          </a:p>
-          <a:p>
-            <a:pPr lvl="0"/>
-            <a:r>
-              <a:rPr lang="en-US" sz="1800"/>
-              <a:t>Their ‘cargo’ package system works rather well.</a:t>
-            </a:r>
-          </a:p>
-          <a:p>
-            <a:pPr lvl="0"/>
-            <a:r>
-              <a:rPr lang="en-US" sz="1800"/>
-              <a:t>No objects for modularity! Good.</a:t>
-            </a:r>
-          </a:p>
-        </p:txBody>
-      </p:sp>
-    </p:spTree>
-  </p:cSld>
-</p:sld>
-</file>
-
-<file path=ppt/slides/slide60.xml><?xml version="1.0" encoding="utf-8"?>
-<p:sld xmlns:a="http://schemas.openxmlformats.org/drawingml/2006/main" xmlns:r="http://schemas.openxmlformats.org/officeDocument/2006/relationships" xmlns:p="http://schemas.openxmlformats.org/presentationml/2006/main">
-  <p:cSld>
-    <p:spTree>
-      <p:nvGrpSpPr>
-        <p:cNvPr id="1" name=""/>
-        <p:cNvGrpSpPr/>
-        <p:nvPr/>
-      </p:nvGrpSpPr>
-      <p:grpSpPr>
-        <a:xfrm>
-          <a:off x="0" y="0"/>
-          <a:ext cx="0" cy="0"/>
-          <a:chOff x="0" y="0"/>
-          <a:chExt cx="0" cy="0"/>
-        </a:xfrm>
-      </p:grpSpPr>
-      <p:sp>
-        <p:nvSpPr>
-          <p:cNvPr id="2" name="Title 1"/>
-          <p:cNvSpPr>
-            <a:spLocks noGrp="1"/>
-          </p:cNvSpPr>
-          <p:nvPr>
-            <p:ph type="title"/>
-          </p:nvPr>
-        </p:nvSpPr>
-        <p:spPr/>
-        <p:txBody>
-          <a:bodyPr/>
-          <a:lstStyle/>
-          <a:p>
-            <a:pPr lvl="0" indent="0" marL="0">
-              <a:buNone/>
-            </a:pPr>
-            <a:r>
-              <a:rPr lang="en-US" sz="3200"/>
               <a:t>Head-to-Head — seL4 (2009) vs APAS-VERUS</a:t>
             </a:r>
           </a:p>
@@ -13992,11 +14497,11 @@
                 <a:tableStyleId>{5C22544A-7EE6-4342-B048-85BDC9FD1C3A}</a:tableStyleId>
               </a:tblPr>
               <a:tblGrid>
-                <a:gridCol w="203200"/>
-                <a:gridCol w="1879600"/>
-                <a:gridCol w="1562100"/>
-                <a:gridCol w="2603500"/>
+                <a:gridCol w="215900"/>
                 <a:gridCol w="1981200"/>
+                <a:gridCol w="1651000"/>
+                <a:gridCol w="2298700"/>
+                <a:gridCol w="2082800"/>
               </a:tblGrid>
               <a:tr h="0">
                 <a:tc>
@@ -14794,118 +15299,6 @@
 </p:sld>
 </file>
 
-<file path=ppt/slides/slide61.xml><?xml version="1.0" encoding="utf-8"?>
-<p:sld xmlns:a="http://schemas.openxmlformats.org/drawingml/2006/main" xmlns:r="http://schemas.openxmlformats.org/officeDocument/2006/relationships" xmlns:p="http://schemas.openxmlformats.org/presentationml/2006/main">
-  <p:cSld>
-    <p:spTree>
-      <p:nvGrpSpPr>
-        <p:cNvPr id="1" name=""/>
-        <p:cNvGrpSpPr/>
-        <p:nvPr/>
-      </p:nvGrpSpPr>
-      <p:grpSpPr>
-        <a:xfrm>
-          <a:off x="0" y="0"/>
-          <a:ext cx="0" cy="0"/>
-          <a:chOff x="0" y="0"/>
-          <a:chExt cx="0" cy="0"/>
-        </a:xfrm>
-      </p:grpSpPr>
-      <p:sp>
-        <p:nvSpPr>
-          <p:cNvPr id="2" name="Title 1"/>
-          <p:cNvSpPr>
-            <a:spLocks noGrp="1"/>
-          </p:cNvSpPr>
-          <p:nvPr>
-            <p:ph type="title"/>
-          </p:nvPr>
-        </p:nvSpPr>
-        <p:spPr/>
-        <p:txBody>
-          <a:bodyPr/>
-          <a:lstStyle/>
-          <a:p>
-            <a:pPr lvl="0" indent="0" marL="0">
-              <a:buNone/>
-            </a:pPr>
-            <a:r>
-              <a:rPr lang="en-US" sz="3200"/>
-              <a:t>Rusticate + Veracity allow quantitative software engineering</a:t>
-            </a:r>
-          </a:p>
-        </p:txBody>
-      </p:sp>
-      <p:sp>
-        <p:nvSpPr>
-          <p:cNvPr id="3" name="Content Placeholder 2"/>
-          <p:cNvSpPr>
-            <a:spLocks noGrp="1"/>
-          </p:cNvSpPr>
-          <p:nvPr>
-            <p:ph idx="1"/>
-          </p:nvPr>
-        </p:nvSpPr>
-        <p:spPr/>
-        <p:txBody>
-          <a:bodyPr/>
-          <a:lstStyle/>
-          <a:p>
-            <a:pPr lvl="0"/>
-            <a:r>
-              <a:rPr lang="en-US" sz="1800"/>
-              <a:t>I downloaded the 1036 most downloaded Rust projects, 3636 crates.</a:t>
-            </a:r>
-          </a:p>
-          <a:p>
-            <a:pPr lvl="0"/>
-            <a:r>
-              <a:rPr lang="en-US" sz="1800"/>
-              <a:t>I threw out three that wrapped std for asynchrony.</a:t>
-            </a:r>
-          </a:p>
-          <a:p>
-            <a:pPr lvl="0"/>
-            <a:r>
-              <a:rPr lang="en-US" sz="1800"/>
-              <a:t>I did a greedy set cover analysis of what Rust uses.</a:t>
-            </a:r>
-          </a:p>
-          <a:p>
-            <a:pPr lvl="0"/>
-            <a:r>
-              <a:rPr lang="en-US" sz="1800"/>
-              <a:t>And another of what verus wraps.</a:t>
-            </a:r>
-          </a:p>
-          <a:p>
-            <a:pPr lvl="0"/>
-            <a:r>
-              <a:rPr lang="en-US" sz="1800"/>
-              <a:t>This is a golden age for quantitative software engineering.</a:t>
-            </a:r>
-          </a:p>
-          <a:p>
-            <a:pPr lvl="0"/>
-            <a:r>
-              <a:rPr lang="en-US" sz="1800"/>
-              <a:t>It took just two days of person time.</a:t>
-            </a:r>
-          </a:p>
-          <a:p>
-            <a:pPr lvl="0"/>
-            <a:r>
-              <a:rPr lang="en-US" sz="1800"/>
-              <a:t>And I never read a line of code in the tools. Just check the output and have the AI write a lot of tests.</a:t>
-            </a:r>
-          </a:p>
-        </p:txBody>
-      </p:sp>
-    </p:spTree>
-  </p:cSld>
-</p:sld>
-</file>
-
 <file path=ppt/slides/slide62.xml><?xml version="1.0" encoding="utf-8"?>
 <p:sld xmlns:a="http://schemas.openxmlformats.org/drawingml/2006/main" xmlns:r="http://schemas.openxmlformats.org/officeDocument/2006/relationships" xmlns:p="http://schemas.openxmlformats.org/presentationml/2006/main">
   <p:cSld>
@@ -14943,7 +15336,7 @@
             </a:pPr>
             <a:r>
               <a:rPr lang="en-US" sz="3200"/>
-              <a:t>Rusticate + Veracity : What Rust Cargos use in std.</a:t>
+              <a:t>Rusticate + Veracity allow quantitative software engineering</a:t>
             </a:r>
           </a:p>
         </p:txBody>
@@ -14966,70 +15359,49 @@
             <a:pPr lvl="0"/>
             <a:r>
               <a:rPr lang="en-US" sz="1800"/>
-              <a:t>Top 1000 projects, 3636 crates.</a:t>
-            </a:r>
-          </a:p>
-          <a:p>
-            <a:pPr lvl="0"/>
-            <a:r>
-              <a:rPr lang="en-US" sz="1800"/>
-              <a:t>19 data types fully support 90%.</a:t>
-            </a:r>
-          </a:p>
-          <a:p>
-            <a:pPr lvl="0"/>
-            <a:r>
-              <a:rPr lang="en-US" sz="1800"/>
-              <a:t>48 data types fully support 100%.</a:t>
-            </a:r>
-          </a:p>
-          <a:p>
-            <a:pPr lvl="0"/>
-            <a:r>
-              <a:rPr lang="en-US" sz="1800"/>
-              <a:t>69 modules fully support 95%.</a:t>
-            </a:r>
-          </a:p>
-          <a:p>
-            <a:pPr lvl="0"/>
-            <a:r>
-              <a:rPr lang="en-US" sz="1800"/>
-              <a:t>79 modules fully support 99%.</a:t>
-            </a:r>
-          </a:p>
-          <a:p>
-            <a:pPr lvl="0"/>
-            <a:r>
-              <a:rPr lang="en-US" sz="1800"/>
-              <a:t>1121 methods fully support 95%.</a:t>
-            </a:r>
-          </a:p>
-          <a:p>
-            <a:pPr lvl="0"/>
-            <a:r>
-              <a:rPr lang="en-US" sz="1800"/>
-              <a:t>1733 methods fully support 99%.</a:t>
-            </a:r>
-          </a:p>
-          <a:p>
-            <a:pPr lvl="0"/>
-            <a:r>
-              <a:rPr lang="en-US" sz="1800"/>
-              <a:t>14,317 total fn definitions in std/core/alloc in Rust</a:t>
-            </a:r>
-          </a:p>
-          <a:p>
-            <a:pPr lvl="0"/>
-            <a:r>
-              <a:rPr lang="en-US" sz="1800"/>
-              <a:t>4,965 pub fn definitions in std/core/alloc in Rust</a:t>
-            </a:r>
-          </a:p>
-          <a:p>
-            <a:pPr lvl="0"/>
-            <a:r>
-              <a:rPr lang="en-US" sz="1800"/>
-              <a:t>But how many of those private functions do we need? I don’t know.</a:t>
+              <a:t>I downloaded the 1036 most downloaded Rust projects, 3636 crates.</a:t>
+            </a:r>
+          </a:p>
+          <a:p>
+            <a:pPr lvl="0"/>
+            <a:r>
+              <a:rPr lang="en-US" sz="1800"/>
+              <a:t>I threw out three that wrapped std for asynchrony.</a:t>
+            </a:r>
+          </a:p>
+          <a:p>
+            <a:pPr lvl="0"/>
+            <a:r>
+              <a:rPr lang="en-US" sz="1800"/>
+              <a:t>I did a greedy set cover analysis of what Rust uses.</a:t>
+            </a:r>
+          </a:p>
+          <a:p>
+            <a:pPr lvl="0"/>
+            <a:r>
+              <a:rPr lang="en-US" sz="1800"/>
+              <a:t>And another of what verus wraps.</a:t>
+            </a:r>
+          </a:p>
+          <a:p>
+            <a:pPr lvl="0"/>
+            <a:r>
+              <a:rPr lang="en-US" sz="1800"/>
+              <a:t>This is a golden age for quantitative software engineering.</a:t>
+            </a:r>
+          </a:p>
+          <a:p>
+            <a:pPr lvl="0"/>
+            <a:r>
+              <a:rPr lang="en-US" sz="1800"/>
+              <a:t>It took just two days of person time.</a:t>
+            </a:r>
+          </a:p>
+          <a:p>
+            <a:pPr lvl="0"/>
+            <a:r>
+              <a:rPr lang="en-US" sz="1800"/>
+              <a:t>And I never read a line of code in the tools. Just check the output and have the AI write a lot of tests.</a:t>
             </a:r>
           </a:p>
         </p:txBody>
@@ -15076,7 +15448,7 @@
             </a:pPr>
             <a:r>
               <a:rPr lang="en-US" sz="3200"/>
-              <a:t>Compare Rust STD to APAS-VERUS?</a:t>
+              <a:t>Rusticate + Veracity : What Rust Cargos use in std.</a:t>
             </a:r>
           </a:p>
         </p:txBody>
@@ -15099,35 +15471,70 @@
             <a:pPr lvl="0"/>
             <a:r>
               <a:rPr lang="en-US" sz="1800"/>
-              <a:t>APAS-VERUS: -6,401 exec functions total, -4,911 with proofs</a:t>
-            </a:r>
-          </a:p>
-          <a:p>
-            <a:pPr lvl="0"/>
-            <a:r>
-              <a:rPr lang="en-US" sz="1800"/>
-              <a:t>But APAS-VERUS has {Mt,St}x{Per,Eph}</a:t>
-            </a:r>
-          </a:p>
-          <a:p>
-            <a:pPr lvl="0"/>
-            <a:r>
-              <a:rPr lang="en-US" sz="1800"/>
-              <a:t>So it is much more like 2000 distinct functions.</a:t>
-            </a:r>
-          </a:p>
-          <a:p>
-            <a:pPr lvl="0"/>
-            <a:r>
-              <a:rPr lang="en-US" sz="1800"/>
-              <a:t>And I wrote this in 160 days while learning Verus.</a:t>
-            </a:r>
-          </a:p>
-          <a:p>
-            <a:pPr lvl="0"/>
-            <a:r>
-              <a:rPr lang="en-US" sz="1800"/>
-              <a:t>At least 30 of those days were understanding and working around pain points.</a:t>
+              <a:t>Top 1000 projects, 3636 crates.</a:t>
+            </a:r>
+          </a:p>
+          <a:p>
+            <a:pPr lvl="0"/>
+            <a:r>
+              <a:rPr lang="en-US" sz="1800"/>
+              <a:t>19 data types fully support 90%.</a:t>
+            </a:r>
+          </a:p>
+          <a:p>
+            <a:pPr lvl="0"/>
+            <a:r>
+              <a:rPr lang="en-US" sz="1800"/>
+              <a:t>48 data types fully support 100%.</a:t>
+            </a:r>
+          </a:p>
+          <a:p>
+            <a:pPr lvl="0"/>
+            <a:r>
+              <a:rPr lang="en-US" sz="1800"/>
+              <a:t>69 modules fully support 95%.</a:t>
+            </a:r>
+          </a:p>
+          <a:p>
+            <a:pPr lvl="0"/>
+            <a:r>
+              <a:rPr lang="en-US" sz="1800"/>
+              <a:t>79 modules fully support 99%.</a:t>
+            </a:r>
+          </a:p>
+          <a:p>
+            <a:pPr lvl="0"/>
+            <a:r>
+              <a:rPr lang="en-US" sz="1800"/>
+              <a:t>1121 methods fully support 95%.</a:t>
+            </a:r>
+          </a:p>
+          <a:p>
+            <a:pPr lvl="0"/>
+            <a:r>
+              <a:rPr lang="en-US" sz="1800"/>
+              <a:t>1733 methods fully support 99%.</a:t>
+            </a:r>
+          </a:p>
+          <a:p>
+            <a:pPr lvl="0"/>
+            <a:r>
+              <a:rPr lang="en-US" sz="1800"/>
+              <a:t>14,317 total fn definitions in std/core/alloc in Rust</a:t>
+            </a:r>
+          </a:p>
+          <a:p>
+            <a:pPr lvl="0"/>
+            <a:r>
+              <a:rPr lang="en-US" sz="1800"/>
+              <a:t>4,965 pub fn definitions in std/core/alloc in Rust</a:t>
+            </a:r>
+          </a:p>
+          <a:p>
+            <a:pPr lvl="0"/>
+            <a:r>
+              <a:rPr lang="en-US" sz="1800"/>
+              <a:t>But how many of those private functions do we need? I don’t know.</a:t>
             </a:r>
           </a:p>
         </p:txBody>
@@ -15174,7 +15581,7 @@
             </a:pPr>
             <a:r>
               <a:rPr lang="en-US" sz="3200"/>
-              <a:t>Rusticate + Veracity: What Verus Wraps</a:t>
+              <a:t>Compare Rust STD to APAS-VERUS?</a:t>
             </a:r>
           </a:p>
         </p:txBody>
@@ -15197,56 +15604,35 @@
             <a:pPr lvl="0"/>
             <a:r>
               <a:rPr lang="en-US" sz="1800"/>
-              <a:t>As of 2026 14 April</a:t>
-            </a:r>
-          </a:p>
-          <a:p>
-            <a:pPr lvl="0"/>
-            <a:r>
-              <a:rPr lang="en-US" sz="1800"/>
-              <a:t>How many Rust Data Types does Verus wrap?</a:t>
-            </a:r>
-          </a:p>
-          <a:p>
-            <a:pPr lvl="1"/>
-            <a:r>
-              <a:rPr lang="en-US" sz="1800"/>
-              <a:t>29 types currently wrapped.</a:t>
-            </a:r>
-          </a:p>
-          <a:p>
-            <a:pPr lvl="0"/>
-            <a:r>
-              <a:rPr lang="en-US" sz="1800"/>
-              <a:t>How many Rust Traits does Verus wrap?</a:t>
-            </a:r>
-          </a:p>
-          <a:p>
-            <a:pPr lvl="1"/>
-            <a:r>
-              <a:rPr lang="en-US" sz="1800"/>
-              <a:t>147 traits in vstd.</a:t>
-            </a:r>
-          </a:p>
-          <a:p>
-            <a:pPr lvl="0"/>
-            <a:r>
-              <a:rPr lang="en-US" sz="1800"/>
-              <a:t>How many total Rust Methods does Verus wrap?</a:t>
-            </a:r>
-          </a:p>
-          <a:p>
-            <a:pPr lvl="1"/>
-            <a:r>
-              <a:rPr lang="en-US" sz="1800"/>
-              <a:t>154 methods currently wrapped.</a:t>
-            </a:r>
-          </a:p>
-          <a:p>
-            <a:pPr lvl="0"/>
-            <a:r>
-              <a:rPr lang="en-US" sz="1800"/>
-              <a:t>A small but growing percentage.</a:t>
+              <a:t>APAS-VERUS: -6,401 exec functions total, -4,911 with proofs</a:t>
+            </a:r>
+          </a:p>
+          <a:p>
+            <a:pPr lvl="0"/>
+            <a:r>
+              <a:rPr lang="en-US" sz="1800"/>
+              <a:t>But APAS-VERUS has {Mt,St}x{Per,Eph}</a:t>
+            </a:r>
+          </a:p>
+          <a:p>
+            <a:pPr lvl="0"/>
+            <a:r>
+              <a:rPr lang="en-US" sz="1800"/>
+              <a:t>So it is much more like 2000 distinct functions.</a:t>
+            </a:r>
+          </a:p>
+          <a:p>
+            <a:pPr lvl="0"/>
+            <a:r>
+              <a:rPr lang="en-US" sz="1800"/>
+              <a:t>And I wrote this in 160 days while learning Verus.</a:t>
+            </a:r>
+          </a:p>
+          <a:p>
+            <a:pPr lvl="0"/>
+            <a:r>
+              <a:rPr lang="en-US" sz="1800"/>
+              <a:t>At least 30 of those days were understanding and working around pain points.</a:t>
             </a:r>
           </a:p>
         </p:txBody>
@@ -15293,7 +15679,7 @@
             </a:pPr>
             <a:r>
               <a:rPr lang="en-US" sz="3200"/>
-              <a:t>Software Engineering in AI Paired Proving</a:t>
+              <a:t>Rusticate + Veracity: What Verus Wraps</a:t>
             </a:r>
           </a:p>
         </p:txBody>
@@ -15316,42 +15702,56 @@
             <a:pPr lvl="0"/>
             <a:r>
               <a:rPr lang="en-US" sz="1800"/>
-              <a:t>Software engineering in the AI age is much like managing programmers.</a:t>
-            </a:r>
-          </a:p>
-          <a:p>
-            <a:pPr lvl="0"/>
-            <a:r>
-              <a:rPr lang="en-US" sz="1800"/>
-              <a:t>You can’t possibly read all their code.</a:t>
-            </a:r>
-          </a:p>
-          <a:p>
-            <a:pPr lvl="0"/>
-            <a:r>
-              <a:rPr lang="en-US" sz="1800"/>
-              <a:t>So you use:</a:t>
+              <a:t>As of 2026 14 April</a:t>
+            </a:r>
+          </a:p>
+          <a:p>
+            <a:pPr lvl="0"/>
+            <a:r>
+              <a:rPr lang="en-US" sz="1800"/>
+              <a:t>How many Rust Data Types does Verus wrap?</a:t>
             </a:r>
           </a:p>
           <a:p>
             <a:pPr lvl="1"/>
             <a:r>
               <a:rPr lang="en-US" sz="1800"/>
-              <a:t>linters both programmatic and AI</a:t>
+              <a:t>29 types currently wrapped.</a:t>
+            </a:r>
+          </a:p>
+          <a:p>
+            <a:pPr lvl="0"/>
+            <a:r>
+              <a:rPr lang="en-US" sz="1800"/>
+              <a:t>How many Rust Traits does Verus wrap?</a:t>
             </a:r>
           </a:p>
           <a:p>
             <a:pPr lvl="1"/>
             <a:r>
               <a:rPr lang="en-US" sz="1800"/>
-              <a:t>stylers both programmatic and AI</a:t>
+              <a:t>147 traits in vstd.</a:t>
+            </a:r>
+          </a:p>
+          <a:p>
+            <a:pPr lvl="0"/>
+            <a:r>
+              <a:rPr lang="en-US" sz="1800"/>
+              <a:t>How many total Rust Methods does Verus wrap?</a:t>
             </a:r>
           </a:p>
           <a:p>
             <a:pPr lvl="1"/>
             <a:r>
               <a:rPr lang="en-US" sz="1800"/>
-              <a:t>AI reviews directed by programmatic tools.</a:t>
+              <a:t>154 methods currently wrapped.</a:t>
+            </a:r>
+          </a:p>
+          <a:p>
+            <a:pPr lvl="0"/>
+            <a:r>
+              <a:rPr lang="en-US" sz="1800"/>
+              <a:t>A small but growing percentage.</a:t>
             </a:r>
           </a:p>
         </p:txBody>
@@ -15421,49 +15821,42 @@
             <a:pPr lvl="0"/>
             <a:r>
               <a:rPr lang="en-US" sz="1800"/>
-              <a:t>Starting with a textbook that has a ton of good prose is a huge plus.</a:t>
-            </a:r>
-          </a:p>
-          <a:p>
-            <a:pPr lvl="0"/>
-            <a:r>
-              <a:rPr lang="en-US" sz="1800"/>
-              <a:t>I did discover a few things about the textbook.</a:t>
-            </a:r>
-          </a:p>
-          <a:p>
-            <a:pPr lvl="0"/>
-            <a:r>
-              <a:rPr lang="en-US" sz="1800"/>
-              <a:t>It needs more on Scheduling. I only built Help-First scheduling.</a:t>
-            </a:r>
-          </a:p>
-          <a:p>
-            <a:pPr lvl="0"/>
-            <a:r>
-              <a:rPr lang="en-US" sz="1800"/>
-              <a:t>It used (K,V) in tree sets as mappings, but I had to make this explicit. Particularly with an Ordered Key Mapping.</a:t>
-            </a:r>
-          </a:p>
-          <a:p>
-            <a:pPr lvl="0"/>
-            <a:r>
-              <a:rPr lang="en-US" sz="1800"/>
-              <a:t>With this Ordered Tables, which are not too complex, were much easier to prove.</a:t>
-            </a:r>
-          </a:p>
-          <a:p>
-            <a:pPr lvl="0"/>
-            <a:r>
-              <a:rPr lang="en-US" sz="1800"/>
-              <a:t>APAS’s discussion of Union Find was too thin. Path compression was very difficult.</a:t>
-            </a:r>
-          </a:p>
-          <a:p>
-            <a:pPr lvl="0"/>
-            <a:r>
-              <a:rPr lang="en-US" sz="1800"/>
-              <a:t>I had to start with Nikhil Swammy et. al’s AlgoCLRS’s implemention and proofs.</a:t>
+              <a:t>Software engineering in the AI age is much like managing programmers.</a:t>
+            </a:r>
+          </a:p>
+          <a:p>
+            <a:pPr lvl="0"/>
+            <a:r>
+              <a:rPr lang="en-US" sz="1800"/>
+              <a:t>You can’t possibly read all their code.</a:t>
+            </a:r>
+          </a:p>
+          <a:p>
+            <a:pPr lvl="0"/>
+            <a:r>
+              <a:rPr lang="en-US" sz="1800"/>
+              <a:t>So you use:</a:t>
+            </a:r>
+          </a:p>
+          <a:p>
+            <a:pPr lvl="1"/>
+            <a:r>
+              <a:rPr lang="en-US" sz="1800"/>
+              <a:t>linters both programmatic and AI</a:t>
+            </a:r>
+          </a:p>
+          <a:p>
+            <a:pPr lvl="1"/>
+            <a:r>
+              <a:rPr lang="en-US" sz="1800"/>
+              <a:t>stylers both programmatic and AI</a:t>
+            </a:r>
+          </a:p>
+          <a:p>
+            <a:pPr lvl="1"/>
+            <a:r>
+              <a:rPr lang="en-US" sz="1800"/>
+              <a:t>AI reviews directed by programmatic tools.</a:t>
             </a:r>
           </a:p>
         </p:txBody>
@@ -15533,70 +15926,49 @@
             <a:pPr lvl="0"/>
             <a:r>
               <a:rPr lang="en-US" sz="1800"/>
-              <a:t>I use git work trees for proof.</a:t>
-            </a:r>
-          </a:p>
-          <a:p>
-            <a:pPr lvl="0"/>
-            <a:r>
-              <a:rPr lang="en-US" sz="1800"/>
-              <a:t>The good news is git is powerful and the agents understand it.</a:t>
-            </a:r>
-          </a:p>
-          <a:p>
-            <a:pPr lvl="0"/>
-            <a:r>
-              <a:rPr lang="en-US" sz="1800"/>
-              <a:t>The bad news is the agents can indeed start using advanced features and get things wrong.</a:t>
-            </a:r>
-          </a:p>
-          <a:p>
-            <a:pPr lvl="0"/>
-            <a:r>
-              <a:rPr lang="en-US" sz="1800"/>
-              <a:t>I work with between 1 and 9 agents.</a:t>
-            </a:r>
-          </a:p>
-          <a:p>
-            <a:pPr lvl="0"/>
-            <a:r>
-              <a:rPr lang="en-US" sz="1800"/>
-              <a:t>One on veracity.</a:t>
-            </a:r>
-          </a:p>
-          <a:p>
-            <a:pPr lvl="0"/>
-            <a:r>
-              <a:rPr lang="en-US" sz="1800"/>
-              <a:t>One orchestrator, writing plans, prompts and controlling merges.</a:t>
-            </a:r>
-          </a:p>
-          <a:p>
-            <a:pPr lvl="0"/>
-            <a:r>
-              <a:rPr lang="en-US" sz="1800"/>
-              <a:t>1-8 on branches each working on different independent plans.</a:t>
-            </a:r>
-          </a:p>
-          <a:p>
-            <a:pPr lvl="0"/>
-            <a:r>
-              <a:rPr lang="en-US" sz="1800"/>
-              <a:t>I am not nearly comfortable enough with agent proof to let them do subagents without observing.</a:t>
-            </a:r>
-          </a:p>
-          <a:p>
-            <a:pPr lvl="0"/>
-            <a:r>
-              <a:rPr lang="en-US" sz="1800"/>
-              <a:t>Cursor was much better at interruption to guide things.</a:t>
-            </a:r>
-          </a:p>
-          <a:p>
-            <a:pPr lvl="0"/>
-            <a:r>
-              <a:rPr lang="en-US" sz="1800"/>
-              <a:t>Claude is getting better at it.</a:t>
+              <a:t>Starting with a textbook that has a ton of good prose is a huge plus.</a:t>
+            </a:r>
+          </a:p>
+          <a:p>
+            <a:pPr lvl="0"/>
+            <a:r>
+              <a:rPr lang="en-US" sz="1800"/>
+              <a:t>I did discover a few things about the textbook.</a:t>
+            </a:r>
+          </a:p>
+          <a:p>
+            <a:pPr lvl="0"/>
+            <a:r>
+              <a:rPr lang="en-US" sz="1800"/>
+              <a:t>It needs more on Scheduling. I only built Help-First scheduling.</a:t>
+            </a:r>
+          </a:p>
+          <a:p>
+            <a:pPr lvl="0"/>
+            <a:r>
+              <a:rPr lang="en-US" sz="1800"/>
+              <a:t>It used (K,V) in tree sets as mappings, but I had to make this explicit. Particularly with an Ordered Key Mapping.</a:t>
+            </a:r>
+          </a:p>
+          <a:p>
+            <a:pPr lvl="0"/>
+            <a:r>
+              <a:rPr lang="en-US" sz="1800"/>
+              <a:t>With this Ordered Tables, which are not too complex, were much easier to prove.</a:t>
+            </a:r>
+          </a:p>
+          <a:p>
+            <a:pPr lvl="0"/>
+            <a:r>
+              <a:rPr lang="en-US" sz="1800"/>
+              <a:t>APAS’s discussion of Union Find was too thin. Path compression was very difficult.</a:t>
+            </a:r>
+          </a:p>
+          <a:p>
+            <a:pPr lvl="0"/>
+            <a:r>
+              <a:rPr lang="en-US" sz="1800"/>
+              <a:t>I had to start with Nikhil Swammy et. al’s AlgoCLRS’s implemention and proofs.</a:t>
             </a:r>
           </a:p>
         </p:txBody>
@@ -15643,7 +16015,7 @@
             </a:pPr>
             <a:r>
               <a:rPr lang="en-US" sz="3200"/>
-              <a:t>Software Engineering in AI Paired Proving- Models</a:t>
+              <a:t>Software Engineering in AI Paired Proving</a:t>
             </a:r>
           </a:p>
         </p:txBody>
@@ -15666,56 +16038,70 @@
             <a:pPr lvl="0"/>
             <a:r>
               <a:rPr lang="en-US" sz="1800"/>
-              <a:t>The agents I used are: various Google, OpenAI and Anthropic.</a:t>
-            </a:r>
-          </a:p>
-          <a:p>
-            <a:pPr lvl="0"/>
-            <a:r>
-              <a:rPr lang="en-US" sz="1800"/>
-              <a:t>A google agent once took 12 minutes to ‘echo HI’ to test it’s terminal.</a:t>
-            </a:r>
-          </a:p>
-          <a:p>
-            <a:pPr lvl="0"/>
-            <a:r>
-              <a:rPr lang="en-US" sz="1800"/>
-              <a:t>Anthropics models are signficantly better than OpenAI.</a:t>
-            </a:r>
-          </a:p>
-          <a:p>
-            <a:pPr lvl="0"/>
-            <a:r>
-              <a:rPr lang="en-US" sz="1800"/>
-              <a:t>And Claude Code’s cost is the least so far.</a:t>
-            </a:r>
-          </a:p>
-          <a:p>
-            <a:pPr lvl="0"/>
-            <a:r>
-              <a:rPr lang="en-US" sz="1800"/>
-              <a:t>They are said in the press to be spending $5000 per month per user.</a:t>
-            </a:r>
-          </a:p>
-          <a:p>
-            <a:pPr lvl="0"/>
-            <a:r>
-              <a:rPr lang="en-US" sz="1800"/>
-              <a:t>They are buying market share (what happened to Amazon’s buying market share phase?).</a:t>
-            </a:r>
-          </a:p>
-          <a:p>
-            <a:pPr lvl="0"/>
-            <a:r>
-              <a:rPr lang="en-US" sz="1800"/>
-              <a:t>And they are buying coding interactions.</a:t>
-            </a:r>
-          </a:p>
-          <a:p>
-            <a:pPr lvl="0"/>
-            <a:r>
-              <a:rPr lang="en-US" sz="1800"/>
-              <a:t>But both vendors are playing leap frog.</a:t>
+              <a:t>I use git work trees for proof.</a:t>
+            </a:r>
+          </a:p>
+          <a:p>
+            <a:pPr lvl="0"/>
+            <a:r>
+              <a:rPr lang="en-US" sz="1800"/>
+              <a:t>The good news is git is powerful and the agents understand it.</a:t>
+            </a:r>
+          </a:p>
+          <a:p>
+            <a:pPr lvl="0"/>
+            <a:r>
+              <a:rPr lang="en-US" sz="1800"/>
+              <a:t>The bad news is the agents can indeed start using advanced features and get things wrong.</a:t>
+            </a:r>
+          </a:p>
+          <a:p>
+            <a:pPr lvl="0"/>
+            <a:r>
+              <a:rPr lang="en-US" sz="1800"/>
+              <a:t>I work with between 1 and 9 agents.</a:t>
+            </a:r>
+          </a:p>
+          <a:p>
+            <a:pPr lvl="0"/>
+            <a:r>
+              <a:rPr lang="en-US" sz="1800"/>
+              <a:t>One on veracity.</a:t>
+            </a:r>
+          </a:p>
+          <a:p>
+            <a:pPr lvl="0"/>
+            <a:r>
+              <a:rPr lang="en-US" sz="1800"/>
+              <a:t>One orchestrator, writing plans, prompts and controlling merges.</a:t>
+            </a:r>
+          </a:p>
+          <a:p>
+            <a:pPr lvl="0"/>
+            <a:r>
+              <a:rPr lang="en-US" sz="1800"/>
+              <a:t>1-8 on branches each working on different independent plans.</a:t>
+            </a:r>
+          </a:p>
+          <a:p>
+            <a:pPr lvl="0"/>
+            <a:r>
+              <a:rPr lang="en-US" sz="1800"/>
+              <a:t>I am not nearly comfortable enough with agent proof to let them do subagents without observing.</a:t>
+            </a:r>
+          </a:p>
+          <a:p>
+            <a:pPr lvl="0"/>
+            <a:r>
+              <a:rPr lang="en-US" sz="1800"/>
+              <a:t>Cursor was much better at interruption to guide things.</a:t>
+            </a:r>
+          </a:p>
+          <a:p>
+            <a:pPr lvl="0"/>
+            <a:r>
+              <a:rPr lang="en-US" sz="1800"/>
+              <a:t>Claude is getting better at it.</a:t>
             </a:r>
           </a:p>
         </p:txBody>
@@ -15762,7 +16148,7 @@
             </a:pPr>
             <a:r>
               <a:rPr lang="en-US" sz="3200"/>
-              <a:t>Software Engineering in AI Paired Proving- Problems</a:t>
+              <a:t>Software Engineering in AI Paired Proving- Models</a:t>
             </a:r>
           </a:p>
         </p:txBody>
@@ -15785,56 +16171,56 @@
             <a:pPr lvl="0"/>
             <a:r>
               <a:rPr lang="en-US" sz="1800"/>
-              <a:t>They are inconsistent.</a:t>
-            </a:r>
-          </a:p>
-          <a:p>
-            <a:pPr lvl="0"/>
-            <a:r>
-              <a:rPr lang="en-US" sz="1800"/>
-              <a:t>They lie.</a:t>
-            </a:r>
-          </a:p>
-          <a:p>
-            <a:pPr lvl="0"/>
-            <a:r>
-              <a:rPr lang="en-US" sz="1800"/>
-              <a:t>They cheat.</a:t>
-            </a:r>
-          </a:p>
-          <a:p>
-            <a:pPr lvl="0"/>
-            <a:r>
-              <a:rPr lang="en-US" sz="1800"/>
-              <a:t>They say I can’t prove that!</a:t>
-            </a:r>
-          </a:p>
-          <a:p>
-            <a:pPr lvl="0"/>
-            <a:r>
-              <a:rPr lang="en-US" sz="1800"/>
-              <a:t>They err.</a:t>
-            </a:r>
-          </a:p>
-          <a:p>
-            <a:pPr lvl="0"/>
-            <a:r>
-              <a:rPr lang="en-US" sz="1800"/>
-              <a:t>But mostly they are just forgetful.</a:t>
-            </a:r>
-          </a:p>
-          <a:p>
-            <a:pPr lvl="0"/>
-            <a:r>
-              <a:rPr lang="en-US" sz="1800"/>
-              <a:t>My attempts to give them coding standard checklists, ala Watts Humphrey and the PSP failed.</a:t>
-            </a:r>
-          </a:p>
-          <a:p>
-            <a:pPr lvl="0"/>
-            <a:r>
-              <a:rPr lang="en-US" sz="1800"/>
-              <a:t>Sometimes they would say “The checklist was followed” and then admit “I lied.”</a:t>
+              <a:t>The agents I used are: various Google, OpenAI and Anthropic.</a:t>
+            </a:r>
+          </a:p>
+          <a:p>
+            <a:pPr lvl="0"/>
+            <a:r>
+              <a:rPr lang="en-US" sz="1800"/>
+              <a:t>A google agent once took 12 minutes to ‘echo HI’ to test it’s terminal.</a:t>
+            </a:r>
+          </a:p>
+          <a:p>
+            <a:pPr lvl="0"/>
+            <a:r>
+              <a:rPr lang="en-US" sz="1800"/>
+              <a:t>Anthropics models are signficantly better than OpenAI.</a:t>
+            </a:r>
+          </a:p>
+          <a:p>
+            <a:pPr lvl="0"/>
+            <a:r>
+              <a:rPr lang="en-US" sz="1800"/>
+              <a:t>And Claude Code’s cost is the least so far.</a:t>
+            </a:r>
+          </a:p>
+          <a:p>
+            <a:pPr lvl="0"/>
+            <a:r>
+              <a:rPr lang="en-US" sz="1800"/>
+              <a:t>They are said in the press to be spending $5000 per month per user.</a:t>
+            </a:r>
+          </a:p>
+          <a:p>
+            <a:pPr lvl="0"/>
+            <a:r>
+              <a:rPr lang="en-US" sz="1800"/>
+              <a:t>They are buying market share (what happened to Amazon’s buying market share phase?).</a:t>
+            </a:r>
+          </a:p>
+          <a:p>
+            <a:pPr lvl="0"/>
+            <a:r>
+              <a:rPr lang="en-US" sz="1800"/>
+              <a:t>And they are buying coding interactions.</a:t>
+            </a:r>
+          </a:p>
+          <a:p>
+            <a:pPr lvl="0"/>
+            <a:r>
+              <a:rPr lang="en-US" sz="1800"/>
+              <a:t>But both vendors are playing leap frog.</a:t>
             </a:r>
           </a:p>
         </p:txBody>
@@ -16016,49 +16402,56 @@
             <a:pPr lvl="0"/>
             <a:r>
               <a:rPr lang="en-US" sz="1800"/>
-              <a:t>They are getting better, very few code hallucinations.</a:t>
-            </a:r>
-          </a:p>
-          <a:p>
-            <a:pPr lvl="0"/>
-            <a:r>
-              <a:rPr lang="en-US" sz="1800"/>
-              <a:t>If you tell them you are Dr. FunkenProof and they are Igor, they hallucinate whole modules.</a:t>
-            </a:r>
-          </a:p>
-          <a:p>
-            <a:pPr lvl="0"/>
-            <a:r>
-              <a:rPr lang="en-US" sz="1800"/>
-              <a:t>Just a few months ago only Claude could sweep a codebase decently.</a:t>
-            </a:r>
-          </a:p>
-          <a:p>
-            <a:pPr lvl="0"/>
-            <a:r>
-              <a:rPr lang="en-US" sz="1800"/>
-              <a:t>Now both Claude and OpenAI can.</a:t>
-            </a:r>
-          </a:p>
-          <a:p>
-            <a:pPr lvl="0"/>
-            <a:r>
-              <a:rPr lang="en-US" sz="1800"/>
-              <a:t>And now they can prove like heck.</a:t>
-            </a:r>
-          </a:p>
-          <a:p>
-            <a:pPr lvl="0"/>
-            <a:r>
-              <a:rPr lang="en-US" sz="1800"/>
-              <a:t>10x what I can do.</a:t>
-            </a:r>
-          </a:p>
-          <a:p>
-            <a:pPr lvl="0"/>
-            <a:r>
-              <a:rPr lang="en-US" sz="1800"/>
-              <a:t>Claude wants $25 per code review now, probably because they can and it’s expensive if they’re using pure LLMs.</a:t>
+              <a:t>They are inconsistent.</a:t>
+            </a:r>
+          </a:p>
+          <a:p>
+            <a:pPr lvl="0"/>
+            <a:r>
+              <a:rPr lang="en-US" sz="1800"/>
+              <a:t>They lie.</a:t>
+            </a:r>
+          </a:p>
+          <a:p>
+            <a:pPr lvl="0"/>
+            <a:r>
+              <a:rPr lang="en-US" sz="1800"/>
+              <a:t>They cheat.</a:t>
+            </a:r>
+          </a:p>
+          <a:p>
+            <a:pPr lvl="0"/>
+            <a:r>
+              <a:rPr lang="en-US" sz="1800"/>
+              <a:t>They say I can’t prove that!</a:t>
+            </a:r>
+          </a:p>
+          <a:p>
+            <a:pPr lvl="0"/>
+            <a:r>
+              <a:rPr lang="en-US" sz="1800"/>
+              <a:t>They err.</a:t>
+            </a:r>
+          </a:p>
+          <a:p>
+            <a:pPr lvl="0"/>
+            <a:r>
+              <a:rPr lang="en-US" sz="1800"/>
+              <a:t>But mostly they are just forgetful.</a:t>
+            </a:r>
+          </a:p>
+          <a:p>
+            <a:pPr lvl="0"/>
+            <a:r>
+              <a:rPr lang="en-US" sz="1800"/>
+              <a:t>My attempts to give them coding standard checklists, ala Watts Humphrey and the PSP failed.</a:t>
+            </a:r>
+          </a:p>
+          <a:p>
+            <a:pPr lvl="0"/>
+            <a:r>
+              <a:rPr lang="en-US" sz="1800"/>
+              <a:t>Sometimes they would say “The checklist was followed” and then admit “I lied.”</a:t>
             </a:r>
           </a:p>
         </p:txBody>
@@ -16128,78 +16521,49 @@
             <a:pPr lvl="0"/>
             <a:r>
               <a:rPr lang="en-US" sz="1800"/>
-              <a:t>What is the limiting factor now? </a:t>
-            </a:r>
-            <a:r>
-              <a:rPr lang="en-US" sz="1800" b="1"/>
-              <a:t>Code Review!</a:t>
-            </a:r>
-          </a:p>
-          <a:p>
-            <a:pPr lvl="0"/>
-            <a:r>
-              <a:rPr lang="en-US" sz="1800"/>
-              <a:t>But really </a:t>
-            </a:r>
-            <a:r>
-              <a:rPr lang="en-US" sz="1800" b="1"/>
-              <a:t>Spec Review</a:t>
-            </a:r>
-            <a:r>
-              <a:rPr lang="en-US" sz="1800"/>
-              <a:t> when you prove.</a:t>
-            </a:r>
-          </a:p>
-          <a:p>
-            <a:pPr lvl="0"/>
-            <a:r>
-              <a:rPr lang="en-US" sz="1800"/>
-              <a:t>What can we do to simplify code review?</a:t>
-            </a:r>
-          </a:p>
-          <a:p>
-            <a:pPr lvl="0" indent="-342900" marL="342900">
-              <a:buAutoNum type="arabicPeriod"/>
-            </a:pPr>
-            <a:r>
-              <a:rPr lang="en-US" sz="1800"/>
-              <a:t>Modularity - traits/impls in Verus.</a:t>
-            </a:r>
-          </a:p>
-          <a:p>
-            <a:pPr lvl="0" indent="-342900" marL="342900">
-              <a:buAutoNum startAt="2" type="arabicPeriod"/>
-            </a:pPr>
-            <a:r>
-              <a:rPr lang="en-US" sz="1800"/>
-              <a:t>TOC - This organizes the boilerplate to make reading easier.</a:t>
-            </a:r>
-          </a:p>
-          <a:p>
-            <a:pPr lvl="0" indent="-342900" marL="342900">
-              <a:buAutoNum startAt="3" type="arabicPeriod"/>
-            </a:pPr>
-            <a:r>
-              <a:rPr lang="en-US" sz="1800"/>
-              <a:t>Proof - I really just read the specs. If they’re right the code is right!</a:t>
-            </a:r>
-          </a:p>
-          <a:p>
-            <a:pPr lvl="0" indent="-342900" marL="342900">
-              <a:buAutoNum startAt="4" type="arabicPeriod"/>
-            </a:pPr>
-            <a:r>
-              <a:rPr lang="en-US" sz="1800"/>
-              <a:t>Tests - are hugely useful when you don’t trust your coding team.</a:t>
-            </a:r>
-          </a:p>
-          <a:p>
-            <a:pPr lvl="0" indent="-342900" marL="342900">
-              <a:buAutoNum startAt="5" type="arabicPeriod"/>
-            </a:pPr>
-            <a:r>
-              <a:rPr lang="en-US" sz="1800"/>
-              <a:t>Formatting - rust formatting has been adopted in Verus. It is very low density. I built a minimizing formatter to cut down on my working memory load while reviewing. F* is much tighter.</a:t>
+              <a:t>They are getting better, very few code hallucinations.</a:t>
+            </a:r>
+          </a:p>
+          <a:p>
+            <a:pPr lvl="0"/>
+            <a:r>
+              <a:rPr lang="en-US" sz="1800"/>
+              <a:t>If you tell them you are Dr. FunkenProof and they are Igor, they hallucinate whole modules.</a:t>
+            </a:r>
+          </a:p>
+          <a:p>
+            <a:pPr lvl="0"/>
+            <a:r>
+              <a:rPr lang="en-US" sz="1800"/>
+              <a:t>Just a few months ago only Claude could sweep a codebase decently.</a:t>
+            </a:r>
+          </a:p>
+          <a:p>
+            <a:pPr lvl="0"/>
+            <a:r>
+              <a:rPr lang="en-US" sz="1800"/>
+              <a:t>Now both Claude and OpenAI can.</a:t>
+            </a:r>
+          </a:p>
+          <a:p>
+            <a:pPr lvl="0"/>
+            <a:r>
+              <a:rPr lang="en-US" sz="1800"/>
+              <a:t>And now they can prove like heck.</a:t>
+            </a:r>
+          </a:p>
+          <a:p>
+            <a:pPr lvl="0"/>
+            <a:r>
+              <a:rPr lang="en-US" sz="1800"/>
+              <a:t>10x what I can do.</a:t>
+            </a:r>
+          </a:p>
+          <a:p>
+            <a:pPr lvl="0"/>
+            <a:r>
+              <a:rPr lang="en-US" sz="1800"/>
+              <a:t>Claude wants $25 per code review now, probably because they can and it’s expensive if they’re using pure LLMs.</a:t>
             </a:r>
           </a:p>
         </p:txBody>
@@ -16246,7 +16610,7 @@
             </a:pPr>
             <a:r>
               <a:rPr lang="en-US" sz="3200"/>
-              <a:t>The AI Paired Programming Interfaces</a:t>
+              <a:t>Software Engineering in AI Paired Proving- Problems</a:t>
             </a:r>
           </a:p>
         </p:txBody>
@@ -16269,49 +16633,78 @@
             <a:pPr lvl="0"/>
             <a:r>
               <a:rPr lang="en-US" sz="1800"/>
-              <a:t>What you want is pretty obvious with experience: TEXT still rules.</a:t>
-            </a:r>
-          </a:p>
-          <a:p>
-            <a:pPr lvl="0"/>
-            <a:r>
-              <a:rPr lang="en-US" sz="1800"/>
-              <a:t>You want one window with your core interaction. The agent tells you what it is doing in it.</a:t>
-            </a:r>
-          </a:p>
-          <a:p>
-            <a:pPr lvl="0"/>
-            <a:r>
-              <a:rPr lang="en-US" sz="1800"/>
-              <a:t>You want one to watch your compile, tests and scripts.</a:t>
-            </a:r>
-          </a:p>
-          <a:p>
-            <a:pPr lvl="0"/>
-            <a:r>
-              <a:rPr lang="en-US" sz="1800"/>
-              <a:t>You want one window to have the LLM show you it’s thinking and allow you to question and change it.</a:t>
-            </a:r>
-          </a:p>
-          <a:p>
-            <a:pPr lvl="0"/>
-            <a:r>
-              <a:rPr lang="en-US" sz="1800"/>
-              <a:t>I learned a ton from watching agents think.</a:t>
-            </a:r>
-          </a:p>
-          <a:p>
-            <a:pPr lvl="0"/>
-            <a:r>
-              <a:rPr lang="en-US" sz="1800"/>
-              <a:t>I suspect they are hiding most of their thinking now to prevent them from being used to train new AIs.</a:t>
-            </a:r>
-          </a:p>
-          <a:p>
-            <a:pPr lvl="0"/>
-            <a:r>
-              <a:rPr lang="en-US" sz="1800"/>
-              <a:t>And you want it not to delete your previous conversation on token compression.</a:t>
+              <a:t>What is the limiting factor now? </a:t>
+            </a:r>
+            <a:r>
+              <a:rPr lang="en-US" sz="1800" b="1"/>
+              <a:t>Code Review!</a:t>
+            </a:r>
+          </a:p>
+          <a:p>
+            <a:pPr lvl="0"/>
+            <a:r>
+              <a:rPr lang="en-US" sz="1800"/>
+              <a:t>But really </a:t>
+            </a:r>
+            <a:r>
+              <a:rPr lang="en-US" sz="1800" b="1"/>
+              <a:t>Spec Review</a:t>
+            </a:r>
+            <a:r>
+              <a:rPr lang="en-US" sz="1800"/>
+              <a:t> when you prove.</a:t>
+            </a:r>
+          </a:p>
+          <a:p>
+            <a:pPr lvl="0"/>
+            <a:r>
+              <a:rPr lang="en-US" sz="1800"/>
+              <a:t>What can we do to simplify code review?</a:t>
+            </a:r>
+          </a:p>
+          <a:p>
+            <a:pPr lvl="0" indent="-342900" marL="342900">
+              <a:buAutoNum type="arabicPeriod"/>
+            </a:pPr>
+            <a:r>
+              <a:rPr lang="en-US" sz="1800"/>
+              <a:t>Modularity - traits/impls in Verus.</a:t>
+            </a:r>
+          </a:p>
+          <a:p>
+            <a:pPr lvl="0" indent="-342900" marL="342900">
+              <a:buAutoNum startAt="2" type="arabicPeriod"/>
+            </a:pPr>
+            <a:r>
+              <a:rPr lang="en-US" sz="1800"/>
+              <a:t>TOC - This organizes the boilerplate to make reading easier.</a:t>
+            </a:r>
+          </a:p>
+          <a:p>
+            <a:pPr lvl="0" indent="-342900" marL="342900">
+              <a:buAutoNum startAt="3" type="arabicPeriod"/>
+            </a:pPr>
+            <a:r>
+              <a:rPr lang="en-US" sz="1800"/>
+              <a:t>Proof - I really just read the specs. If they’re right the code is right!</a:t>
+            </a:r>
+          </a:p>
+          <a:p>
+            <a:pPr lvl="0" indent="-342900" marL="342900">
+              <a:buAutoNum startAt="4" type="arabicPeriod"/>
+            </a:pPr>
+            <a:r>
+              <a:rPr lang="en-US" sz="1800"/>
+              <a:t>Tests - are hugely useful when you don’t trust your coding team.</a:t>
+            </a:r>
+          </a:p>
+          <a:p>
+            <a:pPr lvl="0" indent="-342900" marL="342900">
+              <a:buAutoNum startAt="5" type="arabicPeriod"/>
+            </a:pPr>
+            <a:r>
+              <a:rPr lang="en-US" sz="1800"/>
+              <a:t>Formatting - rust formatting has been adopted in Verus. It is very low density. I built a minimizing formatter to cut down on my working memory load while reviewing. F* is much tighter.</a:t>
             </a:r>
           </a:p>
         </p:txBody>
@@ -16322,6 +16715,118 @@
 </file>
 
 <file path=ppt/slides/slide73.xml><?xml version="1.0" encoding="utf-8"?>
+<p:sld xmlns:a="http://schemas.openxmlformats.org/drawingml/2006/main" xmlns:r="http://schemas.openxmlformats.org/officeDocument/2006/relationships" xmlns:p="http://schemas.openxmlformats.org/presentationml/2006/main">
+  <p:cSld>
+    <p:spTree>
+      <p:nvGrpSpPr>
+        <p:cNvPr id="1" name=""/>
+        <p:cNvGrpSpPr/>
+        <p:nvPr/>
+      </p:nvGrpSpPr>
+      <p:grpSpPr>
+        <a:xfrm>
+          <a:off x="0" y="0"/>
+          <a:ext cx="0" cy="0"/>
+          <a:chOff x="0" y="0"/>
+          <a:chExt cx="0" cy="0"/>
+        </a:xfrm>
+      </p:grpSpPr>
+      <p:sp>
+        <p:nvSpPr>
+          <p:cNvPr id="2" name="Title 1"/>
+          <p:cNvSpPr>
+            <a:spLocks noGrp="1"/>
+          </p:cNvSpPr>
+          <p:nvPr>
+            <p:ph type="title"/>
+          </p:nvPr>
+        </p:nvSpPr>
+        <p:spPr/>
+        <p:txBody>
+          <a:bodyPr/>
+          <a:lstStyle/>
+          <a:p>
+            <a:pPr lvl="0" indent="0" marL="0">
+              <a:buNone/>
+            </a:pPr>
+            <a:r>
+              <a:rPr lang="en-US" sz="3200"/>
+              <a:t>The AI Paired Programming Interfaces</a:t>
+            </a:r>
+          </a:p>
+        </p:txBody>
+      </p:sp>
+      <p:sp>
+        <p:nvSpPr>
+          <p:cNvPr id="3" name="Content Placeholder 2"/>
+          <p:cNvSpPr>
+            <a:spLocks noGrp="1"/>
+          </p:cNvSpPr>
+          <p:nvPr>
+            <p:ph idx="1"/>
+          </p:nvPr>
+        </p:nvSpPr>
+        <p:spPr/>
+        <p:txBody>
+          <a:bodyPr/>
+          <a:lstStyle/>
+          <a:p>
+            <a:pPr lvl="0"/>
+            <a:r>
+              <a:rPr lang="en-US" sz="1800"/>
+              <a:t>What you want is pretty obvious with experience: TEXT still rules.</a:t>
+            </a:r>
+          </a:p>
+          <a:p>
+            <a:pPr lvl="0"/>
+            <a:r>
+              <a:rPr lang="en-US" sz="1800"/>
+              <a:t>You want one window with your core interaction. The agent tells you what it is doing in it.</a:t>
+            </a:r>
+          </a:p>
+          <a:p>
+            <a:pPr lvl="0"/>
+            <a:r>
+              <a:rPr lang="en-US" sz="1800"/>
+              <a:t>You want one to watch your compile, tests and scripts.</a:t>
+            </a:r>
+          </a:p>
+          <a:p>
+            <a:pPr lvl="0"/>
+            <a:r>
+              <a:rPr lang="en-US" sz="1800"/>
+              <a:t>You want one window to have the LLM show you it’s thinking and allow you to question and change it.</a:t>
+            </a:r>
+          </a:p>
+          <a:p>
+            <a:pPr lvl="0"/>
+            <a:r>
+              <a:rPr lang="en-US" sz="1800"/>
+              <a:t>I learned a ton from watching agents think.</a:t>
+            </a:r>
+          </a:p>
+          <a:p>
+            <a:pPr lvl="0"/>
+            <a:r>
+              <a:rPr lang="en-US" sz="1800"/>
+              <a:t>I suspect they are hiding most of their thinking now to prevent them from being used to train new AIs.</a:t>
+            </a:r>
+          </a:p>
+          <a:p>
+            <a:pPr lvl="0"/>
+            <a:r>
+              <a:rPr lang="en-US" sz="1800"/>
+              <a:t>And you want it not to delete your previous conversation on token compression.</a:t>
+            </a:r>
+          </a:p>
+        </p:txBody>
+      </p:sp>
+    </p:spTree>
+  </p:cSld>
+</p:sld>
+</file>
+
+<file path=ppt/slides/slide74.xml><?xml version="1.0" encoding="utf-8"?>
 <p:sld xmlns:a="http://schemas.openxmlformats.org/drawingml/2006/main" xmlns:r="http://schemas.openxmlformats.org/officeDocument/2006/relationships" xmlns:p="http://schemas.openxmlformats.org/presentationml/2006/main">
   <p:cSld>
     <p:spTree>
@@ -16712,111 +17217,6 @@
 </p:sld>
 </file>
 
-<file path=ppt/slides/slide74.xml><?xml version="1.0" encoding="utf-8"?>
-<p:sld xmlns:a="http://schemas.openxmlformats.org/drawingml/2006/main" xmlns:r="http://schemas.openxmlformats.org/officeDocument/2006/relationships" xmlns:p="http://schemas.openxmlformats.org/presentationml/2006/main">
-  <p:cSld>
-    <p:spTree>
-      <p:nvGrpSpPr>
-        <p:cNvPr id="1" name=""/>
-        <p:cNvGrpSpPr/>
-        <p:nvPr/>
-      </p:nvGrpSpPr>
-      <p:grpSpPr>
-        <a:xfrm>
-          <a:off x="0" y="0"/>
-          <a:ext cx="0" cy="0"/>
-          <a:chOff x="0" y="0"/>
-          <a:chExt cx="0" cy="0"/>
-        </a:xfrm>
-      </p:grpSpPr>
-      <p:sp>
-        <p:nvSpPr>
-          <p:cNvPr id="2" name="Title 1"/>
-          <p:cNvSpPr>
-            <a:spLocks noGrp="1"/>
-          </p:cNvSpPr>
-          <p:nvPr>
-            <p:ph type="title"/>
-          </p:nvPr>
-        </p:nvSpPr>
-        <p:spPr/>
-        <p:txBody>
-          <a:bodyPr/>
-          <a:lstStyle/>
-          <a:p>
-            <a:pPr lvl="0" indent="0" marL="0">
-              <a:buNone/>
-            </a:pPr>
-            <a:r>
-              <a:rPr lang="en-US" sz="3200"/>
-              <a:t>The Internet Apocalypse</a:t>
-            </a:r>
-          </a:p>
-        </p:txBody>
-      </p:sp>
-      <p:sp>
-        <p:nvSpPr>
-          <p:cNvPr id="3" name="Content Placeholder 2"/>
-          <p:cNvSpPr>
-            <a:spLocks noGrp="1"/>
-          </p:cNvSpPr>
-          <p:nvPr>
-            <p:ph idx="1"/>
-          </p:nvPr>
-        </p:nvSpPr>
-        <p:spPr/>
-        <p:txBody>
-          <a:bodyPr/>
-          <a:lstStyle/>
-          <a:p>
-            <a:pPr lvl="0"/>
-            <a:r>
-              <a:rPr lang="en-US" sz="1800"/>
-              <a:t>I asked Claude Code to check its switches on startup for me, at the End of Jan 2026.</a:t>
-            </a:r>
-          </a:p>
-          <a:p>
-            <a:pPr lvl="0"/>
-            <a:r>
-              <a:rPr lang="en-US" sz="1800"/>
-              <a:t>It immediately started disassembling itself.</a:t>
-            </a:r>
-          </a:p>
-          <a:p>
-            <a:pPr lvl="0"/>
-            <a:r>
-              <a:rPr lang="en-US" sz="1800"/>
-              <a:t>Scared the heck out of me.</a:t>
-            </a:r>
-          </a:p>
-          <a:p>
-            <a:pPr lvl="0"/>
-            <a:r>
-              <a:rPr lang="en-US" sz="1800"/>
-              <a:t>I told it to read it’s docs.</a:t>
-            </a:r>
-          </a:p>
-          <a:p>
-            <a:pPr lvl="0"/>
-            <a:r>
-              <a:rPr lang="en-US" sz="1800"/>
-              <a:t>I have 100% belief that these LLMs are moving faster than computer security.</a:t>
-            </a:r>
-          </a:p>
-          <a:p>
-            <a:pPr lvl="0"/>
-            <a:r>
-              <a:rPr lang="en-US" sz="1800"/>
-              <a:t>It’s verify or be hacked at this point.</a:t>
-            </a:r>
-          </a:p>
-        </p:txBody>
-      </p:sp>
-    </p:spTree>
-  </p:cSld>
-</p:sld>
-</file>
-
 <file path=ppt/slides/slide75.xml><?xml version="1.0" encoding="utf-8"?>
 <p:sld xmlns:a="http://schemas.openxmlformats.org/drawingml/2006/main" xmlns:r="http://schemas.openxmlformats.org/officeDocument/2006/relationships" xmlns:p="http://schemas.openxmlformats.org/presentationml/2006/main">
   <p:cSld>
@@ -16877,42 +17277,42 @@
             <a:pPr lvl="0"/>
             <a:r>
               <a:rPr lang="en-US" sz="1800"/>
-              <a:t>Where should we focus our limited, but quickly growing, proving power?</a:t>
-            </a:r>
-          </a:p>
-          <a:p>
-            <a:pPr lvl="0"/>
-            <a:r>
-              <a:rPr lang="en-US" sz="1800"/>
-              <a:t>In theory 70% of intrusions are solved by type safe languages.</a:t>
-            </a:r>
-          </a:p>
-          <a:p>
-            <a:pPr lvl="0"/>
-            <a:r>
-              <a:rPr lang="en-US" sz="1800"/>
-              <a:t>I suspect that this just ignores way too much of the human aspect.</a:t>
-            </a:r>
-          </a:p>
-          <a:p>
-            <a:pPr lvl="0"/>
-            <a:r>
-              <a:rPr lang="en-US" sz="1800"/>
-              <a:t>I have never liked a single estimation paper’s methods.</a:t>
-            </a:r>
-          </a:p>
-          <a:p>
-            <a:pPr lvl="0"/>
-            <a:r>
-              <a:rPr lang="en-US" sz="1800"/>
-              <a:t>One way to help us focus our new-found superpowers is to survey KLOC type-unsafe x Interfaces x Running Services x $ Value.</a:t>
-            </a:r>
-          </a:p>
-          <a:p>
-            <a:pPr lvl="0"/>
-            <a:r>
-              <a:rPr lang="en-US" sz="1800"/>
-              <a:t>Which Amazon and Microsoft can probably measure.</a:t>
+              <a:t>I asked Claude Code to check its switches on startup for me, at the End of Jan 2026.</a:t>
+            </a:r>
+          </a:p>
+          <a:p>
+            <a:pPr lvl="0"/>
+            <a:r>
+              <a:rPr lang="en-US" sz="1800"/>
+              <a:t>It immediately started disassembling itself.</a:t>
+            </a:r>
+          </a:p>
+          <a:p>
+            <a:pPr lvl="0"/>
+            <a:r>
+              <a:rPr lang="en-US" sz="1800"/>
+              <a:t>Scared the heck out of me.</a:t>
+            </a:r>
+          </a:p>
+          <a:p>
+            <a:pPr lvl="0"/>
+            <a:r>
+              <a:rPr lang="en-US" sz="1800"/>
+              <a:t>I told it to read it’s docs.</a:t>
+            </a:r>
+          </a:p>
+          <a:p>
+            <a:pPr lvl="0"/>
+            <a:r>
+              <a:rPr lang="en-US" sz="1800"/>
+              <a:t>I have 100% belief that these LLMs are moving faster than computer security.</a:t>
+            </a:r>
+          </a:p>
+          <a:p>
+            <a:pPr lvl="0"/>
+            <a:r>
+              <a:rPr lang="en-US" sz="1800"/>
+              <a:t>It’s verify or be hacked at this point.</a:t>
             </a:r>
           </a:p>
         </p:txBody>
@@ -16959,7 +17359,7 @@
             </a:pPr>
             <a:r>
               <a:rPr lang="en-US" sz="3200"/>
-              <a:t>Future Work</a:t>
+              <a:t>The Internet Apocalypse</a:t>
             </a:r>
           </a:p>
         </p:txBody>
@@ -16982,49 +17382,42 @@
             <a:pPr lvl="0"/>
             <a:r>
               <a:rPr lang="en-US" sz="1800"/>
-              <a:t>GRASE (Medical Acronym) -</a:t>
-            </a:r>
-          </a:p>
-          <a:p>
-            <a:pPr lvl="1"/>
-            <a:r>
-              <a:rPr lang="en-US" sz="1800"/>
-              <a:t>Generally Recognized as Safe and Effective</a:t>
-            </a:r>
-          </a:p>
-          <a:p>
-            <a:pPr lvl="0"/>
-            <a:r>
-              <a:rPr lang="en-US" sz="1800" b="1"/>
-              <a:t>GRASE-</a:t>
-            </a:r>
-          </a:p>
-          <a:p>
-            <a:pPr lvl="1"/>
-            <a:r>
-              <a:rPr lang="en-US" sz="1800" b="1"/>
-              <a:t>Git Recording Agentic Software Engineering</a:t>
-            </a:r>
-          </a:p>
-          <a:p>
-            <a:pPr lvl="0"/>
-            <a:r>
-              <a:rPr lang="en-US" sz="1800"/>
-              <a:t>The GRASE project’s goal is to make statistical process software optimization for agentic coding:</a:t>
-            </a:r>
-          </a:p>
-          <a:p>
-            <a:pPr lvl="1"/>
-            <a:r>
-              <a:rPr lang="en-US" sz="1800" b="1"/>
-              <a:t>Generally Regarded As Simple and Effective.</a:t>
-            </a:r>
-          </a:p>
-          <a:p>
-            <a:pPr lvl="0"/>
-            <a:r>
-              <a:rPr lang="en-US" sz="1800"/>
-              <a:t>A Watt’s Humphrey style PSP data collection done essentially effortlessly by the agents in the background.</a:t>
+              <a:t>Where should we focus our limited, but quickly growing, proving power?</a:t>
+            </a:r>
+          </a:p>
+          <a:p>
+            <a:pPr lvl="0"/>
+            <a:r>
+              <a:rPr lang="en-US" sz="1800"/>
+              <a:t>In theory 70% of intrusions are solved by type safe languages.</a:t>
+            </a:r>
+          </a:p>
+          <a:p>
+            <a:pPr lvl="0"/>
+            <a:r>
+              <a:rPr lang="en-US" sz="1800"/>
+              <a:t>I suspect that this just ignores way too much of the human aspect.</a:t>
+            </a:r>
+          </a:p>
+          <a:p>
+            <a:pPr lvl="0"/>
+            <a:r>
+              <a:rPr lang="en-US" sz="1800"/>
+              <a:t>I have never liked a single estimation paper’s methods.</a:t>
+            </a:r>
+          </a:p>
+          <a:p>
+            <a:pPr lvl="0"/>
+            <a:r>
+              <a:rPr lang="en-US" sz="1800"/>
+              <a:t>One way to help us focus our new-found superpowers is to survey KLOC type-unsafe x Interfaces x Running Services x $ Value.</a:t>
+            </a:r>
+          </a:p>
+          <a:p>
+            <a:pPr lvl="0"/>
+            <a:r>
+              <a:rPr lang="en-US" sz="1800"/>
+              <a:t>Which Amazon and Microsoft can probably measure.</a:t>
             </a:r>
           </a:p>
         </p:txBody>
@@ -17071,7 +17464,7 @@
             </a:pPr>
             <a:r>
               <a:rPr lang="en-US" sz="3200"/>
-              <a:t>Review of the Talk</a:t>
+              <a:t>Future Work</a:t>
             </a:r>
           </a:p>
         </p:txBody>
@@ -17094,14 +17487,49 @@
             <a:pPr lvl="0"/>
             <a:r>
               <a:rPr lang="en-US" sz="1800"/>
-              <a:t>Ah let’s just get to the questions!</a:t>
-            </a:r>
-          </a:p>
-          <a:p>
-            <a:pPr lvl="0"/>
-            <a:r>
-              <a:rPr lang="en-US" sz="1800"/>
-              <a:t>I have a ton of them for you! and I hope you have many for me.</a:t>
+              <a:t>GRASE (Medical Acronym) -</a:t>
+            </a:r>
+          </a:p>
+          <a:p>
+            <a:pPr lvl="1"/>
+            <a:r>
+              <a:rPr lang="en-US" sz="1800"/>
+              <a:t>Generally Recognized as Safe and Effective</a:t>
+            </a:r>
+          </a:p>
+          <a:p>
+            <a:pPr lvl="0"/>
+            <a:r>
+              <a:rPr lang="en-US" sz="1800" b="1"/>
+              <a:t>GRASE-</a:t>
+            </a:r>
+          </a:p>
+          <a:p>
+            <a:pPr lvl="1"/>
+            <a:r>
+              <a:rPr lang="en-US" sz="1800" b="1"/>
+              <a:t>Git Recording Agentic Software Engineering</a:t>
+            </a:r>
+          </a:p>
+          <a:p>
+            <a:pPr lvl="0"/>
+            <a:r>
+              <a:rPr lang="en-US" sz="1800"/>
+              <a:t>The GRASE project’s goal is to make statistical process software optimization for agentic coding:</a:t>
+            </a:r>
+          </a:p>
+          <a:p>
+            <a:pPr lvl="1"/>
+            <a:r>
+              <a:rPr lang="en-US" sz="1800" b="1"/>
+              <a:t>Generally Regarded As Simple and Effective.</a:t>
+            </a:r>
+          </a:p>
+          <a:p>
+            <a:pPr lvl="0"/>
+            <a:r>
+              <a:rPr lang="en-US" sz="1800"/>
+              <a:t>A Watt’s Humphrey style PSP data collection done essentially effortlessly by the agents in the background.</a:t>
             </a:r>
           </a:p>
         </p:txBody>
@@ -17148,7 +17576,37 @@
             </a:pPr>
             <a:r>
               <a:rPr lang="en-US" sz="3200"/>
-              <a:t>Extra Slides</a:t>
+              <a:t>Review of the Talk</a:t>
+            </a:r>
+          </a:p>
+        </p:txBody>
+      </p:sp>
+      <p:sp>
+        <p:nvSpPr>
+          <p:cNvPr id="3" name="Content Placeholder 2"/>
+          <p:cNvSpPr>
+            <a:spLocks noGrp="1"/>
+          </p:cNvSpPr>
+          <p:nvPr>
+            <p:ph idx="1"/>
+          </p:nvPr>
+        </p:nvSpPr>
+        <p:spPr/>
+        <p:txBody>
+          <a:bodyPr/>
+          <a:lstStyle/>
+          <a:p>
+            <a:pPr lvl="0"/>
+            <a:r>
+              <a:rPr lang="en-US" sz="1800"/>
+              <a:t>Ah let’s just get to the questions!</a:t>
+            </a:r>
+          </a:p>
+          <a:p>
+            <a:pPr lvl="0"/>
+            <a:r>
+              <a:rPr lang="en-US" sz="1800"/>
+              <a:t>I have a ton of them for you! and I hope you have many for me.</a:t>
             </a:r>
           </a:p>
         </p:txBody>
@@ -17195,86 +17653,7 @@
             </a:pPr>
             <a:r>
               <a:rPr lang="en-US" sz="3200"/>
-              <a:t>AI Paired Programming Size: Quick Review</a:t>
-            </a:r>
-          </a:p>
-        </p:txBody>
-      </p:sp>
-      <p:sp>
-        <p:nvSpPr>
-          <p:cNvPr id="3" name="Content Placeholder 2"/>
-          <p:cNvSpPr>
-            <a:spLocks noGrp="1"/>
-          </p:cNvSpPr>
-          <p:nvPr>
-            <p:ph idx="1"/>
-          </p:nvPr>
-        </p:nvSpPr>
-        <p:spPr/>
-        <p:txBody>
-          <a:bodyPr/>
-          <a:lstStyle/>
-          <a:p>
-            <a:pPr lvl="0"/>
-            <a:r>
-              <a:rPr lang="en-US" sz="1800"/>
-              <a:t>APAS-AI Lines of Code</a:t>
-            </a:r>
-          </a:p>
-          <a:p>
-            <a:pPr lvl="1"/>
-            <a:r>
-              <a:rPr lang="en-US" sz="1800"/>
-              <a:t>Source: 31,751</a:t>
-            </a:r>
-          </a:p>
-          <a:p>
-            <a:pPr lvl="1"/>
-            <a:r>
-              <a:rPr lang="en-US" sz="1800"/>
-              <a:t>Tests: 55,223</a:t>
-            </a:r>
-          </a:p>
-          <a:p>
-            <a:pPr lvl="1"/>
-            <a:r>
-              <a:rPr lang="en-US" sz="1800"/>
-              <a:t>Benches: 13,890</a:t>
-            </a:r>
-          </a:p>
-          <a:p>
-            <a:pPr lvl="1"/>
-            <a:r>
-              <a:rPr lang="en-US" sz="1800"/>
-              <a:t>Total code: 100,864</a:t>
-            </a:r>
-          </a:p>
-          <a:p>
-            <a:pPr lvl="0"/>
-            <a:r>
-              <a:rPr lang="en-US" sz="1800"/>
-              <a:t>Rusticate Lines of Code</a:t>
-            </a:r>
-          </a:p>
-          <a:p>
-            <a:pPr lvl="1"/>
-            <a:r>
-              <a:rPr lang="en-US" sz="1800"/>
-              <a:t>Source: 29,582</a:t>
-            </a:r>
-          </a:p>
-          <a:p>
-            <a:pPr lvl="1"/>
-            <a:r>
-              <a:rPr lang="en-US" sz="1800"/>
-              <a:t>Tests: 12,890</a:t>
-            </a:r>
-          </a:p>
-          <a:p>
-            <a:pPr lvl="1"/>
-            <a:r>
-              <a:rPr lang="en-US" sz="1800"/>
-              <a:t>Total code: 42,472</a:t>
+              <a:t>Extra Slides</a:t>
             </a:r>
           </a:p>
         </p:txBody>
@@ -17426,7 +17805,7 @@
             </a:pPr>
             <a:r>
               <a:rPr lang="en-US" sz="3200"/>
-              <a:t>AI Paired Proving Size: Quick Review</a:t>
+              <a:t>AI Paired Programming Size: Quick Review</a:t>
             </a:r>
           </a:p>
         </p:txBody>
@@ -17449,70 +17828,63 @@
             <a:pPr lvl="0"/>
             <a:r>
               <a:rPr lang="en-US" sz="1800"/>
-              <a:t>APAS-VERUS Lines of Code</a:t>
+              <a:t>APAS-AI Lines of Code</a:t>
             </a:r>
           </a:p>
           <a:p>
             <a:pPr lvl="1"/>
             <a:r>
               <a:rPr lang="en-US" sz="1800"/>
-              <a:t>Source: 229,319</a:t>
+              <a:t>Source: 31,751</a:t>
             </a:r>
           </a:p>
           <a:p>
             <a:pPr lvl="1"/>
             <a:r>
               <a:rPr lang="en-US" sz="1800"/>
-              <a:t>Tests (RTT): 58,503</a:t>
+              <a:t>Tests: 55,223</a:t>
             </a:r>
           </a:p>
           <a:p>
             <a:pPr lvl="1"/>
             <a:r>
               <a:rPr lang="en-US" sz="1800"/>
-              <a:t>PTTs (rust_verify_test): 15,938</a:t>
+              <a:t>Benches: 13,890</a:t>
             </a:r>
           </a:p>
           <a:p>
             <a:pPr lvl="1"/>
             <a:r>
               <a:rPr lang="en-US" sz="1800"/>
-              <a:t>Benches: 8,027</a:t>
+              <a:t>Total code: 100,864</a:t>
+            </a:r>
+          </a:p>
+          <a:p>
+            <a:pPr lvl="0"/>
+            <a:r>
+              <a:rPr lang="en-US" sz="1800"/>
+              <a:t>Rusticate Lines of Code</a:t>
             </a:r>
           </a:p>
           <a:p>
             <a:pPr lvl="1"/>
             <a:r>
               <a:rPr lang="en-US" sz="1800"/>
-              <a:t>Total code: 311,787</a:t>
-            </a:r>
-          </a:p>
-          <a:p>
-            <a:pPr lvl="0"/>
-            <a:r>
-              <a:rPr lang="en-US" sz="1800"/>
-              <a:t>Veracity Lines of Code</a:t>
+              <a:t>Source: 29,582</a:t>
             </a:r>
           </a:p>
           <a:p>
             <a:pPr lvl="1"/>
             <a:r>
               <a:rPr lang="en-US" sz="1800"/>
-              <a:t>Source: 65,189</a:t>
+              <a:t>Tests: 12,890</a:t>
             </a:r>
           </a:p>
           <a:p>
             <a:pPr lvl="1"/>
             <a:r>
               <a:rPr lang="en-US" sz="1800"/>
-              <a:t>Tests: 2,851</a:t>
-            </a:r>
-          </a:p>
-          <a:p>
-            <a:pPr lvl="1"/>
-            <a:r>
-              <a:rPr lang="en-US" sz="1800"/>
-              <a:t>Total code: 68,040</a:t>
+              <a:t>Total code: 42,472</a:t>
             </a:r>
           </a:p>
         </p:txBody>
@@ -17559,7 +17931,7 @@
             </a:pPr>
             <a:r>
               <a:rPr lang="en-US" sz="3200"/>
-              <a:t>Blood on the Road - Open Source =</a:t>
+              <a:t>AI Paired Proving Size: Quick Review</a:t>
             </a:r>
           </a:p>
         </p:txBody>
@@ -17582,21 +17954,70 @@
             <a:pPr lvl="0"/>
             <a:r>
               <a:rPr lang="en-US" sz="1800"/>
-              <a:t>Open Source is now Open Copy.</a:t>
-            </a:r>
-          </a:p>
-          <a:p>
-            <a:pPr lvl="0"/>
-            <a:r>
-              <a:rPr lang="en-US" sz="1800"/>
-              <a:t>with reports of 1/2 of AI time</a:t>
-            </a:r>
-          </a:p>
-          <a:p>
-            <a:pPr lvl="0"/>
-            <a:r>
-              <a:rPr lang="en-US" sz="1800"/>
-              <a:t>and with the US Government totally undermining copyright law.</a:t>
+              <a:t>APAS-VERUS Lines of Code</a:t>
+            </a:r>
+          </a:p>
+          <a:p>
+            <a:pPr lvl="1"/>
+            <a:r>
+              <a:rPr lang="en-US" sz="1800"/>
+              <a:t>Source: 229,319</a:t>
+            </a:r>
+          </a:p>
+          <a:p>
+            <a:pPr lvl="1"/>
+            <a:r>
+              <a:rPr lang="en-US" sz="1800"/>
+              <a:t>Tests (RTT): 58,503</a:t>
+            </a:r>
+          </a:p>
+          <a:p>
+            <a:pPr lvl="1"/>
+            <a:r>
+              <a:rPr lang="en-US" sz="1800"/>
+              <a:t>PTTs (rust_verify_test): 15,938</a:t>
+            </a:r>
+          </a:p>
+          <a:p>
+            <a:pPr lvl="1"/>
+            <a:r>
+              <a:rPr lang="en-US" sz="1800"/>
+              <a:t>Benches: 8,027</a:t>
+            </a:r>
+          </a:p>
+          <a:p>
+            <a:pPr lvl="1"/>
+            <a:r>
+              <a:rPr lang="en-US" sz="1800"/>
+              <a:t>Total code: 311,787</a:t>
+            </a:r>
+          </a:p>
+          <a:p>
+            <a:pPr lvl="0"/>
+            <a:r>
+              <a:rPr lang="en-US" sz="1800"/>
+              <a:t>Veracity Lines of Code</a:t>
+            </a:r>
+          </a:p>
+          <a:p>
+            <a:pPr lvl="1"/>
+            <a:r>
+              <a:rPr lang="en-US" sz="1800"/>
+              <a:t>Source: 65,189</a:t>
+            </a:r>
+          </a:p>
+          <a:p>
+            <a:pPr lvl="1"/>
+            <a:r>
+              <a:rPr lang="en-US" sz="1800"/>
+              <a:t>Tests: 2,851</a:t>
+            </a:r>
+          </a:p>
+          <a:p>
+            <a:pPr lvl="1"/>
+            <a:r>
+              <a:rPr lang="en-US" sz="1800"/>
+              <a:t>Total code: 68,040</a:t>
             </a:r>
           </a:p>
         </p:txBody>
@@ -17643,7 +18064,7 @@
             </a:pPr>
             <a:r>
               <a:rPr lang="en-US" sz="3200"/>
-              <a:t>Blood on the Road - Open Repositories =</a:t>
+              <a:t>Blood on the Road - Open Source =</a:t>
             </a:r>
           </a:p>
         </p:txBody>
@@ -17666,42 +18087,21 @@
             <a:pPr lvl="0"/>
             <a:r>
               <a:rPr lang="en-US" sz="1800"/>
-              <a:t>Open repositories are now weakly locked doors.</a:t>
-            </a:r>
-          </a:p>
-          <a:p>
-            <a:pPr lvl="0"/>
-            <a:r>
-              <a:rPr lang="en-US" sz="1800"/>
-              <a:t>Agents can and have been used to inject invisble UNICODE attacks.</a:t>
-            </a:r>
-          </a:p>
-          <a:p>
-            <a:pPr lvl="0"/>
-            <a:r>
-              <a:rPr lang="en-US" sz="1800"/>
-              <a:t>Agents can now pass the Turing test, and more easily the programmer Turing test.</a:t>
-            </a:r>
-          </a:p>
-          <a:p>
-            <a:pPr lvl="0"/>
-            <a:r>
-              <a:rPr lang="en-US" sz="1800"/>
-              <a:t>They’ll submit code pretending to be human.</a:t>
-            </a:r>
-          </a:p>
-          <a:p>
-            <a:pPr lvl="0"/>
-            <a:r>
-              <a:rPr lang="en-US" sz="1800"/>
-              <a:t>They’ll steal credentials and submit code.</a:t>
-            </a:r>
-          </a:p>
-          <a:p>
-            <a:pPr lvl="0"/>
-            <a:r>
-              <a:rPr lang="en-US" sz="1800"/>
-              <a:t>LiteLLM is the most atrocious case lately.</a:t>
+              <a:t>Open Source is now Open Copy.</a:t>
+            </a:r>
+          </a:p>
+          <a:p>
+            <a:pPr lvl="0"/>
+            <a:r>
+              <a:rPr lang="en-US" sz="1800"/>
+              <a:t>with reports of 1/2 of AI time</a:t>
+            </a:r>
+          </a:p>
+          <a:p>
+            <a:pPr lvl="0"/>
+            <a:r>
+              <a:rPr lang="en-US" sz="1800"/>
+              <a:t>and with the US Government totally undermining copyright law.</a:t>
             </a:r>
           </a:p>
         </p:txBody>
@@ -17748,7 +18148,7 @@
             </a:pPr>
             <a:r>
               <a:rPr lang="en-US" sz="3200"/>
-              <a:t>Blood on the Road - Key Services</a:t>
+              <a:t>Blood on the Road - Open Repositories =</a:t>
             </a:r>
           </a:p>
         </p:txBody>
@@ -17771,28 +18171,42 @@
             <a:pPr lvl="0"/>
             <a:r>
               <a:rPr lang="en-US" sz="1800"/>
-              <a:t>Authentication is going to be attacked brutally.</a:t>
-            </a:r>
-          </a:p>
-          <a:p>
-            <a:pPr lvl="0"/>
-            <a:r>
-              <a:rPr lang="en-US" sz="1800"/>
-              <a:t>Network services are going to be hacked left and right.</a:t>
-            </a:r>
-          </a:p>
-          <a:p>
-            <a:pPr lvl="0"/>
-            <a:r>
-              <a:rPr lang="en-US" sz="1800"/>
-              <a:t>Configurations are going to be heavily attacked.</a:t>
-            </a:r>
-          </a:p>
-          <a:p>
-            <a:pPr lvl="1"/>
-            <a:r>
-              <a:rPr lang="en-US" sz="1800"/>
-              <a:t>Using text files for these is already error prone.</a:t>
+              <a:t>Open repositories are now weakly locked doors.</a:t>
+            </a:r>
+          </a:p>
+          <a:p>
+            <a:pPr lvl="0"/>
+            <a:r>
+              <a:rPr lang="en-US" sz="1800"/>
+              <a:t>Agents can and have been used to inject invisble UNICODE attacks.</a:t>
+            </a:r>
+          </a:p>
+          <a:p>
+            <a:pPr lvl="0"/>
+            <a:r>
+              <a:rPr lang="en-US" sz="1800"/>
+              <a:t>Agents can now pass the Turing test, and more easily the programmer Turing test.</a:t>
+            </a:r>
+          </a:p>
+          <a:p>
+            <a:pPr lvl="0"/>
+            <a:r>
+              <a:rPr lang="en-US" sz="1800"/>
+              <a:t>They’ll submit code pretending to be human.</a:t>
+            </a:r>
+          </a:p>
+          <a:p>
+            <a:pPr lvl="0"/>
+            <a:r>
+              <a:rPr lang="en-US" sz="1800"/>
+              <a:t>They’ll steal credentials and submit code.</a:t>
+            </a:r>
+          </a:p>
+          <a:p>
+            <a:pPr lvl="0"/>
+            <a:r>
+              <a:rPr lang="en-US" sz="1800"/>
+              <a:t>LiteLLM is the most atrocious case lately.</a:t>
             </a:r>
           </a:p>
         </p:txBody>
@@ -17839,7 +18253,7 @@
             </a:pPr>
             <a:r>
               <a:rPr lang="en-US" sz="3200"/>
-              <a:t>Blood on the Road - Open Binaries =</a:t>
+              <a:t>Blood on the Road - Key Services</a:t>
             </a:r>
           </a:p>
         </p:txBody>
@@ -17862,56 +18276,28 @@
             <a:pPr lvl="0"/>
             <a:r>
               <a:rPr lang="en-US" sz="1800"/>
-              <a:t>Open binaries are next.</a:t>
-            </a:r>
-          </a:p>
-          <a:p>
-            <a:pPr lvl="0"/>
-            <a:r>
-              <a:rPr lang="en-US" sz="1800"/>
-              <a:t>They are going to be disassembled and recontructed.</a:t>
-            </a:r>
-          </a:p>
-          <a:p>
-            <a:pPr lvl="0"/>
-            <a:r>
-              <a:rPr lang="en-US" sz="1800"/>
-              <a:t>They are going to be rewritten in real time.</a:t>
-            </a:r>
-          </a:p>
-          <a:p>
-            <a:pPr lvl="0"/>
-            <a:r>
-              <a:rPr lang="en-US" sz="1800"/>
-              <a:t>Key solutions to this are:</a:t>
-            </a:r>
-          </a:p>
-          <a:p>
-            <a:pPr lvl="0"/>
-            <a:r>
-              <a:rPr lang="en-US" sz="1800"/>
-              <a:t>Binary packages from all repositories.</a:t>
-            </a:r>
-          </a:p>
-          <a:p>
-            <a:pPr lvl="0"/>
-            <a:r>
-              <a:rPr lang="en-US" sz="1800"/>
-              <a:t>Cryptographically signed.</a:t>
-            </a:r>
-          </a:p>
-          <a:p>
-            <a:pPr lvl="0"/>
-            <a:r>
-              <a:rPr lang="en-US" sz="1800"/>
-              <a:t>Installation protected in the OS.</a:t>
-            </a:r>
-          </a:p>
-          <a:p>
-            <a:pPr lvl="0"/>
-            <a:r>
-              <a:rPr lang="en-US" sz="1800"/>
-              <a:t>And protected from reading by the OS.</a:t>
+              <a:t>Authentication is going to be attacked brutally.</a:t>
+            </a:r>
+          </a:p>
+          <a:p>
+            <a:pPr lvl="0"/>
+            <a:r>
+              <a:rPr lang="en-US" sz="1800"/>
+              <a:t>Network services are going to be hacked left and right.</a:t>
+            </a:r>
+          </a:p>
+          <a:p>
+            <a:pPr lvl="0"/>
+            <a:r>
+              <a:rPr lang="en-US" sz="1800"/>
+              <a:t>Configurations are going to be heavily attacked.</a:t>
+            </a:r>
+          </a:p>
+          <a:p>
+            <a:pPr lvl="1"/>
+            <a:r>
+              <a:rPr lang="en-US" sz="1800"/>
+              <a:t>Using text files for these is already error prone.</a:t>
             </a:r>
           </a:p>
         </p:txBody>
@@ -17958,7 +18344,7 @@
             </a:pPr>
             <a:r>
               <a:rPr lang="en-US" sz="3200"/>
-              <a:t>Questions - F* and Pulse</a:t>
+              <a:t>Blood on the Road - Open Binaries =</a:t>
             </a:r>
           </a:p>
         </p:txBody>
@@ -17981,49 +18367,56 @@
             <a:pPr lvl="0"/>
             <a:r>
               <a:rPr lang="en-US" sz="1800"/>
-              <a:t>Are F* modules really in use? If not, why?</a:t>
-            </a:r>
-          </a:p>
-          <a:p>
-            <a:pPr lvl="0"/>
-            <a:r>
-              <a:rPr lang="en-US" sz="1800"/>
-              <a:t>Got Functors?</a:t>
-            </a:r>
-          </a:p>
-          <a:p>
-            <a:pPr lvl="0"/>
-            <a:r>
-              <a:rPr lang="en-US" sz="1800"/>
-              <a:t>Are F* modules working with proof smoothly? Took me about three days to get a proving model (Treap) with modules.</a:t>
-            </a:r>
-          </a:p>
-          <a:p>
-            <a:pPr lvl="0"/>
-            <a:r>
-              <a:rPr lang="en-US" sz="1800"/>
-              <a:t>Does F* have a typed library search yet?</a:t>
-            </a:r>
-          </a:p>
-          <a:p>
-            <a:pPr lvl="0"/>
-            <a:r>
-              <a:rPr lang="en-US" sz="1800"/>
-              <a:t>Are typeclasses being heavily used?</a:t>
-            </a:r>
-          </a:p>
-          <a:p>
-            <a:pPr lvl="0"/>
-            <a:r>
-              <a:rPr lang="en-US" sz="1800"/>
-              <a:t>How fast is validation now?</a:t>
-            </a:r>
-          </a:p>
-          <a:p>
-            <a:pPr lvl="0"/>
-            <a:r>
-              <a:rPr lang="en-US" sz="1800"/>
-              <a:t>Nik you have any more statistics on AutoCLRS?</a:t>
+              <a:t>Open binaries are next.</a:t>
+            </a:r>
+          </a:p>
+          <a:p>
+            <a:pPr lvl="0"/>
+            <a:r>
+              <a:rPr lang="en-US" sz="1800"/>
+              <a:t>They are going to be disassembled and recontructed.</a:t>
+            </a:r>
+          </a:p>
+          <a:p>
+            <a:pPr lvl="0"/>
+            <a:r>
+              <a:rPr lang="en-US" sz="1800"/>
+              <a:t>They are going to be rewritten in real time.</a:t>
+            </a:r>
+          </a:p>
+          <a:p>
+            <a:pPr lvl="0"/>
+            <a:r>
+              <a:rPr lang="en-US" sz="1800"/>
+              <a:t>Key solutions to this are:</a:t>
+            </a:r>
+          </a:p>
+          <a:p>
+            <a:pPr lvl="0"/>
+            <a:r>
+              <a:rPr lang="en-US" sz="1800"/>
+              <a:t>Binary packages from all repositories.</a:t>
+            </a:r>
+          </a:p>
+          <a:p>
+            <a:pPr lvl="0"/>
+            <a:r>
+              <a:rPr lang="en-US" sz="1800"/>
+              <a:t>Cryptographically signed.</a:t>
+            </a:r>
+          </a:p>
+          <a:p>
+            <a:pPr lvl="0"/>
+            <a:r>
+              <a:rPr lang="en-US" sz="1800"/>
+              <a:t>Installation protected in the OS.</a:t>
+            </a:r>
+          </a:p>
+          <a:p>
+            <a:pPr lvl="0"/>
+            <a:r>
+              <a:rPr lang="en-US" sz="1800"/>
+              <a:t>And protected from reading by the OS.</a:t>
             </a:r>
           </a:p>
         </p:txBody>
@@ -18070,7 +18463,7 @@
             </a:pPr>
             <a:r>
               <a:rPr lang="en-US" sz="3200"/>
-              <a:t>Questions</a:t>
+              <a:t>Questions - F* and Pulse</a:t>
             </a:r>
           </a:p>
         </p:txBody>
@@ -18093,42 +18486,49 @@
             <a:pPr lvl="0"/>
             <a:r>
               <a:rPr lang="en-US" sz="1800"/>
-              <a:t>Did the PL community overly complicate things with higher-order types?</a:t>
-            </a:r>
-          </a:p>
-          <a:p>
-            <a:pPr lvl="0"/>
-            <a:r>
-              <a:rPr lang="en-US" sz="1800"/>
-              <a:t>What can you folks say about MSFT adoption of proven code?</a:t>
-            </a:r>
-          </a:p>
-          <a:p>
-            <a:pPr lvl="0"/>
-            <a:r>
-              <a:rPr lang="en-US" sz="1800"/>
-              <a:t>What are the biggest F* verified systems?</a:t>
-            </a:r>
-          </a:p>
-          <a:p>
-            <a:pPr lvl="0"/>
-            <a:r>
-              <a:rPr lang="en-US" sz="1800"/>
-              <a:t>What are the biggest Pulse verified sytems?</a:t>
-            </a:r>
-          </a:p>
-          <a:p>
-            <a:pPr lvl="0"/>
-            <a:r>
-              <a:rPr lang="en-US" sz="1800"/>
-              <a:t>Any quantitatives? Person days? AI days?</a:t>
-            </a:r>
-          </a:p>
-          <a:p>
-            <a:pPr lvl="0"/>
-            <a:r>
-              <a:rPr lang="en-US" sz="1800"/>
-              <a:t>Should I quit Verus and go learn Pulse?</a:t>
+              <a:t>Are F* modules really in use? If not, why?</a:t>
+            </a:r>
+          </a:p>
+          <a:p>
+            <a:pPr lvl="0"/>
+            <a:r>
+              <a:rPr lang="en-US" sz="1800"/>
+              <a:t>Got Functors?</a:t>
+            </a:r>
+          </a:p>
+          <a:p>
+            <a:pPr lvl="0"/>
+            <a:r>
+              <a:rPr lang="en-US" sz="1800"/>
+              <a:t>Are F* modules working with proof smoothly? Took me about three days to get a proving model (Treap) with modules.</a:t>
+            </a:r>
+          </a:p>
+          <a:p>
+            <a:pPr lvl="0"/>
+            <a:r>
+              <a:rPr lang="en-US" sz="1800"/>
+              <a:t>Does F* have a typed library search yet?</a:t>
+            </a:r>
+          </a:p>
+          <a:p>
+            <a:pPr lvl="0"/>
+            <a:r>
+              <a:rPr lang="en-US" sz="1800"/>
+              <a:t>Are typeclasses being heavily used?</a:t>
+            </a:r>
+          </a:p>
+          <a:p>
+            <a:pPr lvl="0"/>
+            <a:r>
+              <a:rPr lang="en-US" sz="1800"/>
+              <a:t>How fast is validation now?</a:t>
+            </a:r>
+          </a:p>
+          <a:p>
+            <a:pPr lvl="0"/>
+            <a:r>
+              <a:rPr lang="en-US" sz="1800"/>
+              <a:t>Nik you have any more statistics on AutoCLRS?</a:t>
             </a:r>
           </a:p>
         </p:txBody>
@@ -18198,49 +18598,42 @@
             <a:pPr lvl="0"/>
             <a:r>
               <a:rPr lang="en-US" sz="1800"/>
-              <a:t>Are you folks still using Make? That’s how I got started on this.</a:t>
-            </a:r>
-          </a:p>
-          <a:p>
-            <a:pPr lvl="0"/>
-            <a:r>
-              <a:rPr lang="en-US" sz="1800"/>
-              <a:t>Many programmers and worse, managers, complain about the programmer time to switch languages. Are you finding that you can switch languages with your AIs explaining things to you?</a:t>
-            </a:r>
-          </a:p>
-          <a:p>
-            <a:pPr lvl="0"/>
-            <a:r>
-              <a:rPr lang="en-US" sz="1800"/>
-              <a:t>Can we prove Rust’s (awful) std with Verus?</a:t>
-            </a:r>
-          </a:p>
-          <a:p>
-            <a:pPr lvl="0"/>
-            <a:r>
-              <a:rPr lang="en-US" sz="1800"/>
-              <a:t>Can we prove a compiler with Verus and EPR?</a:t>
-            </a:r>
-          </a:p>
-          <a:p>
-            <a:pPr lvl="0"/>
-            <a:r>
-              <a:rPr lang="en-US" sz="1800"/>
-              <a:t>Can we prove a TIL (Tarditi, Morrisett, Harper) like compiler?</a:t>
-            </a:r>
-          </a:p>
-          <a:p>
-            <a:pPr lvl="0"/>
-            <a:r>
-              <a:rPr lang="en-US" sz="1800"/>
-              <a:t>Can we verify a comp cert like compiler?</a:t>
-            </a:r>
-          </a:p>
-          <a:p>
-            <a:pPr lvl="0"/>
-            <a:r>
-              <a:rPr lang="en-US" sz="1800"/>
-              <a:t>Can we prove an OS in Verus?</a:t>
+              <a:t>Did the PL community overly complicate things with higher-order types?</a:t>
+            </a:r>
+          </a:p>
+          <a:p>
+            <a:pPr lvl="0"/>
+            <a:r>
+              <a:rPr lang="en-US" sz="1800"/>
+              <a:t>What can you folks say about MSFT adoption of proven code?</a:t>
+            </a:r>
+          </a:p>
+          <a:p>
+            <a:pPr lvl="0"/>
+            <a:r>
+              <a:rPr lang="en-US" sz="1800"/>
+              <a:t>What are the biggest F* verified systems?</a:t>
+            </a:r>
+          </a:p>
+          <a:p>
+            <a:pPr lvl="0"/>
+            <a:r>
+              <a:rPr lang="en-US" sz="1800"/>
+              <a:t>What are the biggest Pulse verified sytems?</a:t>
+            </a:r>
+          </a:p>
+          <a:p>
+            <a:pPr lvl="0"/>
+            <a:r>
+              <a:rPr lang="en-US" sz="1800"/>
+              <a:t>Any quantitatives? Person days? AI days?</a:t>
+            </a:r>
+          </a:p>
+          <a:p>
+            <a:pPr lvl="0"/>
+            <a:r>
+              <a:rPr lang="en-US" sz="1800"/>
+              <a:t>Should I quit Verus and go learn Pulse?</a:t>
             </a:r>
           </a:p>
         </p:txBody>
@@ -18287,7 +18680,7 @@
             </a:pPr>
             <a:r>
               <a:rPr lang="en-US" sz="3200"/>
-              <a:t>Questions - AI LLM Agents</a:t>
+              <a:t>Questions</a:t>
             </a:r>
           </a:p>
         </p:txBody>
@@ -18310,56 +18703,49 @@
             <a:pPr lvl="0"/>
             <a:r>
               <a:rPr lang="en-US" sz="1800"/>
-              <a:t>How fast is this moving?</a:t>
-            </a:r>
-          </a:p>
-          <a:p>
-            <a:pPr lvl="0"/>
-            <a:r>
-              <a:rPr lang="en-US" sz="1800"/>
-              <a:t>How much context do we need?</a:t>
-            </a:r>
-          </a:p>
-          <a:p>
-            <a:pPr lvl="0"/>
-            <a:r>
-              <a:rPr lang="en-US" sz="1800"/>
-              <a:t>How much speed do we have? T/S down and up?</a:t>
-            </a:r>
-          </a:p>
-          <a:p>
-            <a:pPr lvl="0"/>
-            <a:r>
-              <a:rPr lang="en-US" sz="1800"/>
-              <a:t>How much speed do we need?</a:t>
-            </a:r>
-          </a:p>
-          <a:p>
-            <a:pPr lvl="0"/>
-            <a:r>
-              <a:rPr lang="en-US" sz="1800"/>
-              <a:t>How much speed will we get?</a:t>
-            </a:r>
-          </a:p>
-          <a:p>
-            <a:pPr lvl="0"/>
-            <a:r>
-              <a:rPr lang="en-US" sz="1800"/>
-              <a:t>When it’s 10 times faster how will we use it?</a:t>
-            </a:r>
-          </a:p>
-          <a:p>
-            <a:pPr lvl="0"/>
-            <a:r>
-              <a:rPr lang="en-US" sz="1800"/>
-              <a:t>When will this really cost the user what it costs the provider?</a:t>
-            </a:r>
-          </a:p>
-          <a:p>
-            <a:pPr lvl="0"/>
-            <a:r>
-              <a:rPr lang="en-US" sz="1800"/>
-              <a:t>When will it get even better intermediate term memory?</a:t>
+              <a:t>Are you folks still using Make? That’s how I got started on this.</a:t>
+            </a:r>
+          </a:p>
+          <a:p>
+            <a:pPr lvl="0"/>
+            <a:r>
+              <a:rPr lang="en-US" sz="1800"/>
+              <a:t>Many programmers and worse, managers, complain about the programmer time to switch languages. Are you finding that you can switch languages with your AIs explaining things to you?</a:t>
+            </a:r>
+          </a:p>
+          <a:p>
+            <a:pPr lvl="0"/>
+            <a:r>
+              <a:rPr lang="en-US" sz="1800"/>
+              <a:t>Can we prove Rust’s (awful) std with Verus?</a:t>
+            </a:r>
+          </a:p>
+          <a:p>
+            <a:pPr lvl="0"/>
+            <a:r>
+              <a:rPr lang="en-US" sz="1800"/>
+              <a:t>Can we prove a compiler with Verus and EPR?</a:t>
+            </a:r>
+          </a:p>
+          <a:p>
+            <a:pPr lvl="0"/>
+            <a:r>
+              <a:rPr lang="en-US" sz="1800"/>
+              <a:t>Can we prove a TIL (Tarditi, Morrisett, Harper) like compiler?</a:t>
+            </a:r>
+          </a:p>
+          <a:p>
+            <a:pPr lvl="0"/>
+            <a:r>
+              <a:rPr lang="en-US" sz="1800"/>
+              <a:t>Can we verify a comp cert like compiler?</a:t>
+            </a:r>
+          </a:p>
+          <a:p>
+            <a:pPr lvl="0"/>
+            <a:r>
+              <a:rPr lang="en-US" sz="1800"/>
+              <a:t>Can we prove an OS in Verus?</a:t>
             </a:r>
           </a:p>
         </p:txBody>
@@ -18406,7 +18792,7 @@
             </a:pPr>
             <a:r>
               <a:rPr lang="en-US" sz="3200"/>
-              <a:t>Cloud Security Alliance</a:t>
+              <a:t>Questions - AI LLM Agents</a:t>
             </a:r>
           </a:p>
         </p:txBody>
@@ -18429,42 +18815,56 @@
             <a:pPr lvl="0"/>
             <a:r>
               <a:rPr lang="en-US" sz="1800"/>
-              <a:t>The cloud security alliance has some sober recommendations:</a:t>
-            </a:r>
-          </a:p>
-          <a:p>
-            <a:pPr lvl="0"/>
-            <a:r>
-              <a:rPr lang="en-US" sz="1800"/>
-              <a:t>The “AI Vulnerability Storm”: Building a “Mythosready” Security Program</a:t>
-            </a:r>
-          </a:p>
-          <a:p>
-            <a:pPr lvl="0"/>
-            <a:r>
-              <a:rPr lang="en-US" sz="1800"/>
-              <a:t>https://labs.cloudsecurityalliance.org/wp-content/uploads/2026/04/mythosreadyv91.pdf</a:t>
-            </a:r>
-          </a:p>
-          <a:p>
-            <a:pPr lvl="0"/>
-            <a:r>
-              <a:rPr lang="en-US" sz="1800"/>
-              <a:t>Use LLM-based vulnerability discovery and remediation capabilities.</a:t>
-            </a:r>
-          </a:p>
-          <a:p>
-            <a:pPr lvl="0"/>
-            <a:r>
-              <a:rPr lang="en-US" sz="1800"/>
-              <a:t>Update risk metrics.</a:t>
-            </a:r>
-          </a:p>
-          <a:p>
-            <a:pPr lvl="0"/>
-            <a:r>
-              <a:rPr lang="en-US" sz="1800"/>
-              <a:t>We cannot outwork machine-speed threats. Re-prioritize, automate, and prepare for burnout.</a:t>
+              <a:t>How fast is this moving?</a:t>
+            </a:r>
+          </a:p>
+          <a:p>
+            <a:pPr lvl="0"/>
+            <a:r>
+              <a:rPr lang="en-US" sz="1800"/>
+              <a:t>How much context do we need?</a:t>
+            </a:r>
+          </a:p>
+          <a:p>
+            <a:pPr lvl="0"/>
+            <a:r>
+              <a:rPr lang="en-US" sz="1800"/>
+              <a:t>How much speed do we have? T/S down and up?</a:t>
+            </a:r>
+          </a:p>
+          <a:p>
+            <a:pPr lvl="0"/>
+            <a:r>
+              <a:rPr lang="en-US" sz="1800"/>
+              <a:t>How much speed do we need?</a:t>
+            </a:r>
+          </a:p>
+          <a:p>
+            <a:pPr lvl="0"/>
+            <a:r>
+              <a:rPr lang="en-US" sz="1800"/>
+              <a:t>How much speed will we get?</a:t>
+            </a:r>
+          </a:p>
+          <a:p>
+            <a:pPr lvl="0"/>
+            <a:r>
+              <a:rPr lang="en-US" sz="1800"/>
+              <a:t>When it’s 10 times faster how will we use it?</a:t>
+            </a:r>
+          </a:p>
+          <a:p>
+            <a:pPr lvl="0"/>
+            <a:r>
+              <a:rPr lang="en-US" sz="1800"/>
+              <a:t>When will this really cost the user what it costs the provider?</a:t>
+            </a:r>
+          </a:p>
+          <a:p>
+            <a:pPr lvl="0"/>
+            <a:r>
+              <a:rPr lang="en-US" sz="1800"/>
+              <a:t>When will it get even better intermediate term memory?</a:t>
             </a:r>
           </a:p>
         </p:txBody>
@@ -19025,6 +19425,111 @@
           </a:graphicData>
         </a:graphic>
       </p:graphicFrame>
+    </p:spTree>
+  </p:cSld>
+</p:sld>
+</file>
+
+<file path=ppt/slides/slide90.xml><?xml version="1.0" encoding="utf-8"?>
+<p:sld xmlns:a="http://schemas.openxmlformats.org/drawingml/2006/main" xmlns:r="http://schemas.openxmlformats.org/officeDocument/2006/relationships" xmlns:p="http://schemas.openxmlformats.org/presentationml/2006/main">
+  <p:cSld>
+    <p:spTree>
+      <p:nvGrpSpPr>
+        <p:cNvPr id="1" name=""/>
+        <p:cNvGrpSpPr/>
+        <p:nvPr/>
+      </p:nvGrpSpPr>
+      <p:grpSpPr>
+        <a:xfrm>
+          <a:off x="0" y="0"/>
+          <a:ext cx="0" cy="0"/>
+          <a:chOff x="0" y="0"/>
+          <a:chExt cx="0" cy="0"/>
+        </a:xfrm>
+      </p:grpSpPr>
+      <p:sp>
+        <p:nvSpPr>
+          <p:cNvPr id="2" name="Title 1"/>
+          <p:cNvSpPr>
+            <a:spLocks noGrp="1"/>
+          </p:cNvSpPr>
+          <p:nvPr>
+            <p:ph type="title"/>
+          </p:nvPr>
+        </p:nvSpPr>
+        <p:spPr/>
+        <p:txBody>
+          <a:bodyPr/>
+          <a:lstStyle/>
+          <a:p>
+            <a:pPr lvl="0" indent="0" marL="0">
+              <a:buNone/>
+            </a:pPr>
+            <a:r>
+              <a:rPr lang="en-US" sz="3200"/>
+              <a:t>Cloud Security Alliance</a:t>
+            </a:r>
+          </a:p>
+        </p:txBody>
+      </p:sp>
+      <p:sp>
+        <p:nvSpPr>
+          <p:cNvPr id="3" name="Content Placeholder 2"/>
+          <p:cNvSpPr>
+            <a:spLocks noGrp="1"/>
+          </p:cNvSpPr>
+          <p:nvPr>
+            <p:ph idx="1"/>
+          </p:nvPr>
+        </p:nvSpPr>
+        <p:spPr/>
+        <p:txBody>
+          <a:bodyPr/>
+          <a:lstStyle/>
+          <a:p>
+            <a:pPr lvl="0"/>
+            <a:r>
+              <a:rPr lang="en-US" sz="1800"/>
+              <a:t>The cloud security alliance has some sober recommendations:</a:t>
+            </a:r>
+          </a:p>
+          <a:p>
+            <a:pPr lvl="0"/>
+            <a:r>
+              <a:rPr lang="en-US" sz="1800"/>
+              <a:t>The “AI Vulnerability Storm”: Building a “Mythosready” Security Program</a:t>
+            </a:r>
+          </a:p>
+          <a:p>
+            <a:pPr lvl="0"/>
+            <a:r>
+              <a:rPr lang="en-US" sz="1800"/>
+              <a:t>https://labs.cloudsecurityalliance.org/wp-content/uploads/2026/04/mythosreadyv91.pdf</a:t>
+            </a:r>
+          </a:p>
+          <a:p>
+            <a:pPr lvl="0"/>
+            <a:r>
+              <a:rPr lang="en-US" sz="1800"/>
+              <a:t>Use LLM-based vulnerability discovery and remediation capabilities.</a:t>
+            </a:r>
+          </a:p>
+          <a:p>
+            <a:pPr lvl="0"/>
+            <a:r>
+              <a:rPr lang="en-US" sz="1800"/>
+              <a:t>Update risk metrics.</a:t>
+            </a:r>
+          </a:p>
+          <a:p>
+            <a:pPr lvl="0"/>
+            <a:r>
+              <a:rPr lang="en-US" sz="1800"/>
+              <a:t>We cannot outwork machine-speed threats. Re-prioritize, automate, and prepare for burnout.</a:t>
+            </a:r>
+          </a:p>
+        </p:txBody>
+      </p:sp>
     </p:spTree>
   </p:cSld>
 </p:sld>

--- a/lectures/slidesCMUCS.pptx
+++ b/lectures/slidesCMUCS.pptx
@@ -95,6 +95,7 @@
     <p:sldId id="343" r:id="rId89"/>
     <p:sldId id="344" r:id="rId90"/>
     <p:sldId id="345" r:id="rId91"/>
+    <p:sldId id="346" r:id="rId92"/>
   </p:sldIdLst>
   <p:sldSz cx="9144000" cy="5143500" type="screen16x9"/>
   <p:notesSz cx="6858000" cy="9144000"/>
@@ -14248,53 +14249,6 @@
                       </a:pPr>
                       <a:r>
                         <a:rPr/>
-                        <a:t>4</a:t>
-                      </a:r>
-                    </a:p>
-                  </a:txBody>
-                </a:tc>
-                <a:tc>
-                  <a:txBody>
-                    <a:bodyPr/>
-                    <a:lstStyle/>
-                    <a:p>
-                      <a:pPr lvl="0" indent="0" marL="0" algn="l">
-                        <a:buNone/>
-                      </a:pPr>
-                      <a:r>
-                        <a:rPr/>
-                        <a:t>R — Review Ratio</a:t>
-                      </a:r>
-                    </a:p>
-                  </a:txBody>
-                </a:tc>
-                <a:tc>
-                  <a:txBody>
-                    <a:bodyPr/>
-                    <a:lstStyle/>
-                    <a:p>
-                      <a:pPr lvl="0" indent="0" marL="0" algn="ctr">
-                        <a:buNone/>
-                      </a:pPr>
-                      <a:r>
-                        <a:rPr b="1"/>
-                        <a:t>~33.3%</a:t>
-                      </a:r>
-                    </a:p>
-                  </a:txBody>
-                </a:tc>
-              </a:tr>
-              <a:tr h="0">
-                <a:tc>
-                  <a:txBody>
-                    <a:bodyPr/>
-                    <a:lstStyle/>
-                    <a:p>
-                      <a:pPr lvl="0" indent="0" marL="0" algn="l">
-                        <a:buNone/>
-                      </a:pPr>
-                      <a:r>
-                        <a:rPr/>
                         <a:t>5</a:t>
                       </a:r>
                     </a:p>
@@ -14420,6 +14374,53 @@
                       <a:r>
                         <a:rPr b="1"/>
                         <a:t>$6.305</a:t>
+                      </a:r>
+                    </a:p>
+                  </a:txBody>
+                </a:tc>
+              </a:tr>
+              <a:tr h="0">
+                <a:tc>
+                  <a:txBody>
+                    <a:bodyPr/>
+                    <a:lstStyle/>
+                    <a:p>
+                      <a:pPr lvl="0" indent="0" marL="0" algn="l">
+                        <a:buNone/>
+                      </a:pPr>
+                      <a:r>
+                        <a:rPr/>
+                        <a:t>4</a:t>
+                      </a:r>
+                    </a:p>
+                  </a:txBody>
+                </a:tc>
+                <a:tc>
+                  <a:txBody>
+                    <a:bodyPr/>
+                    <a:lstStyle/>
+                    <a:p>
+                      <a:pPr lvl="0" indent="0" marL="0" algn="l">
+                        <a:buNone/>
+                      </a:pPr>
+                      <a:r>
+                        <a:rPr/>
+                        <a:t>R — Review Ratio</a:t>
+                      </a:r>
+                    </a:p>
+                  </a:txBody>
+                </a:tc>
+                <a:tc>
+                  <a:txBody>
+                    <a:bodyPr/>
+                    <a:lstStyle/>
+                    <a:p>
+                      <a:pPr lvl="0" indent="0" marL="0" algn="ctr">
+                        <a:buNone/>
+                      </a:pPr>
+                      <a:r>
+                        <a:rPr b="1"/>
+                        <a:t>~33.3%</a:t>
                       </a:r>
                     </a:p>
                   </a:txBody>
@@ -15336,7 +15337,7 @@
             </a:pPr>
             <a:r>
               <a:rPr lang="en-US" sz="3200"/>
-              <a:t>Rusticate + Veracity allow quantitative software engineering</a:t>
+              <a:t>R</a:t>
             </a:r>
           </a:p>
         </p:txBody>
@@ -15359,49 +15360,32 @@
             <a:pPr lvl="0"/>
             <a:r>
               <a:rPr lang="en-US" sz="1800"/>
-              <a:t>I downloaded the 1036 most downloaded Rust projects, 3636 crates.</a:t>
-            </a:r>
-          </a:p>
-          <a:p>
-            <a:pPr lvl="0"/>
-            <a:r>
-              <a:rPr lang="en-US" sz="1800"/>
-              <a:t>I threw out three that wrapped std for asynchrony.</a:t>
-            </a:r>
-          </a:p>
-          <a:p>
-            <a:pPr lvl="0"/>
-            <a:r>
-              <a:rPr lang="en-US" sz="1800"/>
-              <a:t>I did a greedy set cover analysis of what Rust uses.</a:t>
-            </a:r>
-          </a:p>
-          <a:p>
-            <a:pPr lvl="0"/>
-            <a:r>
-              <a:rPr lang="en-US" sz="1800"/>
-              <a:t>And another of what verus wraps.</a:t>
-            </a:r>
-          </a:p>
-          <a:p>
-            <a:pPr lvl="0"/>
-            <a:r>
-              <a:rPr lang="en-US" sz="1800"/>
-              <a:t>This is a golden age for quantitative software engineering.</a:t>
-            </a:r>
-          </a:p>
-          <a:p>
-            <a:pPr lvl="0"/>
-            <a:r>
-              <a:rPr lang="en-US" sz="1800"/>
-              <a:t>It took just two days of person time.</a:t>
-            </a:r>
-          </a:p>
-          <a:p>
-            <a:pPr lvl="0"/>
-            <a:r>
-              <a:rPr lang="en-US" sz="1800"/>
-              <a:t>And I never read a line of code in the tools. Just check the output and have the AI write a lot of tests.</a:t>
+              <a:t>LOPC2R = Lines of proven code 2 review</a:t>
+            </a:r>
+          </a:p>
+          <a:p>
+            <a:pPr lvl="0"/>
+            <a:r>
+              <a:rPr lang="en-US" sz="1800"/>
+              <a:t>LOPC0R = Lines of proven code not to review</a:t>
+            </a:r>
+          </a:p>
+          <a:p>
+            <a:pPr lvl="0"/>
+            <a:r>
+              <a:rPr lang="en-US" sz="1800"/>
+              <a:t>R = LOPC2R / (LOPC2R + LOC0R)</a:t>
+            </a:r>
+          </a:p>
+          <a:p>
+            <a:pPr lvl="0"/>
+            <a:r>
+              <a:rPr lang="en-US" sz="1800"/>
+              <a:t>R — Review Ratio </a:t>
+            </a:r>
+            <a:r>
+              <a:rPr lang="en-US" sz="1800" b="1"/>
+              <a:t>~33.3%</a:t>
             </a:r>
           </a:p>
         </p:txBody>
@@ -15448,7 +15432,7 @@
             </a:pPr>
             <a:r>
               <a:rPr lang="en-US" sz="3200"/>
-              <a:t>Rusticate + Veracity : What Rust Cargos use in std.</a:t>
+              <a:t>Rusticate + Veracity allow quantitative software engineering</a:t>
             </a:r>
           </a:p>
         </p:txBody>
@@ -15471,70 +15455,49 @@
             <a:pPr lvl="0"/>
             <a:r>
               <a:rPr lang="en-US" sz="1800"/>
-              <a:t>Top 1000 projects, 3636 crates.</a:t>
-            </a:r>
-          </a:p>
-          <a:p>
-            <a:pPr lvl="0"/>
-            <a:r>
-              <a:rPr lang="en-US" sz="1800"/>
-              <a:t>19 data types fully support 90%.</a:t>
-            </a:r>
-          </a:p>
-          <a:p>
-            <a:pPr lvl="0"/>
-            <a:r>
-              <a:rPr lang="en-US" sz="1800"/>
-              <a:t>48 data types fully support 100%.</a:t>
-            </a:r>
-          </a:p>
-          <a:p>
-            <a:pPr lvl="0"/>
-            <a:r>
-              <a:rPr lang="en-US" sz="1800"/>
-              <a:t>69 modules fully support 95%.</a:t>
-            </a:r>
-          </a:p>
-          <a:p>
-            <a:pPr lvl="0"/>
-            <a:r>
-              <a:rPr lang="en-US" sz="1800"/>
-              <a:t>79 modules fully support 99%.</a:t>
-            </a:r>
-          </a:p>
-          <a:p>
-            <a:pPr lvl="0"/>
-            <a:r>
-              <a:rPr lang="en-US" sz="1800"/>
-              <a:t>1121 methods fully support 95%.</a:t>
-            </a:r>
-          </a:p>
-          <a:p>
-            <a:pPr lvl="0"/>
-            <a:r>
-              <a:rPr lang="en-US" sz="1800"/>
-              <a:t>1733 methods fully support 99%.</a:t>
-            </a:r>
-          </a:p>
-          <a:p>
-            <a:pPr lvl="0"/>
-            <a:r>
-              <a:rPr lang="en-US" sz="1800"/>
-              <a:t>14,317 total fn definitions in std/core/alloc in Rust</a:t>
-            </a:r>
-          </a:p>
-          <a:p>
-            <a:pPr lvl="0"/>
-            <a:r>
-              <a:rPr lang="en-US" sz="1800"/>
-              <a:t>4,965 pub fn definitions in std/core/alloc in Rust</a:t>
-            </a:r>
-          </a:p>
-          <a:p>
-            <a:pPr lvl="0"/>
-            <a:r>
-              <a:rPr lang="en-US" sz="1800"/>
-              <a:t>But how many of those private functions do we need? I don’t know.</a:t>
+              <a:t>I downloaded the 1036 most downloaded Rust projects, 3636 crates.</a:t>
+            </a:r>
+          </a:p>
+          <a:p>
+            <a:pPr lvl="0"/>
+            <a:r>
+              <a:rPr lang="en-US" sz="1800"/>
+              <a:t>I threw out three that wrapped std for asynchrony.</a:t>
+            </a:r>
+          </a:p>
+          <a:p>
+            <a:pPr lvl="0"/>
+            <a:r>
+              <a:rPr lang="en-US" sz="1800"/>
+              <a:t>I did a greedy set cover analysis of what Rust uses.</a:t>
+            </a:r>
+          </a:p>
+          <a:p>
+            <a:pPr lvl="0"/>
+            <a:r>
+              <a:rPr lang="en-US" sz="1800"/>
+              <a:t>And another of what verus wraps.</a:t>
+            </a:r>
+          </a:p>
+          <a:p>
+            <a:pPr lvl="0"/>
+            <a:r>
+              <a:rPr lang="en-US" sz="1800"/>
+              <a:t>This is a golden age for quantitative software engineering.</a:t>
+            </a:r>
+          </a:p>
+          <a:p>
+            <a:pPr lvl="0"/>
+            <a:r>
+              <a:rPr lang="en-US" sz="1800"/>
+              <a:t>It took just two days of person time.</a:t>
+            </a:r>
+          </a:p>
+          <a:p>
+            <a:pPr lvl="0"/>
+            <a:r>
+              <a:rPr lang="en-US" sz="1800"/>
+              <a:t>And I never read a line of code in the tools. Just check the output and have the AI write a lot of tests.</a:t>
             </a:r>
           </a:p>
         </p:txBody>
@@ -15581,7 +15544,7 @@
             </a:pPr>
             <a:r>
               <a:rPr lang="en-US" sz="3200"/>
-              <a:t>Compare Rust STD to APAS-VERUS?</a:t>
+              <a:t>Rusticate + Veracity : What Rust Cargos use in std.</a:t>
             </a:r>
           </a:p>
         </p:txBody>
@@ -15604,35 +15567,70 @@
             <a:pPr lvl="0"/>
             <a:r>
               <a:rPr lang="en-US" sz="1800"/>
-              <a:t>APAS-VERUS: -6,401 exec functions total, -4,911 with proofs</a:t>
-            </a:r>
-          </a:p>
-          <a:p>
-            <a:pPr lvl="0"/>
-            <a:r>
-              <a:rPr lang="en-US" sz="1800"/>
-              <a:t>But APAS-VERUS has {Mt,St}x{Per,Eph}</a:t>
-            </a:r>
-          </a:p>
-          <a:p>
-            <a:pPr lvl="0"/>
-            <a:r>
-              <a:rPr lang="en-US" sz="1800"/>
-              <a:t>So it is much more like 2000 distinct functions.</a:t>
-            </a:r>
-          </a:p>
-          <a:p>
-            <a:pPr lvl="0"/>
-            <a:r>
-              <a:rPr lang="en-US" sz="1800"/>
-              <a:t>And I wrote this in 160 days while learning Verus.</a:t>
-            </a:r>
-          </a:p>
-          <a:p>
-            <a:pPr lvl="0"/>
-            <a:r>
-              <a:rPr lang="en-US" sz="1800"/>
-              <a:t>At least 30 of those days were understanding and working around pain points.</a:t>
+              <a:t>Top 1000 projects, 3636 crates.</a:t>
+            </a:r>
+          </a:p>
+          <a:p>
+            <a:pPr lvl="0"/>
+            <a:r>
+              <a:rPr lang="en-US" sz="1800"/>
+              <a:t>19 data types fully support 90%.</a:t>
+            </a:r>
+          </a:p>
+          <a:p>
+            <a:pPr lvl="0"/>
+            <a:r>
+              <a:rPr lang="en-US" sz="1800"/>
+              <a:t>48 data types fully support 100%.</a:t>
+            </a:r>
+          </a:p>
+          <a:p>
+            <a:pPr lvl="0"/>
+            <a:r>
+              <a:rPr lang="en-US" sz="1800"/>
+              <a:t>69 modules fully support 95%.</a:t>
+            </a:r>
+          </a:p>
+          <a:p>
+            <a:pPr lvl="0"/>
+            <a:r>
+              <a:rPr lang="en-US" sz="1800"/>
+              <a:t>79 modules fully support 99%.</a:t>
+            </a:r>
+          </a:p>
+          <a:p>
+            <a:pPr lvl="0"/>
+            <a:r>
+              <a:rPr lang="en-US" sz="1800"/>
+              <a:t>1121 methods fully support 95%.</a:t>
+            </a:r>
+          </a:p>
+          <a:p>
+            <a:pPr lvl="0"/>
+            <a:r>
+              <a:rPr lang="en-US" sz="1800"/>
+              <a:t>1733 methods fully support 99%.</a:t>
+            </a:r>
+          </a:p>
+          <a:p>
+            <a:pPr lvl="0"/>
+            <a:r>
+              <a:rPr lang="en-US" sz="1800"/>
+              <a:t>14,317 total fn definitions in std/core/alloc in Rust</a:t>
+            </a:r>
+          </a:p>
+          <a:p>
+            <a:pPr lvl="0"/>
+            <a:r>
+              <a:rPr lang="en-US" sz="1800"/>
+              <a:t>4,965 pub fn definitions in std/core/alloc in Rust</a:t>
+            </a:r>
+          </a:p>
+          <a:p>
+            <a:pPr lvl="0"/>
+            <a:r>
+              <a:rPr lang="en-US" sz="1800"/>
+              <a:t>But how many of those private functions do we need? I don’t know.</a:t>
             </a:r>
           </a:p>
         </p:txBody>
@@ -15679,7 +15677,7 @@
             </a:pPr>
             <a:r>
               <a:rPr lang="en-US" sz="3200"/>
-              <a:t>Rusticate + Veracity: What Verus Wraps</a:t>
+              <a:t>Compare Rust STD to APAS-VERUS?</a:t>
             </a:r>
           </a:p>
         </p:txBody>
@@ -15702,56 +15700,35 @@
             <a:pPr lvl="0"/>
             <a:r>
               <a:rPr lang="en-US" sz="1800"/>
-              <a:t>As of 2026 14 April</a:t>
-            </a:r>
-          </a:p>
-          <a:p>
-            <a:pPr lvl="0"/>
-            <a:r>
-              <a:rPr lang="en-US" sz="1800"/>
-              <a:t>How many Rust Data Types does Verus wrap?</a:t>
-            </a:r>
-          </a:p>
-          <a:p>
-            <a:pPr lvl="1"/>
-            <a:r>
-              <a:rPr lang="en-US" sz="1800"/>
-              <a:t>29 types currently wrapped.</a:t>
-            </a:r>
-          </a:p>
-          <a:p>
-            <a:pPr lvl="0"/>
-            <a:r>
-              <a:rPr lang="en-US" sz="1800"/>
-              <a:t>How many Rust Traits does Verus wrap?</a:t>
-            </a:r>
-          </a:p>
-          <a:p>
-            <a:pPr lvl="1"/>
-            <a:r>
-              <a:rPr lang="en-US" sz="1800"/>
-              <a:t>147 traits in vstd.</a:t>
-            </a:r>
-          </a:p>
-          <a:p>
-            <a:pPr lvl="0"/>
-            <a:r>
-              <a:rPr lang="en-US" sz="1800"/>
-              <a:t>How many total Rust Methods does Verus wrap?</a:t>
-            </a:r>
-          </a:p>
-          <a:p>
-            <a:pPr lvl="1"/>
-            <a:r>
-              <a:rPr lang="en-US" sz="1800"/>
-              <a:t>154 methods currently wrapped.</a:t>
-            </a:r>
-          </a:p>
-          <a:p>
-            <a:pPr lvl="0"/>
-            <a:r>
-              <a:rPr lang="en-US" sz="1800"/>
-              <a:t>A small but growing percentage.</a:t>
+              <a:t>APAS-VERUS: -6,401 exec functions total, -4,911 with proofs</a:t>
+            </a:r>
+          </a:p>
+          <a:p>
+            <a:pPr lvl="0"/>
+            <a:r>
+              <a:rPr lang="en-US" sz="1800"/>
+              <a:t>But APAS-VERUS has {Mt,St}x{Per,Eph}</a:t>
+            </a:r>
+          </a:p>
+          <a:p>
+            <a:pPr lvl="0"/>
+            <a:r>
+              <a:rPr lang="en-US" sz="1800"/>
+              <a:t>So it is much more like 2000 distinct functions.</a:t>
+            </a:r>
+          </a:p>
+          <a:p>
+            <a:pPr lvl="0"/>
+            <a:r>
+              <a:rPr lang="en-US" sz="1800"/>
+              <a:t>And I wrote this in 160 days while learning Verus.</a:t>
+            </a:r>
+          </a:p>
+          <a:p>
+            <a:pPr lvl="0"/>
+            <a:r>
+              <a:rPr lang="en-US" sz="1800"/>
+              <a:t>At least 30 of those days were understanding and working around pain points.</a:t>
             </a:r>
           </a:p>
         </p:txBody>
@@ -15798,7 +15775,7 @@
             </a:pPr>
             <a:r>
               <a:rPr lang="en-US" sz="3200"/>
-              <a:t>Software Engineering in AI Paired Proving</a:t>
+              <a:t>Rusticate + Veracity: What Verus Wraps</a:t>
             </a:r>
           </a:p>
         </p:txBody>
@@ -15821,42 +15798,56 @@
             <a:pPr lvl="0"/>
             <a:r>
               <a:rPr lang="en-US" sz="1800"/>
-              <a:t>Software engineering in the AI age is much like managing programmers.</a:t>
-            </a:r>
-          </a:p>
-          <a:p>
-            <a:pPr lvl="0"/>
-            <a:r>
-              <a:rPr lang="en-US" sz="1800"/>
-              <a:t>You can’t possibly read all their code.</a:t>
-            </a:r>
-          </a:p>
-          <a:p>
-            <a:pPr lvl="0"/>
-            <a:r>
-              <a:rPr lang="en-US" sz="1800"/>
-              <a:t>So you use:</a:t>
+              <a:t>As of 2026 14 April</a:t>
+            </a:r>
+          </a:p>
+          <a:p>
+            <a:pPr lvl="0"/>
+            <a:r>
+              <a:rPr lang="en-US" sz="1800"/>
+              <a:t>How many Rust Data Types does Verus wrap?</a:t>
             </a:r>
           </a:p>
           <a:p>
             <a:pPr lvl="1"/>
             <a:r>
               <a:rPr lang="en-US" sz="1800"/>
-              <a:t>linters both programmatic and AI</a:t>
+              <a:t>29 types currently wrapped.</a:t>
+            </a:r>
+          </a:p>
+          <a:p>
+            <a:pPr lvl="0"/>
+            <a:r>
+              <a:rPr lang="en-US" sz="1800"/>
+              <a:t>How many Rust Traits does Verus wrap?</a:t>
             </a:r>
           </a:p>
           <a:p>
             <a:pPr lvl="1"/>
             <a:r>
               <a:rPr lang="en-US" sz="1800"/>
-              <a:t>stylers both programmatic and AI</a:t>
+              <a:t>147 traits in vstd.</a:t>
+            </a:r>
+          </a:p>
+          <a:p>
+            <a:pPr lvl="0"/>
+            <a:r>
+              <a:rPr lang="en-US" sz="1800"/>
+              <a:t>How many total Rust Methods does Verus wrap?</a:t>
             </a:r>
           </a:p>
           <a:p>
             <a:pPr lvl="1"/>
             <a:r>
               <a:rPr lang="en-US" sz="1800"/>
-              <a:t>AI reviews directed by programmatic tools.</a:t>
+              <a:t>154 methods currently wrapped.</a:t>
+            </a:r>
+          </a:p>
+          <a:p>
+            <a:pPr lvl="0"/>
+            <a:r>
+              <a:rPr lang="en-US" sz="1800"/>
+              <a:t>A small but growing percentage.</a:t>
             </a:r>
           </a:p>
         </p:txBody>
@@ -15926,49 +15917,42 @@
             <a:pPr lvl="0"/>
             <a:r>
               <a:rPr lang="en-US" sz="1800"/>
-              <a:t>Starting with a textbook that has a ton of good prose is a huge plus.</a:t>
-            </a:r>
-          </a:p>
-          <a:p>
-            <a:pPr lvl="0"/>
-            <a:r>
-              <a:rPr lang="en-US" sz="1800"/>
-              <a:t>I did discover a few things about the textbook.</a:t>
-            </a:r>
-          </a:p>
-          <a:p>
-            <a:pPr lvl="0"/>
-            <a:r>
-              <a:rPr lang="en-US" sz="1800"/>
-              <a:t>It needs more on Scheduling. I only built Help-First scheduling.</a:t>
-            </a:r>
-          </a:p>
-          <a:p>
-            <a:pPr lvl="0"/>
-            <a:r>
-              <a:rPr lang="en-US" sz="1800"/>
-              <a:t>It used (K,V) in tree sets as mappings, but I had to make this explicit. Particularly with an Ordered Key Mapping.</a:t>
-            </a:r>
-          </a:p>
-          <a:p>
-            <a:pPr lvl="0"/>
-            <a:r>
-              <a:rPr lang="en-US" sz="1800"/>
-              <a:t>With this Ordered Tables, which are not too complex, were much easier to prove.</a:t>
-            </a:r>
-          </a:p>
-          <a:p>
-            <a:pPr lvl="0"/>
-            <a:r>
-              <a:rPr lang="en-US" sz="1800"/>
-              <a:t>APAS’s discussion of Union Find was too thin. Path compression was very difficult.</a:t>
-            </a:r>
-          </a:p>
-          <a:p>
-            <a:pPr lvl="0"/>
-            <a:r>
-              <a:rPr lang="en-US" sz="1800"/>
-              <a:t>I had to start with Nikhil Swammy et. al’s AlgoCLRS’s implemention and proofs.</a:t>
+              <a:t>Software engineering in the AI age is much like managing programmers.</a:t>
+            </a:r>
+          </a:p>
+          <a:p>
+            <a:pPr lvl="0"/>
+            <a:r>
+              <a:rPr lang="en-US" sz="1800"/>
+              <a:t>You can’t possibly read all their code.</a:t>
+            </a:r>
+          </a:p>
+          <a:p>
+            <a:pPr lvl="0"/>
+            <a:r>
+              <a:rPr lang="en-US" sz="1800"/>
+              <a:t>So you use:</a:t>
+            </a:r>
+          </a:p>
+          <a:p>
+            <a:pPr lvl="1"/>
+            <a:r>
+              <a:rPr lang="en-US" sz="1800"/>
+              <a:t>linters both programmatic and AI</a:t>
+            </a:r>
+          </a:p>
+          <a:p>
+            <a:pPr lvl="1"/>
+            <a:r>
+              <a:rPr lang="en-US" sz="1800"/>
+              <a:t>stylers both programmatic and AI</a:t>
+            </a:r>
+          </a:p>
+          <a:p>
+            <a:pPr lvl="1"/>
+            <a:r>
+              <a:rPr lang="en-US" sz="1800"/>
+              <a:t>AI reviews directed by programmatic tools.</a:t>
             </a:r>
           </a:p>
         </p:txBody>
@@ -16038,70 +16022,49 @@
             <a:pPr lvl="0"/>
             <a:r>
               <a:rPr lang="en-US" sz="1800"/>
-              <a:t>I use git work trees for proof.</a:t>
-            </a:r>
-          </a:p>
-          <a:p>
-            <a:pPr lvl="0"/>
-            <a:r>
-              <a:rPr lang="en-US" sz="1800"/>
-              <a:t>The good news is git is powerful and the agents understand it.</a:t>
-            </a:r>
-          </a:p>
-          <a:p>
-            <a:pPr lvl="0"/>
-            <a:r>
-              <a:rPr lang="en-US" sz="1800"/>
-              <a:t>The bad news is the agents can indeed start using advanced features and get things wrong.</a:t>
-            </a:r>
-          </a:p>
-          <a:p>
-            <a:pPr lvl="0"/>
-            <a:r>
-              <a:rPr lang="en-US" sz="1800"/>
-              <a:t>I work with between 1 and 9 agents.</a:t>
-            </a:r>
-          </a:p>
-          <a:p>
-            <a:pPr lvl="0"/>
-            <a:r>
-              <a:rPr lang="en-US" sz="1800"/>
-              <a:t>One on veracity.</a:t>
-            </a:r>
-          </a:p>
-          <a:p>
-            <a:pPr lvl="0"/>
-            <a:r>
-              <a:rPr lang="en-US" sz="1800"/>
-              <a:t>One orchestrator, writing plans, prompts and controlling merges.</a:t>
-            </a:r>
-          </a:p>
-          <a:p>
-            <a:pPr lvl="0"/>
-            <a:r>
-              <a:rPr lang="en-US" sz="1800"/>
-              <a:t>1-8 on branches each working on different independent plans.</a:t>
-            </a:r>
-          </a:p>
-          <a:p>
-            <a:pPr lvl="0"/>
-            <a:r>
-              <a:rPr lang="en-US" sz="1800"/>
-              <a:t>I am not nearly comfortable enough with agent proof to let them do subagents without observing.</a:t>
-            </a:r>
-          </a:p>
-          <a:p>
-            <a:pPr lvl="0"/>
-            <a:r>
-              <a:rPr lang="en-US" sz="1800"/>
-              <a:t>Cursor was much better at interruption to guide things.</a:t>
-            </a:r>
-          </a:p>
-          <a:p>
-            <a:pPr lvl="0"/>
-            <a:r>
-              <a:rPr lang="en-US" sz="1800"/>
-              <a:t>Claude is getting better at it.</a:t>
+              <a:t>Starting with a textbook that has a ton of good prose is a huge plus.</a:t>
+            </a:r>
+          </a:p>
+          <a:p>
+            <a:pPr lvl="0"/>
+            <a:r>
+              <a:rPr lang="en-US" sz="1800"/>
+              <a:t>I did discover a few things about the textbook.</a:t>
+            </a:r>
+          </a:p>
+          <a:p>
+            <a:pPr lvl="0"/>
+            <a:r>
+              <a:rPr lang="en-US" sz="1800"/>
+              <a:t>It needs more on Scheduling. I only built Help-First scheduling.</a:t>
+            </a:r>
+          </a:p>
+          <a:p>
+            <a:pPr lvl="0"/>
+            <a:r>
+              <a:rPr lang="en-US" sz="1800"/>
+              <a:t>It used (K,V) in tree sets as mappings, but I had to make this explicit. Particularly with an Ordered Key Mapping.</a:t>
+            </a:r>
+          </a:p>
+          <a:p>
+            <a:pPr lvl="0"/>
+            <a:r>
+              <a:rPr lang="en-US" sz="1800"/>
+              <a:t>With this Ordered Tables, which are not too complex, were much easier to prove.</a:t>
+            </a:r>
+          </a:p>
+          <a:p>
+            <a:pPr lvl="0"/>
+            <a:r>
+              <a:rPr lang="en-US" sz="1800"/>
+              <a:t>APAS’s discussion of Union Find was too thin. Path compression was very difficult.</a:t>
+            </a:r>
+          </a:p>
+          <a:p>
+            <a:pPr lvl="0"/>
+            <a:r>
+              <a:rPr lang="en-US" sz="1800"/>
+              <a:t>I had to start with Nikhil Swammy et. al’s AlgoCLRS’s implemention and proofs.</a:t>
             </a:r>
           </a:p>
         </p:txBody>
@@ -16148,7 +16111,7 @@
             </a:pPr>
             <a:r>
               <a:rPr lang="en-US" sz="3200"/>
-              <a:t>Software Engineering in AI Paired Proving- Models</a:t>
+              <a:t>Software Engineering in AI Paired Proving</a:t>
             </a:r>
           </a:p>
         </p:txBody>
@@ -16171,56 +16134,70 @@
             <a:pPr lvl="0"/>
             <a:r>
               <a:rPr lang="en-US" sz="1800"/>
-              <a:t>The agents I used are: various Google, OpenAI and Anthropic.</a:t>
-            </a:r>
-          </a:p>
-          <a:p>
-            <a:pPr lvl="0"/>
-            <a:r>
-              <a:rPr lang="en-US" sz="1800"/>
-              <a:t>A google agent once took 12 minutes to ‘echo HI’ to test it’s terminal.</a:t>
-            </a:r>
-          </a:p>
-          <a:p>
-            <a:pPr lvl="0"/>
-            <a:r>
-              <a:rPr lang="en-US" sz="1800"/>
-              <a:t>Anthropics models are signficantly better than OpenAI.</a:t>
-            </a:r>
-          </a:p>
-          <a:p>
-            <a:pPr lvl="0"/>
-            <a:r>
-              <a:rPr lang="en-US" sz="1800"/>
-              <a:t>And Claude Code’s cost is the least so far.</a:t>
-            </a:r>
-          </a:p>
-          <a:p>
-            <a:pPr lvl="0"/>
-            <a:r>
-              <a:rPr lang="en-US" sz="1800"/>
-              <a:t>They are said in the press to be spending $5000 per month per user.</a:t>
-            </a:r>
-          </a:p>
-          <a:p>
-            <a:pPr lvl="0"/>
-            <a:r>
-              <a:rPr lang="en-US" sz="1800"/>
-              <a:t>They are buying market share (what happened to Amazon’s buying market share phase?).</a:t>
-            </a:r>
-          </a:p>
-          <a:p>
-            <a:pPr lvl="0"/>
-            <a:r>
-              <a:rPr lang="en-US" sz="1800"/>
-              <a:t>And they are buying coding interactions.</a:t>
-            </a:r>
-          </a:p>
-          <a:p>
-            <a:pPr lvl="0"/>
-            <a:r>
-              <a:rPr lang="en-US" sz="1800"/>
-              <a:t>But both vendors are playing leap frog.</a:t>
+              <a:t>I use git work trees for proof.</a:t>
+            </a:r>
+          </a:p>
+          <a:p>
+            <a:pPr lvl="0"/>
+            <a:r>
+              <a:rPr lang="en-US" sz="1800"/>
+              <a:t>The good news is git is powerful and the agents understand it.</a:t>
+            </a:r>
+          </a:p>
+          <a:p>
+            <a:pPr lvl="0"/>
+            <a:r>
+              <a:rPr lang="en-US" sz="1800"/>
+              <a:t>The bad news is the agents can indeed start using advanced features and get things wrong.</a:t>
+            </a:r>
+          </a:p>
+          <a:p>
+            <a:pPr lvl="0"/>
+            <a:r>
+              <a:rPr lang="en-US" sz="1800"/>
+              <a:t>I work with between 1 and 9 agents.</a:t>
+            </a:r>
+          </a:p>
+          <a:p>
+            <a:pPr lvl="0"/>
+            <a:r>
+              <a:rPr lang="en-US" sz="1800"/>
+              <a:t>One on veracity.</a:t>
+            </a:r>
+          </a:p>
+          <a:p>
+            <a:pPr lvl="0"/>
+            <a:r>
+              <a:rPr lang="en-US" sz="1800"/>
+              <a:t>One orchestrator, writing plans, prompts and controlling merges.</a:t>
+            </a:r>
+          </a:p>
+          <a:p>
+            <a:pPr lvl="0"/>
+            <a:r>
+              <a:rPr lang="en-US" sz="1800"/>
+              <a:t>1-8 on branches each working on different independent plans.</a:t>
+            </a:r>
+          </a:p>
+          <a:p>
+            <a:pPr lvl="0"/>
+            <a:r>
+              <a:rPr lang="en-US" sz="1800"/>
+              <a:t>I am not nearly comfortable enough with agent proof to let them do subagents without observing.</a:t>
+            </a:r>
+          </a:p>
+          <a:p>
+            <a:pPr lvl="0"/>
+            <a:r>
+              <a:rPr lang="en-US" sz="1800"/>
+              <a:t>Cursor was much better at interruption to guide things.</a:t>
+            </a:r>
+          </a:p>
+          <a:p>
+            <a:pPr lvl="0"/>
+            <a:r>
+              <a:rPr lang="en-US" sz="1800"/>
+              <a:t>Claude is getting better at it.</a:t>
             </a:r>
           </a:p>
         </p:txBody>
@@ -16379,7 +16356,7 @@
             </a:pPr>
             <a:r>
               <a:rPr lang="en-US" sz="3200"/>
-              <a:t>Software Engineering in AI Paired Proving- Problems</a:t>
+              <a:t>Software Engineering in AI Paired Proving- Models</a:t>
             </a:r>
           </a:p>
         </p:txBody>
@@ -16402,56 +16379,56 @@
             <a:pPr lvl="0"/>
             <a:r>
               <a:rPr lang="en-US" sz="1800"/>
-              <a:t>They are inconsistent.</a:t>
-            </a:r>
-          </a:p>
-          <a:p>
-            <a:pPr lvl="0"/>
-            <a:r>
-              <a:rPr lang="en-US" sz="1800"/>
-              <a:t>They lie.</a:t>
-            </a:r>
-          </a:p>
-          <a:p>
-            <a:pPr lvl="0"/>
-            <a:r>
-              <a:rPr lang="en-US" sz="1800"/>
-              <a:t>They cheat.</a:t>
-            </a:r>
-          </a:p>
-          <a:p>
-            <a:pPr lvl="0"/>
-            <a:r>
-              <a:rPr lang="en-US" sz="1800"/>
-              <a:t>They say I can’t prove that!</a:t>
-            </a:r>
-          </a:p>
-          <a:p>
-            <a:pPr lvl="0"/>
-            <a:r>
-              <a:rPr lang="en-US" sz="1800"/>
-              <a:t>They err.</a:t>
-            </a:r>
-          </a:p>
-          <a:p>
-            <a:pPr lvl="0"/>
-            <a:r>
-              <a:rPr lang="en-US" sz="1800"/>
-              <a:t>But mostly they are just forgetful.</a:t>
-            </a:r>
-          </a:p>
-          <a:p>
-            <a:pPr lvl="0"/>
-            <a:r>
-              <a:rPr lang="en-US" sz="1800"/>
-              <a:t>My attempts to give them coding standard checklists, ala Watts Humphrey and the PSP failed.</a:t>
-            </a:r>
-          </a:p>
-          <a:p>
-            <a:pPr lvl="0"/>
-            <a:r>
-              <a:rPr lang="en-US" sz="1800"/>
-              <a:t>Sometimes they would say “The checklist was followed” and then admit “I lied.”</a:t>
+              <a:t>The agents I used are: various Google, OpenAI and Anthropic.</a:t>
+            </a:r>
+          </a:p>
+          <a:p>
+            <a:pPr lvl="0"/>
+            <a:r>
+              <a:rPr lang="en-US" sz="1800"/>
+              <a:t>A google agent once took 12 minutes to ‘echo HI’ to test it’s terminal.</a:t>
+            </a:r>
+          </a:p>
+          <a:p>
+            <a:pPr lvl="0"/>
+            <a:r>
+              <a:rPr lang="en-US" sz="1800"/>
+              <a:t>Anthropics models are signficantly better than OpenAI.</a:t>
+            </a:r>
+          </a:p>
+          <a:p>
+            <a:pPr lvl="0"/>
+            <a:r>
+              <a:rPr lang="en-US" sz="1800"/>
+              <a:t>And Claude Code’s cost is the least so far.</a:t>
+            </a:r>
+          </a:p>
+          <a:p>
+            <a:pPr lvl="0"/>
+            <a:r>
+              <a:rPr lang="en-US" sz="1800"/>
+              <a:t>They are said in the press to be spending $5000 per month per user.</a:t>
+            </a:r>
+          </a:p>
+          <a:p>
+            <a:pPr lvl="0"/>
+            <a:r>
+              <a:rPr lang="en-US" sz="1800"/>
+              <a:t>They are buying market share (what happened to Amazon’s buying market share phase?).</a:t>
+            </a:r>
+          </a:p>
+          <a:p>
+            <a:pPr lvl="0"/>
+            <a:r>
+              <a:rPr lang="en-US" sz="1800"/>
+              <a:t>And they are buying coding interactions.</a:t>
+            </a:r>
+          </a:p>
+          <a:p>
+            <a:pPr lvl="0"/>
+            <a:r>
+              <a:rPr lang="en-US" sz="1800"/>
+              <a:t>But both vendors are playing leap frog.</a:t>
             </a:r>
           </a:p>
         </p:txBody>
@@ -16521,49 +16498,56 @@
             <a:pPr lvl="0"/>
             <a:r>
               <a:rPr lang="en-US" sz="1800"/>
-              <a:t>They are getting better, very few code hallucinations.</a:t>
-            </a:r>
-          </a:p>
-          <a:p>
-            <a:pPr lvl="0"/>
-            <a:r>
-              <a:rPr lang="en-US" sz="1800"/>
-              <a:t>If you tell them you are Dr. FunkenProof and they are Igor, they hallucinate whole modules.</a:t>
-            </a:r>
-          </a:p>
-          <a:p>
-            <a:pPr lvl="0"/>
-            <a:r>
-              <a:rPr lang="en-US" sz="1800"/>
-              <a:t>Just a few months ago only Claude could sweep a codebase decently.</a:t>
-            </a:r>
-          </a:p>
-          <a:p>
-            <a:pPr lvl="0"/>
-            <a:r>
-              <a:rPr lang="en-US" sz="1800"/>
-              <a:t>Now both Claude and OpenAI can.</a:t>
-            </a:r>
-          </a:p>
-          <a:p>
-            <a:pPr lvl="0"/>
-            <a:r>
-              <a:rPr lang="en-US" sz="1800"/>
-              <a:t>And now they can prove like heck.</a:t>
-            </a:r>
-          </a:p>
-          <a:p>
-            <a:pPr lvl="0"/>
-            <a:r>
-              <a:rPr lang="en-US" sz="1800"/>
-              <a:t>10x what I can do.</a:t>
-            </a:r>
-          </a:p>
-          <a:p>
-            <a:pPr lvl="0"/>
-            <a:r>
-              <a:rPr lang="en-US" sz="1800"/>
-              <a:t>Claude wants $25 per code review now, probably because they can and it’s expensive if they’re using pure LLMs.</a:t>
+              <a:t>They are inconsistent.</a:t>
+            </a:r>
+          </a:p>
+          <a:p>
+            <a:pPr lvl="0"/>
+            <a:r>
+              <a:rPr lang="en-US" sz="1800"/>
+              <a:t>They lie.</a:t>
+            </a:r>
+          </a:p>
+          <a:p>
+            <a:pPr lvl="0"/>
+            <a:r>
+              <a:rPr lang="en-US" sz="1800"/>
+              <a:t>They cheat.</a:t>
+            </a:r>
+          </a:p>
+          <a:p>
+            <a:pPr lvl="0"/>
+            <a:r>
+              <a:rPr lang="en-US" sz="1800"/>
+              <a:t>They say I can’t prove that!</a:t>
+            </a:r>
+          </a:p>
+          <a:p>
+            <a:pPr lvl="0"/>
+            <a:r>
+              <a:rPr lang="en-US" sz="1800"/>
+              <a:t>They err.</a:t>
+            </a:r>
+          </a:p>
+          <a:p>
+            <a:pPr lvl="0"/>
+            <a:r>
+              <a:rPr lang="en-US" sz="1800"/>
+              <a:t>But mostly they are just forgetful.</a:t>
+            </a:r>
+          </a:p>
+          <a:p>
+            <a:pPr lvl="0"/>
+            <a:r>
+              <a:rPr lang="en-US" sz="1800"/>
+              <a:t>My attempts to give them coding standard checklists, ala Watts Humphrey and the PSP failed.</a:t>
+            </a:r>
+          </a:p>
+          <a:p>
+            <a:pPr lvl="0"/>
+            <a:r>
+              <a:rPr lang="en-US" sz="1800"/>
+              <a:t>Sometimes they would say “The checklist was followed” and then admit “I lied.”</a:t>
             </a:r>
           </a:p>
         </p:txBody>
@@ -16633,78 +16617,49 @@
             <a:pPr lvl="0"/>
             <a:r>
               <a:rPr lang="en-US" sz="1800"/>
-              <a:t>What is the limiting factor now? </a:t>
-            </a:r>
-            <a:r>
-              <a:rPr lang="en-US" sz="1800" b="1"/>
-              <a:t>Code Review!</a:t>
-            </a:r>
-          </a:p>
-          <a:p>
-            <a:pPr lvl="0"/>
-            <a:r>
-              <a:rPr lang="en-US" sz="1800"/>
-              <a:t>But really </a:t>
-            </a:r>
-            <a:r>
-              <a:rPr lang="en-US" sz="1800" b="1"/>
-              <a:t>Spec Review</a:t>
-            </a:r>
-            <a:r>
-              <a:rPr lang="en-US" sz="1800"/>
-              <a:t> when you prove.</a:t>
-            </a:r>
-          </a:p>
-          <a:p>
-            <a:pPr lvl="0"/>
-            <a:r>
-              <a:rPr lang="en-US" sz="1800"/>
-              <a:t>What can we do to simplify code review?</a:t>
-            </a:r>
-          </a:p>
-          <a:p>
-            <a:pPr lvl="0" indent="-342900" marL="342900">
-              <a:buAutoNum type="arabicPeriod"/>
-            </a:pPr>
-            <a:r>
-              <a:rPr lang="en-US" sz="1800"/>
-              <a:t>Modularity - traits/impls in Verus.</a:t>
-            </a:r>
-          </a:p>
-          <a:p>
-            <a:pPr lvl="0" indent="-342900" marL="342900">
-              <a:buAutoNum startAt="2" type="arabicPeriod"/>
-            </a:pPr>
-            <a:r>
-              <a:rPr lang="en-US" sz="1800"/>
-              <a:t>TOC - This organizes the boilerplate to make reading easier.</a:t>
-            </a:r>
-          </a:p>
-          <a:p>
-            <a:pPr lvl="0" indent="-342900" marL="342900">
-              <a:buAutoNum startAt="3" type="arabicPeriod"/>
-            </a:pPr>
-            <a:r>
-              <a:rPr lang="en-US" sz="1800"/>
-              <a:t>Proof - I really just read the specs. If they’re right the code is right!</a:t>
-            </a:r>
-          </a:p>
-          <a:p>
-            <a:pPr lvl="0" indent="-342900" marL="342900">
-              <a:buAutoNum startAt="4" type="arabicPeriod"/>
-            </a:pPr>
-            <a:r>
-              <a:rPr lang="en-US" sz="1800"/>
-              <a:t>Tests - are hugely useful when you don’t trust your coding team.</a:t>
-            </a:r>
-          </a:p>
-          <a:p>
-            <a:pPr lvl="0" indent="-342900" marL="342900">
-              <a:buAutoNum startAt="5" type="arabicPeriod"/>
-            </a:pPr>
-            <a:r>
-              <a:rPr lang="en-US" sz="1800"/>
-              <a:t>Formatting - rust formatting has been adopted in Verus. It is very low density. I built a minimizing formatter to cut down on my working memory load while reviewing. F* is much tighter.</a:t>
+              <a:t>They are getting better, very few code hallucinations.</a:t>
+            </a:r>
+          </a:p>
+          <a:p>
+            <a:pPr lvl="0"/>
+            <a:r>
+              <a:rPr lang="en-US" sz="1800"/>
+              <a:t>If you tell them you are Dr. FunkenProof and they are Igor, they hallucinate whole modules.</a:t>
+            </a:r>
+          </a:p>
+          <a:p>
+            <a:pPr lvl="0"/>
+            <a:r>
+              <a:rPr lang="en-US" sz="1800"/>
+              <a:t>Just a few months ago only Claude could sweep a codebase decently.</a:t>
+            </a:r>
+          </a:p>
+          <a:p>
+            <a:pPr lvl="0"/>
+            <a:r>
+              <a:rPr lang="en-US" sz="1800"/>
+              <a:t>Now both Claude and OpenAI can.</a:t>
+            </a:r>
+          </a:p>
+          <a:p>
+            <a:pPr lvl="0"/>
+            <a:r>
+              <a:rPr lang="en-US" sz="1800"/>
+              <a:t>And now they can prove like heck.</a:t>
+            </a:r>
+          </a:p>
+          <a:p>
+            <a:pPr lvl="0"/>
+            <a:r>
+              <a:rPr lang="en-US" sz="1800"/>
+              <a:t>10x what I can do.</a:t>
+            </a:r>
+          </a:p>
+          <a:p>
+            <a:pPr lvl="0"/>
+            <a:r>
+              <a:rPr lang="en-US" sz="1800"/>
+              <a:t>Claude wants $25 per code review now, probably because they can and it’s expensive if they’re using pure LLMs.</a:t>
             </a:r>
           </a:p>
         </p:txBody>
@@ -16751,7 +16706,7 @@
             </a:pPr>
             <a:r>
               <a:rPr lang="en-US" sz="3200"/>
-              <a:t>The AI Paired Programming Interfaces</a:t>
+              <a:t>Software Engineering in AI Paired Proving- Problems</a:t>
             </a:r>
           </a:p>
         </p:txBody>
@@ -16774,49 +16729,78 @@
             <a:pPr lvl="0"/>
             <a:r>
               <a:rPr lang="en-US" sz="1800"/>
-              <a:t>What you want is pretty obvious with experience: TEXT still rules.</a:t>
-            </a:r>
-          </a:p>
-          <a:p>
-            <a:pPr lvl="0"/>
-            <a:r>
-              <a:rPr lang="en-US" sz="1800"/>
-              <a:t>You want one window with your core interaction. The agent tells you what it is doing in it.</a:t>
-            </a:r>
-          </a:p>
-          <a:p>
-            <a:pPr lvl="0"/>
-            <a:r>
-              <a:rPr lang="en-US" sz="1800"/>
-              <a:t>You want one to watch your compile, tests and scripts.</a:t>
-            </a:r>
-          </a:p>
-          <a:p>
-            <a:pPr lvl="0"/>
-            <a:r>
-              <a:rPr lang="en-US" sz="1800"/>
-              <a:t>You want one window to have the LLM show you it’s thinking and allow you to question and change it.</a:t>
-            </a:r>
-          </a:p>
-          <a:p>
-            <a:pPr lvl="0"/>
-            <a:r>
-              <a:rPr lang="en-US" sz="1800"/>
-              <a:t>I learned a ton from watching agents think.</a:t>
-            </a:r>
-          </a:p>
-          <a:p>
-            <a:pPr lvl="0"/>
-            <a:r>
-              <a:rPr lang="en-US" sz="1800"/>
-              <a:t>I suspect they are hiding most of their thinking now to prevent them from being used to train new AIs.</a:t>
-            </a:r>
-          </a:p>
-          <a:p>
-            <a:pPr lvl="0"/>
-            <a:r>
-              <a:rPr lang="en-US" sz="1800"/>
-              <a:t>And you want it not to delete your previous conversation on token compression.</a:t>
+              <a:t>What is the limiting factor now? </a:t>
+            </a:r>
+            <a:r>
+              <a:rPr lang="en-US" sz="1800" b="1"/>
+              <a:t>Code Review!</a:t>
+            </a:r>
+          </a:p>
+          <a:p>
+            <a:pPr lvl="0"/>
+            <a:r>
+              <a:rPr lang="en-US" sz="1800"/>
+              <a:t>But really </a:t>
+            </a:r>
+            <a:r>
+              <a:rPr lang="en-US" sz="1800" b="1"/>
+              <a:t>Spec Review</a:t>
+            </a:r>
+            <a:r>
+              <a:rPr lang="en-US" sz="1800"/>
+              <a:t> when you prove.</a:t>
+            </a:r>
+          </a:p>
+          <a:p>
+            <a:pPr lvl="0"/>
+            <a:r>
+              <a:rPr lang="en-US" sz="1800"/>
+              <a:t>What can we do to simplify code review?</a:t>
+            </a:r>
+          </a:p>
+          <a:p>
+            <a:pPr lvl="0" indent="-342900" marL="342900">
+              <a:buAutoNum type="arabicPeriod"/>
+            </a:pPr>
+            <a:r>
+              <a:rPr lang="en-US" sz="1800"/>
+              <a:t>Modularity - traits/impls in Verus.</a:t>
+            </a:r>
+          </a:p>
+          <a:p>
+            <a:pPr lvl="0" indent="-342900" marL="342900">
+              <a:buAutoNum startAt="2" type="arabicPeriod"/>
+            </a:pPr>
+            <a:r>
+              <a:rPr lang="en-US" sz="1800"/>
+              <a:t>TOC - This organizes the boilerplate to make reading easier.</a:t>
+            </a:r>
+          </a:p>
+          <a:p>
+            <a:pPr lvl="0" indent="-342900" marL="342900">
+              <a:buAutoNum startAt="3" type="arabicPeriod"/>
+            </a:pPr>
+            <a:r>
+              <a:rPr lang="en-US" sz="1800"/>
+              <a:t>Proof - I really just read the specs. If they’re right the code is right!</a:t>
+            </a:r>
+          </a:p>
+          <a:p>
+            <a:pPr lvl="0" indent="-342900" marL="342900">
+              <a:buAutoNum startAt="4" type="arabicPeriod"/>
+            </a:pPr>
+            <a:r>
+              <a:rPr lang="en-US" sz="1800"/>
+              <a:t>Tests - are hugely useful when you don’t trust your coding team.</a:t>
+            </a:r>
+          </a:p>
+          <a:p>
+            <a:pPr lvl="0" indent="-342900" marL="342900">
+              <a:buAutoNum startAt="5" type="arabicPeriod"/>
+            </a:pPr>
+            <a:r>
+              <a:rPr lang="en-US" sz="1800"/>
+              <a:t>Formatting - rust formatting has been adopted in Verus. It is very low density. I built a minimizing formatter to cut down on my working memory load while reviewing. F* is much tighter.</a:t>
             </a:r>
           </a:p>
         </p:txBody>
@@ -16827,6 +16811,118 @@
 </file>
 
 <file path=ppt/slides/slide74.xml><?xml version="1.0" encoding="utf-8"?>
+<p:sld xmlns:a="http://schemas.openxmlformats.org/drawingml/2006/main" xmlns:r="http://schemas.openxmlformats.org/officeDocument/2006/relationships" xmlns:p="http://schemas.openxmlformats.org/presentationml/2006/main">
+  <p:cSld>
+    <p:spTree>
+      <p:nvGrpSpPr>
+        <p:cNvPr id="1" name=""/>
+        <p:cNvGrpSpPr/>
+        <p:nvPr/>
+      </p:nvGrpSpPr>
+      <p:grpSpPr>
+        <a:xfrm>
+          <a:off x="0" y="0"/>
+          <a:ext cx="0" cy="0"/>
+          <a:chOff x="0" y="0"/>
+          <a:chExt cx="0" cy="0"/>
+        </a:xfrm>
+      </p:grpSpPr>
+      <p:sp>
+        <p:nvSpPr>
+          <p:cNvPr id="2" name="Title 1"/>
+          <p:cNvSpPr>
+            <a:spLocks noGrp="1"/>
+          </p:cNvSpPr>
+          <p:nvPr>
+            <p:ph type="title"/>
+          </p:nvPr>
+        </p:nvSpPr>
+        <p:spPr/>
+        <p:txBody>
+          <a:bodyPr/>
+          <a:lstStyle/>
+          <a:p>
+            <a:pPr lvl="0" indent="0" marL="0">
+              <a:buNone/>
+            </a:pPr>
+            <a:r>
+              <a:rPr lang="en-US" sz="3200"/>
+              <a:t>The AI Paired Programming Interfaces</a:t>
+            </a:r>
+          </a:p>
+        </p:txBody>
+      </p:sp>
+      <p:sp>
+        <p:nvSpPr>
+          <p:cNvPr id="3" name="Content Placeholder 2"/>
+          <p:cNvSpPr>
+            <a:spLocks noGrp="1"/>
+          </p:cNvSpPr>
+          <p:nvPr>
+            <p:ph idx="1"/>
+          </p:nvPr>
+        </p:nvSpPr>
+        <p:spPr/>
+        <p:txBody>
+          <a:bodyPr/>
+          <a:lstStyle/>
+          <a:p>
+            <a:pPr lvl="0"/>
+            <a:r>
+              <a:rPr lang="en-US" sz="1800"/>
+              <a:t>What you want is pretty obvious with experience: TEXT still rules.</a:t>
+            </a:r>
+          </a:p>
+          <a:p>
+            <a:pPr lvl="0"/>
+            <a:r>
+              <a:rPr lang="en-US" sz="1800"/>
+              <a:t>You want one window with your core interaction. The agent tells you what it is doing in it.</a:t>
+            </a:r>
+          </a:p>
+          <a:p>
+            <a:pPr lvl="0"/>
+            <a:r>
+              <a:rPr lang="en-US" sz="1800"/>
+              <a:t>You want one to watch your compile, tests and scripts.</a:t>
+            </a:r>
+          </a:p>
+          <a:p>
+            <a:pPr lvl="0"/>
+            <a:r>
+              <a:rPr lang="en-US" sz="1800"/>
+              <a:t>You want one window to have the LLM show you it’s thinking and allow you to question and change it.</a:t>
+            </a:r>
+          </a:p>
+          <a:p>
+            <a:pPr lvl="0"/>
+            <a:r>
+              <a:rPr lang="en-US" sz="1800"/>
+              <a:t>I learned a ton from watching agents think.</a:t>
+            </a:r>
+          </a:p>
+          <a:p>
+            <a:pPr lvl="0"/>
+            <a:r>
+              <a:rPr lang="en-US" sz="1800"/>
+              <a:t>I suspect they are hiding most of their thinking now to prevent them from being used to train new AIs.</a:t>
+            </a:r>
+          </a:p>
+          <a:p>
+            <a:pPr lvl="0"/>
+            <a:r>
+              <a:rPr lang="en-US" sz="1800"/>
+              <a:t>And you want it not to delete your previous conversation on token compression.</a:t>
+            </a:r>
+          </a:p>
+        </p:txBody>
+      </p:sp>
+    </p:spTree>
+  </p:cSld>
+</p:sld>
+</file>
+
+<file path=ppt/slides/slide75.xml><?xml version="1.0" encoding="utf-8"?>
 <p:sld xmlns:a="http://schemas.openxmlformats.org/drawingml/2006/main" xmlns:r="http://schemas.openxmlformats.org/officeDocument/2006/relationships" xmlns:p="http://schemas.openxmlformats.org/presentationml/2006/main">
   <p:cSld>
     <p:spTree>
@@ -17217,111 +17313,6 @@
 </p:sld>
 </file>
 
-<file path=ppt/slides/slide75.xml><?xml version="1.0" encoding="utf-8"?>
-<p:sld xmlns:a="http://schemas.openxmlformats.org/drawingml/2006/main" xmlns:r="http://schemas.openxmlformats.org/officeDocument/2006/relationships" xmlns:p="http://schemas.openxmlformats.org/presentationml/2006/main">
-  <p:cSld>
-    <p:spTree>
-      <p:nvGrpSpPr>
-        <p:cNvPr id="1" name=""/>
-        <p:cNvGrpSpPr/>
-        <p:nvPr/>
-      </p:nvGrpSpPr>
-      <p:grpSpPr>
-        <a:xfrm>
-          <a:off x="0" y="0"/>
-          <a:ext cx="0" cy="0"/>
-          <a:chOff x="0" y="0"/>
-          <a:chExt cx="0" cy="0"/>
-        </a:xfrm>
-      </p:grpSpPr>
-      <p:sp>
-        <p:nvSpPr>
-          <p:cNvPr id="2" name="Title 1"/>
-          <p:cNvSpPr>
-            <a:spLocks noGrp="1"/>
-          </p:cNvSpPr>
-          <p:nvPr>
-            <p:ph type="title"/>
-          </p:nvPr>
-        </p:nvSpPr>
-        <p:spPr/>
-        <p:txBody>
-          <a:bodyPr/>
-          <a:lstStyle/>
-          <a:p>
-            <a:pPr lvl="0" indent="0" marL="0">
-              <a:buNone/>
-            </a:pPr>
-            <a:r>
-              <a:rPr lang="en-US" sz="3200"/>
-              <a:t>The Internet Apocalypse</a:t>
-            </a:r>
-          </a:p>
-        </p:txBody>
-      </p:sp>
-      <p:sp>
-        <p:nvSpPr>
-          <p:cNvPr id="3" name="Content Placeholder 2"/>
-          <p:cNvSpPr>
-            <a:spLocks noGrp="1"/>
-          </p:cNvSpPr>
-          <p:nvPr>
-            <p:ph idx="1"/>
-          </p:nvPr>
-        </p:nvSpPr>
-        <p:spPr/>
-        <p:txBody>
-          <a:bodyPr/>
-          <a:lstStyle/>
-          <a:p>
-            <a:pPr lvl="0"/>
-            <a:r>
-              <a:rPr lang="en-US" sz="1800"/>
-              <a:t>I asked Claude Code to check its switches on startup for me, at the End of Jan 2026.</a:t>
-            </a:r>
-          </a:p>
-          <a:p>
-            <a:pPr lvl="0"/>
-            <a:r>
-              <a:rPr lang="en-US" sz="1800"/>
-              <a:t>It immediately started disassembling itself.</a:t>
-            </a:r>
-          </a:p>
-          <a:p>
-            <a:pPr lvl="0"/>
-            <a:r>
-              <a:rPr lang="en-US" sz="1800"/>
-              <a:t>Scared the heck out of me.</a:t>
-            </a:r>
-          </a:p>
-          <a:p>
-            <a:pPr lvl="0"/>
-            <a:r>
-              <a:rPr lang="en-US" sz="1800"/>
-              <a:t>I told it to read it’s docs.</a:t>
-            </a:r>
-          </a:p>
-          <a:p>
-            <a:pPr lvl="0"/>
-            <a:r>
-              <a:rPr lang="en-US" sz="1800"/>
-              <a:t>I have 100% belief that these LLMs are moving faster than computer security.</a:t>
-            </a:r>
-          </a:p>
-          <a:p>
-            <a:pPr lvl="0"/>
-            <a:r>
-              <a:rPr lang="en-US" sz="1800"/>
-              <a:t>It’s verify or be hacked at this point.</a:t>
-            </a:r>
-          </a:p>
-        </p:txBody>
-      </p:sp>
-    </p:spTree>
-  </p:cSld>
-</p:sld>
-</file>
-
 <file path=ppt/slides/slide76.xml><?xml version="1.0" encoding="utf-8"?>
 <p:sld xmlns:a="http://schemas.openxmlformats.org/drawingml/2006/main" xmlns:r="http://schemas.openxmlformats.org/officeDocument/2006/relationships" xmlns:p="http://schemas.openxmlformats.org/presentationml/2006/main">
   <p:cSld>
@@ -17382,42 +17373,42 @@
             <a:pPr lvl="0"/>
             <a:r>
               <a:rPr lang="en-US" sz="1800"/>
-              <a:t>Where should we focus our limited, but quickly growing, proving power?</a:t>
-            </a:r>
-          </a:p>
-          <a:p>
-            <a:pPr lvl="0"/>
-            <a:r>
-              <a:rPr lang="en-US" sz="1800"/>
-              <a:t>In theory 70% of intrusions are solved by type safe languages.</a:t>
-            </a:r>
-          </a:p>
-          <a:p>
-            <a:pPr lvl="0"/>
-            <a:r>
-              <a:rPr lang="en-US" sz="1800"/>
-              <a:t>I suspect that this just ignores way too much of the human aspect.</a:t>
-            </a:r>
-          </a:p>
-          <a:p>
-            <a:pPr lvl="0"/>
-            <a:r>
-              <a:rPr lang="en-US" sz="1800"/>
-              <a:t>I have never liked a single estimation paper’s methods.</a:t>
-            </a:r>
-          </a:p>
-          <a:p>
-            <a:pPr lvl="0"/>
-            <a:r>
-              <a:rPr lang="en-US" sz="1800"/>
-              <a:t>One way to help us focus our new-found superpowers is to survey KLOC type-unsafe x Interfaces x Running Services x $ Value.</a:t>
-            </a:r>
-          </a:p>
-          <a:p>
-            <a:pPr lvl="0"/>
-            <a:r>
-              <a:rPr lang="en-US" sz="1800"/>
-              <a:t>Which Amazon and Microsoft can probably measure.</a:t>
+              <a:t>I asked Claude Code to check its switches on startup for me, at the End of Jan 2026.</a:t>
+            </a:r>
+          </a:p>
+          <a:p>
+            <a:pPr lvl="0"/>
+            <a:r>
+              <a:rPr lang="en-US" sz="1800"/>
+              <a:t>It immediately started disassembling itself.</a:t>
+            </a:r>
+          </a:p>
+          <a:p>
+            <a:pPr lvl="0"/>
+            <a:r>
+              <a:rPr lang="en-US" sz="1800"/>
+              <a:t>Scared the heck out of me.</a:t>
+            </a:r>
+          </a:p>
+          <a:p>
+            <a:pPr lvl="0"/>
+            <a:r>
+              <a:rPr lang="en-US" sz="1800"/>
+              <a:t>I told it to read it’s docs.</a:t>
+            </a:r>
+          </a:p>
+          <a:p>
+            <a:pPr lvl="0"/>
+            <a:r>
+              <a:rPr lang="en-US" sz="1800"/>
+              <a:t>I have 100% belief that these LLMs are moving faster than computer security.</a:t>
+            </a:r>
+          </a:p>
+          <a:p>
+            <a:pPr lvl="0"/>
+            <a:r>
+              <a:rPr lang="en-US" sz="1800"/>
+              <a:t>It’s verify or be hacked at this point.</a:t>
             </a:r>
           </a:p>
         </p:txBody>
@@ -17464,7 +17455,7 @@
             </a:pPr>
             <a:r>
               <a:rPr lang="en-US" sz="3200"/>
-              <a:t>Future Work</a:t>
+              <a:t>The Internet Apocalypse</a:t>
             </a:r>
           </a:p>
         </p:txBody>
@@ -17487,49 +17478,42 @@
             <a:pPr lvl="0"/>
             <a:r>
               <a:rPr lang="en-US" sz="1800"/>
-              <a:t>GRASE (Medical Acronym) -</a:t>
-            </a:r>
-          </a:p>
-          <a:p>
-            <a:pPr lvl="1"/>
-            <a:r>
-              <a:rPr lang="en-US" sz="1800"/>
-              <a:t>Generally Recognized as Safe and Effective</a:t>
-            </a:r>
-          </a:p>
-          <a:p>
-            <a:pPr lvl="0"/>
-            <a:r>
-              <a:rPr lang="en-US" sz="1800" b="1"/>
-              <a:t>GRASE-</a:t>
-            </a:r>
-          </a:p>
-          <a:p>
-            <a:pPr lvl="1"/>
-            <a:r>
-              <a:rPr lang="en-US" sz="1800" b="1"/>
-              <a:t>Git Recording Agentic Software Engineering</a:t>
-            </a:r>
-          </a:p>
-          <a:p>
-            <a:pPr lvl="0"/>
-            <a:r>
-              <a:rPr lang="en-US" sz="1800"/>
-              <a:t>The GRASE project’s goal is to make statistical process software optimization for agentic coding:</a:t>
-            </a:r>
-          </a:p>
-          <a:p>
-            <a:pPr lvl="1"/>
-            <a:r>
-              <a:rPr lang="en-US" sz="1800" b="1"/>
-              <a:t>Generally Regarded As Simple and Effective.</a:t>
-            </a:r>
-          </a:p>
-          <a:p>
-            <a:pPr lvl="0"/>
-            <a:r>
-              <a:rPr lang="en-US" sz="1800"/>
-              <a:t>A Watt’s Humphrey style PSP data collection done essentially effortlessly by the agents in the background.</a:t>
+              <a:t>Where should we focus our limited, but quickly growing, proving power?</a:t>
+            </a:r>
+          </a:p>
+          <a:p>
+            <a:pPr lvl="0"/>
+            <a:r>
+              <a:rPr lang="en-US" sz="1800"/>
+              <a:t>In theory 70% of intrusions are solved by type safe languages.</a:t>
+            </a:r>
+          </a:p>
+          <a:p>
+            <a:pPr lvl="0"/>
+            <a:r>
+              <a:rPr lang="en-US" sz="1800"/>
+              <a:t>I suspect that this just ignores way too much of the human aspect.</a:t>
+            </a:r>
+          </a:p>
+          <a:p>
+            <a:pPr lvl="0"/>
+            <a:r>
+              <a:rPr lang="en-US" sz="1800"/>
+              <a:t>I have never liked a single estimation paper’s methods.</a:t>
+            </a:r>
+          </a:p>
+          <a:p>
+            <a:pPr lvl="0"/>
+            <a:r>
+              <a:rPr lang="en-US" sz="1800"/>
+              <a:t>One way to help us focus our new-found superpowers is to survey KLOC type-unsafe x Interfaces x Running Services x $ Value.</a:t>
+            </a:r>
+          </a:p>
+          <a:p>
+            <a:pPr lvl="0"/>
+            <a:r>
+              <a:rPr lang="en-US" sz="1800"/>
+              <a:t>Which Amazon and Microsoft can probably measure.</a:t>
             </a:r>
           </a:p>
         </p:txBody>
@@ -17576,7 +17560,7 @@
             </a:pPr>
             <a:r>
               <a:rPr lang="en-US" sz="3200"/>
-              <a:t>Review of the Talk</a:t>
+              <a:t>Future Work</a:t>
             </a:r>
           </a:p>
         </p:txBody>
@@ -17599,14 +17583,49 @@
             <a:pPr lvl="0"/>
             <a:r>
               <a:rPr lang="en-US" sz="1800"/>
-              <a:t>Ah let’s just get to the questions!</a:t>
-            </a:r>
-          </a:p>
-          <a:p>
-            <a:pPr lvl="0"/>
-            <a:r>
-              <a:rPr lang="en-US" sz="1800"/>
-              <a:t>I have a ton of them for you! and I hope you have many for me.</a:t>
+              <a:t>GRASE (Medical Acronym) -</a:t>
+            </a:r>
+          </a:p>
+          <a:p>
+            <a:pPr lvl="1"/>
+            <a:r>
+              <a:rPr lang="en-US" sz="1800"/>
+              <a:t>Generally Recognized as Safe and Effective</a:t>
+            </a:r>
+          </a:p>
+          <a:p>
+            <a:pPr lvl="0"/>
+            <a:r>
+              <a:rPr lang="en-US" sz="1800" b="1"/>
+              <a:t>GRASE-</a:t>
+            </a:r>
+          </a:p>
+          <a:p>
+            <a:pPr lvl="1"/>
+            <a:r>
+              <a:rPr lang="en-US" sz="1800" b="1"/>
+              <a:t>Git Recording Agentic Software Engineering</a:t>
+            </a:r>
+          </a:p>
+          <a:p>
+            <a:pPr lvl="0"/>
+            <a:r>
+              <a:rPr lang="en-US" sz="1800"/>
+              <a:t>The GRASE project’s goal is to make statistical process software optimization for agentic coding:</a:t>
+            </a:r>
+          </a:p>
+          <a:p>
+            <a:pPr lvl="1"/>
+            <a:r>
+              <a:rPr lang="en-US" sz="1800" b="1"/>
+              <a:t>Generally Regarded As Simple and Effective.</a:t>
+            </a:r>
+          </a:p>
+          <a:p>
+            <a:pPr lvl="0"/>
+            <a:r>
+              <a:rPr lang="en-US" sz="1800"/>
+              <a:t>A Watt’s Humphrey style PSP data collection done essentially effortlessly by the agents in the background.</a:t>
             </a:r>
           </a:p>
         </p:txBody>
@@ -17653,7 +17672,37 @@
             </a:pPr>
             <a:r>
               <a:rPr lang="en-US" sz="3200"/>
-              <a:t>Extra Slides</a:t>
+              <a:t>Review of the Talk</a:t>
+            </a:r>
+          </a:p>
+        </p:txBody>
+      </p:sp>
+      <p:sp>
+        <p:nvSpPr>
+          <p:cNvPr id="3" name="Content Placeholder 2"/>
+          <p:cNvSpPr>
+            <a:spLocks noGrp="1"/>
+          </p:cNvSpPr>
+          <p:nvPr>
+            <p:ph idx="1"/>
+          </p:nvPr>
+        </p:nvSpPr>
+        <p:spPr/>
+        <p:txBody>
+          <a:bodyPr/>
+          <a:lstStyle/>
+          <a:p>
+            <a:pPr lvl="0"/>
+            <a:r>
+              <a:rPr lang="en-US" sz="1800"/>
+              <a:t>Ah let’s just get to the questions!</a:t>
+            </a:r>
+          </a:p>
+          <a:p>
+            <a:pPr lvl="0"/>
+            <a:r>
+              <a:rPr lang="en-US" sz="1800"/>
+              <a:t>I have a ton of them for you! and I hope you have many for me.</a:t>
             </a:r>
           </a:p>
         </p:txBody>
@@ -17805,86 +17854,7 @@
             </a:pPr>
             <a:r>
               <a:rPr lang="en-US" sz="3200"/>
-              <a:t>AI Paired Programming Size: Quick Review</a:t>
-            </a:r>
-          </a:p>
-        </p:txBody>
-      </p:sp>
-      <p:sp>
-        <p:nvSpPr>
-          <p:cNvPr id="3" name="Content Placeholder 2"/>
-          <p:cNvSpPr>
-            <a:spLocks noGrp="1"/>
-          </p:cNvSpPr>
-          <p:nvPr>
-            <p:ph idx="1"/>
-          </p:nvPr>
-        </p:nvSpPr>
-        <p:spPr/>
-        <p:txBody>
-          <a:bodyPr/>
-          <a:lstStyle/>
-          <a:p>
-            <a:pPr lvl="0"/>
-            <a:r>
-              <a:rPr lang="en-US" sz="1800"/>
-              <a:t>APAS-AI Lines of Code</a:t>
-            </a:r>
-          </a:p>
-          <a:p>
-            <a:pPr lvl="1"/>
-            <a:r>
-              <a:rPr lang="en-US" sz="1800"/>
-              <a:t>Source: 31,751</a:t>
-            </a:r>
-          </a:p>
-          <a:p>
-            <a:pPr lvl="1"/>
-            <a:r>
-              <a:rPr lang="en-US" sz="1800"/>
-              <a:t>Tests: 55,223</a:t>
-            </a:r>
-          </a:p>
-          <a:p>
-            <a:pPr lvl="1"/>
-            <a:r>
-              <a:rPr lang="en-US" sz="1800"/>
-              <a:t>Benches: 13,890</a:t>
-            </a:r>
-          </a:p>
-          <a:p>
-            <a:pPr lvl="1"/>
-            <a:r>
-              <a:rPr lang="en-US" sz="1800"/>
-              <a:t>Total code: 100,864</a:t>
-            </a:r>
-          </a:p>
-          <a:p>
-            <a:pPr lvl="0"/>
-            <a:r>
-              <a:rPr lang="en-US" sz="1800"/>
-              <a:t>Rusticate Lines of Code</a:t>
-            </a:r>
-          </a:p>
-          <a:p>
-            <a:pPr lvl="1"/>
-            <a:r>
-              <a:rPr lang="en-US" sz="1800"/>
-              <a:t>Source: 29,582</a:t>
-            </a:r>
-          </a:p>
-          <a:p>
-            <a:pPr lvl="1"/>
-            <a:r>
-              <a:rPr lang="en-US" sz="1800"/>
-              <a:t>Tests: 12,890</a:t>
-            </a:r>
-          </a:p>
-          <a:p>
-            <a:pPr lvl="1"/>
-            <a:r>
-              <a:rPr lang="en-US" sz="1800"/>
-              <a:t>Total code: 42,472</a:t>
+              <a:t>Extra Slides</a:t>
             </a:r>
           </a:p>
         </p:txBody>
@@ -17931,7 +17901,7 @@
             </a:pPr>
             <a:r>
               <a:rPr lang="en-US" sz="3200"/>
-              <a:t>AI Paired Proving Size: Quick Review</a:t>
+              <a:t>AI Paired Programming Size: Quick Review</a:t>
             </a:r>
           </a:p>
         </p:txBody>
@@ -17954,70 +17924,63 @@
             <a:pPr lvl="0"/>
             <a:r>
               <a:rPr lang="en-US" sz="1800"/>
-              <a:t>APAS-VERUS Lines of Code</a:t>
+              <a:t>APAS-AI Lines of Code</a:t>
             </a:r>
           </a:p>
           <a:p>
             <a:pPr lvl="1"/>
             <a:r>
               <a:rPr lang="en-US" sz="1800"/>
-              <a:t>Source: 229,319</a:t>
+              <a:t>Source: 31,751</a:t>
             </a:r>
           </a:p>
           <a:p>
             <a:pPr lvl="1"/>
             <a:r>
               <a:rPr lang="en-US" sz="1800"/>
-              <a:t>Tests (RTT): 58,503</a:t>
+              <a:t>Tests: 55,223</a:t>
             </a:r>
           </a:p>
           <a:p>
             <a:pPr lvl="1"/>
             <a:r>
               <a:rPr lang="en-US" sz="1800"/>
-              <a:t>PTTs (rust_verify_test): 15,938</a:t>
+              <a:t>Benches: 13,890</a:t>
             </a:r>
           </a:p>
           <a:p>
             <a:pPr lvl="1"/>
             <a:r>
               <a:rPr lang="en-US" sz="1800"/>
-              <a:t>Benches: 8,027</a:t>
+              <a:t>Total code: 100,864</a:t>
+            </a:r>
+          </a:p>
+          <a:p>
+            <a:pPr lvl="0"/>
+            <a:r>
+              <a:rPr lang="en-US" sz="1800"/>
+              <a:t>Rusticate Lines of Code</a:t>
             </a:r>
           </a:p>
           <a:p>
             <a:pPr lvl="1"/>
             <a:r>
               <a:rPr lang="en-US" sz="1800"/>
-              <a:t>Total code: 311,787</a:t>
-            </a:r>
-          </a:p>
-          <a:p>
-            <a:pPr lvl="0"/>
-            <a:r>
-              <a:rPr lang="en-US" sz="1800"/>
-              <a:t>Veracity Lines of Code</a:t>
+              <a:t>Source: 29,582</a:t>
             </a:r>
           </a:p>
           <a:p>
             <a:pPr lvl="1"/>
             <a:r>
               <a:rPr lang="en-US" sz="1800"/>
-              <a:t>Source: 65,189</a:t>
+              <a:t>Tests: 12,890</a:t>
             </a:r>
           </a:p>
           <a:p>
             <a:pPr lvl="1"/>
             <a:r>
               <a:rPr lang="en-US" sz="1800"/>
-              <a:t>Tests: 2,851</a:t>
-            </a:r>
-          </a:p>
-          <a:p>
-            <a:pPr lvl="1"/>
-            <a:r>
-              <a:rPr lang="en-US" sz="1800"/>
-              <a:t>Total code: 68,040</a:t>
+              <a:t>Total code: 42,472</a:t>
             </a:r>
           </a:p>
         </p:txBody>
@@ -18064,7 +18027,7 @@
             </a:pPr>
             <a:r>
               <a:rPr lang="en-US" sz="3200"/>
-              <a:t>Blood on the Road - Open Source =</a:t>
+              <a:t>AI Paired Proving Size: Quick Review</a:t>
             </a:r>
           </a:p>
         </p:txBody>
@@ -18087,21 +18050,70 @@
             <a:pPr lvl="0"/>
             <a:r>
               <a:rPr lang="en-US" sz="1800"/>
-              <a:t>Open Source is now Open Copy.</a:t>
-            </a:r>
-          </a:p>
-          <a:p>
-            <a:pPr lvl="0"/>
-            <a:r>
-              <a:rPr lang="en-US" sz="1800"/>
-              <a:t>with reports of 1/2 of AI time</a:t>
-            </a:r>
-          </a:p>
-          <a:p>
-            <a:pPr lvl="0"/>
-            <a:r>
-              <a:rPr lang="en-US" sz="1800"/>
-              <a:t>and with the US Government totally undermining copyright law.</a:t>
+              <a:t>APAS-VERUS Lines of Code</a:t>
+            </a:r>
+          </a:p>
+          <a:p>
+            <a:pPr lvl="1"/>
+            <a:r>
+              <a:rPr lang="en-US" sz="1800"/>
+              <a:t>Source: 229,319</a:t>
+            </a:r>
+          </a:p>
+          <a:p>
+            <a:pPr lvl="1"/>
+            <a:r>
+              <a:rPr lang="en-US" sz="1800"/>
+              <a:t>Tests (RTT): 58,503</a:t>
+            </a:r>
+          </a:p>
+          <a:p>
+            <a:pPr lvl="1"/>
+            <a:r>
+              <a:rPr lang="en-US" sz="1800"/>
+              <a:t>PTTs (rust_verify_test): 15,938</a:t>
+            </a:r>
+          </a:p>
+          <a:p>
+            <a:pPr lvl="1"/>
+            <a:r>
+              <a:rPr lang="en-US" sz="1800"/>
+              <a:t>Benches: 8,027</a:t>
+            </a:r>
+          </a:p>
+          <a:p>
+            <a:pPr lvl="1"/>
+            <a:r>
+              <a:rPr lang="en-US" sz="1800"/>
+              <a:t>Total code: 311,787</a:t>
+            </a:r>
+          </a:p>
+          <a:p>
+            <a:pPr lvl="0"/>
+            <a:r>
+              <a:rPr lang="en-US" sz="1800"/>
+              <a:t>Veracity Lines of Code</a:t>
+            </a:r>
+          </a:p>
+          <a:p>
+            <a:pPr lvl="1"/>
+            <a:r>
+              <a:rPr lang="en-US" sz="1800"/>
+              <a:t>Source: 65,189</a:t>
+            </a:r>
+          </a:p>
+          <a:p>
+            <a:pPr lvl="1"/>
+            <a:r>
+              <a:rPr lang="en-US" sz="1800"/>
+              <a:t>Tests: 2,851</a:t>
+            </a:r>
+          </a:p>
+          <a:p>
+            <a:pPr lvl="1"/>
+            <a:r>
+              <a:rPr lang="en-US" sz="1800"/>
+              <a:t>Total code: 68,040</a:t>
             </a:r>
           </a:p>
         </p:txBody>
@@ -18148,7 +18160,7 @@
             </a:pPr>
             <a:r>
               <a:rPr lang="en-US" sz="3200"/>
-              <a:t>Blood on the Road - Open Repositories =</a:t>
+              <a:t>Blood on the Road - Open Source =</a:t>
             </a:r>
           </a:p>
         </p:txBody>
@@ -18171,42 +18183,21 @@
             <a:pPr lvl="0"/>
             <a:r>
               <a:rPr lang="en-US" sz="1800"/>
-              <a:t>Open repositories are now weakly locked doors.</a:t>
-            </a:r>
-          </a:p>
-          <a:p>
-            <a:pPr lvl="0"/>
-            <a:r>
-              <a:rPr lang="en-US" sz="1800"/>
-              <a:t>Agents can and have been used to inject invisble UNICODE attacks.</a:t>
-            </a:r>
-          </a:p>
-          <a:p>
-            <a:pPr lvl="0"/>
-            <a:r>
-              <a:rPr lang="en-US" sz="1800"/>
-              <a:t>Agents can now pass the Turing test, and more easily the programmer Turing test.</a:t>
-            </a:r>
-          </a:p>
-          <a:p>
-            <a:pPr lvl="0"/>
-            <a:r>
-              <a:rPr lang="en-US" sz="1800"/>
-              <a:t>They’ll submit code pretending to be human.</a:t>
-            </a:r>
-          </a:p>
-          <a:p>
-            <a:pPr lvl="0"/>
-            <a:r>
-              <a:rPr lang="en-US" sz="1800"/>
-              <a:t>They’ll steal credentials and submit code.</a:t>
-            </a:r>
-          </a:p>
-          <a:p>
-            <a:pPr lvl="0"/>
-            <a:r>
-              <a:rPr lang="en-US" sz="1800"/>
-              <a:t>LiteLLM is the most atrocious case lately.</a:t>
+              <a:t>Open Source is now Open Copy.</a:t>
+            </a:r>
+          </a:p>
+          <a:p>
+            <a:pPr lvl="0"/>
+            <a:r>
+              <a:rPr lang="en-US" sz="1800"/>
+              <a:t>with reports of 1/2 of AI time</a:t>
+            </a:r>
+          </a:p>
+          <a:p>
+            <a:pPr lvl="0"/>
+            <a:r>
+              <a:rPr lang="en-US" sz="1800"/>
+              <a:t>and with the US Government totally undermining copyright law.</a:t>
             </a:r>
           </a:p>
         </p:txBody>
@@ -18253,7 +18244,7 @@
             </a:pPr>
             <a:r>
               <a:rPr lang="en-US" sz="3200"/>
-              <a:t>Blood on the Road - Key Services</a:t>
+              <a:t>Blood on the Road - Open Repositories =</a:t>
             </a:r>
           </a:p>
         </p:txBody>
@@ -18276,28 +18267,42 @@
             <a:pPr lvl="0"/>
             <a:r>
               <a:rPr lang="en-US" sz="1800"/>
-              <a:t>Authentication is going to be attacked brutally.</a:t>
-            </a:r>
-          </a:p>
-          <a:p>
-            <a:pPr lvl="0"/>
-            <a:r>
-              <a:rPr lang="en-US" sz="1800"/>
-              <a:t>Network services are going to be hacked left and right.</a:t>
-            </a:r>
-          </a:p>
-          <a:p>
-            <a:pPr lvl="0"/>
-            <a:r>
-              <a:rPr lang="en-US" sz="1800"/>
-              <a:t>Configurations are going to be heavily attacked.</a:t>
-            </a:r>
-          </a:p>
-          <a:p>
-            <a:pPr lvl="1"/>
-            <a:r>
-              <a:rPr lang="en-US" sz="1800"/>
-              <a:t>Using text files for these is already error prone.</a:t>
+              <a:t>Open repositories are now weakly locked doors.</a:t>
+            </a:r>
+          </a:p>
+          <a:p>
+            <a:pPr lvl="0"/>
+            <a:r>
+              <a:rPr lang="en-US" sz="1800"/>
+              <a:t>Agents can and have been used to inject invisble UNICODE attacks.</a:t>
+            </a:r>
+          </a:p>
+          <a:p>
+            <a:pPr lvl="0"/>
+            <a:r>
+              <a:rPr lang="en-US" sz="1800"/>
+              <a:t>Agents can now pass the Turing test, and more easily the programmer Turing test.</a:t>
+            </a:r>
+          </a:p>
+          <a:p>
+            <a:pPr lvl="0"/>
+            <a:r>
+              <a:rPr lang="en-US" sz="1800"/>
+              <a:t>They’ll submit code pretending to be human.</a:t>
+            </a:r>
+          </a:p>
+          <a:p>
+            <a:pPr lvl="0"/>
+            <a:r>
+              <a:rPr lang="en-US" sz="1800"/>
+              <a:t>They’ll steal credentials and submit code.</a:t>
+            </a:r>
+          </a:p>
+          <a:p>
+            <a:pPr lvl="0"/>
+            <a:r>
+              <a:rPr lang="en-US" sz="1800"/>
+              <a:t>LiteLLM is the most atrocious case lately.</a:t>
             </a:r>
           </a:p>
         </p:txBody>
@@ -18344,7 +18349,7 @@
             </a:pPr>
             <a:r>
               <a:rPr lang="en-US" sz="3200"/>
-              <a:t>Blood on the Road - Open Binaries =</a:t>
+              <a:t>Blood on the Road - Key Services</a:t>
             </a:r>
           </a:p>
         </p:txBody>
@@ -18367,56 +18372,28 @@
             <a:pPr lvl="0"/>
             <a:r>
               <a:rPr lang="en-US" sz="1800"/>
-              <a:t>Open binaries are next.</a:t>
-            </a:r>
-          </a:p>
-          <a:p>
-            <a:pPr lvl="0"/>
-            <a:r>
-              <a:rPr lang="en-US" sz="1800"/>
-              <a:t>They are going to be disassembled and recontructed.</a:t>
-            </a:r>
-          </a:p>
-          <a:p>
-            <a:pPr lvl="0"/>
-            <a:r>
-              <a:rPr lang="en-US" sz="1800"/>
-              <a:t>They are going to be rewritten in real time.</a:t>
-            </a:r>
-          </a:p>
-          <a:p>
-            <a:pPr lvl="0"/>
-            <a:r>
-              <a:rPr lang="en-US" sz="1800"/>
-              <a:t>Key solutions to this are:</a:t>
-            </a:r>
-          </a:p>
-          <a:p>
-            <a:pPr lvl="0"/>
-            <a:r>
-              <a:rPr lang="en-US" sz="1800"/>
-              <a:t>Binary packages from all repositories.</a:t>
-            </a:r>
-          </a:p>
-          <a:p>
-            <a:pPr lvl="0"/>
-            <a:r>
-              <a:rPr lang="en-US" sz="1800"/>
-              <a:t>Cryptographically signed.</a:t>
-            </a:r>
-          </a:p>
-          <a:p>
-            <a:pPr lvl="0"/>
-            <a:r>
-              <a:rPr lang="en-US" sz="1800"/>
-              <a:t>Installation protected in the OS.</a:t>
-            </a:r>
-          </a:p>
-          <a:p>
-            <a:pPr lvl="0"/>
-            <a:r>
-              <a:rPr lang="en-US" sz="1800"/>
-              <a:t>And protected from reading by the OS.</a:t>
+              <a:t>Authentication is going to be attacked brutally.</a:t>
+            </a:r>
+          </a:p>
+          <a:p>
+            <a:pPr lvl="0"/>
+            <a:r>
+              <a:rPr lang="en-US" sz="1800"/>
+              <a:t>Network services are going to be hacked left and right.</a:t>
+            </a:r>
+          </a:p>
+          <a:p>
+            <a:pPr lvl="0"/>
+            <a:r>
+              <a:rPr lang="en-US" sz="1800"/>
+              <a:t>Configurations are going to be heavily attacked.</a:t>
+            </a:r>
+          </a:p>
+          <a:p>
+            <a:pPr lvl="1"/>
+            <a:r>
+              <a:rPr lang="en-US" sz="1800"/>
+              <a:t>Using text files for these is already error prone.</a:t>
             </a:r>
           </a:p>
         </p:txBody>
@@ -18463,7 +18440,7 @@
             </a:pPr>
             <a:r>
               <a:rPr lang="en-US" sz="3200"/>
-              <a:t>Questions - F* and Pulse</a:t>
+              <a:t>Blood on the Road - Open Binaries =</a:t>
             </a:r>
           </a:p>
         </p:txBody>
@@ -18486,49 +18463,56 @@
             <a:pPr lvl="0"/>
             <a:r>
               <a:rPr lang="en-US" sz="1800"/>
-              <a:t>Are F* modules really in use? If not, why?</a:t>
-            </a:r>
-          </a:p>
-          <a:p>
-            <a:pPr lvl="0"/>
-            <a:r>
-              <a:rPr lang="en-US" sz="1800"/>
-              <a:t>Got Functors?</a:t>
-            </a:r>
-          </a:p>
-          <a:p>
-            <a:pPr lvl="0"/>
-            <a:r>
-              <a:rPr lang="en-US" sz="1800"/>
-              <a:t>Are F* modules working with proof smoothly? Took me about three days to get a proving model (Treap) with modules.</a:t>
-            </a:r>
-          </a:p>
-          <a:p>
-            <a:pPr lvl="0"/>
-            <a:r>
-              <a:rPr lang="en-US" sz="1800"/>
-              <a:t>Does F* have a typed library search yet?</a:t>
-            </a:r>
-          </a:p>
-          <a:p>
-            <a:pPr lvl="0"/>
-            <a:r>
-              <a:rPr lang="en-US" sz="1800"/>
-              <a:t>Are typeclasses being heavily used?</a:t>
-            </a:r>
-          </a:p>
-          <a:p>
-            <a:pPr lvl="0"/>
-            <a:r>
-              <a:rPr lang="en-US" sz="1800"/>
-              <a:t>How fast is validation now?</a:t>
-            </a:r>
-          </a:p>
-          <a:p>
-            <a:pPr lvl="0"/>
-            <a:r>
-              <a:rPr lang="en-US" sz="1800"/>
-              <a:t>Nik you have any more statistics on AutoCLRS?</a:t>
+              <a:t>Open binaries are next.</a:t>
+            </a:r>
+          </a:p>
+          <a:p>
+            <a:pPr lvl="0"/>
+            <a:r>
+              <a:rPr lang="en-US" sz="1800"/>
+              <a:t>They are going to be disassembled and recontructed.</a:t>
+            </a:r>
+          </a:p>
+          <a:p>
+            <a:pPr lvl="0"/>
+            <a:r>
+              <a:rPr lang="en-US" sz="1800"/>
+              <a:t>They are going to be rewritten in real time.</a:t>
+            </a:r>
+          </a:p>
+          <a:p>
+            <a:pPr lvl="0"/>
+            <a:r>
+              <a:rPr lang="en-US" sz="1800"/>
+              <a:t>Key solutions to this are:</a:t>
+            </a:r>
+          </a:p>
+          <a:p>
+            <a:pPr lvl="0"/>
+            <a:r>
+              <a:rPr lang="en-US" sz="1800"/>
+              <a:t>Binary packages from all repositories.</a:t>
+            </a:r>
+          </a:p>
+          <a:p>
+            <a:pPr lvl="0"/>
+            <a:r>
+              <a:rPr lang="en-US" sz="1800"/>
+              <a:t>Cryptographically signed.</a:t>
+            </a:r>
+          </a:p>
+          <a:p>
+            <a:pPr lvl="0"/>
+            <a:r>
+              <a:rPr lang="en-US" sz="1800"/>
+              <a:t>Installation protected in the OS.</a:t>
+            </a:r>
+          </a:p>
+          <a:p>
+            <a:pPr lvl="0"/>
+            <a:r>
+              <a:rPr lang="en-US" sz="1800"/>
+              <a:t>And protected from reading by the OS.</a:t>
             </a:r>
           </a:p>
         </p:txBody>
@@ -18575,7 +18559,7 @@
             </a:pPr>
             <a:r>
               <a:rPr lang="en-US" sz="3200"/>
-              <a:t>Questions</a:t>
+              <a:t>Questions - F* and Pulse</a:t>
             </a:r>
           </a:p>
         </p:txBody>
@@ -18598,42 +18582,49 @@
             <a:pPr lvl="0"/>
             <a:r>
               <a:rPr lang="en-US" sz="1800"/>
-              <a:t>Did the PL community overly complicate things with higher-order types?</a:t>
-            </a:r>
-          </a:p>
-          <a:p>
-            <a:pPr lvl="0"/>
-            <a:r>
-              <a:rPr lang="en-US" sz="1800"/>
-              <a:t>What can you folks say about MSFT adoption of proven code?</a:t>
-            </a:r>
-          </a:p>
-          <a:p>
-            <a:pPr lvl="0"/>
-            <a:r>
-              <a:rPr lang="en-US" sz="1800"/>
-              <a:t>What are the biggest F* verified systems?</a:t>
-            </a:r>
-          </a:p>
-          <a:p>
-            <a:pPr lvl="0"/>
-            <a:r>
-              <a:rPr lang="en-US" sz="1800"/>
-              <a:t>What are the biggest Pulse verified sytems?</a:t>
-            </a:r>
-          </a:p>
-          <a:p>
-            <a:pPr lvl="0"/>
-            <a:r>
-              <a:rPr lang="en-US" sz="1800"/>
-              <a:t>Any quantitatives? Person days? AI days?</a:t>
-            </a:r>
-          </a:p>
-          <a:p>
-            <a:pPr lvl="0"/>
-            <a:r>
-              <a:rPr lang="en-US" sz="1800"/>
-              <a:t>Should I quit Verus and go learn Pulse?</a:t>
+              <a:t>Are F* modules really in use? If not, why?</a:t>
+            </a:r>
+          </a:p>
+          <a:p>
+            <a:pPr lvl="0"/>
+            <a:r>
+              <a:rPr lang="en-US" sz="1800"/>
+              <a:t>Got Functors?</a:t>
+            </a:r>
+          </a:p>
+          <a:p>
+            <a:pPr lvl="0"/>
+            <a:r>
+              <a:rPr lang="en-US" sz="1800"/>
+              <a:t>Are F* modules working with proof smoothly? Took me about three days to get a proving model (Treap) with modules.</a:t>
+            </a:r>
+          </a:p>
+          <a:p>
+            <a:pPr lvl="0"/>
+            <a:r>
+              <a:rPr lang="en-US" sz="1800"/>
+              <a:t>Does F* have a typed library search yet?</a:t>
+            </a:r>
+          </a:p>
+          <a:p>
+            <a:pPr lvl="0"/>
+            <a:r>
+              <a:rPr lang="en-US" sz="1800"/>
+              <a:t>Are typeclasses being heavily used?</a:t>
+            </a:r>
+          </a:p>
+          <a:p>
+            <a:pPr lvl="0"/>
+            <a:r>
+              <a:rPr lang="en-US" sz="1800"/>
+              <a:t>How fast is validation now?</a:t>
+            </a:r>
+          </a:p>
+          <a:p>
+            <a:pPr lvl="0"/>
+            <a:r>
+              <a:rPr lang="en-US" sz="1800"/>
+              <a:t>Nik you have any more statistics on AutoCLRS?</a:t>
             </a:r>
           </a:p>
         </p:txBody>
@@ -18703,49 +18694,42 @@
             <a:pPr lvl="0"/>
             <a:r>
               <a:rPr lang="en-US" sz="1800"/>
-              <a:t>Are you folks still using Make? That’s how I got started on this.</a:t>
-            </a:r>
-          </a:p>
-          <a:p>
-            <a:pPr lvl="0"/>
-            <a:r>
-              <a:rPr lang="en-US" sz="1800"/>
-              <a:t>Many programmers and worse, managers, complain about the programmer time to switch languages. Are you finding that you can switch languages with your AIs explaining things to you?</a:t>
-            </a:r>
-          </a:p>
-          <a:p>
-            <a:pPr lvl="0"/>
-            <a:r>
-              <a:rPr lang="en-US" sz="1800"/>
-              <a:t>Can we prove Rust’s (awful) std with Verus?</a:t>
-            </a:r>
-          </a:p>
-          <a:p>
-            <a:pPr lvl="0"/>
-            <a:r>
-              <a:rPr lang="en-US" sz="1800"/>
-              <a:t>Can we prove a compiler with Verus and EPR?</a:t>
-            </a:r>
-          </a:p>
-          <a:p>
-            <a:pPr lvl="0"/>
-            <a:r>
-              <a:rPr lang="en-US" sz="1800"/>
-              <a:t>Can we prove a TIL (Tarditi, Morrisett, Harper) like compiler?</a:t>
-            </a:r>
-          </a:p>
-          <a:p>
-            <a:pPr lvl="0"/>
-            <a:r>
-              <a:rPr lang="en-US" sz="1800"/>
-              <a:t>Can we verify a comp cert like compiler?</a:t>
-            </a:r>
-          </a:p>
-          <a:p>
-            <a:pPr lvl="0"/>
-            <a:r>
-              <a:rPr lang="en-US" sz="1800"/>
-              <a:t>Can we prove an OS in Verus?</a:t>
+              <a:t>Did the PL community overly complicate things with higher-order types?</a:t>
+            </a:r>
+          </a:p>
+          <a:p>
+            <a:pPr lvl="0"/>
+            <a:r>
+              <a:rPr lang="en-US" sz="1800"/>
+              <a:t>What can you folks say about MSFT adoption of proven code?</a:t>
+            </a:r>
+          </a:p>
+          <a:p>
+            <a:pPr lvl="0"/>
+            <a:r>
+              <a:rPr lang="en-US" sz="1800"/>
+              <a:t>What are the biggest F* verified systems?</a:t>
+            </a:r>
+          </a:p>
+          <a:p>
+            <a:pPr lvl="0"/>
+            <a:r>
+              <a:rPr lang="en-US" sz="1800"/>
+              <a:t>What are the biggest Pulse verified sytems?</a:t>
+            </a:r>
+          </a:p>
+          <a:p>
+            <a:pPr lvl="0"/>
+            <a:r>
+              <a:rPr lang="en-US" sz="1800"/>
+              <a:t>Any quantitatives? Person days? AI days?</a:t>
+            </a:r>
+          </a:p>
+          <a:p>
+            <a:pPr lvl="0"/>
+            <a:r>
+              <a:rPr lang="en-US" sz="1800"/>
+              <a:t>Should I quit Verus and go learn Pulse?</a:t>
             </a:r>
           </a:p>
         </p:txBody>
@@ -18792,7 +18776,7 @@
             </a:pPr>
             <a:r>
               <a:rPr lang="en-US" sz="3200"/>
-              <a:t>Questions - AI LLM Agents</a:t>
+              <a:t>Questions</a:t>
             </a:r>
           </a:p>
         </p:txBody>
@@ -18815,56 +18799,49 @@
             <a:pPr lvl="0"/>
             <a:r>
               <a:rPr lang="en-US" sz="1800"/>
-              <a:t>How fast is this moving?</a:t>
-            </a:r>
-          </a:p>
-          <a:p>
-            <a:pPr lvl="0"/>
-            <a:r>
-              <a:rPr lang="en-US" sz="1800"/>
-              <a:t>How much context do we need?</a:t>
-            </a:r>
-          </a:p>
-          <a:p>
-            <a:pPr lvl="0"/>
-            <a:r>
-              <a:rPr lang="en-US" sz="1800"/>
-              <a:t>How much speed do we have? T/S down and up?</a:t>
-            </a:r>
-          </a:p>
-          <a:p>
-            <a:pPr lvl="0"/>
-            <a:r>
-              <a:rPr lang="en-US" sz="1800"/>
-              <a:t>How much speed do we need?</a:t>
-            </a:r>
-          </a:p>
-          <a:p>
-            <a:pPr lvl="0"/>
-            <a:r>
-              <a:rPr lang="en-US" sz="1800"/>
-              <a:t>How much speed will we get?</a:t>
-            </a:r>
-          </a:p>
-          <a:p>
-            <a:pPr lvl="0"/>
-            <a:r>
-              <a:rPr lang="en-US" sz="1800"/>
-              <a:t>When it’s 10 times faster how will we use it?</a:t>
-            </a:r>
-          </a:p>
-          <a:p>
-            <a:pPr lvl="0"/>
-            <a:r>
-              <a:rPr lang="en-US" sz="1800"/>
-              <a:t>When will this really cost the user what it costs the provider?</a:t>
-            </a:r>
-          </a:p>
-          <a:p>
-            <a:pPr lvl="0"/>
-            <a:r>
-              <a:rPr lang="en-US" sz="1800"/>
-              <a:t>When will it get even better intermediate term memory?</a:t>
+              <a:t>Are you folks still using Make? That’s how I got started on this.</a:t>
+            </a:r>
+          </a:p>
+          <a:p>
+            <a:pPr lvl="0"/>
+            <a:r>
+              <a:rPr lang="en-US" sz="1800"/>
+              <a:t>Many programmers and worse, managers, complain about the programmer time to switch languages. Are you finding that you can switch languages with your AIs explaining things to you?</a:t>
+            </a:r>
+          </a:p>
+          <a:p>
+            <a:pPr lvl="0"/>
+            <a:r>
+              <a:rPr lang="en-US" sz="1800"/>
+              <a:t>Can we prove Rust’s (awful) std with Verus?</a:t>
+            </a:r>
+          </a:p>
+          <a:p>
+            <a:pPr lvl="0"/>
+            <a:r>
+              <a:rPr lang="en-US" sz="1800"/>
+              <a:t>Can we prove a compiler with Verus and EPR?</a:t>
+            </a:r>
+          </a:p>
+          <a:p>
+            <a:pPr lvl="0"/>
+            <a:r>
+              <a:rPr lang="en-US" sz="1800"/>
+              <a:t>Can we prove a TIL (Tarditi, Morrisett, Harper) like compiler?</a:t>
+            </a:r>
+          </a:p>
+          <a:p>
+            <a:pPr lvl="0"/>
+            <a:r>
+              <a:rPr lang="en-US" sz="1800"/>
+              <a:t>Can we verify a comp cert like compiler?</a:t>
+            </a:r>
+          </a:p>
+          <a:p>
+            <a:pPr lvl="0"/>
+            <a:r>
+              <a:rPr lang="en-US" sz="1800"/>
+              <a:t>Can we prove an OS in Verus?</a:t>
             </a:r>
           </a:p>
         </p:txBody>
@@ -19431,6 +19408,125 @@
 </file>
 
 <file path=ppt/slides/slide90.xml><?xml version="1.0" encoding="utf-8"?>
+<p:sld xmlns:a="http://schemas.openxmlformats.org/drawingml/2006/main" xmlns:r="http://schemas.openxmlformats.org/officeDocument/2006/relationships" xmlns:p="http://schemas.openxmlformats.org/presentationml/2006/main">
+  <p:cSld>
+    <p:spTree>
+      <p:nvGrpSpPr>
+        <p:cNvPr id="1" name=""/>
+        <p:cNvGrpSpPr/>
+        <p:nvPr/>
+      </p:nvGrpSpPr>
+      <p:grpSpPr>
+        <a:xfrm>
+          <a:off x="0" y="0"/>
+          <a:ext cx="0" cy="0"/>
+          <a:chOff x="0" y="0"/>
+          <a:chExt cx="0" cy="0"/>
+        </a:xfrm>
+      </p:grpSpPr>
+      <p:sp>
+        <p:nvSpPr>
+          <p:cNvPr id="2" name="Title 1"/>
+          <p:cNvSpPr>
+            <a:spLocks noGrp="1"/>
+          </p:cNvSpPr>
+          <p:nvPr>
+            <p:ph type="title"/>
+          </p:nvPr>
+        </p:nvSpPr>
+        <p:spPr/>
+        <p:txBody>
+          <a:bodyPr/>
+          <a:lstStyle/>
+          <a:p>
+            <a:pPr lvl="0" indent="0" marL="0">
+              <a:buNone/>
+            </a:pPr>
+            <a:r>
+              <a:rPr lang="en-US" sz="3200"/>
+              <a:t>Questions - AI LLM Agents</a:t>
+            </a:r>
+          </a:p>
+        </p:txBody>
+      </p:sp>
+      <p:sp>
+        <p:nvSpPr>
+          <p:cNvPr id="3" name="Content Placeholder 2"/>
+          <p:cNvSpPr>
+            <a:spLocks noGrp="1"/>
+          </p:cNvSpPr>
+          <p:nvPr>
+            <p:ph idx="1"/>
+          </p:nvPr>
+        </p:nvSpPr>
+        <p:spPr/>
+        <p:txBody>
+          <a:bodyPr/>
+          <a:lstStyle/>
+          <a:p>
+            <a:pPr lvl="0"/>
+            <a:r>
+              <a:rPr lang="en-US" sz="1800"/>
+              <a:t>How fast is this moving?</a:t>
+            </a:r>
+          </a:p>
+          <a:p>
+            <a:pPr lvl="0"/>
+            <a:r>
+              <a:rPr lang="en-US" sz="1800"/>
+              <a:t>How much context do we need?</a:t>
+            </a:r>
+          </a:p>
+          <a:p>
+            <a:pPr lvl="0"/>
+            <a:r>
+              <a:rPr lang="en-US" sz="1800"/>
+              <a:t>How much speed do we have? T/S down and up?</a:t>
+            </a:r>
+          </a:p>
+          <a:p>
+            <a:pPr lvl="0"/>
+            <a:r>
+              <a:rPr lang="en-US" sz="1800"/>
+              <a:t>How much speed do we need?</a:t>
+            </a:r>
+          </a:p>
+          <a:p>
+            <a:pPr lvl="0"/>
+            <a:r>
+              <a:rPr lang="en-US" sz="1800"/>
+              <a:t>How much speed will we get?</a:t>
+            </a:r>
+          </a:p>
+          <a:p>
+            <a:pPr lvl="0"/>
+            <a:r>
+              <a:rPr lang="en-US" sz="1800"/>
+              <a:t>When it’s 10 times faster how will we use it?</a:t>
+            </a:r>
+          </a:p>
+          <a:p>
+            <a:pPr lvl="0"/>
+            <a:r>
+              <a:rPr lang="en-US" sz="1800"/>
+              <a:t>When will this really cost the user what it costs the provider?</a:t>
+            </a:r>
+          </a:p>
+          <a:p>
+            <a:pPr lvl="0"/>
+            <a:r>
+              <a:rPr lang="en-US" sz="1800"/>
+              <a:t>When will it get even better intermediate term memory?</a:t>
+            </a:r>
+          </a:p>
+        </p:txBody>
+      </p:sp>
+    </p:spTree>
+  </p:cSld>
+</p:sld>
+</file>
+
+<file path=ppt/slides/slide91.xml><?xml version="1.0" encoding="utf-8"?>
 <p:sld xmlns:a="http://schemas.openxmlformats.org/drawingml/2006/main" xmlns:r="http://schemas.openxmlformats.org/officeDocument/2006/relationships" xmlns:p="http://schemas.openxmlformats.org/presentationml/2006/main">
   <p:cSld>
     <p:spTree>

--- a/lectures/slidesCMUCS.pptx
+++ b/lectures/slidesCMUCS.pptx
@@ -96,6 +96,7 @@
     <p:sldId id="344" r:id="rId90"/>
     <p:sldId id="345" r:id="rId91"/>
     <p:sldId id="346" r:id="rId92"/>
+    <p:sldId id="347" r:id="rId93"/>
   </p:sldIdLst>
   <p:sldSz cx="9144000" cy="5143500" type="screen16x9"/>
   <p:notesSz cx="6858000" cy="9144000"/>
@@ -13402,13 +13403,13 @@
                 <a:tableStyleId>{5C22544A-7EE6-4342-B048-85BDC9FD1C3A}</a:tableStyleId>
               </a:tblPr>
               <a:tblGrid>
-                <a:gridCol w="469900"/>
+                <a:gridCol w="482600"/>
                 <a:gridCol w="2781300"/>
-                <a:gridCol w="1155700"/>
-                <a:gridCol w="1041400"/>
-                <a:gridCol w="927100"/>
-                <a:gridCol w="927100"/>
-                <a:gridCol w="927100"/>
+                <a:gridCol w="1206500"/>
+                <a:gridCol w="850900"/>
+                <a:gridCol w="850900"/>
+                <a:gridCol w="1092200"/>
+                <a:gridCol w="965200"/>
               </a:tblGrid>
               <a:tr h="0">
                 <a:tc>
@@ -13469,7 +13470,7 @@
                       </a:pPr>
                       <a:r>
                         <a:rPr/>
-                        <a:t>LOC</a:t>
+                        <a:t>KLOC</a:t>
                       </a:r>
                     </a:p>
                   </a:txBody>
@@ -13485,7 +13486,7 @@
                       </a:pPr>
                       <a:r>
                         <a:rPr/>
-                        <a:t>LoEC</a:t>
+                        <a:t>KLoEC</a:t>
                       </a:r>
                     </a:p>
                   </a:txBody>
@@ -13501,7 +13502,7 @@
                       </a:pPr>
                       <a:r>
                         <a:rPr/>
-                        <a:t>LOPC2R</a:t>
+                        <a:t>KLOPC2R</a:t>
                       </a:r>
                     </a:p>
                   </a:txBody>
@@ -13517,7 +13518,7 @@
                       </a:pPr>
                       <a:r>
                         <a:rPr/>
-                        <a:t>LOC0R</a:t>
+                        <a:t>KLOC0R</a:t>
                       </a:r>
                     </a:p>
                   </a:txBody>
@@ -13580,7 +13581,7 @@
                       </a:pPr>
                       <a:r>
                         <a:rPr/>
-                        <a:t>31,751</a:t>
+                        <a:t>31.8</a:t>
                       </a:r>
                     </a:p>
                   </a:txBody>
@@ -13595,7 +13596,7 @@
                       </a:pPr>
                       <a:r>
                         <a:rPr/>
-                        <a:t>31,751</a:t>
+                        <a:t>31.8</a:t>
                       </a:r>
                     </a:p>
                   </a:txBody>
@@ -13687,7 +13688,7 @@
                       </a:pPr>
                       <a:r>
                         <a:rPr/>
-                        <a:t>166,401</a:t>
+                        <a:t>166.4</a:t>
                       </a:r>
                     </a:p>
                   </a:txBody>
@@ -13702,7 +13703,7 @@
                       </a:pPr>
                       <a:r>
                         <a:rPr/>
-                        <a:t>56,549</a:t>
+                        <a:t>56.5</a:t>
                       </a:r>
                     </a:p>
                   </a:txBody>
@@ -13717,7 +13718,7 @@
                       </a:pPr>
                       <a:r>
                         <a:rPr/>
-                        <a:t>47,828</a:t>
+                        <a:t>47.8</a:t>
                       </a:r>
                     </a:p>
                   </a:txBody>
@@ -13732,7 +13733,7 @@
                       </a:pPr>
                       <a:r>
                         <a:rPr/>
-                        <a:t>95,908</a:t>
+                        <a:t>95.9</a:t>
                       </a:r>
                     </a:p>
                   </a:txBody>
@@ -13794,7 +13795,7 @@
                       </a:pPr>
                       <a:r>
                         <a:rPr/>
-                        <a:t>198,152</a:t>
+                        <a:t>198.2</a:t>
                       </a:r>
                     </a:p>
                   </a:txBody>
@@ -13809,7 +13810,7 @@
                       </a:pPr>
                       <a:r>
                         <a:rPr/>
-                        <a:t>88,300</a:t>
+                        <a:t>88.3</a:t>
                       </a:r>
                     </a:p>
                   </a:txBody>
@@ -13824,7 +13825,7 @@
                       </a:pPr>
                       <a:r>
                         <a:rPr/>
-                        <a:t>47,828</a:t>
+                        <a:t>47.8</a:t>
                       </a:r>
                     </a:p>
                   </a:txBody>
@@ -13839,7 +13840,7 @@
                       </a:pPr>
                       <a:r>
                         <a:rPr/>
-                        <a:t>95,908</a:t>
+                        <a:t>95.9</a:t>
                       </a:r>
                     </a:p>
                   </a:txBody>
@@ -14264,7 +14265,7 @@
                       </a:pPr>
                       <a:r>
                         <a:rPr/>
-                        <a:t>$ / verified deliverable line</a:t>
+                        <a:t>$ / KLines</a:t>
                       </a:r>
                     </a:p>
                   </a:txBody>
@@ -14279,7 +14280,7 @@
                       </a:pPr>
                       <a:r>
                         <a:rPr b="1"/>
-                        <a:t>$1.877</a:t>
+                        <a:t>$1,877</a:t>
                       </a:r>
                     </a:p>
                   </a:txBody>
@@ -14311,7 +14312,7 @@
                       </a:pPr>
                       <a:r>
                         <a:rPr/>
-                        <a:t>C / KLOEC</a:t>
+                        <a:t>C / KLOE</a:t>
                       </a:r>
                     </a:p>
                   </a:txBody>
@@ -14326,7 +14327,7 @@
                       </a:pPr>
                       <a:r>
                         <a:rPr b="1"/>
-                        <a:t>$2.665</a:t>
+                        <a:t>$2,665</a:t>
                       </a:r>
                     </a:p>
                   </a:txBody>
@@ -14373,7 +14374,7 @@
                       </a:pPr>
                       <a:r>
                         <a:rPr b="1"/>
-                        <a:t>$6.305</a:t>
+                        <a:t>$6,305</a:t>
                       </a:r>
                     </a:p>
                   </a:txBody>
@@ -14472,7 +14473,7 @@
             </a:pPr>
             <a:r>
               <a:rPr lang="en-US" sz="3200"/>
-              <a:t>Head-to-Head — seL4 (2009) vs APAS-VERUS</a:t>
+              <a:t>Head-to-Head — seL4 (2009) vs APAS-VERUS — 22 py base</a:t>
             </a:r>
           </a:p>
         </p:txBody>
@@ -15337,59 +15338,829 @@
             </a:pPr>
             <a:r>
               <a:rPr lang="en-US" sz="3200"/>
-              <a:t>R</a:t>
-            </a:r>
-          </a:p>
-        </p:txBody>
-      </p:sp>
-      <p:sp>
-        <p:nvSpPr>
-          <p:cNvPr id="3" name="Content Placeholder 2"/>
-          <p:cNvSpPr>
-            <a:spLocks noGrp="1"/>
-          </p:cNvSpPr>
+              <a:t>Head-to-Head — seL4 (2009) vs APAS-VERUS — 22.5 py base</a:t>
+            </a:r>
+          </a:p>
+        </p:txBody>
+      </p:sp>
+      <p:graphicFrame>
+        <p:nvGraphicFramePr>
+          <p:cNvPr id="6" name="Content Placeholder 5"/>
+          <p:cNvGraphicFramePr>
+            <a:graphicFrameLocks noGrp="1"/>
+          </p:cNvGraphicFramePr>
           <p:nvPr>
             <p:ph idx="1"/>
           </p:nvPr>
-        </p:nvSpPr>
-        <p:spPr/>
-        <p:txBody>
-          <a:bodyPr/>
-          <a:lstStyle/>
-          <a:p>
-            <a:pPr lvl="0"/>
-            <a:r>
-              <a:rPr lang="en-US" sz="1800"/>
-              <a:t>LOPC2R = Lines of proven code 2 review</a:t>
-            </a:r>
-          </a:p>
-          <a:p>
-            <a:pPr lvl="0"/>
-            <a:r>
-              <a:rPr lang="en-US" sz="1800"/>
-              <a:t>LOPC0R = Lines of proven code not to review</a:t>
-            </a:r>
-          </a:p>
-          <a:p>
-            <a:pPr lvl="0"/>
-            <a:r>
-              <a:rPr lang="en-US" sz="1800"/>
-              <a:t>R = LOPC2R / (LOPC2R + LOC0R)</a:t>
-            </a:r>
-          </a:p>
-          <a:p>
-            <a:pPr lvl="0"/>
-            <a:r>
-              <a:rPr lang="en-US" sz="1800"/>
-              <a:t>R — Review Ratio </a:t>
-            </a:r>
-            <a:r>
-              <a:rPr lang="en-US" sz="1800" b="1"/>
-              <a:t>~33.3%</a:t>
-            </a:r>
-          </a:p>
-        </p:txBody>
-      </p:sp>
+        </p:nvGraphicFramePr>
+        <p:xfrm>
+          <a:off x="457200" y="1193800"/>
+          <a:ext cx="8229600" cy="3390900"/>
+        </p:xfrm>
+        <a:graphic>
+          <a:graphicData uri="http://schemas.openxmlformats.org/drawingml/2006/table">
+            <a:tbl>
+              <a:tblPr firstRow="1" bandRow="1">
+                <a:tableStyleId>{5C22544A-7EE6-4342-B048-85BDC9FD1C3A}</a:tableStyleId>
+              </a:tblPr>
+              <a:tblGrid>
+                <a:gridCol w="406400"/>
+                <a:gridCol w="1828800"/>
+                <a:gridCol w="1524000"/>
+                <a:gridCol w="2438400"/>
+                <a:gridCol w="2032000"/>
+              </a:tblGrid>
+              <a:tr h="0">
+                <a:tc>
+                  <a:txBody>
+                    <a:bodyPr/>
+                    <a:lstStyle/>
+                    <a:p>
+                      <a:pPr lvl="0" indent="0" marL="0" algn="ctr">
+                        <a:buNone/>
+                      </a:pPr>
+                      <a:r>
+                        <a:rPr/>
+                        <a:t>#</a:t>
+                      </a:r>
+                    </a:p>
+                  </a:txBody>
+                  <a:tcPr/>
+                </a:tc>
+                <a:tc>
+                  <a:txBody>
+                    <a:bodyPr/>
+                    <a:lstStyle/>
+                    <a:p>
+                      <a:pPr lvl="0" indent="0" marL="0" algn="l">
+                        <a:buNone/>
+                      </a:pPr>
+                      <a:r>
+                        <a:rPr/>
+                        <a:t>Quantity</a:t>
+                      </a:r>
+                    </a:p>
+                  </a:txBody>
+                  <a:tcPr/>
+                </a:tc>
+                <a:tc>
+                  <a:txBody>
+                    <a:bodyPr/>
+                    <a:lstStyle/>
+                    <a:p>
+                      <a:pPr lvl="0" indent="0" marL="0" algn="r">
+                        <a:buNone/>
+                      </a:pPr>
+                      <a:r>
+                        <a:rPr/>
+                        <a:t>seL4 (pre-AI)</a:t>
+                      </a:r>
+                    </a:p>
+                  </a:txBody>
+                  <a:tcPr/>
+                </a:tc>
+                <a:tc>
+                  <a:txBody>
+                    <a:bodyPr/>
+                    <a:lstStyle/>
+                    <a:p>
+                      <a:pPr lvl="0" indent="0" marL="0" algn="r">
+                        <a:buNone/>
+                      </a:pPr>
+                      <a:r>
+                        <a:rPr/>
+                        <a:t>APAS-VERUS (AI-paired)</a:t>
+                      </a:r>
+                    </a:p>
+                  </a:txBody>
+                  <a:tcPr/>
+                </a:tc>
+                <a:tc>
+                  <a:txBody>
+                    <a:bodyPr/>
+                    <a:lstStyle/>
+                    <a:p>
+                      <a:pPr lvl="0" indent="0" marL="0" algn="ctr">
+                        <a:buNone/>
+                      </a:pPr>
+                      <a:r>
+                        <a:rPr/>
+                        <a:t>Ratio</a:t>
+                      </a:r>
+                    </a:p>
+                  </a:txBody>
+                  <a:tcPr/>
+                </a:tc>
+              </a:tr>
+              <a:tr h="0">
+                <a:tc>
+                  <a:txBody>
+                    <a:bodyPr/>
+                    <a:lstStyle/>
+                    <a:p>
+                      <a:pPr lvl="0" indent="0" marL="0" algn="ctr">
+                        <a:buNone/>
+                      </a:pPr>
+                      <a:r>
+                        <a:rPr/>
+                        <a:t>1</a:t>
+                      </a:r>
+                    </a:p>
+                  </a:txBody>
+                </a:tc>
+                <a:tc>
+                  <a:txBody>
+                    <a:bodyPr/>
+                    <a:lstStyle/>
+                    <a:p>
+                      <a:pPr lvl="0" indent="0" marL="0" algn="l">
+                        <a:buNone/>
+                      </a:pPr>
+                      <a:r>
+                        <a:rPr/>
+                        <a:t>Person-years</a:t>
+                      </a:r>
+                    </a:p>
+                  </a:txBody>
+                </a:tc>
+                <a:tc>
+                  <a:txBody>
+                    <a:bodyPr/>
+                    <a:lstStyle/>
+                    <a:p>
+                      <a:pPr lvl="0" indent="0" marL="0" algn="r">
+                        <a:buNone/>
+                      </a:pPr>
+                      <a:r>
+                        <a:rPr/>
+                        <a:t>22.5</a:t>
+                      </a:r>
+                    </a:p>
+                  </a:txBody>
+                </a:tc>
+                <a:tc>
+                  <a:txBody>
+                    <a:bodyPr/>
+                    <a:lstStyle/>
+                    <a:p>
+                      <a:pPr lvl="0" indent="0" marL="0" algn="r">
+                        <a:buNone/>
+                      </a:pPr>
+                      <a:r>
+                        <a:rPr/>
+                        <a:t>0.64</a:t>
+                      </a:r>
+                    </a:p>
+                  </a:txBody>
+                </a:tc>
+                <a:tc>
+                  <a:txBody>
+                    <a:bodyPr/>
+                    <a:lstStyle/>
+                    <a:p>
+                      <a:pPr lvl="0" indent="0" marL="0" algn="ctr">
+                        <a:buNone/>
+                      </a:pPr>
+                      <a:r>
+                        <a:rPr/>
+                        <a:t>seL4 ~35×</a:t>
+                      </a:r>
+                    </a:p>
+                  </a:txBody>
+                </a:tc>
+              </a:tr>
+              <a:tr h="0">
+                <a:tc>
+                  <a:txBody>
+                    <a:bodyPr/>
+                    <a:lstStyle/>
+                    <a:p>
+                      <a:pPr lvl="0" indent="0" marL="0" algn="ctr">
+                        <a:buNone/>
+                      </a:pPr>
+                      <a:r>
+                        <a:rPr/>
+                        <a:t>2</a:t>
+                      </a:r>
+                    </a:p>
+                  </a:txBody>
+                </a:tc>
+                <a:tc>
+                  <a:txBody>
+                    <a:bodyPr/>
+                    <a:lstStyle/>
+                    <a:p>
+                      <a:pPr lvl="0" indent="0" marL="0" algn="l">
+                        <a:buNone/>
+                      </a:pPr>
+                      <a:r>
+                        <a:rPr/>
+                        <a:t>Hours</a:t>
+                      </a:r>
+                    </a:p>
+                  </a:txBody>
+                </a:tc>
+                <a:tc>
+                  <a:txBody>
+                    <a:bodyPr/>
+                    <a:lstStyle/>
+                    <a:p>
+                      <a:pPr lvl="0" indent="0" marL="0" algn="r">
+                        <a:buNone/>
+                      </a:pPr>
+                      <a:r>
+                        <a:rPr/>
+                        <a:t>46,800</a:t>
+                      </a:r>
+                    </a:p>
+                  </a:txBody>
+                </a:tc>
+                <a:tc>
+                  <a:txBody>
+                    <a:bodyPr/>
+                    <a:lstStyle/>
+                    <a:p>
+                      <a:pPr lvl="0" indent="0" marL="0" algn="r">
+                        <a:buNone/>
+                      </a:pPr>
+                      <a:r>
+                        <a:rPr/>
+                        <a:t>1,123</a:t>
+                      </a:r>
+                    </a:p>
+                  </a:txBody>
+                </a:tc>
+                <a:tc>
+                  <a:txBody>
+                    <a:bodyPr/>
+                    <a:lstStyle/>
+                    <a:p>
+                      <a:pPr lvl="0" indent="0" marL="0" algn="ctr">
+                        <a:buNone/>
+                      </a:pPr>
+                      <a:r>
+                        <a:rPr/>
+                        <a:t>seL4 ~42×</a:t>
+                      </a:r>
+                    </a:p>
+                  </a:txBody>
+                </a:tc>
+              </a:tr>
+              <a:tr h="0">
+                <a:tc>
+                  <a:txBody>
+                    <a:bodyPr/>
+                    <a:lstStyle/>
+                    <a:p>
+                      <a:pPr lvl="0" indent="0" marL="0" algn="ctr">
+                        <a:buNone/>
+                      </a:pPr>
+                      <a:r>
+                        <a:rPr/>
+                        <a:t>3</a:t>
+                      </a:r>
+                    </a:p>
+                  </a:txBody>
+                </a:tc>
+                <a:tc>
+                  <a:txBody>
+                    <a:bodyPr/>
+                    <a:lstStyle/>
+                    <a:p>
+                      <a:pPr lvl="0" indent="0" marL="0" algn="l">
+                        <a:buNone/>
+                      </a:pPr>
+                      <a:r>
+                        <a:rPr/>
+                        <a:t>KLOE</a:t>
+                      </a:r>
+                    </a:p>
+                  </a:txBody>
+                </a:tc>
+                <a:tc>
+                  <a:txBody>
+                    <a:bodyPr/>
+                    <a:lstStyle/>
+                    <a:p>
+                      <a:pPr lvl="0" indent="0" marL="0" algn="r">
+                        <a:buNone/>
+                      </a:pPr>
+                      <a:r>
+                        <a:rPr/>
+                        <a:t>10</a:t>
+                      </a:r>
+                    </a:p>
+                  </a:txBody>
+                </a:tc>
+                <a:tc>
+                  <a:txBody>
+                    <a:bodyPr/>
+                    <a:lstStyle/>
+                    <a:p>
+                      <a:pPr lvl="0" indent="0" marL="0" algn="r">
+                        <a:buNone/>
+                      </a:pPr>
+                      <a:r>
+                        <a:rPr/>
+                        <a:t>~ 57</a:t>
+                      </a:r>
+                    </a:p>
+                  </a:txBody>
+                </a:tc>
+                <a:tc>
+                  <a:txBody>
+                    <a:bodyPr/>
+                    <a:lstStyle/>
+                    <a:p>
+                      <a:pPr lvl="0" indent="0" marL="0" algn="ctr">
+                        <a:buNone/>
+                      </a:pPr>
+                      <a:r>
+                        <a:rPr/>
+                        <a:t>Verus ~5.7×</a:t>
+                      </a:r>
+                    </a:p>
+                  </a:txBody>
+                </a:tc>
+              </a:tr>
+              <a:tr h="0">
+                <a:tc>
+                  <a:txBody>
+                    <a:bodyPr/>
+                    <a:lstStyle/>
+                    <a:p>
+                      <a:pPr lvl="0" indent="0" marL="0" algn="ctr">
+                        <a:buNone/>
+                      </a:pPr>
+                      <a:r>
+                        <a:rPr/>
+                        <a:t>4</a:t>
+                      </a:r>
+                    </a:p>
+                  </a:txBody>
+                </a:tc>
+                <a:tc>
+                  <a:txBody>
+                    <a:bodyPr/>
+                    <a:lstStyle/>
+                    <a:p>
+                      <a:pPr lvl="0" indent="0" marL="0" algn="l">
+                        <a:buNone/>
+                      </a:pPr>
+                      <a:r>
+                        <a:rPr/>
+                        <a:t>KLOP</a:t>
+                      </a:r>
+                    </a:p>
+                  </a:txBody>
+                </a:tc>
+                <a:tc>
+                  <a:txBody>
+                    <a:bodyPr/>
+                    <a:lstStyle/>
+                    <a:p>
+                      <a:pPr lvl="0" indent="0" marL="0" algn="r">
+                        <a:buNone/>
+                      </a:pPr>
+                      <a:r>
+                        <a:rPr/>
+                        <a:t>480</a:t>
+                      </a:r>
+                    </a:p>
+                  </a:txBody>
+                </a:tc>
+                <a:tc>
+                  <a:txBody>
+                    <a:bodyPr/>
+                    <a:lstStyle/>
+                    <a:p>
+                      <a:pPr lvl="0" indent="0" marL="0" algn="r">
+                        <a:buNone/>
+                      </a:pPr>
+                      <a:r>
+                        <a:rPr/>
+                        <a:t>~ 110</a:t>
+                      </a:r>
+                    </a:p>
+                  </a:txBody>
+                </a:tc>
+                <a:tc>
+                  <a:txBody>
+                    <a:bodyPr/>
+                    <a:lstStyle/>
+                    <a:p>
+                      <a:pPr lvl="0" indent="0" marL="0" algn="ctr">
+                        <a:buNone/>
+                      </a:pPr>
+                      <a:r>
+                        <a:rPr/>
+                        <a:t>seL4 ~4.4×</a:t>
+                      </a:r>
+                    </a:p>
+                  </a:txBody>
+                </a:tc>
+              </a:tr>
+              <a:tr h="0">
+                <a:tc>
+                  <a:txBody>
+                    <a:bodyPr/>
+                    <a:lstStyle/>
+                    <a:p>
+                      <a:pPr lvl="0" indent="0" marL="0" algn="ctr">
+                        <a:buNone/>
+                      </a:pPr>
+                      <a:r>
+                        <a:rPr/>
+                        <a:t>5</a:t>
+                      </a:r>
+                    </a:p>
+                  </a:txBody>
+                </a:tc>
+                <a:tc>
+                  <a:txBody>
+                    <a:bodyPr/>
+                    <a:lstStyle/>
+                    <a:p>
+                      <a:pPr lvl="0" indent="0" marL="0" algn="l">
+                        <a:buNone/>
+                      </a:pPr>
+                      <a:r>
+                        <a:rPr/>
+                        <a:t>KLOP / KLOE</a:t>
+                      </a:r>
+                    </a:p>
+                  </a:txBody>
+                </a:tc>
+                <a:tc>
+                  <a:txBody>
+                    <a:bodyPr/>
+                    <a:lstStyle/>
+                    <a:p>
+                      <a:pPr lvl="0" indent="0" marL="0" algn="r">
+                        <a:buNone/>
+                      </a:pPr>
+                      <a:r>
+                        <a:rPr/>
+                        <a:t>48</a:t>
+                      </a:r>
+                    </a:p>
+                  </a:txBody>
+                </a:tc>
+                <a:tc>
+                  <a:txBody>
+                    <a:bodyPr/>
+                    <a:lstStyle/>
+                    <a:p>
+                      <a:pPr lvl="0" indent="0" marL="0" algn="r">
+                        <a:buNone/>
+                      </a:pPr>
+                      <a:r>
+                        <a:rPr/>
+                        <a:t>~ 1.9</a:t>
+                      </a:r>
+                    </a:p>
+                  </a:txBody>
+                </a:tc>
+                <a:tc>
+                  <a:txBody>
+                    <a:bodyPr/>
+                    <a:lstStyle/>
+                    <a:p>
+                      <a:pPr lvl="0" indent="0" marL="0" algn="ctr">
+                        <a:buNone/>
+                      </a:pPr>
+                      <a:r>
+                        <a:rPr/>
+                        <a:t>seL4 </a:t>
+                      </a:r>
+                      <a:r>
+                        <a:rPr b="1"/>
+                        <a:t>~25×</a:t>
+                      </a:r>
+                    </a:p>
+                  </a:txBody>
+                </a:tc>
+              </a:tr>
+              <a:tr h="0">
+                <a:tc>
+                  <a:txBody>
+                    <a:bodyPr/>
+                    <a:lstStyle/>
+                    <a:p>
+                      <a:pPr lvl="0" indent="0" marL="0" algn="ctr">
+                        <a:buNone/>
+                      </a:pPr>
+                      <a:r>
+                        <a:rPr/>
+                        <a:t>6</a:t>
+                      </a:r>
+                    </a:p>
+                  </a:txBody>
+                </a:tc>
+                <a:tc>
+                  <a:txBody>
+                    <a:bodyPr/>
+                    <a:lstStyle/>
+                    <a:p>
+                      <a:pPr lvl="0" indent="0" marL="0" algn="l">
+                        <a:buNone/>
+                      </a:pPr>
+                      <a:r>
+                        <a:rPr/>
+                        <a:t>KLines / hour</a:t>
+                      </a:r>
+                    </a:p>
+                  </a:txBody>
+                </a:tc>
+                <a:tc>
+                  <a:txBody>
+                    <a:bodyPr/>
+                    <a:lstStyle/>
+                    <a:p>
+                      <a:pPr lvl="0" indent="0" marL="0" algn="r">
+                        <a:buNone/>
+                      </a:pPr>
+                      <a:r>
+                        <a:rPr/>
+                        <a:t>0.0105</a:t>
+                      </a:r>
+                    </a:p>
+                  </a:txBody>
+                </a:tc>
+                <a:tc>
+                  <a:txBody>
+                    <a:bodyPr/>
+                    <a:lstStyle/>
+                    <a:p>
+                      <a:pPr lvl="0" indent="0" marL="0" algn="r">
+                        <a:buNone/>
+                      </a:pPr>
+                      <a:r>
+                        <a:rPr/>
+                        <a:t>0.148</a:t>
+                      </a:r>
+                    </a:p>
+                  </a:txBody>
+                </a:tc>
+                <a:tc>
+                  <a:txBody>
+                    <a:bodyPr/>
+                    <a:lstStyle/>
+                    <a:p>
+                      <a:pPr lvl="0" indent="0" marL="0" algn="ctr">
+                        <a:buNone/>
+                      </a:pPr>
+                      <a:r>
+                        <a:rPr/>
+                        <a:t>Verus ~14×</a:t>
+                      </a:r>
+                    </a:p>
+                  </a:txBody>
+                </a:tc>
+              </a:tr>
+              <a:tr h="0">
+                <a:tc>
+                  <a:txBody>
+                    <a:bodyPr/>
+                    <a:lstStyle/>
+                    <a:p>
+                      <a:pPr lvl="0" indent="0" marL="0" algn="ctr">
+                        <a:buNone/>
+                      </a:pPr>
+                      <a:r>
+                        <a:rPr/>
+                        <a:t>7</a:t>
+                      </a:r>
+                    </a:p>
+                  </a:txBody>
+                </a:tc>
+                <a:tc>
+                  <a:txBody>
+                    <a:bodyPr/>
+                    <a:lstStyle/>
+                    <a:p>
+                      <a:pPr lvl="0" indent="0" marL="0" algn="l">
+                        <a:buNone/>
+                      </a:pPr>
+                      <a:r>
+                        <a:rPr/>
+                        <a:t>$ / KLOE</a:t>
+                      </a:r>
+                    </a:p>
+                  </a:txBody>
+                </a:tc>
+                <a:tc>
+                  <a:txBody>
+                    <a:bodyPr/>
+                    <a:lstStyle/>
+                    <a:p>
+                      <a:pPr lvl="0" indent="0" marL="0" algn="r">
+                        <a:buNone/>
+                      </a:pPr>
+                      <a:r>
+                        <a:rPr/>
+                        <a:t>$ 843,750</a:t>
+                      </a:r>
+                    </a:p>
+                  </a:txBody>
+                </a:tc>
+                <a:tc>
+                  <a:txBody>
+                    <a:bodyPr/>
+                    <a:lstStyle/>
+                    <a:p>
+                      <a:pPr lvl="0" indent="0" marL="0" algn="r">
+                        <a:buNone/>
+                      </a:pPr>
+                      <a:r>
+                        <a:rPr/>
+                        <a:t>~ $ 4,300</a:t>
+                      </a:r>
+                    </a:p>
+                  </a:txBody>
+                </a:tc>
+                <a:tc>
+                  <a:txBody>
+                    <a:bodyPr/>
+                    <a:lstStyle/>
+                    <a:p>
+                      <a:pPr lvl="0" indent="0" marL="0" algn="ctr">
+                        <a:buNone/>
+                      </a:pPr>
+                      <a:r>
+                        <a:rPr/>
+                        <a:t>seL4 </a:t>
+                      </a:r>
+                      <a:r>
+                        <a:rPr b="1"/>
+                        <a:t>~196×</a:t>
+                      </a:r>
+                    </a:p>
+                  </a:txBody>
+                </a:tc>
+              </a:tr>
+              <a:tr h="0">
+                <a:tc>
+                  <a:txBody>
+                    <a:bodyPr/>
+                    <a:lstStyle/>
+                    <a:p>
+                      <a:pPr lvl="0" indent="0" marL="0" algn="ctr">
+                        <a:buNone/>
+                      </a:pPr>
+                      <a:r>
+                        <a:rPr/>
+                        <a:t>8</a:t>
+                      </a:r>
+                    </a:p>
+                  </a:txBody>
+                </a:tc>
+                <a:tc>
+                  <a:txBody>
+                    <a:bodyPr/>
+                    <a:lstStyle/>
+                    <a:p>
+                      <a:pPr lvl="0" indent="0" marL="0" algn="l">
+                        <a:buNone/>
+                      </a:pPr>
+                      <a:r>
+                        <a:rPr/>
+                        <a:t>$ / KLOP</a:t>
+                      </a:r>
+                    </a:p>
+                  </a:txBody>
+                </a:tc>
+                <a:tc>
+                  <a:txBody>
+                    <a:bodyPr/>
+                    <a:lstStyle/>
+                    <a:p>
+                      <a:pPr lvl="0" indent="0" marL="0" algn="r">
+                        <a:buNone/>
+                      </a:pPr>
+                      <a:r>
+                        <a:rPr/>
+                        <a:t>$ 17,578</a:t>
+                      </a:r>
+                    </a:p>
+                  </a:txBody>
+                </a:tc>
+                <a:tc>
+                  <a:txBody>
+                    <a:bodyPr/>
+                    <a:lstStyle/>
+                    <a:p>
+                      <a:pPr lvl="0" indent="0" marL="0" algn="r">
+                        <a:buNone/>
+                      </a:pPr>
+                      <a:r>
+                        <a:rPr/>
+                        <a:t>~ $ 2,225</a:t>
+                      </a:r>
+                    </a:p>
+                  </a:txBody>
+                </a:tc>
+                <a:tc>
+                  <a:txBody>
+                    <a:bodyPr/>
+                    <a:lstStyle/>
+                    <a:p>
+                      <a:pPr lvl="0" indent="0" marL="0" algn="ctr">
+                        <a:buNone/>
+                      </a:pPr>
+                      <a:r>
+                        <a:rPr/>
+                        <a:t>seL4 ~7.9×</a:t>
+                      </a:r>
+                    </a:p>
+                  </a:txBody>
+                </a:tc>
+              </a:tr>
+              <a:tr h="0">
+                <a:tc>
+                  <a:txBody>
+                    <a:bodyPr/>
+                    <a:lstStyle/>
+                    <a:p>
+                      <a:pPr lvl="0" indent="0" marL="0" algn="ctr">
+                        <a:buNone/>
+                      </a:pPr>
+                      <a:r>
+                        <a:rPr/>
+                        <a:t>9</a:t>
+                      </a:r>
+                    </a:p>
+                  </a:txBody>
+                </a:tc>
+                <a:tc>
+                  <a:txBody>
+                    <a:bodyPr/>
+                    <a:lstStyle/>
+                    <a:p>
+                      <a:pPr lvl="0" indent="0" marL="0" algn="l">
+                        <a:buNone/>
+                      </a:pPr>
+                      <a:r>
+                        <a:rPr/>
+                        <a:t>C + P total</a:t>
+                      </a:r>
+                    </a:p>
+                  </a:txBody>
+                </a:tc>
+                <a:tc>
+                  <a:txBody>
+                    <a:bodyPr/>
+                    <a:lstStyle/>
+                    <a:p>
+                      <a:pPr lvl="0" indent="0" marL="0" algn="r">
+                        <a:buNone/>
+                      </a:pPr>
+                      <a:r>
+                        <a:rPr/>
+                        <a:t>$ 8,437,500</a:t>
+                      </a:r>
+                    </a:p>
+                  </a:txBody>
+                </a:tc>
+                <a:tc>
+                  <a:txBody>
+                    <a:bodyPr/>
+                    <a:lstStyle/>
+                    <a:p>
+                      <a:pPr lvl="0" indent="0" marL="0" algn="r">
+                        <a:buNone/>
+                      </a:pPr>
+                      <a:r>
+                        <a:rPr/>
+                        <a:t>$ 244,840</a:t>
+                      </a:r>
+                    </a:p>
+                  </a:txBody>
+                </a:tc>
+                <a:tc>
+                  <a:txBody>
+                    <a:bodyPr/>
+                    <a:lstStyle/>
+                    <a:p>
+                      <a:pPr lvl="0" indent="0" marL="0" algn="ctr">
+                        <a:buNone/>
+                      </a:pPr>
+                      <a:r>
+                        <a:rPr/>
+                        <a:t>seL4 </a:t>
+                      </a:r>
+                      <a:r>
+                        <a:rPr b="1"/>
+                        <a:t>~34.5×</a:t>
+                      </a:r>
+                    </a:p>
+                  </a:txBody>
+                </a:tc>
+              </a:tr>
+            </a:tbl>
+          </a:graphicData>
+        </a:graphic>
+      </p:graphicFrame>
     </p:spTree>
   </p:cSld>
 </p:sld>
@@ -15432,7 +16203,7 @@
             </a:pPr>
             <a:r>
               <a:rPr lang="en-US" sz="3200"/>
-              <a:t>Rusticate + Veracity allow quantitative software engineering</a:t>
+              <a:t>R</a:t>
             </a:r>
           </a:p>
         </p:txBody>
@@ -15455,49 +16226,39 @@
             <a:pPr lvl="0"/>
             <a:r>
               <a:rPr lang="en-US" sz="1800"/>
-              <a:t>I downloaded the 1036 most downloaded Rust projects, 3636 crates.</a:t>
-            </a:r>
-          </a:p>
-          <a:p>
-            <a:pPr lvl="0"/>
-            <a:r>
-              <a:rPr lang="en-US" sz="1800"/>
-              <a:t>I threw out three that wrapped std for asynchrony.</a:t>
-            </a:r>
-          </a:p>
-          <a:p>
-            <a:pPr lvl="0"/>
-            <a:r>
-              <a:rPr lang="en-US" sz="1800"/>
-              <a:t>I did a greedy set cover analysis of what Rust uses.</a:t>
-            </a:r>
-          </a:p>
-          <a:p>
-            <a:pPr lvl="0"/>
-            <a:r>
-              <a:rPr lang="en-US" sz="1800"/>
-              <a:t>And another of what verus wraps.</a:t>
-            </a:r>
-          </a:p>
-          <a:p>
-            <a:pPr lvl="0"/>
-            <a:r>
-              <a:rPr lang="en-US" sz="1800"/>
-              <a:t>This is a golden age for quantitative software engineering.</a:t>
-            </a:r>
-          </a:p>
-          <a:p>
-            <a:pPr lvl="0"/>
-            <a:r>
-              <a:rPr lang="en-US" sz="1800"/>
-              <a:t>It took just two days of person time.</a:t>
-            </a:r>
-          </a:p>
-          <a:p>
-            <a:pPr lvl="0"/>
-            <a:r>
-              <a:rPr lang="en-US" sz="1800"/>
-              <a:t>And I never read a line of code in the tools. Just check the output and have the AI write a lot of tests.</a:t>
+              <a:t>LOPC2R = Lines of proven code 2 review</a:t>
+            </a:r>
+          </a:p>
+          <a:p>
+            <a:pPr lvl="0"/>
+            <a:r>
+              <a:rPr lang="en-US" sz="1800"/>
+              <a:t>LOPC0R = Lines of proven code not to review</a:t>
+            </a:r>
+          </a:p>
+          <a:p>
+            <a:pPr lvl="0"/>
+            <a:r>
+              <a:rPr lang="en-US" sz="1800"/>
+              <a:t>R = LOPC2R / (LOPC2R + LOC0R)</a:t>
+            </a:r>
+          </a:p>
+          <a:p>
+            <a:pPr lvl="0"/>
+            <a:r>
+              <a:rPr lang="en-US" sz="1800"/>
+              <a:t>47,828 / 143,736 = 0.332749 = 33.2749 %</a:t>
+            </a:r>
+          </a:p>
+          <a:p>
+            <a:pPr lvl="0"/>
+            <a:r>
+              <a:rPr lang="en-US" sz="1800"/>
+              <a:t>R — Review Ratio </a:t>
+            </a:r>
+            <a:r>
+              <a:rPr lang="en-US" sz="1800" b="1"/>
+              <a:t>~33.3%</a:t>
             </a:r>
           </a:p>
         </p:txBody>
@@ -15544,7 +16305,7 @@
             </a:pPr>
             <a:r>
               <a:rPr lang="en-US" sz="3200"/>
-              <a:t>Rusticate + Veracity : What Rust Cargos use in std.</a:t>
+              <a:t>Rusticate + Veracity allow quantitative software engineering</a:t>
             </a:r>
           </a:p>
         </p:txBody>
@@ -15567,70 +16328,49 @@
             <a:pPr lvl="0"/>
             <a:r>
               <a:rPr lang="en-US" sz="1800"/>
-              <a:t>Top 1000 projects, 3636 crates.</a:t>
-            </a:r>
-          </a:p>
-          <a:p>
-            <a:pPr lvl="0"/>
-            <a:r>
-              <a:rPr lang="en-US" sz="1800"/>
-              <a:t>19 data types fully support 90%.</a:t>
-            </a:r>
-          </a:p>
-          <a:p>
-            <a:pPr lvl="0"/>
-            <a:r>
-              <a:rPr lang="en-US" sz="1800"/>
-              <a:t>48 data types fully support 100%.</a:t>
-            </a:r>
-          </a:p>
-          <a:p>
-            <a:pPr lvl="0"/>
-            <a:r>
-              <a:rPr lang="en-US" sz="1800"/>
-              <a:t>69 modules fully support 95%.</a:t>
-            </a:r>
-          </a:p>
-          <a:p>
-            <a:pPr lvl="0"/>
-            <a:r>
-              <a:rPr lang="en-US" sz="1800"/>
-              <a:t>79 modules fully support 99%.</a:t>
-            </a:r>
-          </a:p>
-          <a:p>
-            <a:pPr lvl="0"/>
-            <a:r>
-              <a:rPr lang="en-US" sz="1800"/>
-              <a:t>1121 methods fully support 95%.</a:t>
-            </a:r>
-          </a:p>
-          <a:p>
-            <a:pPr lvl="0"/>
-            <a:r>
-              <a:rPr lang="en-US" sz="1800"/>
-              <a:t>1733 methods fully support 99%.</a:t>
-            </a:r>
-          </a:p>
-          <a:p>
-            <a:pPr lvl="0"/>
-            <a:r>
-              <a:rPr lang="en-US" sz="1800"/>
-              <a:t>14,317 total fn definitions in std/core/alloc in Rust</a:t>
-            </a:r>
-          </a:p>
-          <a:p>
-            <a:pPr lvl="0"/>
-            <a:r>
-              <a:rPr lang="en-US" sz="1800"/>
-              <a:t>4,965 pub fn definitions in std/core/alloc in Rust</a:t>
-            </a:r>
-          </a:p>
-          <a:p>
-            <a:pPr lvl="0"/>
-            <a:r>
-              <a:rPr lang="en-US" sz="1800"/>
-              <a:t>But how many of those private functions do we need? I don’t know.</a:t>
+              <a:t>I downloaded the 1036 most downloaded Rust projects, 3636 crates.</a:t>
+            </a:r>
+          </a:p>
+          <a:p>
+            <a:pPr lvl="0"/>
+            <a:r>
+              <a:rPr lang="en-US" sz="1800"/>
+              <a:t>I threw out three that wrapped std for asynchrony.</a:t>
+            </a:r>
+          </a:p>
+          <a:p>
+            <a:pPr lvl="0"/>
+            <a:r>
+              <a:rPr lang="en-US" sz="1800"/>
+              <a:t>I did a greedy set cover analysis of what Rust uses.</a:t>
+            </a:r>
+          </a:p>
+          <a:p>
+            <a:pPr lvl="0"/>
+            <a:r>
+              <a:rPr lang="en-US" sz="1800"/>
+              <a:t>And another of what verus wraps.</a:t>
+            </a:r>
+          </a:p>
+          <a:p>
+            <a:pPr lvl="0"/>
+            <a:r>
+              <a:rPr lang="en-US" sz="1800"/>
+              <a:t>This is a golden age for quantitative software engineering.</a:t>
+            </a:r>
+          </a:p>
+          <a:p>
+            <a:pPr lvl="0"/>
+            <a:r>
+              <a:rPr lang="en-US" sz="1800"/>
+              <a:t>It took just two days of person time.</a:t>
+            </a:r>
+          </a:p>
+          <a:p>
+            <a:pPr lvl="0"/>
+            <a:r>
+              <a:rPr lang="en-US" sz="1800"/>
+              <a:t>And I never read a line of code in the tools. Just check the output and have the AI write a lot of tests.</a:t>
             </a:r>
           </a:p>
         </p:txBody>
@@ -15677,7 +16417,7 @@
             </a:pPr>
             <a:r>
               <a:rPr lang="en-US" sz="3200"/>
-              <a:t>Compare Rust STD to APAS-VERUS?</a:t>
+              <a:t>Rusticate + Veracity : What Rust Cargos use in std.</a:t>
             </a:r>
           </a:p>
         </p:txBody>
@@ -15700,35 +16440,70 @@
             <a:pPr lvl="0"/>
             <a:r>
               <a:rPr lang="en-US" sz="1800"/>
-              <a:t>APAS-VERUS: -6,401 exec functions total, -4,911 with proofs</a:t>
-            </a:r>
-          </a:p>
-          <a:p>
-            <a:pPr lvl="0"/>
-            <a:r>
-              <a:rPr lang="en-US" sz="1800"/>
-              <a:t>But APAS-VERUS has {Mt,St}x{Per,Eph}</a:t>
-            </a:r>
-          </a:p>
-          <a:p>
-            <a:pPr lvl="0"/>
-            <a:r>
-              <a:rPr lang="en-US" sz="1800"/>
-              <a:t>So it is much more like 2000 distinct functions.</a:t>
-            </a:r>
-          </a:p>
-          <a:p>
-            <a:pPr lvl="0"/>
-            <a:r>
-              <a:rPr lang="en-US" sz="1800"/>
-              <a:t>And I wrote this in 160 days while learning Verus.</a:t>
-            </a:r>
-          </a:p>
-          <a:p>
-            <a:pPr lvl="0"/>
-            <a:r>
-              <a:rPr lang="en-US" sz="1800"/>
-              <a:t>At least 30 of those days were understanding and working around pain points.</a:t>
+              <a:t>Top 1000 projects, 3636 crates.</a:t>
+            </a:r>
+          </a:p>
+          <a:p>
+            <a:pPr lvl="0"/>
+            <a:r>
+              <a:rPr lang="en-US" sz="1800"/>
+              <a:t>19 data types fully support 90%.</a:t>
+            </a:r>
+          </a:p>
+          <a:p>
+            <a:pPr lvl="0"/>
+            <a:r>
+              <a:rPr lang="en-US" sz="1800"/>
+              <a:t>48 data types fully support 100%.</a:t>
+            </a:r>
+          </a:p>
+          <a:p>
+            <a:pPr lvl="0"/>
+            <a:r>
+              <a:rPr lang="en-US" sz="1800"/>
+              <a:t>69 modules fully support 95%.</a:t>
+            </a:r>
+          </a:p>
+          <a:p>
+            <a:pPr lvl="0"/>
+            <a:r>
+              <a:rPr lang="en-US" sz="1800"/>
+              <a:t>79 modules fully support 99%.</a:t>
+            </a:r>
+          </a:p>
+          <a:p>
+            <a:pPr lvl="0"/>
+            <a:r>
+              <a:rPr lang="en-US" sz="1800"/>
+              <a:t>1121 methods fully support 95%.</a:t>
+            </a:r>
+          </a:p>
+          <a:p>
+            <a:pPr lvl="0"/>
+            <a:r>
+              <a:rPr lang="en-US" sz="1800"/>
+              <a:t>1733 methods fully support 99%.</a:t>
+            </a:r>
+          </a:p>
+          <a:p>
+            <a:pPr lvl="0"/>
+            <a:r>
+              <a:rPr lang="en-US" sz="1800"/>
+              <a:t>14,317 total fn definitions in std/core/alloc in Rust</a:t>
+            </a:r>
+          </a:p>
+          <a:p>
+            <a:pPr lvl="0"/>
+            <a:r>
+              <a:rPr lang="en-US" sz="1800"/>
+              <a:t>4,965 pub fn definitions in std/core/alloc in Rust</a:t>
+            </a:r>
+          </a:p>
+          <a:p>
+            <a:pPr lvl="0"/>
+            <a:r>
+              <a:rPr lang="en-US" sz="1800"/>
+              <a:t>But how many of those private functions do we need? I don’t know.</a:t>
             </a:r>
           </a:p>
         </p:txBody>
@@ -15775,7 +16550,7 @@
             </a:pPr>
             <a:r>
               <a:rPr lang="en-US" sz="3200"/>
-              <a:t>Rusticate + Veracity: What Verus Wraps</a:t>
+              <a:t>Compare Rust STD to APAS-VERUS?</a:t>
             </a:r>
           </a:p>
         </p:txBody>
@@ -15798,56 +16573,35 @@
             <a:pPr lvl="0"/>
             <a:r>
               <a:rPr lang="en-US" sz="1800"/>
-              <a:t>As of 2026 14 April</a:t>
-            </a:r>
-          </a:p>
-          <a:p>
-            <a:pPr lvl="0"/>
-            <a:r>
-              <a:rPr lang="en-US" sz="1800"/>
-              <a:t>How many Rust Data Types does Verus wrap?</a:t>
-            </a:r>
-          </a:p>
-          <a:p>
-            <a:pPr lvl="1"/>
-            <a:r>
-              <a:rPr lang="en-US" sz="1800"/>
-              <a:t>29 types currently wrapped.</a:t>
-            </a:r>
-          </a:p>
-          <a:p>
-            <a:pPr lvl="0"/>
-            <a:r>
-              <a:rPr lang="en-US" sz="1800"/>
-              <a:t>How many Rust Traits does Verus wrap?</a:t>
-            </a:r>
-          </a:p>
-          <a:p>
-            <a:pPr lvl="1"/>
-            <a:r>
-              <a:rPr lang="en-US" sz="1800"/>
-              <a:t>147 traits in vstd.</a:t>
-            </a:r>
-          </a:p>
-          <a:p>
-            <a:pPr lvl="0"/>
-            <a:r>
-              <a:rPr lang="en-US" sz="1800"/>
-              <a:t>How many total Rust Methods does Verus wrap?</a:t>
-            </a:r>
-          </a:p>
-          <a:p>
-            <a:pPr lvl="1"/>
-            <a:r>
-              <a:rPr lang="en-US" sz="1800"/>
-              <a:t>154 methods currently wrapped.</a:t>
-            </a:r>
-          </a:p>
-          <a:p>
-            <a:pPr lvl="0"/>
-            <a:r>
-              <a:rPr lang="en-US" sz="1800"/>
-              <a:t>A small but growing percentage.</a:t>
+              <a:t>APAS-VERUS: -6,401 exec functions total, -4,911 with proofs</a:t>
+            </a:r>
+          </a:p>
+          <a:p>
+            <a:pPr lvl="0"/>
+            <a:r>
+              <a:rPr lang="en-US" sz="1800"/>
+              <a:t>But APAS-VERUS has {Mt,St}x{Per,Eph}</a:t>
+            </a:r>
+          </a:p>
+          <a:p>
+            <a:pPr lvl="0"/>
+            <a:r>
+              <a:rPr lang="en-US" sz="1800"/>
+              <a:t>So it is much more like 2000 distinct functions.</a:t>
+            </a:r>
+          </a:p>
+          <a:p>
+            <a:pPr lvl="0"/>
+            <a:r>
+              <a:rPr lang="en-US" sz="1800"/>
+              <a:t>And I wrote this in 160 days while learning Verus.</a:t>
+            </a:r>
+          </a:p>
+          <a:p>
+            <a:pPr lvl="0"/>
+            <a:r>
+              <a:rPr lang="en-US" sz="1800"/>
+              <a:t>At least 30 of those days were understanding and working around pain points.</a:t>
             </a:r>
           </a:p>
         </p:txBody>
@@ -15894,7 +16648,7 @@
             </a:pPr>
             <a:r>
               <a:rPr lang="en-US" sz="3200"/>
-              <a:t>Software Engineering in AI Paired Proving</a:t>
+              <a:t>Rusticate + Veracity: What Verus Wraps</a:t>
             </a:r>
           </a:p>
         </p:txBody>
@@ -15917,42 +16671,56 @@
             <a:pPr lvl="0"/>
             <a:r>
               <a:rPr lang="en-US" sz="1800"/>
-              <a:t>Software engineering in the AI age is much like managing programmers.</a:t>
-            </a:r>
-          </a:p>
-          <a:p>
-            <a:pPr lvl="0"/>
-            <a:r>
-              <a:rPr lang="en-US" sz="1800"/>
-              <a:t>You can’t possibly read all their code.</a:t>
-            </a:r>
-          </a:p>
-          <a:p>
-            <a:pPr lvl="0"/>
-            <a:r>
-              <a:rPr lang="en-US" sz="1800"/>
-              <a:t>So you use:</a:t>
+              <a:t>As of 2026 14 April</a:t>
+            </a:r>
+          </a:p>
+          <a:p>
+            <a:pPr lvl="0"/>
+            <a:r>
+              <a:rPr lang="en-US" sz="1800"/>
+              <a:t>How many Rust Data Types does Verus wrap?</a:t>
             </a:r>
           </a:p>
           <a:p>
             <a:pPr lvl="1"/>
             <a:r>
               <a:rPr lang="en-US" sz="1800"/>
-              <a:t>linters both programmatic and AI</a:t>
+              <a:t>29 types currently wrapped.</a:t>
+            </a:r>
+          </a:p>
+          <a:p>
+            <a:pPr lvl="0"/>
+            <a:r>
+              <a:rPr lang="en-US" sz="1800"/>
+              <a:t>How many Rust Traits does Verus wrap?</a:t>
             </a:r>
           </a:p>
           <a:p>
             <a:pPr lvl="1"/>
             <a:r>
               <a:rPr lang="en-US" sz="1800"/>
-              <a:t>stylers both programmatic and AI</a:t>
+              <a:t>147 traits in vstd.</a:t>
+            </a:r>
+          </a:p>
+          <a:p>
+            <a:pPr lvl="0"/>
+            <a:r>
+              <a:rPr lang="en-US" sz="1800"/>
+              <a:t>How many total Rust Methods does Verus wrap?</a:t>
             </a:r>
           </a:p>
           <a:p>
             <a:pPr lvl="1"/>
             <a:r>
               <a:rPr lang="en-US" sz="1800"/>
-              <a:t>AI reviews directed by programmatic tools.</a:t>
+              <a:t>154 methods currently wrapped.</a:t>
+            </a:r>
+          </a:p>
+          <a:p>
+            <a:pPr lvl="0"/>
+            <a:r>
+              <a:rPr lang="en-US" sz="1800"/>
+              <a:t>A small but growing percentage.</a:t>
             </a:r>
           </a:p>
         </p:txBody>
@@ -16022,49 +16790,42 @@
             <a:pPr lvl="0"/>
             <a:r>
               <a:rPr lang="en-US" sz="1800"/>
-              <a:t>Starting with a textbook that has a ton of good prose is a huge plus.</a:t>
-            </a:r>
-          </a:p>
-          <a:p>
-            <a:pPr lvl="0"/>
-            <a:r>
-              <a:rPr lang="en-US" sz="1800"/>
-              <a:t>I did discover a few things about the textbook.</a:t>
-            </a:r>
-          </a:p>
-          <a:p>
-            <a:pPr lvl="0"/>
-            <a:r>
-              <a:rPr lang="en-US" sz="1800"/>
-              <a:t>It needs more on Scheduling. I only built Help-First scheduling.</a:t>
-            </a:r>
-          </a:p>
-          <a:p>
-            <a:pPr lvl="0"/>
-            <a:r>
-              <a:rPr lang="en-US" sz="1800"/>
-              <a:t>It used (K,V) in tree sets as mappings, but I had to make this explicit. Particularly with an Ordered Key Mapping.</a:t>
-            </a:r>
-          </a:p>
-          <a:p>
-            <a:pPr lvl="0"/>
-            <a:r>
-              <a:rPr lang="en-US" sz="1800"/>
-              <a:t>With this Ordered Tables, which are not too complex, were much easier to prove.</a:t>
-            </a:r>
-          </a:p>
-          <a:p>
-            <a:pPr lvl="0"/>
-            <a:r>
-              <a:rPr lang="en-US" sz="1800"/>
-              <a:t>APAS’s discussion of Union Find was too thin. Path compression was very difficult.</a:t>
-            </a:r>
-          </a:p>
-          <a:p>
-            <a:pPr lvl="0"/>
-            <a:r>
-              <a:rPr lang="en-US" sz="1800"/>
-              <a:t>I had to start with Nikhil Swammy et. al’s AlgoCLRS’s implemention and proofs.</a:t>
+              <a:t>Software engineering in the AI age is much like managing programmers.</a:t>
+            </a:r>
+          </a:p>
+          <a:p>
+            <a:pPr lvl="0"/>
+            <a:r>
+              <a:rPr lang="en-US" sz="1800"/>
+              <a:t>You can’t possibly read all their code.</a:t>
+            </a:r>
+          </a:p>
+          <a:p>
+            <a:pPr lvl="0"/>
+            <a:r>
+              <a:rPr lang="en-US" sz="1800"/>
+              <a:t>So you use:</a:t>
+            </a:r>
+          </a:p>
+          <a:p>
+            <a:pPr lvl="1"/>
+            <a:r>
+              <a:rPr lang="en-US" sz="1800"/>
+              <a:t>linters both programmatic and AI</a:t>
+            </a:r>
+          </a:p>
+          <a:p>
+            <a:pPr lvl="1"/>
+            <a:r>
+              <a:rPr lang="en-US" sz="1800"/>
+              <a:t>stylers both programmatic and AI</a:t>
+            </a:r>
+          </a:p>
+          <a:p>
+            <a:pPr lvl="1"/>
+            <a:r>
+              <a:rPr lang="en-US" sz="1800"/>
+              <a:t>AI reviews directed by programmatic tools.</a:t>
             </a:r>
           </a:p>
         </p:txBody>
@@ -16134,70 +16895,49 @@
             <a:pPr lvl="0"/>
             <a:r>
               <a:rPr lang="en-US" sz="1800"/>
-              <a:t>I use git work trees for proof.</a:t>
-            </a:r>
-          </a:p>
-          <a:p>
-            <a:pPr lvl="0"/>
-            <a:r>
-              <a:rPr lang="en-US" sz="1800"/>
-              <a:t>The good news is git is powerful and the agents understand it.</a:t>
-            </a:r>
-          </a:p>
-          <a:p>
-            <a:pPr lvl="0"/>
-            <a:r>
-              <a:rPr lang="en-US" sz="1800"/>
-              <a:t>The bad news is the agents can indeed start using advanced features and get things wrong.</a:t>
-            </a:r>
-          </a:p>
-          <a:p>
-            <a:pPr lvl="0"/>
-            <a:r>
-              <a:rPr lang="en-US" sz="1800"/>
-              <a:t>I work with between 1 and 9 agents.</a:t>
-            </a:r>
-          </a:p>
-          <a:p>
-            <a:pPr lvl="0"/>
-            <a:r>
-              <a:rPr lang="en-US" sz="1800"/>
-              <a:t>One on veracity.</a:t>
-            </a:r>
-          </a:p>
-          <a:p>
-            <a:pPr lvl="0"/>
-            <a:r>
-              <a:rPr lang="en-US" sz="1800"/>
-              <a:t>One orchestrator, writing plans, prompts and controlling merges.</a:t>
-            </a:r>
-          </a:p>
-          <a:p>
-            <a:pPr lvl="0"/>
-            <a:r>
-              <a:rPr lang="en-US" sz="1800"/>
-              <a:t>1-8 on branches each working on different independent plans.</a:t>
-            </a:r>
-          </a:p>
-          <a:p>
-            <a:pPr lvl="0"/>
-            <a:r>
-              <a:rPr lang="en-US" sz="1800"/>
-              <a:t>I am not nearly comfortable enough with agent proof to let them do subagents without observing.</a:t>
-            </a:r>
-          </a:p>
-          <a:p>
-            <a:pPr lvl="0"/>
-            <a:r>
-              <a:rPr lang="en-US" sz="1800"/>
-              <a:t>Cursor was much better at interruption to guide things.</a:t>
-            </a:r>
-          </a:p>
-          <a:p>
-            <a:pPr lvl="0"/>
-            <a:r>
-              <a:rPr lang="en-US" sz="1800"/>
-              <a:t>Claude is getting better at it.</a:t>
+              <a:t>Starting with a textbook that has a ton of good prose is a huge plus.</a:t>
+            </a:r>
+          </a:p>
+          <a:p>
+            <a:pPr lvl="0"/>
+            <a:r>
+              <a:rPr lang="en-US" sz="1800"/>
+              <a:t>I did discover a few things about the textbook.</a:t>
+            </a:r>
+          </a:p>
+          <a:p>
+            <a:pPr lvl="0"/>
+            <a:r>
+              <a:rPr lang="en-US" sz="1800"/>
+              <a:t>It needs more on Scheduling. I only built Help-First scheduling.</a:t>
+            </a:r>
+          </a:p>
+          <a:p>
+            <a:pPr lvl="0"/>
+            <a:r>
+              <a:rPr lang="en-US" sz="1800"/>
+              <a:t>It used (K,V) in tree sets as mappings, but I had to make this explicit. Particularly with an Ordered Key Mapping.</a:t>
+            </a:r>
+          </a:p>
+          <a:p>
+            <a:pPr lvl="0"/>
+            <a:r>
+              <a:rPr lang="en-US" sz="1800"/>
+              <a:t>With this Ordered Tables, which are not too complex, were much easier to prove.</a:t>
+            </a:r>
+          </a:p>
+          <a:p>
+            <a:pPr lvl="0"/>
+            <a:r>
+              <a:rPr lang="en-US" sz="1800"/>
+              <a:t>APAS’s discussion of Union Find was too thin. Path compression was very difficult.</a:t>
+            </a:r>
+          </a:p>
+          <a:p>
+            <a:pPr lvl="0"/>
+            <a:r>
+              <a:rPr lang="en-US" sz="1800"/>
+              <a:t>I had to start with Nikhil Swammy et. al’s AlgoCLRS’s implemention and proofs.</a:t>
             </a:r>
           </a:p>
         </p:txBody>
@@ -16356,7 +17096,7 @@
             </a:pPr>
             <a:r>
               <a:rPr lang="en-US" sz="3200"/>
-              <a:t>Software Engineering in AI Paired Proving- Models</a:t>
+              <a:t>Software Engineering in AI Paired Proving</a:t>
             </a:r>
           </a:p>
         </p:txBody>
@@ -16379,56 +17119,70 @@
             <a:pPr lvl="0"/>
             <a:r>
               <a:rPr lang="en-US" sz="1800"/>
-              <a:t>The agents I used are: various Google, OpenAI and Anthropic.</a:t>
-            </a:r>
-          </a:p>
-          <a:p>
-            <a:pPr lvl="0"/>
-            <a:r>
-              <a:rPr lang="en-US" sz="1800"/>
-              <a:t>A google agent once took 12 minutes to ‘echo HI’ to test it’s terminal.</a:t>
-            </a:r>
-          </a:p>
-          <a:p>
-            <a:pPr lvl="0"/>
-            <a:r>
-              <a:rPr lang="en-US" sz="1800"/>
-              <a:t>Anthropics models are signficantly better than OpenAI.</a:t>
-            </a:r>
-          </a:p>
-          <a:p>
-            <a:pPr lvl="0"/>
-            <a:r>
-              <a:rPr lang="en-US" sz="1800"/>
-              <a:t>And Claude Code’s cost is the least so far.</a:t>
-            </a:r>
-          </a:p>
-          <a:p>
-            <a:pPr lvl="0"/>
-            <a:r>
-              <a:rPr lang="en-US" sz="1800"/>
-              <a:t>They are said in the press to be spending $5000 per month per user.</a:t>
-            </a:r>
-          </a:p>
-          <a:p>
-            <a:pPr lvl="0"/>
-            <a:r>
-              <a:rPr lang="en-US" sz="1800"/>
-              <a:t>They are buying market share (what happened to Amazon’s buying market share phase?).</a:t>
-            </a:r>
-          </a:p>
-          <a:p>
-            <a:pPr lvl="0"/>
-            <a:r>
-              <a:rPr lang="en-US" sz="1800"/>
-              <a:t>And they are buying coding interactions.</a:t>
-            </a:r>
-          </a:p>
-          <a:p>
-            <a:pPr lvl="0"/>
-            <a:r>
-              <a:rPr lang="en-US" sz="1800"/>
-              <a:t>But both vendors are playing leap frog.</a:t>
+              <a:t>I use git work trees for proof.</a:t>
+            </a:r>
+          </a:p>
+          <a:p>
+            <a:pPr lvl="0"/>
+            <a:r>
+              <a:rPr lang="en-US" sz="1800"/>
+              <a:t>The good news is git is powerful and the agents understand it.</a:t>
+            </a:r>
+          </a:p>
+          <a:p>
+            <a:pPr lvl="0"/>
+            <a:r>
+              <a:rPr lang="en-US" sz="1800"/>
+              <a:t>The bad news is the agents can indeed start using advanced features and get things wrong.</a:t>
+            </a:r>
+          </a:p>
+          <a:p>
+            <a:pPr lvl="0"/>
+            <a:r>
+              <a:rPr lang="en-US" sz="1800"/>
+              <a:t>I work with between 1 and 9 agents.</a:t>
+            </a:r>
+          </a:p>
+          <a:p>
+            <a:pPr lvl="0"/>
+            <a:r>
+              <a:rPr lang="en-US" sz="1800"/>
+              <a:t>One on veracity.</a:t>
+            </a:r>
+          </a:p>
+          <a:p>
+            <a:pPr lvl="0"/>
+            <a:r>
+              <a:rPr lang="en-US" sz="1800"/>
+              <a:t>One orchestrator, writing plans, prompts and controlling merges.</a:t>
+            </a:r>
+          </a:p>
+          <a:p>
+            <a:pPr lvl="0"/>
+            <a:r>
+              <a:rPr lang="en-US" sz="1800"/>
+              <a:t>1-8 on branches each working on different independent plans.</a:t>
+            </a:r>
+          </a:p>
+          <a:p>
+            <a:pPr lvl="0"/>
+            <a:r>
+              <a:rPr lang="en-US" sz="1800"/>
+              <a:t>I am not nearly comfortable enough with agent proof to let them do subagents without observing.</a:t>
+            </a:r>
+          </a:p>
+          <a:p>
+            <a:pPr lvl="0"/>
+            <a:r>
+              <a:rPr lang="en-US" sz="1800"/>
+              <a:t>Cursor was much better at interruption to guide things.</a:t>
+            </a:r>
+          </a:p>
+          <a:p>
+            <a:pPr lvl="0"/>
+            <a:r>
+              <a:rPr lang="en-US" sz="1800"/>
+              <a:t>Claude is getting better at it.</a:t>
             </a:r>
           </a:p>
         </p:txBody>
@@ -16475,7 +17229,7 @@
             </a:pPr>
             <a:r>
               <a:rPr lang="en-US" sz="3200"/>
-              <a:t>Software Engineering in AI Paired Proving- Problems</a:t>
+              <a:t>Software Engineering in AI Paired Proving- Models</a:t>
             </a:r>
           </a:p>
         </p:txBody>
@@ -16498,56 +17252,56 @@
             <a:pPr lvl="0"/>
             <a:r>
               <a:rPr lang="en-US" sz="1800"/>
-              <a:t>They are inconsistent.</a:t>
-            </a:r>
-          </a:p>
-          <a:p>
-            <a:pPr lvl="0"/>
-            <a:r>
-              <a:rPr lang="en-US" sz="1800"/>
-              <a:t>They lie.</a:t>
-            </a:r>
-          </a:p>
-          <a:p>
-            <a:pPr lvl="0"/>
-            <a:r>
-              <a:rPr lang="en-US" sz="1800"/>
-              <a:t>They cheat.</a:t>
-            </a:r>
-          </a:p>
-          <a:p>
-            <a:pPr lvl="0"/>
-            <a:r>
-              <a:rPr lang="en-US" sz="1800"/>
-              <a:t>They say I can’t prove that!</a:t>
-            </a:r>
-          </a:p>
-          <a:p>
-            <a:pPr lvl="0"/>
-            <a:r>
-              <a:rPr lang="en-US" sz="1800"/>
-              <a:t>They err.</a:t>
-            </a:r>
-          </a:p>
-          <a:p>
-            <a:pPr lvl="0"/>
-            <a:r>
-              <a:rPr lang="en-US" sz="1800"/>
-              <a:t>But mostly they are just forgetful.</a:t>
-            </a:r>
-          </a:p>
-          <a:p>
-            <a:pPr lvl="0"/>
-            <a:r>
-              <a:rPr lang="en-US" sz="1800"/>
-              <a:t>My attempts to give them coding standard checklists, ala Watts Humphrey and the PSP failed.</a:t>
-            </a:r>
-          </a:p>
-          <a:p>
-            <a:pPr lvl="0"/>
-            <a:r>
-              <a:rPr lang="en-US" sz="1800"/>
-              <a:t>Sometimes they would say “The checklist was followed” and then admit “I lied.”</a:t>
+              <a:t>The agents I used are: various Google, OpenAI and Anthropic.</a:t>
+            </a:r>
+          </a:p>
+          <a:p>
+            <a:pPr lvl="0"/>
+            <a:r>
+              <a:rPr lang="en-US" sz="1800"/>
+              <a:t>A google agent once took 12 minutes to ‘echo HI’ to test it’s terminal.</a:t>
+            </a:r>
+          </a:p>
+          <a:p>
+            <a:pPr lvl="0"/>
+            <a:r>
+              <a:rPr lang="en-US" sz="1800"/>
+              <a:t>Anthropics models are signficantly better than OpenAI.</a:t>
+            </a:r>
+          </a:p>
+          <a:p>
+            <a:pPr lvl="0"/>
+            <a:r>
+              <a:rPr lang="en-US" sz="1800"/>
+              <a:t>And Claude Code’s cost is the least so far.</a:t>
+            </a:r>
+          </a:p>
+          <a:p>
+            <a:pPr lvl="0"/>
+            <a:r>
+              <a:rPr lang="en-US" sz="1800"/>
+              <a:t>They are said in the press to be spending $5000 per month per user.</a:t>
+            </a:r>
+          </a:p>
+          <a:p>
+            <a:pPr lvl="0"/>
+            <a:r>
+              <a:rPr lang="en-US" sz="1800"/>
+              <a:t>They are buying market share (what happened to Amazon’s buying market share phase?).</a:t>
+            </a:r>
+          </a:p>
+          <a:p>
+            <a:pPr lvl="0"/>
+            <a:r>
+              <a:rPr lang="en-US" sz="1800"/>
+              <a:t>And they are buying coding interactions.</a:t>
+            </a:r>
+          </a:p>
+          <a:p>
+            <a:pPr lvl="0"/>
+            <a:r>
+              <a:rPr lang="en-US" sz="1800"/>
+              <a:t>But both vendors are playing leap frog.</a:t>
             </a:r>
           </a:p>
         </p:txBody>
@@ -16617,49 +17371,56 @@
             <a:pPr lvl="0"/>
             <a:r>
               <a:rPr lang="en-US" sz="1800"/>
-              <a:t>They are getting better, very few code hallucinations.</a:t>
-            </a:r>
-          </a:p>
-          <a:p>
-            <a:pPr lvl="0"/>
-            <a:r>
-              <a:rPr lang="en-US" sz="1800"/>
-              <a:t>If you tell them you are Dr. FunkenProof and they are Igor, they hallucinate whole modules.</a:t>
-            </a:r>
-          </a:p>
-          <a:p>
-            <a:pPr lvl="0"/>
-            <a:r>
-              <a:rPr lang="en-US" sz="1800"/>
-              <a:t>Just a few months ago only Claude could sweep a codebase decently.</a:t>
-            </a:r>
-          </a:p>
-          <a:p>
-            <a:pPr lvl="0"/>
-            <a:r>
-              <a:rPr lang="en-US" sz="1800"/>
-              <a:t>Now both Claude and OpenAI can.</a:t>
-            </a:r>
-          </a:p>
-          <a:p>
-            <a:pPr lvl="0"/>
-            <a:r>
-              <a:rPr lang="en-US" sz="1800"/>
-              <a:t>And now they can prove like heck.</a:t>
-            </a:r>
-          </a:p>
-          <a:p>
-            <a:pPr lvl="0"/>
-            <a:r>
-              <a:rPr lang="en-US" sz="1800"/>
-              <a:t>10x what I can do.</a:t>
-            </a:r>
-          </a:p>
-          <a:p>
-            <a:pPr lvl="0"/>
-            <a:r>
-              <a:rPr lang="en-US" sz="1800"/>
-              <a:t>Claude wants $25 per code review now, probably because they can and it’s expensive if they’re using pure LLMs.</a:t>
+              <a:t>They are inconsistent.</a:t>
+            </a:r>
+          </a:p>
+          <a:p>
+            <a:pPr lvl="0"/>
+            <a:r>
+              <a:rPr lang="en-US" sz="1800"/>
+              <a:t>They lie.</a:t>
+            </a:r>
+          </a:p>
+          <a:p>
+            <a:pPr lvl="0"/>
+            <a:r>
+              <a:rPr lang="en-US" sz="1800"/>
+              <a:t>They cheat.</a:t>
+            </a:r>
+          </a:p>
+          <a:p>
+            <a:pPr lvl="0"/>
+            <a:r>
+              <a:rPr lang="en-US" sz="1800"/>
+              <a:t>They say I can’t prove that!</a:t>
+            </a:r>
+          </a:p>
+          <a:p>
+            <a:pPr lvl="0"/>
+            <a:r>
+              <a:rPr lang="en-US" sz="1800"/>
+              <a:t>They err.</a:t>
+            </a:r>
+          </a:p>
+          <a:p>
+            <a:pPr lvl="0"/>
+            <a:r>
+              <a:rPr lang="en-US" sz="1800"/>
+              <a:t>But mostly they are just forgetful.</a:t>
+            </a:r>
+          </a:p>
+          <a:p>
+            <a:pPr lvl="0"/>
+            <a:r>
+              <a:rPr lang="en-US" sz="1800"/>
+              <a:t>My attempts to give them coding standard checklists, ala Watts Humphrey and the PSP failed.</a:t>
+            </a:r>
+          </a:p>
+          <a:p>
+            <a:pPr lvl="0"/>
+            <a:r>
+              <a:rPr lang="en-US" sz="1800"/>
+              <a:t>Sometimes they would say “The checklist was followed” and then admit “I lied.”</a:t>
             </a:r>
           </a:p>
         </p:txBody>
@@ -16729,78 +17490,49 @@
             <a:pPr lvl="0"/>
             <a:r>
               <a:rPr lang="en-US" sz="1800"/>
-              <a:t>What is the limiting factor now? </a:t>
-            </a:r>
-            <a:r>
-              <a:rPr lang="en-US" sz="1800" b="1"/>
-              <a:t>Code Review!</a:t>
-            </a:r>
-          </a:p>
-          <a:p>
-            <a:pPr lvl="0"/>
-            <a:r>
-              <a:rPr lang="en-US" sz="1800"/>
-              <a:t>But really </a:t>
-            </a:r>
-            <a:r>
-              <a:rPr lang="en-US" sz="1800" b="1"/>
-              <a:t>Spec Review</a:t>
-            </a:r>
-            <a:r>
-              <a:rPr lang="en-US" sz="1800"/>
-              <a:t> when you prove.</a:t>
-            </a:r>
-          </a:p>
-          <a:p>
-            <a:pPr lvl="0"/>
-            <a:r>
-              <a:rPr lang="en-US" sz="1800"/>
-              <a:t>What can we do to simplify code review?</a:t>
-            </a:r>
-          </a:p>
-          <a:p>
-            <a:pPr lvl="0" indent="-342900" marL="342900">
-              <a:buAutoNum type="arabicPeriod"/>
-            </a:pPr>
-            <a:r>
-              <a:rPr lang="en-US" sz="1800"/>
-              <a:t>Modularity - traits/impls in Verus.</a:t>
-            </a:r>
-          </a:p>
-          <a:p>
-            <a:pPr lvl="0" indent="-342900" marL="342900">
-              <a:buAutoNum startAt="2" type="arabicPeriod"/>
-            </a:pPr>
-            <a:r>
-              <a:rPr lang="en-US" sz="1800"/>
-              <a:t>TOC - This organizes the boilerplate to make reading easier.</a:t>
-            </a:r>
-          </a:p>
-          <a:p>
-            <a:pPr lvl="0" indent="-342900" marL="342900">
-              <a:buAutoNum startAt="3" type="arabicPeriod"/>
-            </a:pPr>
-            <a:r>
-              <a:rPr lang="en-US" sz="1800"/>
-              <a:t>Proof - I really just read the specs. If they’re right the code is right!</a:t>
-            </a:r>
-          </a:p>
-          <a:p>
-            <a:pPr lvl="0" indent="-342900" marL="342900">
-              <a:buAutoNum startAt="4" type="arabicPeriod"/>
-            </a:pPr>
-            <a:r>
-              <a:rPr lang="en-US" sz="1800"/>
-              <a:t>Tests - are hugely useful when you don’t trust your coding team.</a:t>
-            </a:r>
-          </a:p>
-          <a:p>
-            <a:pPr lvl="0" indent="-342900" marL="342900">
-              <a:buAutoNum startAt="5" type="arabicPeriod"/>
-            </a:pPr>
-            <a:r>
-              <a:rPr lang="en-US" sz="1800"/>
-              <a:t>Formatting - rust formatting has been adopted in Verus. It is very low density. I built a minimizing formatter to cut down on my working memory load while reviewing. F* is much tighter.</a:t>
+              <a:t>They are getting better, very few code hallucinations.</a:t>
+            </a:r>
+          </a:p>
+          <a:p>
+            <a:pPr lvl="0"/>
+            <a:r>
+              <a:rPr lang="en-US" sz="1800"/>
+              <a:t>If you tell them you are Dr. FunkenProof and they are Igor, they hallucinate whole modules.</a:t>
+            </a:r>
+          </a:p>
+          <a:p>
+            <a:pPr lvl="0"/>
+            <a:r>
+              <a:rPr lang="en-US" sz="1800"/>
+              <a:t>Just a few months ago only Claude could sweep a codebase decently.</a:t>
+            </a:r>
+          </a:p>
+          <a:p>
+            <a:pPr lvl="0"/>
+            <a:r>
+              <a:rPr lang="en-US" sz="1800"/>
+              <a:t>Now both Claude and OpenAI can.</a:t>
+            </a:r>
+          </a:p>
+          <a:p>
+            <a:pPr lvl="0"/>
+            <a:r>
+              <a:rPr lang="en-US" sz="1800"/>
+              <a:t>And now they can prove like heck.</a:t>
+            </a:r>
+          </a:p>
+          <a:p>
+            <a:pPr lvl="0"/>
+            <a:r>
+              <a:rPr lang="en-US" sz="1800"/>
+              <a:t>10x what I can do.</a:t>
+            </a:r>
+          </a:p>
+          <a:p>
+            <a:pPr lvl="0"/>
+            <a:r>
+              <a:rPr lang="en-US" sz="1800"/>
+              <a:t>Claude wants $25 per code review now, probably because they can and it’s expensive if they’re using pure LLMs.</a:t>
             </a:r>
           </a:p>
         </p:txBody>
@@ -16847,7 +17579,7 @@
             </a:pPr>
             <a:r>
               <a:rPr lang="en-US" sz="3200"/>
-              <a:t>The AI Paired Programming Interfaces</a:t>
+              <a:t>Software Engineering in AI Paired Proving- Problems</a:t>
             </a:r>
           </a:p>
         </p:txBody>
@@ -16870,49 +17602,78 @@
             <a:pPr lvl="0"/>
             <a:r>
               <a:rPr lang="en-US" sz="1800"/>
-              <a:t>What you want is pretty obvious with experience: TEXT still rules.</a:t>
-            </a:r>
-          </a:p>
-          <a:p>
-            <a:pPr lvl="0"/>
-            <a:r>
-              <a:rPr lang="en-US" sz="1800"/>
-              <a:t>You want one window with your core interaction. The agent tells you what it is doing in it.</a:t>
-            </a:r>
-          </a:p>
-          <a:p>
-            <a:pPr lvl="0"/>
-            <a:r>
-              <a:rPr lang="en-US" sz="1800"/>
-              <a:t>You want one to watch your compile, tests and scripts.</a:t>
-            </a:r>
-          </a:p>
-          <a:p>
-            <a:pPr lvl="0"/>
-            <a:r>
-              <a:rPr lang="en-US" sz="1800"/>
-              <a:t>You want one window to have the LLM show you it’s thinking and allow you to question and change it.</a:t>
-            </a:r>
-          </a:p>
-          <a:p>
-            <a:pPr lvl="0"/>
-            <a:r>
-              <a:rPr lang="en-US" sz="1800"/>
-              <a:t>I learned a ton from watching agents think.</a:t>
-            </a:r>
-          </a:p>
-          <a:p>
-            <a:pPr lvl="0"/>
-            <a:r>
-              <a:rPr lang="en-US" sz="1800"/>
-              <a:t>I suspect they are hiding most of their thinking now to prevent them from being used to train new AIs.</a:t>
-            </a:r>
-          </a:p>
-          <a:p>
-            <a:pPr lvl="0"/>
-            <a:r>
-              <a:rPr lang="en-US" sz="1800"/>
-              <a:t>And you want it not to delete your previous conversation on token compression.</a:t>
+              <a:t>What is the limiting factor now? </a:t>
+            </a:r>
+            <a:r>
+              <a:rPr lang="en-US" sz="1800" b="1"/>
+              <a:t>Code Review!</a:t>
+            </a:r>
+          </a:p>
+          <a:p>
+            <a:pPr lvl="0"/>
+            <a:r>
+              <a:rPr lang="en-US" sz="1800"/>
+              <a:t>But really </a:t>
+            </a:r>
+            <a:r>
+              <a:rPr lang="en-US" sz="1800" b="1"/>
+              <a:t>Spec Review</a:t>
+            </a:r>
+            <a:r>
+              <a:rPr lang="en-US" sz="1800"/>
+              <a:t> when you prove.</a:t>
+            </a:r>
+          </a:p>
+          <a:p>
+            <a:pPr lvl="0"/>
+            <a:r>
+              <a:rPr lang="en-US" sz="1800"/>
+              <a:t>What can we do to simplify code review?</a:t>
+            </a:r>
+          </a:p>
+          <a:p>
+            <a:pPr lvl="0" indent="-342900" marL="342900">
+              <a:buAutoNum type="arabicPeriod"/>
+            </a:pPr>
+            <a:r>
+              <a:rPr lang="en-US" sz="1800"/>
+              <a:t>Modularity - traits/impls in Verus.</a:t>
+            </a:r>
+          </a:p>
+          <a:p>
+            <a:pPr lvl="0" indent="-342900" marL="342900">
+              <a:buAutoNum startAt="2" type="arabicPeriod"/>
+            </a:pPr>
+            <a:r>
+              <a:rPr lang="en-US" sz="1800"/>
+              <a:t>TOC - This organizes the boilerplate to make reading easier.</a:t>
+            </a:r>
+          </a:p>
+          <a:p>
+            <a:pPr lvl="0" indent="-342900" marL="342900">
+              <a:buAutoNum startAt="3" type="arabicPeriod"/>
+            </a:pPr>
+            <a:r>
+              <a:rPr lang="en-US" sz="1800"/>
+              <a:t>Proof - I really just read the specs. If they’re right the code is right!</a:t>
+            </a:r>
+          </a:p>
+          <a:p>
+            <a:pPr lvl="0" indent="-342900" marL="342900">
+              <a:buAutoNum startAt="4" type="arabicPeriod"/>
+            </a:pPr>
+            <a:r>
+              <a:rPr lang="en-US" sz="1800"/>
+              <a:t>Tests - are hugely useful when you don’t trust your coding team.</a:t>
+            </a:r>
+          </a:p>
+          <a:p>
+            <a:pPr lvl="0" indent="-342900" marL="342900">
+              <a:buAutoNum startAt="5" type="arabicPeriod"/>
+            </a:pPr>
+            <a:r>
+              <a:rPr lang="en-US" sz="1800"/>
+              <a:t>Formatting - rust formatting has been adopted in Verus. It is very low density. I built a minimizing formatter to cut down on my working memory load while reviewing. F* is much tighter.</a:t>
             </a:r>
           </a:p>
         </p:txBody>
@@ -16959,355 +17720,76 @@
             </a:pPr>
             <a:r>
               <a:rPr lang="en-US" sz="3200"/>
-              <a:t>Mythos Audit Rust/Firefox</a:t>
-            </a:r>
-          </a:p>
-        </p:txBody>
-      </p:sp>
-      <p:graphicFrame>
-        <p:nvGraphicFramePr>
-          <p:cNvPr id="6" name="Content Placeholder 5"/>
-          <p:cNvGraphicFramePr>
-            <a:graphicFrameLocks noGrp="1"/>
-          </p:cNvGraphicFramePr>
+              <a:t>The AI Paired Programming Interfaces</a:t>
+            </a:r>
+          </a:p>
+        </p:txBody>
+      </p:sp>
+      <p:sp>
+        <p:nvSpPr>
+          <p:cNvPr id="3" name="Content Placeholder 2"/>
+          <p:cNvSpPr>
+            <a:spLocks noGrp="1"/>
+          </p:cNvSpPr>
           <p:nvPr>
             <p:ph idx="1"/>
           </p:nvPr>
-        </p:nvGraphicFramePr>
-        <p:xfrm>
-          <a:off x="457200" y="1193800"/>
-          <a:ext cx="8229600" cy="3390900"/>
-        </p:xfrm>
-        <a:graphic>
-          <a:graphicData uri="http://schemas.openxmlformats.org/drawingml/2006/table">
-            <a:tbl>
-              <a:tblPr firstRow="1" bandRow="1">
-                <a:tableStyleId>{5C22544A-7EE6-4342-B048-85BDC9FD1C3A}</a:tableStyleId>
-              </a:tblPr>
-              <a:tblGrid>
-                <a:gridCol w="330200"/>
-                <a:gridCol w="2552700"/>
-                <a:gridCol w="2336800"/>
-                <a:gridCol w="2997200"/>
-              </a:tblGrid>
-              <a:tr h="0">
-                <a:tc>
-                  <a:txBody>
-                    <a:bodyPr/>
-                    <a:lstStyle/>
-                    <a:p>
-                      <a:pPr lvl="0" indent="0" marL="0">
-                        <a:buNone/>
-                      </a:pPr>
-                      <a:r>
-                        <a:rPr/>
-                        <a:t>#</a:t>
-                      </a:r>
-                    </a:p>
-                  </a:txBody>
-                  <a:tcPr/>
-                </a:tc>
-                <a:tc>
-                  <a:txBody>
-                    <a:bodyPr/>
-                    <a:lstStyle/>
-                    <a:p>
-                      <a:pPr lvl="0" indent="0" marL="0">
-                        <a:buNone/>
-                      </a:pPr>
-                      <a:r>
-                        <a:rPr/>
-                        <a:t>Metric</a:t>
-                      </a:r>
-                    </a:p>
-                  </a:txBody>
-                  <a:tcPr/>
-                </a:tc>
-                <a:tc>
-                  <a:txBody>
-                    <a:bodyPr/>
-                    <a:lstStyle/>
-                    <a:p>
-                      <a:pPr lvl="0" indent="0" marL="0">
-                        <a:buNone/>
-                      </a:pPr>
-                      <a:r>
-                        <a:rPr/>
-                        <a:t>Rust (Compiler/Std)</a:t>
-                      </a:r>
-                    </a:p>
-                  </a:txBody>
-                  <a:tcPr/>
-                </a:tc>
-                <a:tc>
-                  <a:txBody>
-                    <a:bodyPr/>
-                    <a:lstStyle/>
-                    <a:p>
-                      <a:pPr lvl="0" indent="0" marL="0">
-                        <a:buNone/>
-                      </a:pPr>
-                      <a:r>
-                        <a:rPr/>
-                        <a:t>Firefox (Entire Codebase)</a:t>
-                      </a:r>
-                    </a:p>
-                  </a:txBody>
-                  <a:tcPr/>
-                </a:tc>
-              </a:tr>
-              <a:tr h="0">
-                <a:tc>
-                  <a:txBody>
-                    <a:bodyPr/>
-                    <a:lstStyle/>
-                    <a:p>
-                      <a:pPr lvl="0" indent="0" marL="0">
-                        <a:buNone/>
-                      </a:pPr>
-                      <a:r>
-                        <a:rPr/>
-                        <a:t>1</a:t>
-                      </a:r>
-                    </a:p>
-                  </a:txBody>
-                </a:tc>
-                <a:tc>
-                  <a:txBody>
-                    <a:bodyPr/>
-                    <a:lstStyle/>
-                    <a:p>
-                      <a:pPr lvl="0" indent="0" marL="0">
-                        <a:buNone/>
-                      </a:pPr>
-                      <a:r>
-                        <a:rPr/>
-                        <a:t>Codebase Size</a:t>
-                      </a:r>
-                    </a:p>
-                  </a:txBody>
-                </a:tc>
-                <a:tc>
-                  <a:txBody>
-                    <a:bodyPr/>
-                    <a:lstStyle/>
-                    <a:p>
-                      <a:pPr lvl="0" indent="0" marL="0">
-                        <a:buNone/>
-                      </a:pPr>
-                      <a:r>
-                        <a:rPr/>
-                        <a:t>~4,500 KLOC</a:t>
-                      </a:r>
-                    </a:p>
-                  </a:txBody>
-                </a:tc>
-                <a:tc>
-                  <a:txBody>
-                    <a:bodyPr/>
-                    <a:lstStyle/>
-                    <a:p>
-                      <a:pPr lvl="0" indent="0" marL="0">
-                        <a:buNone/>
-                      </a:pPr>
-                      <a:r>
-                        <a:rPr/>
-                        <a:t>~40,000 KLOC</a:t>
-                      </a:r>
-                    </a:p>
-                  </a:txBody>
-                </a:tc>
-              </a:tr>
-              <a:tr h="0">
-                <a:tc>
-                  <a:txBody>
-                    <a:bodyPr/>
-                    <a:lstStyle/>
-                    <a:p>
-                      <a:pPr lvl="0" indent="0" marL="0">
-                        <a:buNone/>
-                      </a:pPr>
-                      <a:r>
-                        <a:rPr/>
-                        <a:t>2</a:t>
-                      </a:r>
-                    </a:p>
-                  </a:txBody>
-                </a:tc>
-                <a:tc>
-                  <a:txBody>
-                    <a:bodyPr/>
-                    <a:lstStyle/>
-                    <a:p>
-                      <a:pPr lvl="0" indent="0" marL="0">
-                        <a:buNone/>
-                      </a:pPr>
-                      <a:r>
-                        <a:rPr/>
-                        <a:t>Mythos Bugs Found</a:t>
-                      </a:r>
-                    </a:p>
-                  </a:txBody>
-                </a:tc>
-                <a:tc>
-                  <a:txBody>
-                    <a:bodyPr/>
-                    <a:lstStyle/>
-                    <a:p>
-                      <a:pPr lvl="0" indent="0" marL="0">
-                        <a:buNone/>
-                      </a:pPr>
-                      <a:r>
-                        <a:rPr/>
-                        <a:t>189</a:t>
-                      </a:r>
-                    </a:p>
-                  </a:txBody>
-                </a:tc>
-                <a:tc>
-                  <a:txBody>
-                    <a:bodyPr/>
-                    <a:lstStyle/>
-                    <a:p>
-                      <a:pPr lvl="0" indent="0" marL="0">
-                        <a:buNone/>
-                      </a:pPr>
-                      <a:r>
-                        <a:rPr/>
-                        <a:t>271</a:t>
-                      </a:r>
-                    </a:p>
-                  </a:txBody>
-                </a:tc>
-              </a:tr>
-              <a:tr h="0">
-                <a:tc>
-                  <a:txBody>
-                    <a:bodyPr/>
-                    <a:lstStyle/>
-                    <a:p>
-                      <a:pPr lvl="0" indent="0" marL="0">
-                        <a:buNone/>
-                      </a:pPr>
-                      <a:r>
-                        <a:rPr/>
-                        <a:t>3</a:t>
-                      </a:r>
-                    </a:p>
-                  </a:txBody>
-                </a:tc>
-                <a:tc>
-                  <a:txBody>
-                    <a:bodyPr/>
-                    <a:lstStyle/>
-                    <a:p>
-                      <a:pPr lvl="0" indent="0" marL="0">
-                        <a:buNone/>
-                      </a:pPr>
-                      <a:r>
-                        <a:rPr/>
-                        <a:t>Vulnerability Density</a:t>
-                      </a:r>
-                    </a:p>
-                  </a:txBody>
-                </a:tc>
-                <a:tc>
-                  <a:txBody>
-                    <a:bodyPr/>
-                    <a:lstStyle/>
-                    <a:p>
-                      <a:pPr lvl="0" indent="0" marL="0">
-                        <a:buNone/>
-                      </a:pPr>
-                      <a:r>
-                        <a:rPr/>
-                        <a:t>0.0420 bugs/KLOC</a:t>
-                      </a:r>
-                    </a:p>
-                  </a:txBody>
-                </a:tc>
-                <a:tc>
-                  <a:txBody>
-                    <a:bodyPr/>
-                    <a:lstStyle/>
-                    <a:p>
-                      <a:pPr lvl="0" indent="0" marL="0">
-                        <a:buNone/>
-                      </a:pPr>
-                      <a:r>
-                        <a:rPr/>
-                        <a:t>0.0068 bugs/KLOC</a:t>
-                      </a:r>
-                    </a:p>
-                  </a:txBody>
-                </a:tc>
-              </a:tr>
-              <a:tr h="0">
-                <a:tc>
-                  <a:txBody>
-                    <a:bodyPr/>
-                    <a:lstStyle/>
-                    <a:p>
-                      <a:pPr lvl="0" indent="0" marL="0">
-                        <a:buNone/>
-                      </a:pPr>
-                      <a:r>
-                        <a:rPr/>
-                        <a:t>4</a:t>
-                      </a:r>
-                    </a:p>
-                  </a:txBody>
-                </a:tc>
-                <a:tc>
-                  <a:txBody>
-                    <a:bodyPr/>
-                    <a:lstStyle/>
-                    <a:p>
-                      <a:pPr lvl="0" indent="0" marL="0">
-                        <a:buNone/>
-                      </a:pPr>
-                      <a:r>
-                        <a:rPr/>
-                        <a:t>Ratio</a:t>
-                      </a:r>
-                    </a:p>
-                  </a:txBody>
-                </a:tc>
-                <a:tc>
-                  <a:txBody>
-                    <a:bodyPr/>
-                    <a:lstStyle/>
-                    <a:p>
-                      <a:pPr lvl="0" indent="0" marL="0">
-                        <a:buNone/>
-                      </a:pPr>
-                      <a:r>
-                        <a:rPr b="1"/>
-                        <a:t>6.18</a:t>
-                      </a:r>
-                    </a:p>
-                  </a:txBody>
-                </a:tc>
-                <a:tc>
-                  <a:txBody>
-                    <a:bodyPr/>
-                    <a:lstStyle/>
-                    <a:p>
-                      <a:pPr lvl="0" indent="0" marL="0">
-                        <a:buNone/>
-                      </a:pPr>
-                      <a:r>
-                        <a:rPr/>
-                        <a:t>1</a:t>
-                      </a:r>
-                    </a:p>
-                  </a:txBody>
-                </a:tc>
-              </a:tr>
-            </a:tbl>
-          </a:graphicData>
-        </a:graphic>
-      </p:graphicFrame>
+        </p:nvSpPr>
+        <p:spPr/>
+        <p:txBody>
+          <a:bodyPr/>
+          <a:lstStyle/>
+          <a:p>
+            <a:pPr lvl="0"/>
+            <a:r>
+              <a:rPr lang="en-US" sz="1800"/>
+              <a:t>What you want is pretty obvious with experience: TEXT still rules.</a:t>
+            </a:r>
+          </a:p>
+          <a:p>
+            <a:pPr lvl="0"/>
+            <a:r>
+              <a:rPr lang="en-US" sz="1800"/>
+              <a:t>You want one window with your core interaction. The agent tells you what it is doing in it.</a:t>
+            </a:r>
+          </a:p>
+          <a:p>
+            <a:pPr lvl="0"/>
+            <a:r>
+              <a:rPr lang="en-US" sz="1800"/>
+              <a:t>You want one to watch your compile, tests and scripts.</a:t>
+            </a:r>
+          </a:p>
+          <a:p>
+            <a:pPr lvl="0"/>
+            <a:r>
+              <a:rPr lang="en-US" sz="1800"/>
+              <a:t>You want one window to have the LLM show you it’s thinking and allow you to question and change it.</a:t>
+            </a:r>
+          </a:p>
+          <a:p>
+            <a:pPr lvl="0"/>
+            <a:r>
+              <a:rPr lang="en-US" sz="1800"/>
+              <a:t>I learned a ton from watching agents think.</a:t>
+            </a:r>
+          </a:p>
+          <a:p>
+            <a:pPr lvl="0"/>
+            <a:r>
+              <a:rPr lang="en-US" sz="1800"/>
+              <a:t>I suspect they are hiding most of their thinking now to prevent them from being used to train new AIs.</a:t>
+            </a:r>
+          </a:p>
+          <a:p>
+            <a:pPr lvl="0"/>
+            <a:r>
+              <a:rPr lang="en-US" sz="1800"/>
+              <a:t>And you want it not to delete your previous conversation on token compression.</a:t>
+            </a:r>
+          </a:p>
+        </p:txBody>
+      </p:sp>
     </p:spTree>
   </p:cSld>
 </p:sld>
@@ -17350,69 +17832,355 @@
             </a:pPr>
             <a:r>
               <a:rPr lang="en-US" sz="3200"/>
-              <a:t>The Internet Apocalypse</a:t>
-            </a:r>
-          </a:p>
-        </p:txBody>
-      </p:sp>
-      <p:sp>
-        <p:nvSpPr>
-          <p:cNvPr id="3" name="Content Placeholder 2"/>
-          <p:cNvSpPr>
-            <a:spLocks noGrp="1"/>
-          </p:cNvSpPr>
+              <a:t>Mythos Audit Rust/Firefox</a:t>
+            </a:r>
+          </a:p>
+        </p:txBody>
+      </p:sp>
+      <p:graphicFrame>
+        <p:nvGraphicFramePr>
+          <p:cNvPr id="6" name="Content Placeholder 5"/>
+          <p:cNvGraphicFramePr>
+            <a:graphicFrameLocks noGrp="1"/>
+          </p:cNvGraphicFramePr>
           <p:nvPr>
             <p:ph idx="1"/>
           </p:nvPr>
-        </p:nvSpPr>
-        <p:spPr/>
-        <p:txBody>
-          <a:bodyPr/>
-          <a:lstStyle/>
-          <a:p>
-            <a:pPr lvl="0"/>
-            <a:r>
-              <a:rPr lang="en-US" sz="1800"/>
-              <a:t>I asked Claude Code to check its switches on startup for me, at the End of Jan 2026.</a:t>
-            </a:r>
-          </a:p>
-          <a:p>
-            <a:pPr lvl="0"/>
-            <a:r>
-              <a:rPr lang="en-US" sz="1800"/>
-              <a:t>It immediately started disassembling itself.</a:t>
-            </a:r>
-          </a:p>
-          <a:p>
-            <a:pPr lvl="0"/>
-            <a:r>
-              <a:rPr lang="en-US" sz="1800"/>
-              <a:t>Scared the heck out of me.</a:t>
-            </a:r>
-          </a:p>
-          <a:p>
-            <a:pPr lvl="0"/>
-            <a:r>
-              <a:rPr lang="en-US" sz="1800"/>
-              <a:t>I told it to read it’s docs.</a:t>
-            </a:r>
-          </a:p>
-          <a:p>
-            <a:pPr lvl="0"/>
-            <a:r>
-              <a:rPr lang="en-US" sz="1800"/>
-              <a:t>I have 100% belief that these LLMs are moving faster than computer security.</a:t>
-            </a:r>
-          </a:p>
-          <a:p>
-            <a:pPr lvl="0"/>
-            <a:r>
-              <a:rPr lang="en-US" sz="1800"/>
-              <a:t>It’s verify or be hacked at this point.</a:t>
-            </a:r>
-          </a:p>
-        </p:txBody>
-      </p:sp>
+        </p:nvGraphicFramePr>
+        <p:xfrm>
+          <a:off x="457200" y="1193800"/>
+          <a:ext cx="8229600" cy="3390900"/>
+        </p:xfrm>
+        <a:graphic>
+          <a:graphicData uri="http://schemas.openxmlformats.org/drawingml/2006/table">
+            <a:tbl>
+              <a:tblPr firstRow="1" bandRow="1">
+                <a:tableStyleId>{5C22544A-7EE6-4342-B048-85BDC9FD1C3A}</a:tableStyleId>
+              </a:tblPr>
+              <a:tblGrid>
+                <a:gridCol w="330200"/>
+                <a:gridCol w="2552700"/>
+                <a:gridCol w="2336800"/>
+                <a:gridCol w="2997200"/>
+              </a:tblGrid>
+              <a:tr h="0">
+                <a:tc>
+                  <a:txBody>
+                    <a:bodyPr/>
+                    <a:lstStyle/>
+                    <a:p>
+                      <a:pPr lvl="0" indent="0" marL="0">
+                        <a:buNone/>
+                      </a:pPr>
+                      <a:r>
+                        <a:rPr/>
+                        <a:t>#</a:t>
+                      </a:r>
+                    </a:p>
+                  </a:txBody>
+                  <a:tcPr/>
+                </a:tc>
+                <a:tc>
+                  <a:txBody>
+                    <a:bodyPr/>
+                    <a:lstStyle/>
+                    <a:p>
+                      <a:pPr lvl="0" indent="0" marL="0">
+                        <a:buNone/>
+                      </a:pPr>
+                      <a:r>
+                        <a:rPr/>
+                        <a:t>Metric</a:t>
+                      </a:r>
+                    </a:p>
+                  </a:txBody>
+                  <a:tcPr/>
+                </a:tc>
+                <a:tc>
+                  <a:txBody>
+                    <a:bodyPr/>
+                    <a:lstStyle/>
+                    <a:p>
+                      <a:pPr lvl="0" indent="0" marL="0">
+                        <a:buNone/>
+                      </a:pPr>
+                      <a:r>
+                        <a:rPr/>
+                        <a:t>Rust (Compiler/Std)</a:t>
+                      </a:r>
+                    </a:p>
+                  </a:txBody>
+                  <a:tcPr/>
+                </a:tc>
+                <a:tc>
+                  <a:txBody>
+                    <a:bodyPr/>
+                    <a:lstStyle/>
+                    <a:p>
+                      <a:pPr lvl="0" indent="0" marL="0">
+                        <a:buNone/>
+                      </a:pPr>
+                      <a:r>
+                        <a:rPr/>
+                        <a:t>Firefox (Entire Codebase)</a:t>
+                      </a:r>
+                    </a:p>
+                  </a:txBody>
+                  <a:tcPr/>
+                </a:tc>
+              </a:tr>
+              <a:tr h="0">
+                <a:tc>
+                  <a:txBody>
+                    <a:bodyPr/>
+                    <a:lstStyle/>
+                    <a:p>
+                      <a:pPr lvl="0" indent="0" marL="0">
+                        <a:buNone/>
+                      </a:pPr>
+                      <a:r>
+                        <a:rPr/>
+                        <a:t>1</a:t>
+                      </a:r>
+                    </a:p>
+                  </a:txBody>
+                </a:tc>
+                <a:tc>
+                  <a:txBody>
+                    <a:bodyPr/>
+                    <a:lstStyle/>
+                    <a:p>
+                      <a:pPr lvl="0" indent="0" marL="0">
+                        <a:buNone/>
+                      </a:pPr>
+                      <a:r>
+                        <a:rPr/>
+                        <a:t>Codebase Size</a:t>
+                      </a:r>
+                    </a:p>
+                  </a:txBody>
+                </a:tc>
+                <a:tc>
+                  <a:txBody>
+                    <a:bodyPr/>
+                    <a:lstStyle/>
+                    <a:p>
+                      <a:pPr lvl="0" indent="0" marL="0">
+                        <a:buNone/>
+                      </a:pPr>
+                      <a:r>
+                        <a:rPr/>
+                        <a:t>~4,500 KLOC</a:t>
+                      </a:r>
+                    </a:p>
+                  </a:txBody>
+                </a:tc>
+                <a:tc>
+                  <a:txBody>
+                    <a:bodyPr/>
+                    <a:lstStyle/>
+                    <a:p>
+                      <a:pPr lvl="0" indent="0" marL="0">
+                        <a:buNone/>
+                      </a:pPr>
+                      <a:r>
+                        <a:rPr/>
+                        <a:t>~40,000 KLOC</a:t>
+                      </a:r>
+                    </a:p>
+                  </a:txBody>
+                </a:tc>
+              </a:tr>
+              <a:tr h="0">
+                <a:tc>
+                  <a:txBody>
+                    <a:bodyPr/>
+                    <a:lstStyle/>
+                    <a:p>
+                      <a:pPr lvl="0" indent="0" marL="0">
+                        <a:buNone/>
+                      </a:pPr>
+                      <a:r>
+                        <a:rPr/>
+                        <a:t>2</a:t>
+                      </a:r>
+                    </a:p>
+                  </a:txBody>
+                </a:tc>
+                <a:tc>
+                  <a:txBody>
+                    <a:bodyPr/>
+                    <a:lstStyle/>
+                    <a:p>
+                      <a:pPr lvl="0" indent="0" marL="0">
+                        <a:buNone/>
+                      </a:pPr>
+                      <a:r>
+                        <a:rPr/>
+                        <a:t>Mythos Bugs Found</a:t>
+                      </a:r>
+                    </a:p>
+                  </a:txBody>
+                </a:tc>
+                <a:tc>
+                  <a:txBody>
+                    <a:bodyPr/>
+                    <a:lstStyle/>
+                    <a:p>
+                      <a:pPr lvl="0" indent="0" marL="0">
+                        <a:buNone/>
+                      </a:pPr>
+                      <a:r>
+                        <a:rPr/>
+                        <a:t>189</a:t>
+                      </a:r>
+                    </a:p>
+                  </a:txBody>
+                </a:tc>
+                <a:tc>
+                  <a:txBody>
+                    <a:bodyPr/>
+                    <a:lstStyle/>
+                    <a:p>
+                      <a:pPr lvl="0" indent="0" marL="0">
+                        <a:buNone/>
+                      </a:pPr>
+                      <a:r>
+                        <a:rPr/>
+                        <a:t>271</a:t>
+                      </a:r>
+                    </a:p>
+                  </a:txBody>
+                </a:tc>
+              </a:tr>
+              <a:tr h="0">
+                <a:tc>
+                  <a:txBody>
+                    <a:bodyPr/>
+                    <a:lstStyle/>
+                    <a:p>
+                      <a:pPr lvl="0" indent="0" marL="0">
+                        <a:buNone/>
+                      </a:pPr>
+                      <a:r>
+                        <a:rPr/>
+                        <a:t>3</a:t>
+                      </a:r>
+                    </a:p>
+                  </a:txBody>
+                </a:tc>
+                <a:tc>
+                  <a:txBody>
+                    <a:bodyPr/>
+                    <a:lstStyle/>
+                    <a:p>
+                      <a:pPr lvl="0" indent="0" marL="0">
+                        <a:buNone/>
+                      </a:pPr>
+                      <a:r>
+                        <a:rPr/>
+                        <a:t>Vulnerability Density</a:t>
+                      </a:r>
+                    </a:p>
+                  </a:txBody>
+                </a:tc>
+                <a:tc>
+                  <a:txBody>
+                    <a:bodyPr/>
+                    <a:lstStyle/>
+                    <a:p>
+                      <a:pPr lvl="0" indent="0" marL="0">
+                        <a:buNone/>
+                      </a:pPr>
+                      <a:r>
+                        <a:rPr/>
+                        <a:t>0.0420 bugs/KLOC</a:t>
+                      </a:r>
+                    </a:p>
+                  </a:txBody>
+                </a:tc>
+                <a:tc>
+                  <a:txBody>
+                    <a:bodyPr/>
+                    <a:lstStyle/>
+                    <a:p>
+                      <a:pPr lvl="0" indent="0" marL="0">
+                        <a:buNone/>
+                      </a:pPr>
+                      <a:r>
+                        <a:rPr/>
+                        <a:t>0.0068 bugs/KLOC</a:t>
+                      </a:r>
+                    </a:p>
+                  </a:txBody>
+                </a:tc>
+              </a:tr>
+              <a:tr h="0">
+                <a:tc>
+                  <a:txBody>
+                    <a:bodyPr/>
+                    <a:lstStyle/>
+                    <a:p>
+                      <a:pPr lvl="0" indent="0" marL="0">
+                        <a:buNone/>
+                      </a:pPr>
+                      <a:r>
+                        <a:rPr/>
+                        <a:t>4</a:t>
+                      </a:r>
+                    </a:p>
+                  </a:txBody>
+                </a:tc>
+                <a:tc>
+                  <a:txBody>
+                    <a:bodyPr/>
+                    <a:lstStyle/>
+                    <a:p>
+                      <a:pPr lvl="0" indent="0" marL="0">
+                        <a:buNone/>
+                      </a:pPr>
+                      <a:r>
+                        <a:rPr/>
+                        <a:t>Ratio</a:t>
+                      </a:r>
+                    </a:p>
+                  </a:txBody>
+                </a:tc>
+                <a:tc>
+                  <a:txBody>
+                    <a:bodyPr/>
+                    <a:lstStyle/>
+                    <a:p>
+                      <a:pPr lvl="0" indent="0" marL="0">
+                        <a:buNone/>
+                      </a:pPr>
+                      <a:r>
+                        <a:rPr b="1"/>
+                        <a:t>6.18</a:t>
+                      </a:r>
+                    </a:p>
+                  </a:txBody>
+                </a:tc>
+                <a:tc>
+                  <a:txBody>
+                    <a:bodyPr/>
+                    <a:lstStyle/>
+                    <a:p>
+                      <a:pPr lvl="0" indent="0" marL="0">
+                        <a:buNone/>
+                      </a:pPr>
+                      <a:r>
+                        <a:rPr/>
+                        <a:t>1</a:t>
+                      </a:r>
+                    </a:p>
+                  </a:txBody>
+                </a:tc>
+              </a:tr>
+            </a:tbl>
+          </a:graphicData>
+        </a:graphic>
+      </p:graphicFrame>
     </p:spTree>
   </p:cSld>
 </p:sld>
@@ -17478,42 +18246,42 @@
             <a:pPr lvl="0"/>
             <a:r>
               <a:rPr lang="en-US" sz="1800"/>
-              <a:t>Where should we focus our limited, but quickly growing, proving power?</a:t>
-            </a:r>
-          </a:p>
-          <a:p>
-            <a:pPr lvl="0"/>
-            <a:r>
-              <a:rPr lang="en-US" sz="1800"/>
-              <a:t>In theory 70% of intrusions are solved by type safe languages.</a:t>
-            </a:r>
-          </a:p>
-          <a:p>
-            <a:pPr lvl="0"/>
-            <a:r>
-              <a:rPr lang="en-US" sz="1800"/>
-              <a:t>I suspect that this just ignores way too much of the human aspect.</a:t>
-            </a:r>
-          </a:p>
-          <a:p>
-            <a:pPr lvl="0"/>
-            <a:r>
-              <a:rPr lang="en-US" sz="1800"/>
-              <a:t>I have never liked a single estimation paper’s methods.</a:t>
-            </a:r>
-          </a:p>
-          <a:p>
-            <a:pPr lvl="0"/>
-            <a:r>
-              <a:rPr lang="en-US" sz="1800"/>
-              <a:t>One way to help us focus our new-found superpowers is to survey KLOC type-unsafe x Interfaces x Running Services x $ Value.</a:t>
-            </a:r>
-          </a:p>
-          <a:p>
-            <a:pPr lvl="0"/>
-            <a:r>
-              <a:rPr lang="en-US" sz="1800"/>
-              <a:t>Which Amazon and Microsoft can probably measure.</a:t>
+              <a:t>I asked Claude Code to check its switches on startup for me, at the End of Jan 2026.</a:t>
+            </a:r>
+          </a:p>
+          <a:p>
+            <a:pPr lvl="0"/>
+            <a:r>
+              <a:rPr lang="en-US" sz="1800"/>
+              <a:t>It immediately started disassembling itself.</a:t>
+            </a:r>
+          </a:p>
+          <a:p>
+            <a:pPr lvl="0"/>
+            <a:r>
+              <a:rPr lang="en-US" sz="1800"/>
+              <a:t>Scared the heck out of me.</a:t>
+            </a:r>
+          </a:p>
+          <a:p>
+            <a:pPr lvl="0"/>
+            <a:r>
+              <a:rPr lang="en-US" sz="1800"/>
+              <a:t>I told it to read it’s docs.</a:t>
+            </a:r>
+          </a:p>
+          <a:p>
+            <a:pPr lvl="0"/>
+            <a:r>
+              <a:rPr lang="en-US" sz="1800"/>
+              <a:t>I have 100% belief that these LLMs are moving faster than computer security.</a:t>
+            </a:r>
+          </a:p>
+          <a:p>
+            <a:pPr lvl="0"/>
+            <a:r>
+              <a:rPr lang="en-US" sz="1800"/>
+              <a:t>It’s verify or be hacked at this point.</a:t>
             </a:r>
           </a:p>
         </p:txBody>
@@ -17560,7 +18328,7 @@
             </a:pPr>
             <a:r>
               <a:rPr lang="en-US" sz="3200"/>
-              <a:t>Future Work</a:t>
+              <a:t>The Internet Apocalypse</a:t>
             </a:r>
           </a:p>
         </p:txBody>
@@ -17583,49 +18351,42 @@
             <a:pPr lvl="0"/>
             <a:r>
               <a:rPr lang="en-US" sz="1800"/>
-              <a:t>GRASE (Medical Acronym) -</a:t>
-            </a:r>
-          </a:p>
-          <a:p>
-            <a:pPr lvl="1"/>
-            <a:r>
-              <a:rPr lang="en-US" sz="1800"/>
-              <a:t>Generally Recognized as Safe and Effective</a:t>
-            </a:r>
-          </a:p>
-          <a:p>
-            <a:pPr lvl="0"/>
-            <a:r>
-              <a:rPr lang="en-US" sz="1800" b="1"/>
-              <a:t>GRASE-</a:t>
-            </a:r>
-          </a:p>
-          <a:p>
-            <a:pPr lvl="1"/>
-            <a:r>
-              <a:rPr lang="en-US" sz="1800" b="1"/>
-              <a:t>Git Recording Agentic Software Engineering</a:t>
-            </a:r>
-          </a:p>
-          <a:p>
-            <a:pPr lvl="0"/>
-            <a:r>
-              <a:rPr lang="en-US" sz="1800"/>
-              <a:t>The GRASE project’s goal is to make statistical process software optimization for agentic coding:</a:t>
-            </a:r>
-          </a:p>
-          <a:p>
-            <a:pPr lvl="1"/>
-            <a:r>
-              <a:rPr lang="en-US" sz="1800" b="1"/>
-              <a:t>Generally Regarded As Simple and Effective.</a:t>
-            </a:r>
-          </a:p>
-          <a:p>
-            <a:pPr lvl="0"/>
-            <a:r>
-              <a:rPr lang="en-US" sz="1800"/>
-              <a:t>A Watt’s Humphrey style PSP data collection done essentially effortlessly by the agents in the background.</a:t>
+              <a:t>Where should we focus our limited, but quickly growing, proving power?</a:t>
+            </a:r>
+          </a:p>
+          <a:p>
+            <a:pPr lvl="0"/>
+            <a:r>
+              <a:rPr lang="en-US" sz="1800"/>
+              <a:t>In theory 70% of intrusions are solved by type safe languages.</a:t>
+            </a:r>
+          </a:p>
+          <a:p>
+            <a:pPr lvl="0"/>
+            <a:r>
+              <a:rPr lang="en-US" sz="1800"/>
+              <a:t>I suspect that this just ignores way too much of the human aspect.</a:t>
+            </a:r>
+          </a:p>
+          <a:p>
+            <a:pPr lvl="0"/>
+            <a:r>
+              <a:rPr lang="en-US" sz="1800"/>
+              <a:t>I have never liked a single estimation paper’s methods.</a:t>
+            </a:r>
+          </a:p>
+          <a:p>
+            <a:pPr lvl="0"/>
+            <a:r>
+              <a:rPr lang="en-US" sz="1800"/>
+              <a:t>One way to help us focus our new-found superpowers is to survey KLOC type-unsafe x Interfaces x Running Services x $ Value.</a:t>
+            </a:r>
+          </a:p>
+          <a:p>
+            <a:pPr lvl="0"/>
+            <a:r>
+              <a:rPr lang="en-US" sz="1800"/>
+              <a:t>Which Amazon and Microsoft can probably measure.</a:t>
             </a:r>
           </a:p>
         </p:txBody>
@@ -17672,7 +18433,7 @@
             </a:pPr>
             <a:r>
               <a:rPr lang="en-US" sz="3200"/>
-              <a:t>Review of the Talk</a:t>
+              <a:t>Future Work</a:t>
             </a:r>
           </a:p>
         </p:txBody>
@@ -17695,14 +18456,49 @@
             <a:pPr lvl="0"/>
             <a:r>
               <a:rPr lang="en-US" sz="1800"/>
-              <a:t>Ah let’s just get to the questions!</a:t>
-            </a:r>
-          </a:p>
-          <a:p>
-            <a:pPr lvl="0"/>
-            <a:r>
-              <a:rPr lang="en-US" sz="1800"/>
-              <a:t>I have a ton of them for you! and I hope you have many for me.</a:t>
+              <a:t>GRASE (Medical Acronym) -</a:t>
+            </a:r>
+          </a:p>
+          <a:p>
+            <a:pPr lvl="1"/>
+            <a:r>
+              <a:rPr lang="en-US" sz="1800"/>
+              <a:t>Generally Recognized as Safe and Effective</a:t>
+            </a:r>
+          </a:p>
+          <a:p>
+            <a:pPr lvl="0"/>
+            <a:r>
+              <a:rPr lang="en-US" sz="1800" b="1"/>
+              <a:t>GRASE-</a:t>
+            </a:r>
+          </a:p>
+          <a:p>
+            <a:pPr lvl="1"/>
+            <a:r>
+              <a:rPr lang="en-US" sz="1800" b="1"/>
+              <a:t>Git Recording Agentic Software Engineering</a:t>
+            </a:r>
+          </a:p>
+          <a:p>
+            <a:pPr lvl="0"/>
+            <a:r>
+              <a:rPr lang="en-US" sz="1800"/>
+              <a:t>The GRASE project’s goal is to make statistical process software optimization for agentic coding:</a:t>
+            </a:r>
+          </a:p>
+          <a:p>
+            <a:pPr lvl="1"/>
+            <a:r>
+              <a:rPr lang="en-US" sz="1800" b="1"/>
+              <a:t>Generally Regarded As Simple and Effective.</a:t>
+            </a:r>
+          </a:p>
+          <a:p>
+            <a:pPr lvl="0"/>
+            <a:r>
+              <a:rPr lang="en-US" sz="1800"/>
+              <a:t>A Watt’s Humphrey style PSP data collection done essentially effortlessly by the agents in the background.</a:t>
             </a:r>
           </a:p>
         </p:txBody>
@@ -17854,7 +18650,37 @@
             </a:pPr>
             <a:r>
               <a:rPr lang="en-US" sz="3200"/>
-              <a:t>Extra Slides</a:t>
+              <a:t>Review of the Talk</a:t>
+            </a:r>
+          </a:p>
+        </p:txBody>
+      </p:sp>
+      <p:sp>
+        <p:nvSpPr>
+          <p:cNvPr id="3" name="Content Placeholder 2"/>
+          <p:cNvSpPr>
+            <a:spLocks noGrp="1"/>
+          </p:cNvSpPr>
+          <p:nvPr>
+            <p:ph idx="1"/>
+          </p:nvPr>
+        </p:nvSpPr>
+        <p:spPr/>
+        <p:txBody>
+          <a:bodyPr/>
+          <a:lstStyle/>
+          <a:p>
+            <a:pPr lvl="0"/>
+            <a:r>
+              <a:rPr lang="en-US" sz="1800"/>
+              <a:t>Ah let’s just get to the questions!</a:t>
+            </a:r>
+          </a:p>
+          <a:p>
+            <a:pPr lvl="0"/>
+            <a:r>
+              <a:rPr lang="en-US" sz="1800"/>
+              <a:t>I have a ton of them for you! and I hope you have many for me.</a:t>
             </a:r>
           </a:p>
         </p:txBody>
@@ -17901,86 +18727,7 @@
             </a:pPr>
             <a:r>
               <a:rPr lang="en-US" sz="3200"/>
-              <a:t>AI Paired Programming Size: Quick Review</a:t>
-            </a:r>
-          </a:p>
-        </p:txBody>
-      </p:sp>
-      <p:sp>
-        <p:nvSpPr>
-          <p:cNvPr id="3" name="Content Placeholder 2"/>
-          <p:cNvSpPr>
-            <a:spLocks noGrp="1"/>
-          </p:cNvSpPr>
-          <p:nvPr>
-            <p:ph idx="1"/>
-          </p:nvPr>
-        </p:nvSpPr>
-        <p:spPr/>
-        <p:txBody>
-          <a:bodyPr/>
-          <a:lstStyle/>
-          <a:p>
-            <a:pPr lvl="0"/>
-            <a:r>
-              <a:rPr lang="en-US" sz="1800"/>
-              <a:t>APAS-AI Lines of Code</a:t>
-            </a:r>
-          </a:p>
-          <a:p>
-            <a:pPr lvl="1"/>
-            <a:r>
-              <a:rPr lang="en-US" sz="1800"/>
-              <a:t>Source: 31,751</a:t>
-            </a:r>
-          </a:p>
-          <a:p>
-            <a:pPr lvl="1"/>
-            <a:r>
-              <a:rPr lang="en-US" sz="1800"/>
-              <a:t>Tests: 55,223</a:t>
-            </a:r>
-          </a:p>
-          <a:p>
-            <a:pPr lvl="1"/>
-            <a:r>
-              <a:rPr lang="en-US" sz="1800"/>
-              <a:t>Benches: 13,890</a:t>
-            </a:r>
-          </a:p>
-          <a:p>
-            <a:pPr lvl="1"/>
-            <a:r>
-              <a:rPr lang="en-US" sz="1800"/>
-              <a:t>Total code: 100,864</a:t>
-            </a:r>
-          </a:p>
-          <a:p>
-            <a:pPr lvl="0"/>
-            <a:r>
-              <a:rPr lang="en-US" sz="1800"/>
-              <a:t>Rusticate Lines of Code</a:t>
-            </a:r>
-          </a:p>
-          <a:p>
-            <a:pPr lvl="1"/>
-            <a:r>
-              <a:rPr lang="en-US" sz="1800"/>
-              <a:t>Source: 29,582</a:t>
-            </a:r>
-          </a:p>
-          <a:p>
-            <a:pPr lvl="1"/>
-            <a:r>
-              <a:rPr lang="en-US" sz="1800"/>
-              <a:t>Tests: 12,890</a:t>
-            </a:r>
-          </a:p>
-          <a:p>
-            <a:pPr lvl="1"/>
-            <a:r>
-              <a:rPr lang="en-US" sz="1800"/>
-              <a:t>Total code: 42,472</a:t>
+              <a:t>Extra Slides</a:t>
             </a:r>
           </a:p>
         </p:txBody>
@@ -18027,7 +18774,7 @@
             </a:pPr>
             <a:r>
               <a:rPr lang="en-US" sz="3200"/>
-              <a:t>AI Paired Proving Size: Quick Review</a:t>
+              <a:t>AI Paired Programming Size: Quick Review</a:t>
             </a:r>
           </a:p>
         </p:txBody>
@@ -18050,70 +18797,63 @@
             <a:pPr lvl="0"/>
             <a:r>
               <a:rPr lang="en-US" sz="1800"/>
-              <a:t>APAS-VERUS Lines of Code</a:t>
+              <a:t>APAS-AI Lines of Code</a:t>
             </a:r>
           </a:p>
           <a:p>
             <a:pPr lvl="1"/>
             <a:r>
               <a:rPr lang="en-US" sz="1800"/>
-              <a:t>Source: 229,319</a:t>
+              <a:t>Source: 31,751</a:t>
             </a:r>
           </a:p>
           <a:p>
             <a:pPr lvl="1"/>
             <a:r>
               <a:rPr lang="en-US" sz="1800"/>
-              <a:t>Tests (RTT): 58,503</a:t>
+              <a:t>Tests: 55,223</a:t>
             </a:r>
           </a:p>
           <a:p>
             <a:pPr lvl="1"/>
             <a:r>
               <a:rPr lang="en-US" sz="1800"/>
-              <a:t>PTTs (rust_verify_test): 15,938</a:t>
+              <a:t>Benches: 13,890</a:t>
             </a:r>
           </a:p>
           <a:p>
             <a:pPr lvl="1"/>
             <a:r>
               <a:rPr lang="en-US" sz="1800"/>
-              <a:t>Benches: 8,027</a:t>
+              <a:t>Total code: 100,864</a:t>
+            </a:r>
+          </a:p>
+          <a:p>
+            <a:pPr lvl="0"/>
+            <a:r>
+              <a:rPr lang="en-US" sz="1800"/>
+              <a:t>Rusticate Lines of Code</a:t>
             </a:r>
           </a:p>
           <a:p>
             <a:pPr lvl="1"/>
             <a:r>
               <a:rPr lang="en-US" sz="1800"/>
-              <a:t>Total code: 311,787</a:t>
-            </a:r>
-          </a:p>
-          <a:p>
-            <a:pPr lvl="0"/>
-            <a:r>
-              <a:rPr lang="en-US" sz="1800"/>
-              <a:t>Veracity Lines of Code</a:t>
+              <a:t>Source: 29,582</a:t>
             </a:r>
           </a:p>
           <a:p>
             <a:pPr lvl="1"/>
             <a:r>
               <a:rPr lang="en-US" sz="1800"/>
-              <a:t>Source: 65,189</a:t>
+              <a:t>Tests: 12,890</a:t>
             </a:r>
           </a:p>
           <a:p>
             <a:pPr lvl="1"/>
             <a:r>
               <a:rPr lang="en-US" sz="1800"/>
-              <a:t>Tests: 2,851</a:t>
-            </a:r>
-          </a:p>
-          <a:p>
-            <a:pPr lvl="1"/>
-            <a:r>
-              <a:rPr lang="en-US" sz="1800"/>
-              <a:t>Total code: 68,040</a:t>
+              <a:t>Total code: 42,472</a:t>
             </a:r>
           </a:p>
         </p:txBody>
@@ -18160,7 +18900,7 @@
             </a:pPr>
             <a:r>
               <a:rPr lang="en-US" sz="3200"/>
-              <a:t>Blood on the Road - Open Source =</a:t>
+              <a:t>AI Paired Proving Size: Quick Review</a:t>
             </a:r>
           </a:p>
         </p:txBody>
@@ -18183,21 +18923,70 @@
             <a:pPr lvl="0"/>
             <a:r>
               <a:rPr lang="en-US" sz="1800"/>
-              <a:t>Open Source is now Open Copy.</a:t>
-            </a:r>
-          </a:p>
-          <a:p>
-            <a:pPr lvl="0"/>
-            <a:r>
-              <a:rPr lang="en-US" sz="1800"/>
-              <a:t>with reports of 1/2 of AI time</a:t>
-            </a:r>
-          </a:p>
-          <a:p>
-            <a:pPr lvl="0"/>
-            <a:r>
-              <a:rPr lang="en-US" sz="1800"/>
-              <a:t>and with the US Government totally undermining copyright law.</a:t>
+              <a:t>APAS-VERUS Lines of Code</a:t>
+            </a:r>
+          </a:p>
+          <a:p>
+            <a:pPr lvl="1"/>
+            <a:r>
+              <a:rPr lang="en-US" sz="1800"/>
+              <a:t>Source: 229,319</a:t>
+            </a:r>
+          </a:p>
+          <a:p>
+            <a:pPr lvl="1"/>
+            <a:r>
+              <a:rPr lang="en-US" sz="1800"/>
+              <a:t>Tests (RTT): 58,503</a:t>
+            </a:r>
+          </a:p>
+          <a:p>
+            <a:pPr lvl="1"/>
+            <a:r>
+              <a:rPr lang="en-US" sz="1800"/>
+              <a:t>PTTs (rust_verify_test): 15,938</a:t>
+            </a:r>
+          </a:p>
+          <a:p>
+            <a:pPr lvl="1"/>
+            <a:r>
+              <a:rPr lang="en-US" sz="1800"/>
+              <a:t>Benches: 8,027</a:t>
+            </a:r>
+          </a:p>
+          <a:p>
+            <a:pPr lvl="1"/>
+            <a:r>
+              <a:rPr lang="en-US" sz="1800"/>
+              <a:t>Total code: 311,787</a:t>
+            </a:r>
+          </a:p>
+          <a:p>
+            <a:pPr lvl="0"/>
+            <a:r>
+              <a:rPr lang="en-US" sz="1800"/>
+              <a:t>Veracity Lines of Code</a:t>
+            </a:r>
+          </a:p>
+          <a:p>
+            <a:pPr lvl="1"/>
+            <a:r>
+              <a:rPr lang="en-US" sz="1800"/>
+              <a:t>Source: 65,189</a:t>
+            </a:r>
+          </a:p>
+          <a:p>
+            <a:pPr lvl="1"/>
+            <a:r>
+              <a:rPr lang="en-US" sz="1800"/>
+              <a:t>Tests: 2,851</a:t>
+            </a:r>
+          </a:p>
+          <a:p>
+            <a:pPr lvl="1"/>
+            <a:r>
+              <a:rPr lang="en-US" sz="1800"/>
+              <a:t>Total code: 68,040</a:t>
             </a:r>
           </a:p>
         </p:txBody>
@@ -18244,7 +19033,7 @@
             </a:pPr>
             <a:r>
               <a:rPr lang="en-US" sz="3200"/>
-              <a:t>Blood on the Road - Open Repositories =</a:t>
+              <a:t>Blood on the Road - Open Source =</a:t>
             </a:r>
           </a:p>
         </p:txBody>
@@ -18267,42 +19056,21 @@
             <a:pPr lvl="0"/>
             <a:r>
               <a:rPr lang="en-US" sz="1800"/>
-              <a:t>Open repositories are now weakly locked doors.</a:t>
-            </a:r>
-          </a:p>
-          <a:p>
-            <a:pPr lvl="0"/>
-            <a:r>
-              <a:rPr lang="en-US" sz="1800"/>
-              <a:t>Agents can and have been used to inject invisble UNICODE attacks.</a:t>
-            </a:r>
-          </a:p>
-          <a:p>
-            <a:pPr lvl="0"/>
-            <a:r>
-              <a:rPr lang="en-US" sz="1800"/>
-              <a:t>Agents can now pass the Turing test, and more easily the programmer Turing test.</a:t>
-            </a:r>
-          </a:p>
-          <a:p>
-            <a:pPr lvl="0"/>
-            <a:r>
-              <a:rPr lang="en-US" sz="1800"/>
-              <a:t>They’ll submit code pretending to be human.</a:t>
-            </a:r>
-          </a:p>
-          <a:p>
-            <a:pPr lvl="0"/>
-            <a:r>
-              <a:rPr lang="en-US" sz="1800"/>
-              <a:t>They’ll steal credentials and submit code.</a:t>
-            </a:r>
-          </a:p>
-          <a:p>
-            <a:pPr lvl="0"/>
-            <a:r>
-              <a:rPr lang="en-US" sz="1800"/>
-              <a:t>LiteLLM is the most atrocious case lately.</a:t>
+              <a:t>Open Source is now Open Copy.</a:t>
+            </a:r>
+          </a:p>
+          <a:p>
+            <a:pPr lvl="0"/>
+            <a:r>
+              <a:rPr lang="en-US" sz="1800"/>
+              <a:t>with reports of 1/2 of AI time</a:t>
+            </a:r>
+          </a:p>
+          <a:p>
+            <a:pPr lvl="0"/>
+            <a:r>
+              <a:rPr lang="en-US" sz="1800"/>
+              <a:t>and with the US Government totally undermining copyright law.</a:t>
             </a:r>
           </a:p>
         </p:txBody>
@@ -18349,7 +19117,7 @@
             </a:pPr>
             <a:r>
               <a:rPr lang="en-US" sz="3200"/>
-              <a:t>Blood on the Road - Key Services</a:t>
+              <a:t>Blood on the Road - Open Repositories =</a:t>
             </a:r>
           </a:p>
         </p:txBody>
@@ -18372,28 +19140,42 @@
             <a:pPr lvl="0"/>
             <a:r>
               <a:rPr lang="en-US" sz="1800"/>
-              <a:t>Authentication is going to be attacked brutally.</a:t>
-            </a:r>
-          </a:p>
-          <a:p>
-            <a:pPr lvl="0"/>
-            <a:r>
-              <a:rPr lang="en-US" sz="1800"/>
-              <a:t>Network services are going to be hacked left and right.</a:t>
-            </a:r>
-          </a:p>
-          <a:p>
-            <a:pPr lvl="0"/>
-            <a:r>
-              <a:rPr lang="en-US" sz="1800"/>
-              <a:t>Configurations are going to be heavily attacked.</a:t>
-            </a:r>
-          </a:p>
-          <a:p>
-            <a:pPr lvl="1"/>
-            <a:r>
-              <a:rPr lang="en-US" sz="1800"/>
-              <a:t>Using text files for these is already error prone.</a:t>
+              <a:t>Open repositories are now weakly locked doors.</a:t>
+            </a:r>
+          </a:p>
+          <a:p>
+            <a:pPr lvl="0"/>
+            <a:r>
+              <a:rPr lang="en-US" sz="1800"/>
+              <a:t>Agents can and have been used to inject invisble UNICODE attacks.</a:t>
+            </a:r>
+          </a:p>
+          <a:p>
+            <a:pPr lvl="0"/>
+            <a:r>
+              <a:rPr lang="en-US" sz="1800"/>
+              <a:t>Agents can now pass the Turing test, and more easily the programmer Turing test.</a:t>
+            </a:r>
+          </a:p>
+          <a:p>
+            <a:pPr lvl="0"/>
+            <a:r>
+              <a:rPr lang="en-US" sz="1800"/>
+              <a:t>They’ll submit code pretending to be human.</a:t>
+            </a:r>
+          </a:p>
+          <a:p>
+            <a:pPr lvl="0"/>
+            <a:r>
+              <a:rPr lang="en-US" sz="1800"/>
+              <a:t>They’ll steal credentials and submit code.</a:t>
+            </a:r>
+          </a:p>
+          <a:p>
+            <a:pPr lvl="0"/>
+            <a:r>
+              <a:rPr lang="en-US" sz="1800"/>
+              <a:t>LiteLLM is the most atrocious case lately.</a:t>
             </a:r>
           </a:p>
         </p:txBody>
@@ -18440,7 +19222,7 @@
             </a:pPr>
             <a:r>
               <a:rPr lang="en-US" sz="3200"/>
-              <a:t>Blood on the Road - Open Binaries =</a:t>
+              <a:t>Blood on the Road - Key Services</a:t>
             </a:r>
           </a:p>
         </p:txBody>
@@ -18463,56 +19245,28 @@
             <a:pPr lvl="0"/>
             <a:r>
               <a:rPr lang="en-US" sz="1800"/>
-              <a:t>Open binaries are next.</a:t>
-            </a:r>
-          </a:p>
-          <a:p>
-            <a:pPr lvl="0"/>
-            <a:r>
-              <a:rPr lang="en-US" sz="1800"/>
-              <a:t>They are going to be disassembled and recontructed.</a:t>
-            </a:r>
-          </a:p>
-          <a:p>
-            <a:pPr lvl="0"/>
-            <a:r>
-              <a:rPr lang="en-US" sz="1800"/>
-              <a:t>They are going to be rewritten in real time.</a:t>
-            </a:r>
-          </a:p>
-          <a:p>
-            <a:pPr lvl="0"/>
-            <a:r>
-              <a:rPr lang="en-US" sz="1800"/>
-              <a:t>Key solutions to this are:</a:t>
-            </a:r>
-          </a:p>
-          <a:p>
-            <a:pPr lvl="0"/>
-            <a:r>
-              <a:rPr lang="en-US" sz="1800"/>
-              <a:t>Binary packages from all repositories.</a:t>
-            </a:r>
-          </a:p>
-          <a:p>
-            <a:pPr lvl="0"/>
-            <a:r>
-              <a:rPr lang="en-US" sz="1800"/>
-              <a:t>Cryptographically signed.</a:t>
-            </a:r>
-          </a:p>
-          <a:p>
-            <a:pPr lvl="0"/>
-            <a:r>
-              <a:rPr lang="en-US" sz="1800"/>
-              <a:t>Installation protected in the OS.</a:t>
-            </a:r>
-          </a:p>
-          <a:p>
-            <a:pPr lvl="0"/>
-            <a:r>
-              <a:rPr lang="en-US" sz="1800"/>
-              <a:t>And protected from reading by the OS.</a:t>
+              <a:t>Authentication is going to be attacked brutally.</a:t>
+            </a:r>
+          </a:p>
+          <a:p>
+            <a:pPr lvl="0"/>
+            <a:r>
+              <a:rPr lang="en-US" sz="1800"/>
+              <a:t>Network services are going to be hacked left and right.</a:t>
+            </a:r>
+          </a:p>
+          <a:p>
+            <a:pPr lvl="0"/>
+            <a:r>
+              <a:rPr lang="en-US" sz="1800"/>
+              <a:t>Configurations are going to be heavily attacked.</a:t>
+            </a:r>
+          </a:p>
+          <a:p>
+            <a:pPr lvl="1"/>
+            <a:r>
+              <a:rPr lang="en-US" sz="1800"/>
+              <a:t>Using text files for these is already error prone.</a:t>
             </a:r>
           </a:p>
         </p:txBody>
@@ -18559,7 +19313,7 @@
             </a:pPr>
             <a:r>
               <a:rPr lang="en-US" sz="3200"/>
-              <a:t>Questions - F* and Pulse</a:t>
+              <a:t>Blood on the Road - Open Binaries =</a:t>
             </a:r>
           </a:p>
         </p:txBody>
@@ -18582,49 +19336,56 @@
             <a:pPr lvl="0"/>
             <a:r>
               <a:rPr lang="en-US" sz="1800"/>
-              <a:t>Are F* modules really in use? If not, why?</a:t>
-            </a:r>
-          </a:p>
-          <a:p>
-            <a:pPr lvl="0"/>
-            <a:r>
-              <a:rPr lang="en-US" sz="1800"/>
-              <a:t>Got Functors?</a:t>
-            </a:r>
-          </a:p>
-          <a:p>
-            <a:pPr lvl="0"/>
-            <a:r>
-              <a:rPr lang="en-US" sz="1800"/>
-              <a:t>Are F* modules working with proof smoothly? Took me about three days to get a proving model (Treap) with modules.</a:t>
-            </a:r>
-          </a:p>
-          <a:p>
-            <a:pPr lvl="0"/>
-            <a:r>
-              <a:rPr lang="en-US" sz="1800"/>
-              <a:t>Does F* have a typed library search yet?</a:t>
-            </a:r>
-          </a:p>
-          <a:p>
-            <a:pPr lvl="0"/>
-            <a:r>
-              <a:rPr lang="en-US" sz="1800"/>
-              <a:t>Are typeclasses being heavily used?</a:t>
-            </a:r>
-          </a:p>
-          <a:p>
-            <a:pPr lvl="0"/>
-            <a:r>
-              <a:rPr lang="en-US" sz="1800"/>
-              <a:t>How fast is validation now?</a:t>
-            </a:r>
-          </a:p>
-          <a:p>
-            <a:pPr lvl="0"/>
-            <a:r>
-              <a:rPr lang="en-US" sz="1800"/>
-              <a:t>Nik you have any more statistics on AutoCLRS?</a:t>
+              <a:t>Open binaries are next.</a:t>
+            </a:r>
+          </a:p>
+          <a:p>
+            <a:pPr lvl="0"/>
+            <a:r>
+              <a:rPr lang="en-US" sz="1800"/>
+              <a:t>They are going to be disassembled and recontructed.</a:t>
+            </a:r>
+          </a:p>
+          <a:p>
+            <a:pPr lvl="0"/>
+            <a:r>
+              <a:rPr lang="en-US" sz="1800"/>
+              <a:t>They are going to be rewritten in real time.</a:t>
+            </a:r>
+          </a:p>
+          <a:p>
+            <a:pPr lvl="0"/>
+            <a:r>
+              <a:rPr lang="en-US" sz="1800"/>
+              <a:t>Key solutions to this are:</a:t>
+            </a:r>
+          </a:p>
+          <a:p>
+            <a:pPr lvl="0"/>
+            <a:r>
+              <a:rPr lang="en-US" sz="1800"/>
+              <a:t>Binary packages from all repositories.</a:t>
+            </a:r>
+          </a:p>
+          <a:p>
+            <a:pPr lvl="0"/>
+            <a:r>
+              <a:rPr lang="en-US" sz="1800"/>
+              <a:t>Cryptographically signed.</a:t>
+            </a:r>
+          </a:p>
+          <a:p>
+            <a:pPr lvl="0"/>
+            <a:r>
+              <a:rPr lang="en-US" sz="1800"/>
+              <a:t>Installation protected in the OS.</a:t>
+            </a:r>
+          </a:p>
+          <a:p>
+            <a:pPr lvl="0"/>
+            <a:r>
+              <a:rPr lang="en-US" sz="1800"/>
+              <a:t>And protected from reading by the OS.</a:t>
             </a:r>
           </a:p>
         </p:txBody>
@@ -18671,7 +19432,7 @@
             </a:pPr>
             <a:r>
               <a:rPr lang="en-US" sz="3200"/>
-              <a:t>Questions</a:t>
+              <a:t>Questions - F* and Pulse</a:t>
             </a:r>
           </a:p>
         </p:txBody>
@@ -18694,42 +19455,49 @@
             <a:pPr lvl="0"/>
             <a:r>
               <a:rPr lang="en-US" sz="1800"/>
-              <a:t>Did the PL community overly complicate things with higher-order types?</a:t>
-            </a:r>
-          </a:p>
-          <a:p>
-            <a:pPr lvl="0"/>
-            <a:r>
-              <a:rPr lang="en-US" sz="1800"/>
-              <a:t>What can you folks say about MSFT adoption of proven code?</a:t>
-            </a:r>
-          </a:p>
-          <a:p>
-            <a:pPr lvl="0"/>
-            <a:r>
-              <a:rPr lang="en-US" sz="1800"/>
-              <a:t>What are the biggest F* verified systems?</a:t>
-            </a:r>
-          </a:p>
-          <a:p>
-            <a:pPr lvl="0"/>
-            <a:r>
-              <a:rPr lang="en-US" sz="1800"/>
-              <a:t>What are the biggest Pulse verified sytems?</a:t>
-            </a:r>
-          </a:p>
-          <a:p>
-            <a:pPr lvl="0"/>
-            <a:r>
-              <a:rPr lang="en-US" sz="1800"/>
-              <a:t>Any quantitatives? Person days? AI days?</a:t>
-            </a:r>
-          </a:p>
-          <a:p>
-            <a:pPr lvl="0"/>
-            <a:r>
-              <a:rPr lang="en-US" sz="1800"/>
-              <a:t>Should I quit Verus and go learn Pulse?</a:t>
+              <a:t>Are F* modules really in use? If not, why?</a:t>
+            </a:r>
+          </a:p>
+          <a:p>
+            <a:pPr lvl="0"/>
+            <a:r>
+              <a:rPr lang="en-US" sz="1800"/>
+              <a:t>Got Functors?</a:t>
+            </a:r>
+          </a:p>
+          <a:p>
+            <a:pPr lvl="0"/>
+            <a:r>
+              <a:rPr lang="en-US" sz="1800"/>
+              <a:t>Are F* modules working with proof smoothly? Took me about three days to get a proving model (Treap) with modules.</a:t>
+            </a:r>
+          </a:p>
+          <a:p>
+            <a:pPr lvl="0"/>
+            <a:r>
+              <a:rPr lang="en-US" sz="1800"/>
+              <a:t>Does F* have a typed library search yet?</a:t>
+            </a:r>
+          </a:p>
+          <a:p>
+            <a:pPr lvl="0"/>
+            <a:r>
+              <a:rPr lang="en-US" sz="1800"/>
+              <a:t>Are typeclasses being heavily used?</a:t>
+            </a:r>
+          </a:p>
+          <a:p>
+            <a:pPr lvl="0"/>
+            <a:r>
+              <a:rPr lang="en-US" sz="1800"/>
+              <a:t>How fast is validation now?</a:t>
+            </a:r>
+          </a:p>
+          <a:p>
+            <a:pPr lvl="0"/>
+            <a:r>
+              <a:rPr lang="en-US" sz="1800"/>
+              <a:t>Nik you have any more statistics on AutoCLRS?</a:t>
             </a:r>
           </a:p>
         </p:txBody>
@@ -18799,49 +19567,42 @@
             <a:pPr lvl="0"/>
             <a:r>
               <a:rPr lang="en-US" sz="1800"/>
-              <a:t>Are you folks still using Make? That’s how I got started on this.</a:t>
-            </a:r>
-          </a:p>
-          <a:p>
-            <a:pPr lvl="0"/>
-            <a:r>
-              <a:rPr lang="en-US" sz="1800"/>
-              <a:t>Many programmers and worse, managers, complain about the programmer time to switch languages. Are you finding that you can switch languages with your AIs explaining things to you?</a:t>
-            </a:r>
-          </a:p>
-          <a:p>
-            <a:pPr lvl="0"/>
-            <a:r>
-              <a:rPr lang="en-US" sz="1800"/>
-              <a:t>Can we prove Rust’s (awful) std with Verus?</a:t>
-            </a:r>
-          </a:p>
-          <a:p>
-            <a:pPr lvl="0"/>
-            <a:r>
-              <a:rPr lang="en-US" sz="1800"/>
-              <a:t>Can we prove a compiler with Verus and EPR?</a:t>
-            </a:r>
-          </a:p>
-          <a:p>
-            <a:pPr lvl="0"/>
-            <a:r>
-              <a:rPr lang="en-US" sz="1800"/>
-              <a:t>Can we prove a TIL (Tarditi, Morrisett, Harper) like compiler?</a:t>
-            </a:r>
-          </a:p>
-          <a:p>
-            <a:pPr lvl="0"/>
-            <a:r>
-              <a:rPr lang="en-US" sz="1800"/>
-              <a:t>Can we verify a comp cert like compiler?</a:t>
-            </a:r>
-          </a:p>
-          <a:p>
-            <a:pPr lvl="0"/>
-            <a:r>
-              <a:rPr lang="en-US" sz="1800"/>
-              <a:t>Can we prove an OS in Verus?</a:t>
+              <a:t>Did the PL community overly complicate things with higher-order types?</a:t>
+            </a:r>
+          </a:p>
+          <a:p>
+            <a:pPr lvl="0"/>
+            <a:r>
+              <a:rPr lang="en-US" sz="1800"/>
+              <a:t>What can you folks say about MSFT adoption of proven code?</a:t>
+            </a:r>
+          </a:p>
+          <a:p>
+            <a:pPr lvl="0"/>
+            <a:r>
+              <a:rPr lang="en-US" sz="1800"/>
+              <a:t>What are the biggest F* verified systems?</a:t>
+            </a:r>
+          </a:p>
+          <a:p>
+            <a:pPr lvl="0"/>
+            <a:r>
+              <a:rPr lang="en-US" sz="1800"/>
+              <a:t>What are the biggest Pulse verified sytems?</a:t>
+            </a:r>
+          </a:p>
+          <a:p>
+            <a:pPr lvl="0"/>
+            <a:r>
+              <a:rPr lang="en-US" sz="1800"/>
+              <a:t>Any quantitatives? Person days? AI days?</a:t>
+            </a:r>
+          </a:p>
+          <a:p>
+            <a:pPr lvl="0"/>
+            <a:r>
+              <a:rPr lang="en-US" sz="1800"/>
+              <a:t>Should I quit Verus and go learn Pulse?</a:t>
             </a:r>
           </a:p>
         </p:txBody>
@@ -19444,7 +20205,7 @@
             </a:pPr>
             <a:r>
               <a:rPr lang="en-US" sz="3200"/>
-              <a:t>Questions - AI LLM Agents</a:t>
+              <a:t>Questions</a:t>
             </a:r>
           </a:p>
         </p:txBody>
@@ -19467,56 +20228,49 @@
             <a:pPr lvl="0"/>
             <a:r>
               <a:rPr lang="en-US" sz="1800"/>
-              <a:t>How fast is this moving?</a:t>
-            </a:r>
-          </a:p>
-          <a:p>
-            <a:pPr lvl="0"/>
-            <a:r>
-              <a:rPr lang="en-US" sz="1800"/>
-              <a:t>How much context do we need?</a:t>
-            </a:r>
-          </a:p>
-          <a:p>
-            <a:pPr lvl="0"/>
-            <a:r>
-              <a:rPr lang="en-US" sz="1800"/>
-              <a:t>How much speed do we have? T/S down and up?</a:t>
-            </a:r>
-          </a:p>
-          <a:p>
-            <a:pPr lvl="0"/>
-            <a:r>
-              <a:rPr lang="en-US" sz="1800"/>
-              <a:t>How much speed do we need?</a:t>
-            </a:r>
-          </a:p>
-          <a:p>
-            <a:pPr lvl="0"/>
-            <a:r>
-              <a:rPr lang="en-US" sz="1800"/>
-              <a:t>How much speed will we get?</a:t>
-            </a:r>
-          </a:p>
-          <a:p>
-            <a:pPr lvl="0"/>
-            <a:r>
-              <a:rPr lang="en-US" sz="1800"/>
-              <a:t>When it’s 10 times faster how will we use it?</a:t>
-            </a:r>
-          </a:p>
-          <a:p>
-            <a:pPr lvl="0"/>
-            <a:r>
-              <a:rPr lang="en-US" sz="1800"/>
-              <a:t>When will this really cost the user what it costs the provider?</a:t>
-            </a:r>
-          </a:p>
-          <a:p>
-            <a:pPr lvl="0"/>
-            <a:r>
-              <a:rPr lang="en-US" sz="1800"/>
-              <a:t>When will it get even better intermediate term memory?</a:t>
+              <a:t>Are you folks still using Make? That’s how I got started on this.</a:t>
+            </a:r>
+          </a:p>
+          <a:p>
+            <a:pPr lvl="0"/>
+            <a:r>
+              <a:rPr lang="en-US" sz="1800"/>
+              <a:t>Many programmers and worse, managers, complain about the programmer time to switch languages. Are you finding that you can switch languages with your AIs explaining things to you?</a:t>
+            </a:r>
+          </a:p>
+          <a:p>
+            <a:pPr lvl="0"/>
+            <a:r>
+              <a:rPr lang="en-US" sz="1800"/>
+              <a:t>Can we prove Rust’s (awful) std with Verus?</a:t>
+            </a:r>
+          </a:p>
+          <a:p>
+            <a:pPr lvl="0"/>
+            <a:r>
+              <a:rPr lang="en-US" sz="1800"/>
+              <a:t>Can we prove a compiler with Verus and EPR?</a:t>
+            </a:r>
+          </a:p>
+          <a:p>
+            <a:pPr lvl="0"/>
+            <a:r>
+              <a:rPr lang="en-US" sz="1800"/>
+              <a:t>Can we prove a TIL (Tarditi, Morrisett, Harper) like compiler?</a:t>
+            </a:r>
+          </a:p>
+          <a:p>
+            <a:pPr lvl="0"/>
+            <a:r>
+              <a:rPr lang="en-US" sz="1800"/>
+              <a:t>Can we verify a comp cert like compiler?</a:t>
+            </a:r>
+          </a:p>
+          <a:p>
+            <a:pPr lvl="0"/>
+            <a:r>
+              <a:rPr lang="en-US" sz="1800"/>
+              <a:t>Can we prove an OS in Verus?</a:t>
             </a:r>
           </a:p>
         </p:txBody>
@@ -19527,6 +20281,125 @@
 </file>
 
 <file path=ppt/slides/slide91.xml><?xml version="1.0" encoding="utf-8"?>
+<p:sld xmlns:a="http://schemas.openxmlformats.org/drawingml/2006/main" xmlns:r="http://schemas.openxmlformats.org/officeDocument/2006/relationships" xmlns:p="http://schemas.openxmlformats.org/presentationml/2006/main">
+  <p:cSld>
+    <p:spTree>
+      <p:nvGrpSpPr>
+        <p:cNvPr id="1" name=""/>
+        <p:cNvGrpSpPr/>
+        <p:nvPr/>
+      </p:nvGrpSpPr>
+      <p:grpSpPr>
+        <a:xfrm>
+          <a:off x="0" y="0"/>
+          <a:ext cx="0" cy="0"/>
+          <a:chOff x="0" y="0"/>
+          <a:chExt cx="0" cy="0"/>
+        </a:xfrm>
+      </p:grpSpPr>
+      <p:sp>
+        <p:nvSpPr>
+          <p:cNvPr id="2" name="Title 1"/>
+          <p:cNvSpPr>
+            <a:spLocks noGrp="1"/>
+          </p:cNvSpPr>
+          <p:nvPr>
+            <p:ph type="title"/>
+          </p:nvPr>
+        </p:nvSpPr>
+        <p:spPr/>
+        <p:txBody>
+          <a:bodyPr/>
+          <a:lstStyle/>
+          <a:p>
+            <a:pPr lvl="0" indent="0" marL="0">
+              <a:buNone/>
+            </a:pPr>
+            <a:r>
+              <a:rPr lang="en-US" sz="3200"/>
+              <a:t>Questions - AI LLM Agents</a:t>
+            </a:r>
+          </a:p>
+        </p:txBody>
+      </p:sp>
+      <p:sp>
+        <p:nvSpPr>
+          <p:cNvPr id="3" name="Content Placeholder 2"/>
+          <p:cNvSpPr>
+            <a:spLocks noGrp="1"/>
+          </p:cNvSpPr>
+          <p:nvPr>
+            <p:ph idx="1"/>
+          </p:nvPr>
+        </p:nvSpPr>
+        <p:spPr/>
+        <p:txBody>
+          <a:bodyPr/>
+          <a:lstStyle/>
+          <a:p>
+            <a:pPr lvl="0"/>
+            <a:r>
+              <a:rPr lang="en-US" sz="1800"/>
+              <a:t>How fast is this moving?</a:t>
+            </a:r>
+          </a:p>
+          <a:p>
+            <a:pPr lvl="0"/>
+            <a:r>
+              <a:rPr lang="en-US" sz="1800"/>
+              <a:t>How much context do we need?</a:t>
+            </a:r>
+          </a:p>
+          <a:p>
+            <a:pPr lvl="0"/>
+            <a:r>
+              <a:rPr lang="en-US" sz="1800"/>
+              <a:t>How much speed do we have? T/S down and up?</a:t>
+            </a:r>
+          </a:p>
+          <a:p>
+            <a:pPr lvl="0"/>
+            <a:r>
+              <a:rPr lang="en-US" sz="1800"/>
+              <a:t>How much speed do we need?</a:t>
+            </a:r>
+          </a:p>
+          <a:p>
+            <a:pPr lvl="0"/>
+            <a:r>
+              <a:rPr lang="en-US" sz="1800"/>
+              <a:t>How much speed will we get?</a:t>
+            </a:r>
+          </a:p>
+          <a:p>
+            <a:pPr lvl="0"/>
+            <a:r>
+              <a:rPr lang="en-US" sz="1800"/>
+              <a:t>When it’s 10 times faster how will we use it?</a:t>
+            </a:r>
+          </a:p>
+          <a:p>
+            <a:pPr lvl="0"/>
+            <a:r>
+              <a:rPr lang="en-US" sz="1800"/>
+              <a:t>When will this really cost the user what it costs the provider?</a:t>
+            </a:r>
+          </a:p>
+          <a:p>
+            <a:pPr lvl="0"/>
+            <a:r>
+              <a:rPr lang="en-US" sz="1800"/>
+              <a:t>When will it get even better intermediate term memory?</a:t>
+            </a:r>
+          </a:p>
+        </p:txBody>
+      </p:sp>
+    </p:spTree>
+  </p:cSld>
+</p:sld>
+</file>
+
+<file path=ppt/slides/slide92.xml><?xml version="1.0" encoding="utf-8"?>
 <p:sld xmlns:a="http://schemas.openxmlformats.org/drawingml/2006/main" xmlns:r="http://schemas.openxmlformats.org/officeDocument/2006/relationships" xmlns:p="http://schemas.openxmlformats.org/presentationml/2006/main">
   <p:cSld>
     <p:spTree>
